--- a/presentation/fraud_detection_final.pptx
+++ b/presentation/fraud_detection_final.pptx
@@ -2,28 +2,29 @@
 <file path=ppt/presentation.xml><?xml version="1.0" encoding="utf-8"?>
 <p:presentation xmlns:p="http://schemas.openxmlformats.org/presentationml/2006/main">
   <p:sldMasterIdLst>
-    <p:sldMasterId xmlns:r="http://schemas.openxmlformats.org/officeDocument/2006/relationships" id="2147483648" r:id="R5d4d5fc32b5e4fe4"/>
+    <p:sldMasterId xmlns:r="http://schemas.openxmlformats.org/officeDocument/2006/relationships" id="2147483648" r:id="R8c56b3a0aaaf4e75"/>
   </p:sldMasterIdLst>
   <p:notesMasterIdLst>
-    <p:notesMasterId xmlns:r="http://schemas.openxmlformats.org/officeDocument/2006/relationships" r:id="R9612bc45680a4cdd"/>
+    <p:notesMasterId xmlns:r="http://schemas.openxmlformats.org/officeDocument/2006/relationships" r:id="R46dc6cef6d864638"/>
   </p:notesMasterIdLst>
   <p:sldIdLst>
-    <p:sldId xmlns:r="http://schemas.openxmlformats.org/officeDocument/2006/relationships" id="256" r:id="R10769e93a0ef4aa6"/>
-    <p:sldId xmlns:r="http://schemas.openxmlformats.org/officeDocument/2006/relationships" id="257" r:id="R15e27ce327934462"/>
-    <p:sldId xmlns:r="http://schemas.openxmlformats.org/officeDocument/2006/relationships" id="258" r:id="R87130368e07a4c1f"/>
-    <p:sldId xmlns:r="http://schemas.openxmlformats.org/officeDocument/2006/relationships" id="259" r:id="R812ee234c9094210"/>
-    <p:sldId xmlns:r="http://schemas.openxmlformats.org/officeDocument/2006/relationships" id="260" r:id="R6e83e120b7eb4233"/>
-    <p:sldId xmlns:r="http://schemas.openxmlformats.org/officeDocument/2006/relationships" id="261" r:id="R05d72abd54d6436c"/>
-    <p:sldId xmlns:r="http://schemas.openxmlformats.org/officeDocument/2006/relationships" id="262" r:id="R33caf82abb154a3b"/>
-    <p:sldId xmlns:r="http://schemas.openxmlformats.org/officeDocument/2006/relationships" id="263" r:id="Re7aa7cb6c23c495b"/>
-    <p:sldId xmlns:r="http://schemas.openxmlformats.org/officeDocument/2006/relationships" id="264" r:id="R7407c23d89c74bd6"/>
-    <p:sldId xmlns:r="http://schemas.openxmlformats.org/officeDocument/2006/relationships" id="265" r:id="R3332d187bb39452a"/>
-    <p:sldId xmlns:r="http://schemas.openxmlformats.org/officeDocument/2006/relationships" id="266" r:id="Rf8d790f6c9d74948"/>
-    <p:sldId xmlns:r="http://schemas.openxmlformats.org/officeDocument/2006/relationships" id="267" r:id="R890db35eee954804"/>
-    <p:sldId xmlns:r="http://schemas.openxmlformats.org/officeDocument/2006/relationships" id="268" r:id="Rb79b808e5a314040"/>
-    <p:sldId xmlns:r="http://schemas.openxmlformats.org/officeDocument/2006/relationships" id="269" r:id="Rff97cdc962da469b"/>
-    <p:sldId xmlns:r="http://schemas.openxmlformats.org/officeDocument/2006/relationships" id="270" r:id="Rd0713b35c3c94bf4"/>
-    <p:sldId xmlns:r="http://schemas.openxmlformats.org/officeDocument/2006/relationships" id="271" r:id="Rba037bac52054a7f"/>
+    <p:sldId xmlns:r="http://schemas.openxmlformats.org/officeDocument/2006/relationships" id="256" r:id="Rd24ccd47dfcb44a3"/>
+    <p:sldId xmlns:r="http://schemas.openxmlformats.org/officeDocument/2006/relationships" id="257" r:id="Rd7c9a23932b048e7"/>
+    <p:sldId xmlns:r="http://schemas.openxmlformats.org/officeDocument/2006/relationships" id="258" r:id="Rb8a6fa5dfa9e41fd"/>
+    <p:sldId xmlns:r="http://schemas.openxmlformats.org/officeDocument/2006/relationships" id="259" r:id="R145ff301f36c4d4f"/>
+    <p:sldId xmlns:r="http://schemas.openxmlformats.org/officeDocument/2006/relationships" id="260" r:id="Rbd25ea2218684838"/>
+    <p:sldId xmlns:r="http://schemas.openxmlformats.org/officeDocument/2006/relationships" id="261" r:id="R1c7d38f15b9a45df"/>
+    <p:sldId xmlns:r="http://schemas.openxmlformats.org/officeDocument/2006/relationships" id="262" r:id="R66032d100d244cde"/>
+    <p:sldId xmlns:r="http://schemas.openxmlformats.org/officeDocument/2006/relationships" id="263" r:id="Rf53edd1f3f9b45de"/>
+    <p:sldId xmlns:r="http://schemas.openxmlformats.org/officeDocument/2006/relationships" id="264" r:id="R7a5998f33fd74d58"/>
+    <p:sldId xmlns:r="http://schemas.openxmlformats.org/officeDocument/2006/relationships" id="265" r:id="R68193678fa3c4201"/>
+    <p:sldId xmlns:r="http://schemas.openxmlformats.org/officeDocument/2006/relationships" id="266" r:id="Ra6daf29220bb443d"/>
+    <p:sldId xmlns:r="http://schemas.openxmlformats.org/officeDocument/2006/relationships" id="267" r:id="Re4a5bad0e4b649d8"/>
+    <p:sldId xmlns:r="http://schemas.openxmlformats.org/officeDocument/2006/relationships" id="268" r:id="Rbe1ffce7831d4680"/>
+    <p:sldId xmlns:r="http://schemas.openxmlformats.org/officeDocument/2006/relationships" id="269" r:id="Rbaf6505ae60e464f"/>
+    <p:sldId xmlns:r="http://schemas.openxmlformats.org/officeDocument/2006/relationships" id="270" r:id="R089b2a98cd6b4dce"/>
+    <p:sldId xmlns:r="http://schemas.openxmlformats.org/officeDocument/2006/relationships" id="271" r:id="R6720e811b16b407c"/>
+    <p:sldId xmlns:r="http://schemas.openxmlformats.org/officeDocument/2006/relationships" id="272" r:id="Ra7f0d12132a646ec"/>
   </p:sldIdLst>
   <p:sldSz cx="12192000" cy="6858000"/>
   <p:notesSz cx="6858000" cy="9144000"/>
@@ -882,7 +883,7 @@
           <a:lstStyle xmlns:a="http://schemas.openxmlformats.org/drawingml/2006/main"/>
           <a:p xmlns:a="http://schemas.openxmlformats.org/drawingml/2006/main">
             <a:r>
-              <a:t>This is the practical boundary between a model demo and a safe operational experiment.</a:t>
+              <a:t>Acknowledge the submission as an external check, while being precise that the public leaderboard is provisional and not the same as a final competition result.</a:t>
             </a:r>
           </a:p>
           <a:p xmlns:a="http://schemas.openxmlformats.org/drawingml/2006/main">
@@ -892,7 +893,7 @@
           </a:p>
           <a:p xmlns:a="http://schemas.openxmlformats.org/drawingml/2006/main">
             <a:r>
-              <a:t>- 04_error_analysis.ipynb and 05_final_model.ipynb: segment limits and holdout caveats.</a:t>
+              <a:t>- User-provided Kaggle leaderboard screenshot: presentation/assets/kaggle_leaderboard_rank_275.png.</a:t>
             </a:r>
           </a:p>
           <a:p xmlns:a="http://schemas.openxmlformats.org/drawingml/2006/main">
@@ -967,7 +968,7 @@
           <a:lstStyle xmlns:a="http://schemas.openxmlformats.org/drawingml/2006/main"/>
           <a:p xmlns:a="http://schemas.openxmlformats.org/drawingml/2006/main">
             <a:r>
-              <a:t>Close the analytical story by showing that the next iteration follows directly from observed errors.</a:t>
+              <a:t>This is the practical boundary between a model demo and a safe operational experiment.</a:t>
             </a:r>
           </a:p>
           <a:p xmlns:a="http://schemas.openxmlformats.org/drawingml/2006/main">
@@ -977,7 +978,7 @@
           </a:p>
           <a:p xmlns:a="http://schemas.openxmlformats.org/drawingml/2006/main">
             <a:r>
-              <a:t>- 04_error_analysis.ipynb and 05_final_model.ipynb: next-step recommendations.</a:t>
+              <a:t>- 04_error_analysis.ipynb and 05_final_model.ipynb: segment limits and holdout caveats.</a:t>
             </a:r>
           </a:p>
           <a:p xmlns:a="http://schemas.openxmlformats.org/drawingml/2006/main">
@@ -1013,6 +1014,91 @@
 </file>
 
 <file path=ppt/notesSlides/notesSlide16.xml><?xml version="1.0" encoding="utf-8"?>
+<p:notes xmlns:p="http://schemas.openxmlformats.org/presentationml/2006/main">
+  <p:cSld>
+    <p:spTree>
+      <p:nvGrpSpPr>
+        <p:cNvPr id="1" name=""/>
+        <p:cNvGrpSpPr/>
+        <p:nvPr/>
+      </p:nvGrpSpPr>
+      <p:grpSpPr>
+        <a:xfrm xmlns:a="http://schemas.openxmlformats.org/drawingml/2006/main"/>
+      </p:grpSpPr>
+      <p:sp>
+        <p:nvSpPr>
+          <p:cNvPr id="2" name="Slide Image Placeholder 1"/>
+          <p:cNvSpPr>
+            <a:spLocks xmlns:a="http://schemas.openxmlformats.org/drawingml/2006/main" noGrp="1"/>
+          </p:cNvSpPr>
+          <p:nvPr>
+            <p:ph type="sldImg" idx="0"/>
+          </p:nvPr>
+        </p:nvSpPr>
+        <p:spPr/>
+      </p:sp>
+      <p:sp>
+        <p:nvSpPr>
+          <p:cNvPr id="3" name="Notes Placeholder 2"/>
+          <p:cNvSpPr>
+            <a:spLocks xmlns:a="http://schemas.openxmlformats.org/drawingml/2006/main" noGrp="1"/>
+          </p:cNvSpPr>
+          <p:nvPr>
+            <p:ph type="body" idx="1"/>
+          </p:nvPr>
+        </p:nvSpPr>
+        <p:spPr/>
+        <p:txBody>
+          <a:bodyPr xmlns:a="http://schemas.openxmlformats.org/drawingml/2006/main"/>
+          <a:lstStyle xmlns:a="http://schemas.openxmlformats.org/drawingml/2006/main"/>
+          <a:p xmlns:a="http://schemas.openxmlformats.org/drawingml/2006/main">
+            <a:r>
+              <a:t>Close the analytical story by showing that the next iteration follows directly from observed errors.</a:t>
+            </a:r>
+          </a:p>
+          <a:p xmlns:a="http://schemas.openxmlformats.org/drawingml/2006/main">
+            <a:r>
+              <a:t>[Sources]</a:t>
+            </a:r>
+          </a:p>
+          <a:p xmlns:a="http://schemas.openxmlformats.org/drawingml/2006/main">
+            <a:r>
+              <a:t>- 04_error_analysis.ipynb and 05_final_model.ipynb: next-step recommendations.</a:t>
+            </a:r>
+          </a:p>
+          <a:p xmlns:a="http://schemas.openxmlformats.org/drawingml/2006/main">
+            <a:r>
+              <a:t>[/Sources]</a:t>
+            </a:r>
+          </a:p>
+        </p:txBody>
+      </p:sp>
+      <p:sp>
+        <p:nvSpPr>
+          <p:cNvPr id="4" name="Slide Number Placeholder 3"/>
+          <p:cNvSpPr>
+            <a:spLocks xmlns:a="http://schemas.openxmlformats.org/drawingml/2006/main" noGrp="1"/>
+          </p:cNvSpPr>
+          <p:nvPr>
+            <p:ph type="sldNum" idx="5"/>
+          </p:nvPr>
+        </p:nvSpPr>
+        <p:spPr/>
+        <p:txBody>
+          <a:bodyPr xmlns:a="http://schemas.openxmlformats.org/drawingml/2006/main"/>
+          <a:lstStyle xmlns:a="http://schemas.openxmlformats.org/drawingml/2006/main"/>
+          <a:p xmlns:a="http://schemas.openxmlformats.org/drawingml/2006/main"/>
+        </p:txBody>
+      </p:sp>
+    </p:spTree>
+  </p:cSld>
+  <p:clrMapOvr>
+    <a:masterClrMapping xmlns:a="http://schemas.openxmlformats.org/drawingml/2006/main"/>
+  </p:clrMapOvr>
+</p:notes>
+</file>
+
+<file path=ppt/notesSlides/notesSlide17.xml><?xml version="1.0" encoding="utf-8"?>
 <p:notes xmlns:p="http://schemas.openxmlformats.org/presentationml/2006/main">
   <p:cSld>
     <p:spTree>
@@ -1830,7 +1916,7 @@
   </p:cSld>
   <p:clrMap bg1="lt1" tx1="dk1" bg2="lt2" tx2="dk2" accent1="accent1" accent2="accent2" accent3="accent3" accent4="accent4" accent5="accent5" accent6="accent6" hlink="hlink" folHlink="folHlink"/>
   <p:sldLayoutIdLst>
-    <p:sldLayoutId xmlns:r="http://schemas.openxmlformats.org/officeDocument/2006/relationships" id="2147483649" r:id="Rfaa7b2c11f384974"/>
+    <p:sldLayoutId xmlns:r="http://schemas.openxmlformats.org/officeDocument/2006/relationships" id="2147483649" r:id="Red25ab02329747e6"/>
   </p:sldLayoutIdLst>
   <p:txStyles>
     <p:titleStyle>
@@ -2381,7 +2467,7 @@
           <p:cNvPr id="13" name="">
             <a:extLst xmlns:a="http://schemas.openxmlformats.org/drawingml/2006/main">
               <a:ext uri="{FF2B5EF4-FFF2-40B4-BE49-F238E27FC236}">
-                <a16:creationId xmlns:a16="http://schemas.microsoft.com/office/drawing/2014/main" id="{8261245D-D378-4228-BF9C-CDD295138CC6}"/>
+                <a16:creationId xmlns:a16="http://schemas.microsoft.com/office/drawing/2014/main" id="{62D34282-12B3-4982-A474-BDBC1B6A2D46}"/>
               </a:ext>
             </a:extLst>
           </p:cNvPr>
@@ -2439,7 +2525,7 @@
           <p:cNvPr id="2" name="">
             <a:extLst xmlns:a="http://schemas.openxmlformats.org/drawingml/2006/main">
               <a:ext uri="{FF2B5EF4-FFF2-40B4-BE49-F238E27FC236}">
-                <a16:creationId xmlns:a16="http://schemas.microsoft.com/office/drawing/2014/main" id="{E5A043B6-DC0A-43D6-B7D3-53A41E3A4879}"/>
+                <a16:creationId xmlns:a16="http://schemas.microsoft.com/office/drawing/2014/main" id="{B97FE683-F31C-4A12-9797-E7367C8BA7D3}"/>
               </a:ext>
             </a:extLst>
           </p:cNvPr>
@@ -2520,7 +2606,7 @@
           <p:cNvPr id="3" name="">
             <a:extLst xmlns:a="http://schemas.openxmlformats.org/drawingml/2006/main">
               <a:ext uri="{FF2B5EF4-FFF2-40B4-BE49-F238E27FC236}">
-                <a16:creationId xmlns:a16="http://schemas.microsoft.com/office/drawing/2014/main" id="{49703830-3929-43E2-A413-6A39E248C27C}"/>
+                <a16:creationId xmlns:a16="http://schemas.microsoft.com/office/drawing/2014/main" id="{F8FD8070-8304-4B41-9C5A-F4183BEAEF2C}"/>
               </a:ext>
             </a:extLst>
           </p:cNvPr>
@@ -2578,7 +2664,7 @@
           <p:cNvPr id="4" name="">
             <a:extLst xmlns:a="http://schemas.openxmlformats.org/drawingml/2006/main">
               <a:ext uri="{FF2B5EF4-FFF2-40B4-BE49-F238E27FC236}">
-                <a16:creationId xmlns:a16="http://schemas.microsoft.com/office/drawing/2014/main" id="{D9E4D7C4-BB61-4F74-9418-907435880FE6}"/>
+                <a16:creationId xmlns:a16="http://schemas.microsoft.com/office/drawing/2014/main" id="{4D336F2B-A161-46DD-8A18-C4A8E89C2A47}"/>
               </a:ext>
             </a:extLst>
           </p:cNvPr>
@@ -2613,7 +2699,7 @@
           <p:cNvPr id="5" name="">
             <a:extLst xmlns:a="http://schemas.openxmlformats.org/drawingml/2006/main">
               <a:ext uri="{FF2B5EF4-FFF2-40B4-BE49-F238E27FC236}">
-                <a16:creationId xmlns:a16="http://schemas.microsoft.com/office/drawing/2014/main" id="{2DB07B42-019A-46E8-804D-68E974F30AD9}"/>
+                <a16:creationId xmlns:a16="http://schemas.microsoft.com/office/drawing/2014/main" id="{DC4775E2-C067-43E0-9F5F-E8990599FFAD}"/>
               </a:ext>
             </a:extLst>
           </p:cNvPr>
@@ -2671,7 +2757,7 @@
           <p:cNvPr id="6" name="">
             <a:extLst xmlns:a="http://schemas.openxmlformats.org/drawingml/2006/main">
               <a:ext uri="{FF2B5EF4-FFF2-40B4-BE49-F238E27FC236}">
-                <a16:creationId xmlns:a16="http://schemas.microsoft.com/office/drawing/2014/main" id="{C4E7B7AE-F8FE-49E7-A101-3754A6ADB04A}"/>
+                <a16:creationId xmlns:a16="http://schemas.microsoft.com/office/drawing/2014/main" id="{C39E6972-6C1E-4A5B-A9B7-D4BF27B4EFA3}"/>
               </a:ext>
             </a:extLst>
           </p:cNvPr>
@@ -2729,7 +2815,7 @@
           <p:cNvPr id="7" name="">
             <a:extLst xmlns:a="http://schemas.openxmlformats.org/drawingml/2006/main">
               <a:ext uri="{FF2B5EF4-FFF2-40B4-BE49-F238E27FC236}">
-                <a16:creationId xmlns:a16="http://schemas.microsoft.com/office/drawing/2014/main" id="{53D64F61-1927-476F-BBB2-2E4562B9B0BC}"/>
+                <a16:creationId xmlns:a16="http://schemas.microsoft.com/office/drawing/2014/main" id="{9C989D9B-A68F-4690-B3A3-7C385C03D1FE}"/>
               </a:ext>
             </a:extLst>
           </p:cNvPr>
@@ -2787,7 +2873,7 @@
           <p:cNvPr id="8" name="">
             <a:extLst xmlns:a="http://schemas.openxmlformats.org/drawingml/2006/main">
               <a:ext uri="{FF2B5EF4-FFF2-40B4-BE49-F238E27FC236}">
-                <a16:creationId xmlns:a16="http://schemas.microsoft.com/office/drawing/2014/main" id="{349209B2-BE9F-4785-92AB-B965C9893525}"/>
+                <a16:creationId xmlns:a16="http://schemas.microsoft.com/office/drawing/2014/main" id="{DF4E80A4-84D1-4E31-9514-7F194E8C56C7}"/>
               </a:ext>
             </a:extLst>
           </p:cNvPr>
@@ -2868,7 +2954,7 @@
           <p:cNvPr id="9" name="">
             <a:extLst xmlns:a="http://schemas.openxmlformats.org/drawingml/2006/main">
               <a:ext uri="{FF2B5EF4-FFF2-40B4-BE49-F238E27FC236}">
-                <a16:creationId xmlns:a16="http://schemas.microsoft.com/office/drawing/2014/main" id="{EAE1C647-D519-4D95-99E2-7F71F35E8172}"/>
+                <a16:creationId xmlns:a16="http://schemas.microsoft.com/office/drawing/2014/main" id="{2322F060-CD56-4904-A6BC-8A511B43DDFD}"/>
               </a:ext>
             </a:extLst>
           </p:cNvPr>
@@ -2926,7 +3012,7 @@
           <p:cNvPr id="10" name="">
             <a:extLst xmlns:a="http://schemas.openxmlformats.org/drawingml/2006/main">
               <a:ext uri="{FF2B5EF4-FFF2-40B4-BE49-F238E27FC236}">
-                <a16:creationId xmlns:a16="http://schemas.microsoft.com/office/drawing/2014/main" id="{37FFDBE3-BB23-4C7C-AB6C-A91D1A4F8825}"/>
+                <a16:creationId xmlns:a16="http://schemas.microsoft.com/office/drawing/2014/main" id="{977B324D-54A3-4F11-AA4D-0C2AC0F0EAB5}"/>
               </a:ext>
             </a:extLst>
           </p:cNvPr>
@@ -2959,7 +3045,7 @@
           <p:cNvPr id="11" name="">
             <a:extLst xmlns:a="http://schemas.openxmlformats.org/drawingml/2006/main">
               <a:ext uri="{FF2B5EF4-FFF2-40B4-BE49-F238E27FC236}">
-                <a16:creationId xmlns:a16="http://schemas.microsoft.com/office/drawing/2014/main" id="{D043AC40-8A18-4035-AE2F-295B2E791463}"/>
+                <a16:creationId xmlns:a16="http://schemas.microsoft.com/office/drawing/2014/main" id="{82C1BA3E-701E-40CD-A526-90ABC0191637}"/>
               </a:ext>
             </a:extLst>
           </p:cNvPr>
@@ -3017,7 +3103,7 @@
           <p:cNvPr id="12" name="">
             <a:extLst xmlns:a="http://schemas.openxmlformats.org/drawingml/2006/main">
               <a:ext uri="{FF2B5EF4-FFF2-40B4-BE49-F238E27FC236}">
-                <a16:creationId xmlns:a16="http://schemas.microsoft.com/office/drawing/2014/main" id="{7DBCD7C7-0163-4105-B3D4-51D44796FDF3}"/>
+                <a16:creationId xmlns:a16="http://schemas.microsoft.com/office/drawing/2014/main" id="{51890DAF-5344-4726-B4D4-8A20B5155D9D}"/>
               </a:ext>
             </a:extLst>
           </p:cNvPr>
@@ -3073,7 +3159,7 @@
     </p:spTree>
     <p:extLst>
       <p:ext uri="{BB962C8B-B14F-4D97-AF65-F5344CB8AC3E}">
-        <p14:creationId xmlns:p14="http://schemas.microsoft.com/office/powerpoint/2010/main" val="1915052953"/>
+        <p14:creationId xmlns:p14="http://schemas.microsoft.com/office/powerpoint/2010/main" val="1132943592"/>
       </p:ext>
     </p:extLst>
   </p:cSld>
@@ -3104,7 +3190,7 @@
           <p:cNvPr id="42" name="">
             <a:extLst xmlns:a="http://schemas.openxmlformats.org/drawingml/2006/main">
               <a:ext uri="{FF2B5EF4-FFF2-40B4-BE49-F238E27FC236}">
-                <a16:creationId xmlns:a16="http://schemas.microsoft.com/office/drawing/2014/main" id="{405B6AB8-41D8-4CC2-8C01-7B09EF871A08}"/>
+                <a16:creationId xmlns:a16="http://schemas.microsoft.com/office/drawing/2014/main" id="{432C3611-358F-4789-8B08-DD286B80B43A}"/>
               </a:ext>
             </a:extLst>
           </p:cNvPr>
@@ -3162,7 +3248,7 @@
           <p:cNvPr id="2" name="">
             <a:extLst xmlns:a="http://schemas.openxmlformats.org/drawingml/2006/main">
               <a:ext uri="{FF2B5EF4-FFF2-40B4-BE49-F238E27FC236}">
-                <a16:creationId xmlns:a16="http://schemas.microsoft.com/office/drawing/2014/main" id="{A5F2A465-148E-4581-82A6-92282D4F55EF}"/>
+                <a16:creationId xmlns:a16="http://schemas.microsoft.com/office/drawing/2014/main" id="{F3533E42-FCBB-4200-8549-EE8EE3066403}"/>
               </a:ext>
             </a:extLst>
           </p:cNvPr>
@@ -3220,7 +3306,7 @@
           <p:cNvPr id="3" name="">
             <a:extLst xmlns:a="http://schemas.openxmlformats.org/drawingml/2006/main">
               <a:ext uri="{FF2B5EF4-FFF2-40B4-BE49-F238E27FC236}">
-                <a16:creationId xmlns:a16="http://schemas.microsoft.com/office/drawing/2014/main" id="{5DB185A9-3096-423A-9079-EE9D7A665E3F}"/>
+                <a16:creationId xmlns:a16="http://schemas.microsoft.com/office/drawing/2014/main" id="{58E4A69B-7E08-48B4-8146-EB5A1098A8C1}"/>
               </a:ext>
             </a:extLst>
           </p:cNvPr>
@@ -3253,7 +3339,7 @@
           <p:cNvPr id="4" name="">
             <a:extLst xmlns:a="http://schemas.openxmlformats.org/drawingml/2006/main">
               <a:ext uri="{FF2B5EF4-FFF2-40B4-BE49-F238E27FC236}">
-                <a16:creationId xmlns:a16="http://schemas.microsoft.com/office/drawing/2014/main" id="{443748B3-653C-4959-BE79-5850F8B4CF2B}"/>
+                <a16:creationId xmlns:a16="http://schemas.microsoft.com/office/drawing/2014/main" id="{A37E92AE-7DD5-4A66-936D-D5FEC0A2DF9A}"/>
               </a:ext>
             </a:extLst>
           </p:cNvPr>
@@ -3311,7 +3397,7 @@
           <p:cNvPr id="5" name="">
             <a:extLst xmlns:a="http://schemas.openxmlformats.org/drawingml/2006/main">
               <a:ext uri="{FF2B5EF4-FFF2-40B4-BE49-F238E27FC236}">
-                <a16:creationId xmlns:a16="http://schemas.microsoft.com/office/drawing/2014/main" id="{2CF76C55-1902-4CCC-8E55-C18A2B8104CA}"/>
+                <a16:creationId xmlns:a16="http://schemas.microsoft.com/office/drawing/2014/main" id="{5148B5DB-26C2-49DE-9B4A-119F8C573E34}"/>
               </a:ext>
             </a:extLst>
           </p:cNvPr>
@@ -3344,7 +3430,7 @@
           <p:cNvPr id="6" name="">
             <a:extLst xmlns:a="http://schemas.openxmlformats.org/drawingml/2006/main">
               <a:ext uri="{FF2B5EF4-FFF2-40B4-BE49-F238E27FC236}">
-                <a16:creationId xmlns:a16="http://schemas.microsoft.com/office/drawing/2014/main" id="{3B7FE25B-0145-41E5-BC4D-FB82FE4B0832}"/>
+                <a16:creationId xmlns:a16="http://schemas.microsoft.com/office/drawing/2014/main" id="{396F7CE8-DF44-48F6-82A6-43286F721F79}"/>
               </a:ext>
             </a:extLst>
           </p:cNvPr>
@@ -3402,7 +3488,7 @@
           <p:cNvPr id="7" name="">
             <a:extLst xmlns:a="http://schemas.openxmlformats.org/drawingml/2006/main">
               <a:ext uri="{FF2B5EF4-FFF2-40B4-BE49-F238E27FC236}">
-                <a16:creationId xmlns:a16="http://schemas.microsoft.com/office/drawing/2014/main" id="{4A14336F-19D0-408A-A3FA-B12051BB841B}"/>
+                <a16:creationId xmlns:a16="http://schemas.microsoft.com/office/drawing/2014/main" id="{9A88F85F-81EA-4D27-8233-824258A75D5E}"/>
               </a:ext>
             </a:extLst>
           </p:cNvPr>
@@ -3435,7 +3521,7 @@
           <p:cNvPr id="8" name="">
             <a:extLst xmlns:a="http://schemas.openxmlformats.org/drawingml/2006/main">
               <a:ext uri="{FF2B5EF4-FFF2-40B4-BE49-F238E27FC236}">
-                <a16:creationId xmlns:a16="http://schemas.microsoft.com/office/drawing/2014/main" id="{63099084-08FC-4B15-84BD-337561D86605}"/>
+                <a16:creationId xmlns:a16="http://schemas.microsoft.com/office/drawing/2014/main" id="{8DAFF6B5-3854-494C-AA29-F6CC51FE15EC}"/>
               </a:ext>
             </a:extLst>
           </p:cNvPr>
@@ -3493,7 +3579,7 @@
           <p:cNvPr id="9" name="">
             <a:extLst xmlns:a="http://schemas.openxmlformats.org/drawingml/2006/main">
               <a:ext uri="{FF2B5EF4-FFF2-40B4-BE49-F238E27FC236}">
-                <a16:creationId xmlns:a16="http://schemas.microsoft.com/office/drawing/2014/main" id="{6B127923-79D3-4580-8A65-95549F04904D}"/>
+                <a16:creationId xmlns:a16="http://schemas.microsoft.com/office/drawing/2014/main" id="{E29DFE97-A439-45A8-8774-2C1859664C3C}"/>
               </a:ext>
             </a:extLst>
           </p:cNvPr>
@@ -3526,7 +3612,7 @@
           <p:cNvPr id="10" name="">
             <a:extLst xmlns:a="http://schemas.openxmlformats.org/drawingml/2006/main">
               <a:ext uri="{FF2B5EF4-FFF2-40B4-BE49-F238E27FC236}">
-                <a16:creationId xmlns:a16="http://schemas.microsoft.com/office/drawing/2014/main" id="{808DDEF5-D03A-4BEA-9858-22AD535F5C4C}"/>
+                <a16:creationId xmlns:a16="http://schemas.microsoft.com/office/drawing/2014/main" id="{D7DDC7D9-A741-485A-9E28-534CA9822F31}"/>
               </a:ext>
             </a:extLst>
           </p:cNvPr>
@@ -3584,7 +3670,7 @@
           <p:cNvPr id="11" name="">
             <a:extLst xmlns:a="http://schemas.openxmlformats.org/drawingml/2006/main">
               <a:ext uri="{FF2B5EF4-FFF2-40B4-BE49-F238E27FC236}">
-                <a16:creationId xmlns:a16="http://schemas.microsoft.com/office/drawing/2014/main" id="{7A060043-EB84-4BBD-BC34-2C722B5ACA21}"/>
+                <a16:creationId xmlns:a16="http://schemas.microsoft.com/office/drawing/2014/main" id="{C7615154-D783-43D2-80F1-2452D8B9949F}"/>
               </a:ext>
             </a:extLst>
           </p:cNvPr>
@@ -3617,7 +3703,7 @@
           <p:cNvPr id="12" name="">
             <a:extLst xmlns:a="http://schemas.openxmlformats.org/drawingml/2006/main">
               <a:ext uri="{FF2B5EF4-FFF2-40B4-BE49-F238E27FC236}">
-                <a16:creationId xmlns:a16="http://schemas.microsoft.com/office/drawing/2014/main" id="{CB639B12-D391-43A7-ACF5-04669BF53BB7}"/>
+                <a16:creationId xmlns:a16="http://schemas.microsoft.com/office/drawing/2014/main" id="{7C9D48B2-D176-4A31-8034-C23C710F3C8C}"/>
               </a:ext>
             </a:extLst>
           </p:cNvPr>
@@ -3675,7 +3761,7 @@
           <p:cNvPr id="13" name="">
             <a:extLst xmlns:a="http://schemas.openxmlformats.org/drawingml/2006/main">
               <a:ext uri="{FF2B5EF4-FFF2-40B4-BE49-F238E27FC236}">
-                <a16:creationId xmlns:a16="http://schemas.microsoft.com/office/drawing/2014/main" id="{11E68CD7-60A6-4063-A27F-476D67F6F462}"/>
+                <a16:creationId xmlns:a16="http://schemas.microsoft.com/office/drawing/2014/main" id="{F8665C65-3D41-4D6C-B86A-5067F2E0544B}"/>
               </a:ext>
             </a:extLst>
           </p:cNvPr>
@@ -3708,7 +3794,7 @@
           <p:cNvPr id="14" name="">
             <a:extLst xmlns:a="http://schemas.openxmlformats.org/drawingml/2006/main">
               <a:ext uri="{FF2B5EF4-FFF2-40B4-BE49-F238E27FC236}">
-                <a16:creationId xmlns:a16="http://schemas.microsoft.com/office/drawing/2014/main" id="{D2C58119-0748-4C65-B610-22CE7C10C212}"/>
+                <a16:creationId xmlns:a16="http://schemas.microsoft.com/office/drawing/2014/main" id="{D5689D70-5A38-4928-991E-F4027CDD9A6E}"/>
               </a:ext>
             </a:extLst>
           </p:cNvPr>
@@ -3766,7 +3852,7 @@
           <p:cNvPr id="15" name="">
             <a:extLst xmlns:a="http://schemas.openxmlformats.org/drawingml/2006/main">
               <a:ext uri="{FF2B5EF4-FFF2-40B4-BE49-F238E27FC236}">
-                <a16:creationId xmlns:a16="http://schemas.microsoft.com/office/drawing/2014/main" id="{86A71CFD-5FE2-4760-B8C9-6FFEFBE32DC7}"/>
+                <a16:creationId xmlns:a16="http://schemas.microsoft.com/office/drawing/2014/main" id="{ADEE23F9-E0E5-46C2-9AEB-E82BA2CA251A}"/>
               </a:ext>
             </a:extLst>
           </p:cNvPr>
@@ -3799,7 +3885,7 @@
           <p:cNvPr id="16" name="">
             <a:extLst xmlns:a="http://schemas.openxmlformats.org/drawingml/2006/main">
               <a:ext uri="{FF2B5EF4-FFF2-40B4-BE49-F238E27FC236}">
-                <a16:creationId xmlns:a16="http://schemas.microsoft.com/office/drawing/2014/main" id="{C09C0358-1044-4B25-86E2-DB946618722F}"/>
+                <a16:creationId xmlns:a16="http://schemas.microsoft.com/office/drawing/2014/main" id="{48FAD724-2931-4449-AD3C-5BF0ED148A3E}"/>
               </a:ext>
             </a:extLst>
           </p:cNvPr>
@@ -3857,7 +3943,7 @@
           <p:cNvPr id="17" name="">
             <a:extLst xmlns:a="http://schemas.openxmlformats.org/drawingml/2006/main">
               <a:ext uri="{FF2B5EF4-FFF2-40B4-BE49-F238E27FC236}">
-                <a16:creationId xmlns:a16="http://schemas.microsoft.com/office/drawing/2014/main" id="{2C156E97-39B7-42E6-9222-A55AD65BD88A}"/>
+                <a16:creationId xmlns:a16="http://schemas.microsoft.com/office/drawing/2014/main" id="{0674AF81-E4C4-4BB6-8EAE-9D7709D0CE63}"/>
               </a:ext>
             </a:extLst>
           </p:cNvPr>
@@ -3890,7 +3976,7 @@
           <p:cNvPr id="18" name="">
             <a:extLst xmlns:a="http://schemas.openxmlformats.org/drawingml/2006/main">
               <a:ext uri="{FF2B5EF4-FFF2-40B4-BE49-F238E27FC236}">
-                <a16:creationId xmlns:a16="http://schemas.microsoft.com/office/drawing/2014/main" id="{FDF0A3D0-64F7-4139-A3DF-4944558125A3}"/>
+                <a16:creationId xmlns:a16="http://schemas.microsoft.com/office/drawing/2014/main" id="{A9C39F0E-DF03-4ED9-8052-5C7575FB259B}"/>
               </a:ext>
             </a:extLst>
           </p:cNvPr>
@@ -3948,7 +4034,7 @@
           <p:cNvPr id="19" name="">
             <a:extLst xmlns:a="http://schemas.openxmlformats.org/drawingml/2006/main">
               <a:ext uri="{FF2B5EF4-FFF2-40B4-BE49-F238E27FC236}">
-                <a16:creationId xmlns:a16="http://schemas.microsoft.com/office/drawing/2014/main" id="{13CFAD60-F977-47AB-A62A-F61A5005ED7A}"/>
+                <a16:creationId xmlns:a16="http://schemas.microsoft.com/office/drawing/2014/main" id="{81189169-A491-4662-AFE5-A559E41B010F}"/>
               </a:ext>
             </a:extLst>
           </p:cNvPr>
@@ -3981,7 +4067,7 @@
           <p:cNvPr id="20" name="">
             <a:extLst xmlns:a="http://schemas.openxmlformats.org/drawingml/2006/main">
               <a:ext uri="{FF2B5EF4-FFF2-40B4-BE49-F238E27FC236}">
-                <a16:creationId xmlns:a16="http://schemas.microsoft.com/office/drawing/2014/main" id="{16D0B08B-A056-4361-B37C-E4DE3A952E53}"/>
+                <a16:creationId xmlns:a16="http://schemas.microsoft.com/office/drawing/2014/main" id="{F9B3F738-E504-4B28-A843-02588C3D7FFB}"/>
               </a:ext>
             </a:extLst>
           </p:cNvPr>
@@ -4039,7 +4125,7 @@
           <p:cNvPr id="21" name="">
             <a:extLst xmlns:a="http://schemas.openxmlformats.org/drawingml/2006/main">
               <a:ext uri="{FF2B5EF4-FFF2-40B4-BE49-F238E27FC236}">
-                <a16:creationId xmlns:a16="http://schemas.microsoft.com/office/drawing/2014/main" id="{93018569-FD78-40BB-914B-C28ED440648E}"/>
+                <a16:creationId xmlns:a16="http://schemas.microsoft.com/office/drawing/2014/main" id="{8F3FAC6E-D7E1-4114-8D80-5E5CAE575E74}"/>
               </a:ext>
             </a:extLst>
           </p:cNvPr>
@@ -4072,7 +4158,7 @@
           <p:cNvPr id="22" name="">
             <a:extLst xmlns:a="http://schemas.openxmlformats.org/drawingml/2006/main">
               <a:ext uri="{FF2B5EF4-FFF2-40B4-BE49-F238E27FC236}">
-                <a16:creationId xmlns:a16="http://schemas.microsoft.com/office/drawing/2014/main" id="{BB9D7209-DC64-4288-97DA-18560F911161}"/>
+                <a16:creationId xmlns:a16="http://schemas.microsoft.com/office/drawing/2014/main" id="{0CEF2319-0814-4C21-B028-D7C2C62B1827}"/>
               </a:ext>
             </a:extLst>
           </p:cNvPr>
@@ -4130,7 +4216,7 @@
           <p:cNvPr id="23" name="">
             <a:extLst xmlns:a="http://schemas.openxmlformats.org/drawingml/2006/main">
               <a:ext uri="{FF2B5EF4-FFF2-40B4-BE49-F238E27FC236}">
-                <a16:creationId xmlns:a16="http://schemas.microsoft.com/office/drawing/2014/main" id="{0890C601-66C4-4BA2-B807-04AFFF5EFC3E}"/>
+                <a16:creationId xmlns:a16="http://schemas.microsoft.com/office/drawing/2014/main" id="{F7C5F795-6F7B-4037-8896-2C0DAF4FA09D}"/>
               </a:ext>
             </a:extLst>
           </p:cNvPr>
@@ -4163,7 +4249,7 @@
           <p:cNvPr id="24" name="">
             <a:extLst xmlns:a="http://schemas.openxmlformats.org/drawingml/2006/main">
               <a:ext uri="{FF2B5EF4-FFF2-40B4-BE49-F238E27FC236}">
-                <a16:creationId xmlns:a16="http://schemas.microsoft.com/office/drawing/2014/main" id="{00AB6CD9-4375-4C0F-A747-FE8CA3E127BA}"/>
+                <a16:creationId xmlns:a16="http://schemas.microsoft.com/office/drawing/2014/main" id="{D718A4E8-5FD3-4DE3-B5E3-9513960A1E1A}"/>
               </a:ext>
             </a:extLst>
           </p:cNvPr>
@@ -4221,7 +4307,7 @@
           <p:cNvPr id="25" name="">
             <a:extLst xmlns:a="http://schemas.openxmlformats.org/drawingml/2006/main">
               <a:ext uri="{FF2B5EF4-FFF2-40B4-BE49-F238E27FC236}">
-                <a16:creationId xmlns:a16="http://schemas.microsoft.com/office/drawing/2014/main" id="{54872BED-F30D-432E-8027-C084A7E88EC1}"/>
+                <a16:creationId xmlns:a16="http://schemas.microsoft.com/office/drawing/2014/main" id="{A45F90FE-6641-4FEE-A88F-1BD1B6009D80}"/>
               </a:ext>
             </a:extLst>
           </p:cNvPr>
@@ -4254,7 +4340,7 @@
           <p:cNvPr id="26" name="">
             <a:extLst xmlns:a="http://schemas.openxmlformats.org/drawingml/2006/main">
               <a:ext uri="{FF2B5EF4-FFF2-40B4-BE49-F238E27FC236}">
-                <a16:creationId xmlns:a16="http://schemas.microsoft.com/office/drawing/2014/main" id="{8F6B54E5-3D31-4591-88A7-D08E8FD82730}"/>
+                <a16:creationId xmlns:a16="http://schemas.microsoft.com/office/drawing/2014/main" id="{95AD0513-5071-455F-ADDF-A0AEB5BF8B7F}"/>
               </a:ext>
             </a:extLst>
           </p:cNvPr>
@@ -4312,7 +4398,7 @@
           <p:cNvPr id="27" name="">
             <a:extLst xmlns:a="http://schemas.openxmlformats.org/drawingml/2006/main">
               <a:ext uri="{FF2B5EF4-FFF2-40B4-BE49-F238E27FC236}">
-                <a16:creationId xmlns:a16="http://schemas.microsoft.com/office/drawing/2014/main" id="{7DB8A942-CCD5-46E6-AD03-71B06444210B}"/>
+                <a16:creationId xmlns:a16="http://schemas.microsoft.com/office/drawing/2014/main" id="{A23C9389-EEE4-48EA-B242-BC2D9FDC57BB}"/>
               </a:ext>
             </a:extLst>
           </p:cNvPr>
@@ -4345,7 +4431,7 @@
           <p:cNvPr id="28" name="">
             <a:extLst xmlns:a="http://schemas.openxmlformats.org/drawingml/2006/main">
               <a:ext uri="{FF2B5EF4-FFF2-40B4-BE49-F238E27FC236}">
-                <a16:creationId xmlns:a16="http://schemas.microsoft.com/office/drawing/2014/main" id="{B0B694D8-B9A2-45B7-8920-9E56243420C5}"/>
+                <a16:creationId xmlns:a16="http://schemas.microsoft.com/office/drawing/2014/main" id="{165EBBA5-5FBE-4119-8CB3-1274882327AE}"/>
               </a:ext>
             </a:extLst>
           </p:cNvPr>
@@ -4403,7 +4489,7 @@
           <p:cNvPr id="29" name="">
             <a:extLst xmlns:a="http://schemas.openxmlformats.org/drawingml/2006/main">
               <a:ext uri="{FF2B5EF4-FFF2-40B4-BE49-F238E27FC236}">
-                <a16:creationId xmlns:a16="http://schemas.microsoft.com/office/drawing/2014/main" id="{57524CC2-6905-4F0D-A49B-219289EFE764}"/>
+                <a16:creationId xmlns:a16="http://schemas.microsoft.com/office/drawing/2014/main" id="{5C024E32-716A-47AE-8391-E42855ECEA34}"/>
               </a:ext>
             </a:extLst>
           </p:cNvPr>
@@ -4436,7 +4522,7 @@
           <p:cNvPr id="30" name="">
             <a:extLst xmlns:a="http://schemas.openxmlformats.org/drawingml/2006/main">
               <a:ext uri="{FF2B5EF4-FFF2-40B4-BE49-F238E27FC236}">
-                <a16:creationId xmlns:a16="http://schemas.microsoft.com/office/drawing/2014/main" id="{DC6D7F08-AF14-48E2-9F5C-900D700CFAFE}"/>
+                <a16:creationId xmlns:a16="http://schemas.microsoft.com/office/drawing/2014/main" id="{9D201B63-23CD-4BFB-A9AF-5D62A495DAAD}"/>
               </a:ext>
             </a:extLst>
           </p:cNvPr>
@@ -4494,7 +4580,7 @@
           <p:cNvPr id="31" name="">
             <a:extLst xmlns:a="http://schemas.openxmlformats.org/drawingml/2006/main">
               <a:ext uri="{FF2B5EF4-FFF2-40B4-BE49-F238E27FC236}">
-                <a16:creationId xmlns:a16="http://schemas.microsoft.com/office/drawing/2014/main" id="{9A63F4C4-074E-4473-8ED7-AF51927436D8}"/>
+                <a16:creationId xmlns:a16="http://schemas.microsoft.com/office/drawing/2014/main" id="{31FAF78F-CAB2-44B8-B410-2C808E091BBD}"/>
               </a:ext>
             </a:extLst>
           </p:cNvPr>
@@ -4552,7 +4638,7 @@
           <p:cNvPr id="32" name="">
             <a:extLst xmlns:a="http://schemas.openxmlformats.org/drawingml/2006/main">
               <a:ext uri="{FF2B5EF4-FFF2-40B4-BE49-F238E27FC236}">
-                <a16:creationId xmlns:a16="http://schemas.microsoft.com/office/drawing/2014/main" id="{9DB4681A-9F32-4633-BB71-394976AF2A3D}"/>
+                <a16:creationId xmlns:a16="http://schemas.microsoft.com/office/drawing/2014/main" id="{26B81F47-C695-45D0-BCF4-6DDE02AC480F}"/>
               </a:ext>
             </a:extLst>
           </p:cNvPr>
@@ -4610,7 +4696,7 @@
           <p:cNvPr id="33" name="">
             <a:extLst xmlns:a="http://schemas.openxmlformats.org/drawingml/2006/main">
               <a:ext uri="{FF2B5EF4-FFF2-40B4-BE49-F238E27FC236}">
-                <a16:creationId xmlns:a16="http://schemas.microsoft.com/office/drawing/2014/main" id="{48A8B82C-FE01-43F9-B458-9EC7446AA008}"/>
+                <a16:creationId xmlns:a16="http://schemas.microsoft.com/office/drawing/2014/main" id="{3809C850-BD58-4D8B-B1E7-D944D11E3EB6}"/>
               </a:ext>
             </a:extLst>
           </p:cNvPr>
@@ -4643,7 +4729,7 @@
           <p:cNvPr id="34" name="">
             <a:extLst xmlns:a="http://schemas.openxmlformats.org/drawingml/2006/main">
               <a:ext uri="{FF2B5EF4-FFF2-40B4-BE49-F238E27FC236}">
-                <a16:creationId xmlns:a16="http://schemas.microsoft.com/office/drawing/2014/main" id="{F50BA18A-A1A4-4488-827B-C982CBF061BC}"/>
+                <a16:creationId xmlns:a16="http://schemas.microsoft.com/office/drawing/2014/main" id="{19C8E624-52E1-4547-86CB-06B147E39139}"/>
               </a:ext>
             </a:extLst>
           </p:cNvPr>
@@ -4701,7 +4787,7 @@
           <p:cNvPr id="35" name="">
             <a:extLst xmlns:a="http://schemas.openxmlformats.org/drawingml/2006/main">
               <a:ext uri="{FF2B5EF4-FFF2-40B4-BE49-F238E27FC236}">
-                <a16:creationId xmlns:a16="http://schemas.microsoft.com/office/drawing/2014/main" id="{9C633E01-0093-4EBD-9BA9-00E92C0C1707}"/>
+                <a16:creationId xmlns:a16="http://schemas.microsoft.com/office/drawing/2014/main" id="{8CBC6907-9D61-40D0-ADB2-3304AEEFD585}"/>
               </a:ext>
             </a:extLst>
           </p:cNvPr>
@@ -4734,7 +4820,7 @@
           <p:cNvPr id="36" name="">
             <a:extLst xmlns:a="http://schemas.openxmlformats.org/drawingml/2006/main">
               <a:ext uri="{FF2B5EF4-FFF2-40B4-BE49-F238E27FC236}">
-                <a16:creationId xmlns:a16="http://schemas.microsoft.com/office/drawing/2014/main" id="{DD30C2AD-528E-40E1-97CB-57CCB998FAF7}"/>
+                <a16:creationId xmlns:a16="http://schemas.microsoft.com/office/drawing/2014/main" id="{FE6217F6-16E7-4CC1-84C7-27F5106A7114}"/>
               </a:ext>
             </a:extLst>
           </p:cNvPr>
@@ -4792,7 +4878,7 @@
           <p:cNvPr id="37" name="">
             <a:extLst xmlns:a="http://schemas.openxmlformats.org/drawingml/2006/main">
               <a:ext uri="{FF2B5EF4-FFF2-40B4-BE49-F238E27FC236}">
-                <a16:creationId xmlns:a16="http://schemas.microsoft.com/office/drawing/2014/main" id="{779B6E9D-06F6-4AF9-B2DF-83341F4580B3}"/>
+                <a16:creationId xmlns:a16="http://schemas.microsoft.com/office/drawing/2014/main" id="{1548E03C-CEDE-45AB-9069-7C11B7101323}"/>
               </a:ext>
             </a:extLst>
           </p:cNvPr>
@@ -4825,7 +4911,7 @@
           <p:cNvPr id="38" name="">
             <a:extLst xmlns:a="http://schemas.openxmlformats.org/drawingml/2006/main">
               <a:ext uri="{FF2B5EF4-FFF2-40B4-BE49-F238E27FC236}">
-                <a16:creationId xmlns:a16="http://schemas.microsoft.com/office/drawing/2014/main" id="{623898C0-4A1A-4091-A610-5F553FA9C2D9}"/>
+                <a16:creationId xmlns:a16="http://schemas.microsoft.com/office/drawing/2014/main" id="{183EDAA4-B901-487D-8055-56E0CFB15190}"/>
               </a:ext>
             </a:extLst>
           </p:cNvPr>
@@ -4883,7 +4969,7 @@
           <p:cNvPr id="39" name="">
             <a:extLst xmlns:a="http://schemas.openxmlformats.org/drawingml/2006/main">
               <a:ext uri="{FF2B5EF4-FFF2-40B4-BE49-F238E27FC236}">
-                <a16:creationId xmlns:a16="http://schemas.microsoft.com/office/drawing/2014/main" id="{7BDD1378-43C6-4F2F-BD59-DD5CDBFD6F6E}"/>
+                <a16:creationId xmlns:a16="http://schemas.microsoft.com/office/drawing/2014/main" id="{254727CA-90AF-4D51-B69D-249B5D631D9B}"/>
               </a:ext>
             </a:extLst>
           </p:cNvPr>
@@ -4916,7 +5002,7 @@
           <p:cNvPr id="40" name="">
             <a:extLst xmlns:a="http://schemas.openxmlformats.org/drawingml/2006/main">
               <a:ext uri="{FF2B5EF4-FFF2-40B4-BE49-F238E27FC236}">
-                <a16:creationId xmlns:a16="http://schemas.microsoft.com/office/drawing/2014/main" id="{70AFEAC9-C1EC-49C1-991A-BF20398BE8B8}"/>
+                <a16:creationId xmlns:a16="http://schemas.microsoft.com/office/drawing/2014/main" id="{5C9B74EB-99D5-42E2-B30F-062DD81AF059}"/>
               </a:ext>
             </a:extLst>
           </p:cNvPr>
@@ -4974,7 +5060,7 @@
           <p:cNvPr id="41" name="">
             <a:extLst xmlns:a="http://schemas.openxmlformats.org/drawingml/2006/main">
               <a:ext uri="{FF2B5EF4-FFF2-40B4-BE49-F238E27FC236}">
-                <a16:creationId xmlns:a16="http://schemas.microsoft.com/office/drawing/2014/main" id="{FF47431A-A0BC-4898-8D3E-3020B0A583F4}"/>
+                <a16:creationId xmlns:a16="http://schemas.microsoft.com/office/drawing/2014/main" id="{F25C7073-8AAC-4177-BE95-9419D83E863B}"/>
               </a:ext>
             </a:extLst>
           </p:cNvPr>
@@ -5030,7 +5116,7 @@
     </p:spTree>
     <p:extLst>
       <p:ext uri="{BB962C8B-B14F-4D97-AF65-F5344CB8AC3E}">
-        <p14:creationId xmlns:p14="http://schemas.microsoft.com/office/powerpoint/2010/main" val="1949198223"/>
+        <p14:creationId xmlns:p14="http://schemas.microsoft.com/office/powerpoint/2010/main" val="692202461"/>
       </p:ext>
     </p:extLst>
   </p:cSld>
@@ -5061,7 +5147,7 @@
           <p:cNvPr id="66" name="">
             <a:extLst xmlns:a="http://schemas.openxmlformats.org/drawingml/2006/main">
               <a:ext uri="{FF2B5EF4-FFF2-40B4-BE49-F238E27FC236}">
-                <a16:creationId xmlns:a16="http://schemas.microsoft.com/office/drawing/2014/main" id="{8BE90195-E2EF-4D47-A510-A221AFE55CB5}"/>
+                <a16:creationId xmlns:a16="http://schemas.microsoft.com/office/drawing/2014/main" id="{FDF41FDC-5937-41EF-9992-177C4C60C741}"/>
               </a:ext>
             </a:extLst>
           </p:cNvPr>
@@ -5119,7 +5205,7 @@
           <p:cNvPr id="2" name="">
             <a:extLst xmlns:a="http://schemas.openxmlformats.org/drawingml/2006/main">
               <a:ext uri="{FF2B5EF4-FFF2-40B4-BE49-F238E27FC236}">
-                <a16:creationId xmlns:a16="http://schemas.microsoft.com/office/drawing/2014/main" id="{C66F32ED-DF71-4043-9D29-C3DF5F1E058A}"/>
+                <a16:creationId xmlns:a16="http://schemas.microsoft.com/office/drawing/2014/main" id="{519B536B-DB2C-48B7-A8B2-C0EBFF2394D8}"/>
               </a:ext>
             </a:extLst>
           </p:cNvPr>
@@ -5177,7 +5263,7 @@
           <p:cNvPr id="3" name="">
             <a:extLst xmlns:a="http://schemas.openxmlformats.org/drawingml/2006/main">
               <a:ext uri="{FF2B5EF4-FFF2-40B4-BE49-F238E27FC236}">
-                <a16:creationId xmlns:a16="http://schemas.microsoft.com/office/drawing/2014/main" id="{92DB1CEE-B587-443B-A5D1-A88BBBC8B756}"/>
+                <a16:creationId xmlns:a16="http://schemas.microsoft.com/office/drawing/2014/main" id="{7CCC60E3-5B52-44AC-ABD6-436D393D787B}"/>
               </a:ext>
             </a:extLst>
           </p:cNvPr>
@@ -5210,7 +5296,7 @@
           <p:cNvPr id="4" name="">
             <a:extLst xmlns:a="http://schemas.openxmlformats.org/drawingml/2006/main">
               <a:ext uri="{FF2B5EF4-FFF2-40B4-BE49-F238E27FC236}">
-                <a16:creationId xmlns:a16="http://schemas.microsoft.com/office/drawing/2014/main" id="{FCD3AFB1-6ECC-4A9B-87F1-F83D85DBC5B9}"/>
+                <a16:creationId xmlns:a16="http://schemas.microsoft.com/office/drawing/2014/main" id="{D15AAA00-AD85-4092-B818-D6AE7305366A}"/>
               </a:ext>
             </a:extLst>
           </p:cNvPr>
@@ -5272,7 +5358,7 @@
           <p:nvPr/>
         </p:nvPicPr>
         <p:blipFill>
-          <a:blip xmlns:r="http://schemas.openxmlformats.org/officeDocument/2006/relationships" xmlns:a="http://schemas.openxmlformats.org/drawingml/2006/main" r:embed="R224e25be4be84215"/>
+          <a:blip xmlns:r="http://schemas.openxmlformats.org/officeDocument/2006/relationships" xmlns:a="http://schemas.openxmlformats.org/drawingml/2006/main" r:embed="R19754a7d0d6e4845"/>
           <a:stretch xmlns:a="http://schemas.openxmlformats.org/drawingml/2006/main"/>
         </p:blipFill>
         <p:spPr>
@@ -5292,7 +5378,7 @@
           <p:cNvPr id="6" name="">
             <a:extLst xmlns:a="http://schemas.openxmlformats.org/drawingml/2006/main">
               <a:ext uri="{FF2B5EF4-FFF2-40B4-BE49-F238E27FC236}">
-                <a16:creationId xmlns:a16="http://schemas.microsoft.com/office/drawing/2014/main" id="{2996AD2A-689B-4FD5-9987-3F9A6D179F52}"/>
+                <a16:creationId xmlns:a16="http://schemas.microsoft.com/office/drawing/2014/main" id="{70604F12-0B65-49F3-AB5F-67AFCF1B14D1}"/>
               </a:ext>
             </a:extLst>
           </p:cNvPr>
@@ -5325,7 +5411,7 @@
           <p:cNvPr id="7" name="">
             <a:extLst xmlns:a="http://schemas.openxmlformats.org/drawingml/2006/main">
               <a:ext uri="{FF2B5EF4-FFF2-40B4-BE49-F238E27FC236}">
-                <a16:creationId xmlns:a16="http://schemas.microsoft.com/office/drawing/2014/main" id="{314925C7-0814-48B6-B5D4-900CEFE0CA17}"/>
+                <a16:creationId xmlns:a16="http://schemas.microsoft.com/office/drawing/2014/main" id="{4D4A0832-AD09-43DD-B92B-13BD80355F41}"/>
               </a:ext>
             </a:extLst>
           </p:cNvPr>
@@ -5383,7 +5469,7 @@
           <p:cNvPr id="8" name="">
             <a:extLst xmlns:a="http://schemas.openxmlformats.org/drawingml/2006/main">
               <a:ext uri="{FF2B5EF4-FFF2-40B4-BE49-F238E27FC236}">
-                <a16:creationId xmlns:a16="http://schemas.microsoft.com/office/drawing/2014/main" id="{09B4B099-8F43-4204-AB0E-F8CB9EAE9CEB}"/>
+                <a16:creationId xmlns:a16="http://schemas.microsoft.com/office/drawing/2014/main" id="{EEE2FF71-57D5-4857-B3F0-0CECF76A7E2F}"/>
               </a:ext>
             </a:extLst>
           </p:cNvPr>
@@ -5416,7 +5502,7 @@
           <p:cNvPr id="9" name="">
             <a:extLst xmlns:a="http://schemas.openxmlformats.org/drawingml/2006/main">
               <a:ext uri="{FF2B5EF4-FFF2-40B4-BE49-F238E27FC236}">
-                <a16:creationId xmlns:a16="http://schemas.microsoft.com/office/drawing/2014/main" id="{955BC165-AE36-46E8-A890-09438F9F07E4}"/>
+                <a16:creationId xmlns:a16="http://schemas.microsoft.com/office/drawing/2014/main" id="{E7003130-5542-4887-AF85-17509772E45B}"/>
               </a:ext>
             </a:extLst>
           </p:cNvPr>
@@ -5474,7 +5560,7 @@
           <p:cNvPr id="10" name="">
             <a:extLst xmlns:a="http://schemas.openxmlformats.org/drawingml/2006/main">
               <a:ext uri="{FF2B5EF4-FFF2-40B4-BE49-F238E27FC236}">
-                <a16:creationId xmlns:a16="http://schemas.microsoft.com/office/drawing/2014/main" id="{FEC063FF-2079-4BD0-86AF-98F9315E2E79}"/>
+                <a16:creationId xmlns:a16="http://schemas.microsoft.com/office/drawing/2014/main" id="{64567523-17A7-4511-8E6B-78906462B2D8}"/>
               </a:ext>
             </a:extLst>
           </p:cNvPr>
@@ -5507,7 +5593,7 @@
           <p:cNvPr id="11" name="">
             <a:extLst xmlns:a="http://schemas.openxmlformats.org/drawingml/2006/main">
               <a:ext uri="{FF2B5EF4-FFF2-40B4-BE49-F238E27FC236}">
-                <a16:creationId xmlns:a16="http://schemas.microsoft.com/office/drawing/2014/main" id="{FEC1F9FC-2608-47F7-AE9D-EE73EE86E7DC}"/>
+                <a16:creationId xmlns:a16="http://schemas.microsoft.com/office/drawing/2014/main" id="{C48ACA47-39FC-4753-8FC8-8C10D660A858}"/>
               </a:ext>
             </a:extLst>
           </p:cNvPr>
@@ -5565,7 +5651,7 @@
           <p:cNvPr id="12" name="">
             <a:extLst xmlns:a="http://schemas.openxmlformats.org/drawingml/2006/main">
               <a:ext uri="{FF2B5EF4-FFF2-40B4-BE49-F238E27FC236}">
-                <a16:creationId xmlns:a16="http://schemas.microsoft.com/office/drawing/2014/main" id="{F51A21E8-03FA-408B-B3C7-65E07C080BC9}"/>
+                <a16:creationId xmlns:a16="http://schemas.microsoft.com/office/drawing/2014/main" id="{4FD97A8C-6EDE-424F-A017-78186B4784C1}"/>
               </a:ext>
             </a:extLst>
           </p:cNvPr>
@@ -5598,7 +5684,7 @@
           <p:cNvPr id="13" name="">
             <a:extLst xmlns:a="http://schemas.openxmlformats.org/drawingml/2006/main">
               <a:ext uri="{FF2B5EF4-FFF2-40B4-BE49-F238E27FC236}">
-                <a16:creationId xmlns:a16="http://schemas.microsoft.com/office/drawing/2014/main" id="{8B45B542-B628-4791-B731-966C6CAB9950}"/>
+                <a16:creationId xmlns:a16="http://schemas.microsoft.com/office/drawing/2014/main" id="{C838FD80-15C2-4B96-AFF2-6C0871BA4BB7}"/>
               </a:ext>
             </a:extLst>
           </p:cNvPr>
@@ -5656,7 +5742,7 @@
           <p:cNvPr id="14" name="">
             <a:extLst xmlns:a="http://schemas.openxmlformats.org/drawingml/2006/main">
               <a:ext uri="{FF2B5EF4-FFF2-40B4-BE49-F238E27FC236}">
-                <a16:creationId xmlns:a16="http://schemas.microsoft.com/office/drawing/2014/main" id="{4A37FC01-D3D0-4AED-858D-9E3EB00B68D5}"/>
+                <a16:creationId xmlns:a16="http://schemas.microsoft.com/office/drawing/2014/main" id="{89574036-24FC-4CB1-BF3F-B49B9B748904}"/>
               </a:ext>
             </a:extLst>
           </p:cNvPr>
@@ -5689,7 +5775,7 @@
           <p:cNvPr id="15" name="">
             <a:extLst xmlns:a="http://schemas.openxmlformats.org/drawingml/2006/main">
               <a:ext uri="{FF2B5EF4-FFF2-40B4-BE49-F238E27FC236}">
-                <a16:creationId xmlns:a16="http://schemas.microsoft.com/office/drawing/2014/main" id="{29BBDE4E-62EE-453F-8133-D94905C3D84F}"/>
+                <a16:creationId xmlns:a16="http://schemas.microsoft.com/office/drawing/2014/main" id="{FD0C8648-67C5-4D21-BEC6-D7FDC7F8D4FB}"/>
               </a:ext>
             </a:extLst>
           </p:cNvPr>
@@ -5747,7 +5833,7 @@
           <p:cNvPr id="16" name="">
             <a:extLst xmlns:a="http://schemas.openxmlformats.org/drawingml/2006/main">
               <a:ext uri="{FF2B5EF4-FFF2-40B4-BE49-F238E27FC236}">
-                <a16:creationId xmlns:a16="http://schemas.microsoft.com/office/drawing/2014/main" id="{0767BAE9-0948-4C6E-90A8-F10AF63A8BFF}"/>
+                <a16:creationId xmlns:a16="http://schemas.microsoft.com/office/drawing/2014/main" id="{978FEE9B-6174-47B9-BB6B-296939DD7C6B}"/>
               </a:ext>
             </a:extLst>
           </p:cNvPr>
@@ -5780,7 +5866,7 @@
           <p:cNvPr id="17" name="">
             <a:extLst xmlns:a="http://schemas.openxmlformats.org/drawingml/2006/main">
               <a:ext uri="{FF2B5EF4-FFF2-40B4-BE49-F238E27FC236}">
-                <a16:creationId xmlns:a16="http://schemas.microsoft.com/office/drawing/2014/main" id="{E591D017-21E6-47E6-9797-67490135A075}"/>
+                <a16:creationId xmlns:a16="http://schemas.microsoft.com/office/drawing/2014/main" id="{4CAE766A-DB31-4C0F-8952-436AB5A523FC}"/>
               </a:ext>
             </a:extLst>
           </p:cNvPr>
@@ -5838,7 +5924,7 @@
           <p:cNvPr id="18" name="">
             <a:extLst xmlns:a="http://schemas.openxmlformats.org/drawingml/2006/main">
               <a:ext uri="{FF2B5EF4-FFF2-40B4-BE49-F238E27FC236}">
-                <a16:creationId xmlns:a16="http://schemas.microsoft.com/office/drawing/2014/main" id="{E48EB047-B11C-4F3E-91A9-337A56B0BDCE}"/>
+                <a16:creationId xmlns:a16="http://schemas.microsoft.com/office/drawing/2014/main" id="{83117C75-AFEA-4F30-A8AC-F71D9502F603}"/>
               </a:ext>
             </a:extLst>
           </p:cNvPr>
@@ -5871,7 +5957,7 @@
           <p:cNvPr id="19" name="">
             <a:extLst xmlns:a="http://schemas.openxmlformats.org/drawingml/2006/main">
               <a:ext uri="{FF2B5EF4-FFF2-40B4-BE49-F238E27FC236}">
-                <a16:creationId xmlns:a16="http://schemas.microsoft.com/office/drawing/2014/main" id="{C1D0BA3D-3CDE-4E2A-B551-29489A1540FE}"/>
+                <a16:creationId xmlns:a16="http://schemas.microsoft.com/office/drawing/2014/main" id="{88B2910E-EEF4-49EE-870B-8732F0898C19}"/>
               </a:ext>
             </a:extLst>
           </p:cNvPr>
@@ -5929,7 +6015,7 @@
           <p:cNvPr id="20" name="">
             <a:extLst xmlns:a="http://schemas.openxmlformats.org/drawingml/2006/main">
               <a:ext uri="{FF2B5EF4-FFF2-40B4-BE49-F238E27FC236}">
-                <a16:creationId xmlns:a16="http://schemas.microsoft.com/office/drawing/2014/main" id="{BFC7CEA7-7E53-4D5D-B35B-AE349A864543}"/>
+                <a16:creationId xmlns:a16="http://schemas.microsoft.com/office/drawing/2014/main" id="{862E45F3-713C-4113-AF84-9D2251E802E0}"/>
               </a:ext>
             </a:extLst>
           </p:cNvPr>
@@ -5962,7 +6048,7 @@
           <p:cNvPr id="21" name="">
             <a:extLst xmlns:a="http://schemas.openxmlformats.org/drawingml/2006/main">
               <a:ext uri="{FF2B5EF4-FFF2-40B4-BE49-F238E27FC236}">
-                <a16:creationId xmlns:a16="http://schemas.microsoft.com/office/drawing/2014/main" id="{51BD4968-7818-42F0-B366-307D1B71B517}"/>
+                <a16:creationId xmlns:a16="http://schemas.microsoft.com/office/drawing/2014/main" id="{DA68D7BC-F240-42F1-A26E-177F5D6B187A}"/>
               </a:ext>
             </a:extLst>
           </p:cNvPr>
@@ -6020,7 +6106,7 @@
           <p:cNvPr id="22" name="">
             <a:extLst xmlns:a="http://schemas.openxmlformats.org/drawingml/2006/main">
               <a:ext uri="{FF2B5EF4-FFF2-40B4-BE49-F238E27FC236}">
-                <a16:creationId xmlns:a16="http://schemas.microsoft.com/office/drawing/2014/main" id="{74EF9CC2-168A-4986-B924-EDBEAC5E200C}"/>
+                <a16:creationId xmlns:a16="http://schemas.microsoft.com/office/drawing/2014/main" id="{4FD870C5-829E-4A4F-A766-6DCCD291B879}"/>
               </a:ext>
             </a:extLst>
           </p:cNvPr>
@@ -6053,7 +6139,7 @@
           <p:cNvPr id="23" name="">
             <a:extLst xmlns:a="http://schemas.openxmlformats.org/drawingml/2006/main">
               <a:ext uri="{FF2B5EF4-FFF2-40B4-BE49-F238E27FC236}">
-                <a16:creationId xmlns:a16="http://schemas.microsoft.com/office/drawing/2014/main" id="{530799A4-BADB-4FB7-9CF0-38AB8C694154}"/>
+                <a16:creationId xmlns:a16="http://schemas.microsoft.com/office/drawing/2014/main" id="{36A45901-F537-41B1-BA74-7809D85202A3}"/>
               </a:ext>
             </a:extLst>
           </p:cNvPr>
@@ -6111,7 +6197,7 @@
           <p:cNvPr id="24" name="">
             <a:extLst xmlns:a="http://schemas.openxmlformats.org/drawingml/2006/main">
               <a:ext uri="{FF2B5EF4-FFF2-40B4-BE49-F238E27FC236}">
-                <a16:creationId xmlns:a16="http://schemas.microsoft.com/office/drawing/2014/main" id="{A95F6932-4513-4EFA-B546-8F6B25F95E35}"/>
+                <a16:creationId xmlns:a16="http://schemas.microsoft.com/office/drawing/2014/main" id="{A60C100D-D39A-401D-8D74-0C2B87C91F2F}"/>
               </a:ext>
             </a:extLst>
           </p:cNvPr>
@@ -6144,7 +6230,7 @@
           <p:cNvPr id="25" name="">
             <a:extLst xmlns:a="http://schemas.openxmlformats.org/drawingml/2006/main">
               <a:ext uri="{FF2B5EF4-FFF2-40B4-BE49-F238E27FC236}">
-                <a16:creationId xmlns:a16="http://schemas.microsoft.com/office/drawing/2014/main" id="{81CD32D9-2B39-4FEE-B9D6-E4BA29665361}"/>
+                <a16:creationId xmlns:a16="http://schemas.microsoft.com/office/drawing/2014/main" id="{400A2019-7BDB-4D80-A466-4AFE36C16BE3}"/>
               </a:ext>
             </a:extLst>
           </p:cNvPr>
@@ -6202,7 +6288,7 @@
           <p:cNvPr id="26" name="">
             <a:extLst xmlns:a="http://schemas.openxmlformats.org/drawingml/2006/main">
               <a:ext uri="{FF2B5EF4-FFF2-40B4-BE49-F238E27FC236}">
-                <a16:creationId xmlns:a16="http://schemas.microsoft.com/office/drawing/2014/main" id="{6B712C53-C4AE-4FA3-B0C1-D126C76351D2}"/>
+                <a16:creationId xmlns:a16="http://schemas.microsoft.com/office/drawing/2014/main" id="{8EC56260-D661-4908-992B-ADA44AF67A5F}"/>
               </a:ext>
             </a:extLst>
           </p:cNvPr>
@@ -6235,7 +6321,7 @@
           <p:cNvPr id="27" name="">
             <a:extLst xmlns:a="http://schemas.openxmlformats.org/drawingml/2006/main">
               <a:ext uri="{FF2B5EF4-FFF2-40B4-BE49-F238E27FC236}">
-                <a16:creationId xmlns:a16="http://schemas.microsoft.com/office/drawing/2014/main" id="{337273A7-A5BB-422D-A3B4-B7B5D6F23583}"/>
+                <a16:creationId xmlns:a16="http://schemas.microsoft.com/office/drawing/2014/main" id="{7F75C625-0D7A-40C0-A749-1F1798362815}"/>
               </a:ext>
             </a:extLst>
           </p:cNvPr>
@@ -6293,7 +6379,7 @@
           <p:cNvPr id="28" name="">
             <a:extLst xmlns:a="http://schemas.openxmlformats.org/drawingml/2006/main">
               <a:ext uri="{FF2B5EF4-FFF2-40B4-BE49-F238E27FC236}">
-                <a16:creationId xmlns:a16="http://schemas.microsoft.com/office/drawing/2014/main" id="{A09FBEED-8BD0-4CCF-B614-E9B41185130F}"/>
+                <a16:creationId xmlns:a16="http://schemas.microsoft.com/office/drawing/2014/main" id="{8F87B215-A5C8-4CAB-8F58-0170061453D6}"/>
               </a:ext>
             </a:extLst>
           </p:cNvPr>
@@ -6326,7 +6412,7 @@
           <p:cNvPr id="29" name="">
             <a:extLst xmlns:a="http://schemas.openxmlformats.org/drawingml/2006/main">
               <a:ext uri="{FF2B5EF4-FFF2-40B4-BE49-F238E27FC236}">
-                <a16:creationId xmlns:a16="http://schemas.microsoft.com/office/drawing/2014/main" id="{8FC828C2-CB2C-4017-8BE2-AF44B701D571}"/>
+                <a16:creationId xmlns:a16="http://schemas.microsoft.com/office/drawing/2014/main" id="{21A1CED2-D1B0-4C66-92D3-100AC8DBB347}"/>
               </a:ext>
             </a:extLst>
           </p:cNvPr>
@@ -6384,7 +6470,7 @@
           <p:cNvPr id="30" name="">
             <a:extLst xmlns:a="http://schemas.openxmlformats.org/drawingml/2006/main">
               <a:ext uri="{FF2B5EF4-FFF2-40B4-BE49-F238E27FC236}">
-                <a16:creationId xmlns:a16="http://schemas.microsoft.com/office/drawing/2014/main" id="{A4D10A26-EC41-46B1-AB35-E942CF60972C}"/>
+                <a16:creationId xmlns:a16="http://schemas.microsoft.com/office/drawing/2014/main" id="{B43B4F64-3B2C-4ABE-B3E0-F7607CE95D1C}"/>
               </a:ext>
             </a:extLst>
           </p:cNvPr>
@@ -6417,7 +6503,7 @@
           <p:cNvPr id="31" name="">
             <a:extLst xmlns:a="http://schemas.openxmlformats.org/drawingml/2006/main">
               <a:ext uri="{FF2B5EF4-FFF2-40B4-BE49-F238E27FC236}">
-                <a16:creationId xmlns:a16="http://schemas.microsoft.com/office/drawing/2014/main" id="{9986EA81-D48A-4388-8DA5-475CC0CC610D}"/>
+                <a16:creationId xmlns:a16="http://schemas.microsoft.com/office/drawing/2014/main" id="{DA6FF685-16AD-4470-8CC3-BA16401AC7E5}"/>
               </a:ext>
             </a:extLst>
           </p:cNvPr>
@@ -6475,7 +6561,7 @@
           <p:cNvPr id="32" name="">
             <a:extLst xmlns:a="http://schemas.openxmlformats.org/drawingml/2006/main">
               <a:ext uri="{FF2B5EF4-FFF2-40B4-BE49-F238E27FC236}">
-                <a16:creationId xmlns:a16="http://schemas.microsoft.com/office/drawing/2014/main" id="{EA939579-F558-4185-B95D-BDFF94179C56}"/>
+                <a16:creationId xmlns:a16="http://schemas.microsoft.com/office/drawing/2014/main" id="{C78EC1CD-10AA-475E-889F-72837B562AAE}"/>
               </a:ext>
             </a:extLst>
           </p:cNvPr>
@@ -6508,7 +6594,7 @@
           <p:cNvPr id="33" name="">
             <a:extLst xmlns:a="http://schemas.openxmlformats.org/drawingml/2006/main">
               <a:ext uri="{FF2B5EF4-FFF2-40B4-BE49-F238E27FC236}">
-                <a16:creationId xmlns:a16="http://schemas.microsoft.com/office/drawing/2014/main" id="{F1674153-33C8-4F7D-80F1-CE84D7C7133A}"/>
+                <a16:creationId xmlns:a16="http://schemas.microsoft.com/office/drawing/2014/main" id="{733C1A63-BE6E-4214-BDB3-1B7B452C5AF3}"/>
               </a:ext>
             </a:extLst>
           </p:cNvPr>
@@ -6566,7 +6652,7 @@
           <p:cNvPr id="34" name="">
             <a:extLst xmlns:a="http://schemas.openxmlformats.org/drawingml/2006/main">
               <a:ext uri="{FF2B5EF4-FFF2-40B4-BE49-F238E27FC236}">
-                <a16:creationId xmlns:a16="http://schemas.microsoft.com/office/drawing/2014/main" id="{1216B0C9-2BC8-46B9-B5B8-04B8D97A0592}"/>
+                <a16:creationId xmlns:a16="http://schemas.microsoft.com/office/drawing/2014/main" id="{63BB4A58-29A1-403A-92B2-D9D523320339}"/>
               </a:ext>
             </a:extLst>
           </p:cNvPr>
@@ -6599,7 +6685,7 @@
           <p:cNvPr id="35" name="">
             <a:extLst xmlns:a="http://schemas.openxmlformats.org/drawingml/2006/main">
               <a:ext uri="{FF2B5EF4-FFF2-40B4-BE49-F238E27FC236}">
-                <a16:creationId xmlns:a16="http://schemas.microsoft.com/office/drawing/2014/main" id="{E219F56E-080D-4160-B16F-37225B8D3F9C}"/>
+                <a16:creationId xmlns:a16="http://schemas.microsoft.com/office/drawing/2014/main" id="{6E270FCB-5F4C-4B86-B039-5CD2348A6782}"/>
               </a:ext>
             </a:extLst>
           </p:cNvPr>
@@ -6657,7 +6743,7 @@
           <p:cNvPr id="36" name="">
             <a:extLst xmlns:a="http://schemas.openxmlformats.org/drawingml/2006/main">
               <a:ext uri="{FF2B5EF4-FFF2-40B4-BE49-F238E27FC236}">
-                <a16:creationId xmlns:a16="http://schemas.microsoft.com/office/drawing/2014/main" id="{587E0335-EA9C-46A7-8C2F-9DE587F8B12D}"/>
+                <a16:creationId xmlns:a16="http://schemas.microsoft.com/office/drawing/2014/main" id="{B1975A35-3272-4909-97F3-DDBC206132E5}"/>
               </a:ext>
             </a:extLst>
           </p:cNvPr>
@@ -6690,7 +6776,7 @@
           <p:cNvPr id="37" name="">
             <a:extLst xmlns:a="http://schemas.openxmlformats.org/drawingml/2006/main">
               <a:ext uri="{FF2B5EF4-FFF2-40B4-BE49-F238E27FC236}">
-                <a16:creationId xmlns:a16="http://schemas.microsoft.com/office/drawing/2014/main" id="{47492C0F-98DE-4A40-9A30-7A2EF73F9E7C}"/>
+                <a16:creationId xmlns:a16="http://schemas.microsoft.com/office/drawing/2014/main" id="{6E1FB142-8217-4B31-801D-35539332CCE1}"/>
               </a:ext>
             </a:extLst>
           </p:cNvPr>
@@ -6748,7 +6834,7 @@
           <p:cNvPr id="38" name="">
             <a:extLst xmlns:a="http://schemas.openxmlformats.org/drawingml/2006/main">
               <a:ext uri="{FF2B5EF4-FFF2-40B4-BE49-F238E27FC236}">
-                <a16:creationId xmlns:a16="http://schemas.microsoft.com/office/drawing/2014/main" id="{897966C1-6412-44B6-9937-1B69EBF4E149}"/>
+                <a16:creationId xmlns:a16="http://schemas.microsoft.com/office/drawing/2014/main" id="{DE8A438C-D1EB-42ED-B77F-E98831B2BB30}"/>
               </a:ext>
             </a:extLst>
           </p:cNvPr>
@@ -6781,7 +6867,7 @@
           <p:cNvPr id="39" name="">
             <a:extLst xmlns:a="http://schemas.openxmlformats.org/drawingml/2006/main">
               <a:ext uri="{FF2B5EF4-FFF2-40B4-BE49-F238E27FC236}">
-                <a16:creationId xmlns:a16="http://schemas.microsoft.com/office/drawing/2014/main" id="{DF370C23-F9B7-4C1B-B883-EC69EF5A4396}"/>
+                <a16:creationId xmlns:a16="http://schemas.microsoft.com/office/drawing/2014/main" id="{9223418B-3879-4BD2-889E-A50FBA80B156}"/>
               </a:ext>
             </a:extLst>
           </p:cNvPr>
@@ -6839,7 +6925,7 @@
           <p:cNvPr id="40" name="">
             <a:extLst xmlns:a="http://schemas.openxmlformats.org/drawingml/2006/main">
               <a:ext uri="{FF2B5EF4-FFF2-40B4-BE49-F238E27FC236}">
-                <a16:creationId xmlns:a16="http://schemas.microsoft.com/office/drawing/2014/main" id="{645725EE-96E0-4424-9E0A-5D3A0A7B03CE}"/>
+                <a16:creationId xmlns:a16="http://schemas.microsoft.com/office/drawing/2014/main" id="{B973E239-72B7-41B5-A137-A3A67100666E}"/>
               </a:ext>
             </a:extLst>
           </p:cNvPr>
@@ -6872,7 +6958,7 @@
           <p:cNvPr id="41" name="">
             <a:extLst xmlns:a="http://schemas.openxmlformats.org/drawingml/2006/main">
               <a:ext uri="{FF2B5EF4-FFF2-40B4-BE49-F238E27FC236}">
-                <a16:creationId xmlns:a16="http://schemas.microsoft.com/office/drawing/2014/main" id="{2C2649ED-EB52-4242-BC35-81EAF5F194F1}"/>
+                <a16:creationId xmlns:a16="http://schemas.microsoft.com/office/drawing/2014/main" id="{42D25BA8-220E-4604-99BA-A562F87DB712}"/>
               </a:ext>
             </a:extLst>
           </p:cNvPr>
@@ -6930,7 +7016,7 @@
           <p:cNvPr id="42" name="">
             <a:extLst xmlns:a="http://schemas.openxmlformats.org/drawingml/2006/main">
               <a:ext uri="{FF2B5EF4-FFF2-40B4-BE49-F238E27FC236}">
-                <a16:creationId xmlns:a16="http://schemas.microsoft.com/office/drawing/2014/main" id="{F9754C9C-5BE3-4EDC-A19D-88DF4548B9FC}"/>
+                <a16:creationId xmlns:a16="http://schemas.microsoft.com/office/drawing/2014/main" id="{6A0CF4AB-BD33-4D8F-A274-ABAE1DEAF535}"/>
               </a:ext>
             </a:extLst>
           </p:cNvPr>
@@ -6963,7 +7049,7 @@
           <p:cNvPr id="43" name="">
             <a:extLst xmlns:a="http://schemas.openxmlformats.org/drawingml/2006/main">
               <a:ext uri="{FF2B5EF4-FFF2-40B4-BE49-F238E27FC236}">
-                <a16:creationId xmlns:a16="http://schemas.microsoft.com/office/drawing/2014/main" id="{CC873451-F440-4553-9AE8-422F57394F0D}"/>
+                <a16:creationId xmlns:a16="http://schemas.microsoft.com/office/drawing/2014/main" id="{96CEF883-456D-463D-821C-97EA7C78510E}"/>
               </a:ext>
             </a:extLst>
           </p:cNvPr>
@@ -7021,7 +7107,7 @@
           <p:cNvPr id="44" name="">
             <a:extLst xmlns:a="http://schemas.openxmlformats.org/drawingml/2006/main">
               <a:ext uri="{FF2B5EF4-FFF2-40B4-BE49-F238E27FC236}">
-                <a16:creationId xmlns:a16="http://schemas.microsoft.com/office/drawing/2014/main" id="{60D6D5AE-AA61-4E2B-B5B1-D5C2C32AC2B7}"/>
+                <a16:creationId xmlns:a16="http://schemas.microsoft.com/office/drawing/2014/main" id="{703683A3-842F-4A0E-A8BC-3E8D8A910CC9}"/>
               </a:ext>
             </a:extLst>
           </p:cNvPr>
@@ -7054,7 +7140,7 @@
           <p:cNvPr id="45" name="">
             <a:extLst xmlns:a="http://schemas.openxmlformats.org/drawingml/2006/main">
               <a:ext uri="{FF2B5EF4-FFF2-40B4-BE49-F238E27FC236}">
-                <a16:creationId xmlns:a16="http://schemas.microsoft.com/office/drawing/2014/main" id="{6AA15515-86C8-4A4A-8344-4BB33409B7A9}"/>
+                <a16:creationId xmlns:a16="http://schemas.microsoft.com/office/drawing/2014/main" id="{7A3CD591-2CAA-45E8-BCEA-7E88455C6D5C}"/>
               </a:ext>
             </a:extLst>
           </p:cNvPr>
@@ -7112,7 +7198,7 @@
           <p:cNvPr id="46" name="">
             <a:extLst xmlns:a="http://schemas.openxmlformats.org/drawingml/2006/main">
               <a:ext uri="{FF2B5EF4-FFF2-40B4-BE49-F238E27FC236}">
-                <a16:creationId xmlns:a16="http://schemas.microsoft.com/office/drawing/2014/main" id="{97CA90D5-2013-44ED-B048-01C07A82B2AF}"/>
+                <a16:creationId xmlns:a16="http://schemas.microsoft.com/office/drawing/2014/main" id="{EBA922B0-9211-46AA-86B1-2105BD7B8E34}"/>
               </a:ext>
             </a:extLst>
           </p:cNvPr>
@@ -7145,7 +7231,7 @@
           <p:cNvPr id="47" name="">
             <a:extLst xmlns:a="http://schemas.openxmlformats.org/drawingml/2006/main">
               <a:ext uri="{FF2B5EF4-FFF2-40B4-BE49-F238E27FC236}">
-                <a16:creationId xmlns:a16="http://schemas.microsoft.com/office/drawing/2014/main" id="{4F7682F4-45C7-4C16-818F-9BAB11E3550B}"/>
+                <a16:creationId xmlns:a16="http://schemas.microsoft.com/office/drawing/2014/main" id="{30B93CE2-C493-461A-8004-38B54D23F360}"/>
               </a:ext>
             </a:extLst>
           </p:cNvPr>
@@ -7203,7 +7289,7 @@
           <p:cNvPr id="48" name="">
             <a:extLst xmlns:a="http://schemas.openxmlformats.org/drawingml/2006/main">
               <a:ext uri="{FF2B5EF4-FFF2-40B4-BE49-F238E27FC236}">
-                <a16:creationId xmlns:a16="http://schemas.microsoft.com/office/drawing/2014/main" id="{116D066A-34CE-4DAB-A8E2-CF3DD2A9A861}"/>
+                <a16:creationId xmlns:a16="http://schemas.microsoft.com/office/drawing/2014/main" id="{209BF699-1A1F-4A20-88A4-C9107AC213F4}"/>
               </a:ext>
             </a:extLst>
           </p:cNvPr>
@@ -7236,7 +7322,7 @@
           <p:cNvPr id="49" name="">
             <a:extLst xmlns:a="http://schemas.openxmlformats.org/drawingml/2006/main">
               <a:ext uri="{FF2B5EF4-FFF2-40B4-BE49-F238E27FC236}">
-                <a16:creationId xmlns:a16="http://schemas.microsoft.com/office/drawing/2014/main" id="{7B61FE29-9929-4B7E-B621-0287AA8536AA}"/>
+                <a16:creationId xmlns:a16="http://schemas.microsoft.com/office/drawing/2014/main" id="{98423911-E0C8-42CB-BC52-6030FD1DC16C}"/>
               </a:ext>
             </a:extLst>
           </p:cNvPr>
@@ -7294,7 +7380,7 @@
           <p:cNvPr id="50" name="">
             <a:extLst xmlns:a="http://schemas.openxmlformats.org/drawingml/2006/main">
               <a:ext uri="{FF2B5EF4-FFF2-40B4-BE49-F238E27FC236}">
-                <a16:creationId xmlns:a16="http://schemas.microsoft.com/office/drawing/2014/main" id="{F33D6EC7-6D1F-4FF7-BD78-1D200E2F4DEF}"/>
+                <a16:creationId xmlns:a16="http://schemas.microsoft.com/office/drawing/2014/main" id="{5545E614-E98E-49F3-B093-33F6827027D5}"/>
               </a:ext>
             </a:extLst>
           </p:cNvPr>
@@ -7327,7 +7413,7 @@
           <p:cNvPr id="51" name="">
             <a:extLst xmlns:a="http://schemas.openxmlformats.org/drawingml/2006/main">
               <a:ext uri="{FF2B5EF4-FFF2-40B4-BE49-F238E27FC236}">
-                <a16:creationId xmlns:a16="http://schemas.microsoft.com/office/drawing/2014/main" id="{4B908F71-C81F-4693-BF85-86278BDABC30}"/>
+                <a16:creationId xmlns:a16="http://schemas.microsoft.com/office/drawing/2014/main" id="{AD2C9E3F-DE8E-4060-87E2-7478934A3372}"/>
               </a:ext>
             </a:extLst>
           </p:cNvPr>
@@ -7385,7 +7471,7 @@
           <p:cNvPr id="52" name="">
             <a:extLst xmlns:a="http://schemas.openxmlformats.org/drawingml/2006/main">
               <a:ext uri="{FF2B5EF4-FFF2-40B4-BE49-F238E27FC236}">
-                <a16:creationId xmlns:a16="http://schemas.microsoft.com/office/drawing/2014/main" id="{6B1AE256-A566-43AD-9C4E-ABB40F182716}"/>
+                <a16:creationId xmlns:a16="http://schemas.microsoft.com/office/drawing/2014/main" id="{411B1878-3B6F-4297-856C-5CFD2F71DB39}"/>
               </a:ext>
             </a:extLst>
           </p:cNvPr>
@@ -7418,7 +7504,7 @@
           <p:cNvPr id="53" name="">
             <a:extLst xmlns:a="http://schemas.openxmlformats.org/drawingml/2006/main">
               <a:ext uri="{FF2B5EF4-FFF2-40B4-BE49-F238E27FC236}">
-                <a16:creationId xmlns:a16="http://schemas.microsoft.com/office/drawing/2014/main" id="{247507C8-CA56-4E52-A0A0-9CC1D2844100}"/>
+                <a16:creationId xmlns:a16="http://schemas.microsoft.com/office/drawing/2014/main" id="{55B07497-2AB5-496F-8C48-1C3C7E884993}"/>
               </a:ext>
             </a:extLst>
           </p:cNvPr>
@@ -7476,7 +7562,7 @@
           <p:cNvPr id="54" name="">
             <a:extLst xmlns:a="http://schemas.openxmlformats.org/drawingml/2006/main">
               <a:ext uri="{FF2B5EF4-FFF2-40B4-BE49-F238E27FC236}">
-                <a16:creationId xmlns:a16="http://schemas.microsoft.com/office/drawing/2014/main" id="{B4904E2A-494B-4DB1-9640-8054BD8C1EF2}"/>
+                <a16:creationId xmlns:a16="http://schemas.microsoft.com/office/drawing/2014/main" id="{1851116E-2EB8-444B-8AF0-C477150AE98F}"/>
               </a:ext>
             </a:extLst>
           </p:cNvPr>
@@ -7509,7 +7595,7 @@
           <p:cNvPr id="55" name="">
             <a:extLst xmlns:a="http://schemas.openxmlformats.org/drawingml/2006/main">
               <a:ext uri="{FF2B5EF4-FFF2-40B4-BE49-F238E27FC236}">
-                <a16:creationId xmlns:a16="http://schemas.microsoft.com/office/drawing/2014/main" id="{55B0157D-7311-44E4-ADE5-29FD460F6B74}"/>
+                <a16:creationId xmlns:a16="http://schemas.microsoft.com/office/drawing/2014/main" id="{C4950028-4D76-40E6-89F4-BB4E1365FC2E}"/>
               </a:ext>
             </a:extLst>
           </p:cNvPr>
@@ -7567,7 +7653,7 @@
           <p:cNvPr id="56" name="">
             <a:extLst xmlns:a="http://schemas.openxmlformats.org/drawingml/2006/main">
               <a:ext uri="{FF2B5EF4-FFF2-40B4-BE49-F238E27FC236}">
-                <a16:creationId xmlns:a16="http://schemas.microsoft.com/office/drawing/2014/main" id="{D14F220F-27BD-4CB8-849E-8960DA1C0A9F}"/>
+                <a16:creationId xmlns:a16="http://schemas.microsoft.com/office/drawing/2014/main" id="{B4E48764-B2E8-4670-9297-0A4CAB6C0816}"/>
               </a:ext>
             </a:extLst>
           </p:cNvPr>
@@ -7600,7 +7686,7 @@
           <p:cNvPr id="57" name="">
             <a:extLst xmlns:a="http://schemas.openxmlformats.org/drawingml/2006/main">
               <a:ext uri="{FF2B5EF4-FFF2-40B4-BE49-F238E27FC236}">
-                <a16:creationId xmlns:a16="http://schemas.microsoft.com/office/drawing/2014/main" id="{0DC4B07C-E897-44FB-A5A3-3D5BB7C2899B}"/>
+                <a16:creationId xmlns:a16="http://schemas.microsoft.com/office/drawing/2014/main" id="{31D67D8F-A82F-4A52-BA6E-554336DECECE}"/>
               </a:ext>
             </a:extLst>
           </p:cNvPr>
@@ -7658,7 +7744,7 @@
           <p:cNvPr id="58" name="">
             <a:extLst xmlns:a="http://schemas.openxmlformats.org/drawingml/2006/main">
               <a:ext uri="{FF2B5EF4-FFF2-40B4-BE49-F238E27FC236}">
-                <a16:creationId xmlns:a16="http://schemas.microsoft.com/office/drawing/2014/main" id="{C6F579D7-4093-436B-A994-7C3FEF2E2E77}"/>
+                <a16:creationId xmlns:a16="http://schemas.microsoft.com/office/drawing/2014/main" id="{CE4F9A72-62A2-4D00-8F71-6D31B6AAB6EC}"/>
               </a:ext>
             </a:extLst>
           </p:cNvPr>
@@ -7691,7 +7777,7 @@
           <p:cNvPr id="59" name="">
             <a:extLst xmlns:a="http://schemas.openxmlformats.org/drawingml/2006/main">
               <a:ext uri="{FF2B5EF4-FFF2-40B4-BE49-F238E27FC236}">
-                <a16:creationId xmlns:a16="http://schemas.microsoft.com/office/drawing/2014/main" id="{BA60BF1B-5EBA-4333-AE4B-248DCEDA23B9}"/>
+                <a16:creationId xmlns:a16="http://schemas.microsoft.com/office/drawing/2014/main" id="{C3614A89-F612-4ADB-97DF-8304BD3FC91A}"/>
               </a:ext>
             </a:extLst>
           </p:cNvPr>
@@ -7749,7 +7835,7 @@
           <p:cNvPr id="60" name="">
             <a:extLst xmlns:a="http://schemas.openxmlformats.org/drawingml/2006/main">
               <a:ext uri="{FF2B5EF4-FFF2-40B4-BE49-F238E27FC236}">
-                <a16:creationId xmlns:a16="http://schemas.microsoft.com/office/drawing/2014/main" id="{F0B9A89C-DACC-4187-B934-A1AFFCE68AA1}"/>
+                <a16:creationId xmlns:a16="http://schemas.microsoft.com/office/drawing/2014/main" id="{DDBD8B46-8DDD-4C47-8524-35F54EBCE6BA}"/>
               </a:ext>
             </a:extLst>
           </p:cNvPr>
@@ -7782,7 +7868,7 @@
           <p:cNvPr id="61" name="">
             <a:extLst xmlns:a="http://schemas.openxmlformats.org/drawingml/2006/main">
               <a:ext uri="{FF2B5EF4-FFF2-40B4-BE49-F238E27FC236}">
-                <a16:creationId xmlns:a16="http://schemas.microsoft.com/office/drawing/2014/main" id="{9875EDCC-D468-4773-9A16-A3D5C192E074}"/>
+                <a16:creationId xmlns:a16="http://schemas.microsoft.com/office/drawing/2014/main" id="{CFECD5CC-C53D-4D39-91FE-886EEA74E754}"/>
               </a:ext>
             </a:extLst>
           </p:cNvPr>
@@ -7840,7 +7926,7 @@
           <p:cNvPr id="62" name="">
             <a:extLst xmlns:a="http://schemas.openxmlformats.org/drawingml/2006/main">
               <a:ext uri="{FF2B5EF4-FFF2-40B4-BE49-F238E27FC236}">
-                <a16:creationId xmlns:a16="http://schemas.microsoft.com/office/drawing/2014/main" id="{AA855B29-CEEA-4EBD-A580-422A10D62DC0}"/>
+                <a16:creationId xmlns:a16="http://schemas.microsoft.com/office/drawing/2014/main" id="{60A7C040-74E3-4994-9035-C894FDB8B4D9}"/>
               </a:ext>
             </a:extLst>
           </p:cNvPr>
@@ -7898,7 +7984,7 @@
           <p:cNvPr id="63" name="">
             <a:extLst xmlns:a="http://schemas.openxmlformats.org/drawingml/2006/main">
               <a:ext uri="{FF2B5EF4-FFF2-40B4-BE49-F238E27FC236}">
-                <a16:creationId xmlns:a16="http://schemas.microsoft.com/office/drawing/2014/main" id="{18E4E5A9-B91E-4035-9EA8-EE3B0FA84461}"/>
+                <a16:creationId xmlns:a16="http://schemas.microsoft.com/office/drawing/2014/main" id="{7260B585-51DC-4194-A695-01CAA1FCB0AC}"/>
               </a:ext>
             </a:extLst>
           </p:cNvPr>
@@ -7931,7 +8017,7 @@
           <p:cNvPr id="64" name="">
             <a:extLst xmlns:a="http://schemas.openxmlformats.org/drawingml/2006/main">
               <a:ext uri="{FF2B5EF4-FFF2-40B4-BE49-F238E27FC236}">
-                <a16:creationId xmlns:a16="http://schemas.microsoft.com/office/drawing/2014/main" id="{2DEEF940-E1E5-4438-A306-5C38850EEAB9}"/>
+                <a16:creationId xmlns:a16="http://schemas.microsoft.com/office/drawing/2014/main" id="{EBF5E6CA-4E63-4D28-A47F-C6AF298D2BFC}"/>
               </a:ext>
             </a:extLst>
           </p:cNvPr>
@@ -7989,7 +8075,7 @@
           <p:cNvPr id="65" name="">
             <a:extLst xmlns:a="http://schemas.openxmlformats.org/drawingml/2006/main">
               <a:ext uri="{FF2B5EF4-FFF2-40B4-BE49-F238E27FC236}">
-                <a16:creationId xmlns:a16="http://schemas.microsoft.com/office/drawing/2014/main" id="{0C9F093A-772C-42E9-857B-D093066087CF}"/>
+                <a16:creationId xmlns:a16="http://schemas.microsoft.com/office/drawing/2014/main" id="{69D2B046-00C0-4B4E-AD9A-522CF4FF4C20}"/>
               </a:ext>
             </a:extLst>
           </p:cNvPr>
@@ -8045,7 +8131,7 @@
     </p:spTree>
     <p:extLst>
       <p:ext uri="{BB962C8B-B14F-4D97-AF65-F5344CB8AC3E}">
-        <p14:creationId xmlns:p14="http://schemas.microsoft.com/office/powerpoint/2010/main" val="474909856"/>
+        <p14:creationId xmlns:p14="http://schemas.microsoft.com/office/powerpoint/2010/main" val="277665406"/>
       </p:ext>
     </p:extLst>
   </p:cSld>
@@ -8076,7 +8162,7 @@
           <p:cNvPr id="18" name="">
             <a:extLst xmlns:a="http://schemas.openxmlformats.org/drawingml/2006/main">
               <a:ext uri="{FF2B5EF4-FFF2-40B4-BE49-F238E27FC236}">
-                <a16:creationId xmlns:a16="http://schemas.microsoft.com/office/drawing/2014/main" id="{5A8D6F55-BA05-455E-8530-03684EE47BB3}"/>
+                <a16:creationId xmlns:a16="http://schemas.microsoft.com/office/drawing/2014/main" id="{B2D49EAE-7B57-4A09-A8A5-55BF08027FA2}"/>
               </a:ext>
             </a:extLst>
           </p:cNvPr>
@@ -8134,7 +8220,7 @@
           <p:cNvPr id="2" name="">
             <a:extLst xmlns:a="http://schemas.openxmlformats.org/drawingml/2006/main">
               <a:ext uri="{FF2B5EF4-FFF2-40B4-BE49-F238E27FC236}">
-                <a16:creationId xmlns:a16="http://schemas.microsoft.com/office/drawing/2014/main" id="{7BBEAD07-7840-4B20-B74C-B8EB1844DD6D}"/>
+                <a16:creationId xmlns:a16="http://schemas.microsoft.com/office/drawing/2014/main" id="{191BA9F4-D58A-42D9-9724-617FAF9CBB6F}"/>
               </a:ext>
             </a:extLst>
           </p:cNvPr>
@@ -8192,7 +8278,7 @@
           <p:cNvPr id="3" name="">
             <a:extLst xmlns:a="http://schemas.openxmlformats.org/drawingml/2006/main">
               <a:ext uri="{FF2B5EF4-FFF2-40B4-BE49-F238E27FC236}">
-                <a16:creationId xmlns:a16="http://schemas.microsoft.com/office/drawing/2014/main" id="{E795352A-E5E9-4D25-8C0F-00C08F136901}"/>
+                <a16:creationId xmlns:a16="http://schemas.microsoft.com/office/drawing/2014/main" id="{CCEF4483-CA9D-46F6-BC49-AC04FE6CC863}"/>
               </a:ext>
             </a:extLst>
           </p:cNvPr>
@@ -8225,7 +8311,7 @@
           <p:cNvPr id="4" name="">
             <a:extLst xmlns:a="http://schemas.openxmlformats.org/drawingml/2006/main">
               <a:ext uri="{FF2B5EF4-FFF2-40B4-BE49-F238E27FC236}">
-                <a16:creationId xmlns:a16="http://schemas.microsoft.com/office/drawing/2014/main" id="{8EFFDF69-788B-4D1A-9E75-A44D0E862079}"/>
+                <a16:creationId xmlns:a16="http://schemas.microsoft.com/office/drawing/2014/main" id="{A8685443-0175-4BFA-83E1-0A3BD73CCB83}"/>
               </a:ext>
             </a:extLst>
           </p:cNvPr>
@@ -8287,7 +8373,7 @@
           <p:nvPr/>
         </p:nvPicPr>
         <p:blipFill>
-          <a:blip xmlns:r="http://schemas.openxmlformats.org/officeDocument/2006/relationships" xmlns:a="http://schemas.openxmlformats.org/drawingml/2006/main" r:embed="R61d777150adb45e1"/>
+          <a:blip xmlns:r="http://schemas.openxmlformats.org/officeDocument/2006/relationships" xmlns:a="http://schemas.openxmlformats.org/drawingml/2006/main" r:embed="R869b5a1cce20444a"/>
           <a:stretch xmlns:a="http://schemas.openxmlformats.org/drawingml/2006/main"/>
         </p:blipFill>
         <p:spPr>
@@ -8311,7 +8397,7 @@
           <p:nvPr/>
         </p:nvPicPr>
         <p:blipFill>
-          <a:blip xmlns:r="http://schemas.openxmlformats.org/officeDocument/2006/relationships" xmlns:a="http://schemas.openxmlformats.org/drawingml/2006/main" r:embed="R0526418bd7e948a1"/>
+          <a:blip xmlns:r="http://schemas.openxmlformats.org/officeDocument/2006/relationships" xmlns:a="http://schemas.openxmlformats.org/drawingml/2006/main" r:embed="R394235ebbdcd4b8c"/>
           <a:stretch xmlns:a="http://schemas.openxmlformats.org/drawingml/2006/main"/>
         </p:blipFill>
         <p:spPr>
@@ -8331,7 +8417,7 @@
           <p:cNvPr id="7" name="">
             <a:extLst xmlns:a="http://schemas.openxmlformats.org/drawingml/2006/main">
               <a:ext uri="{FF2B5EF4-FFF2-40B4-BE49-F238E27FC236}">
-                <a16:creationId xmlns:a16="http://schemas.microsoft.com/office/drawing/2014/main" id="{83A72E88-20B2-429B-9516-746626DAF387}"/>
+                <a16:creationId xmlns:a16="http://schemas.microsoft.com/office/drawing/2014/main" id="{E81AE044-EC82-454A-96F8-DE2FD720EF42}"/>
               </a:ext>
             </a:extLst>
           </p:cNvPr>
@@ -8389,7 +8475,7 @@
           <p:cNvPr id="8" name="">
             <a:extLst xmlns:a="http://schemas.openxmlformats.org/drawingml/2006/main">
               <a:ext uri="{FF2B5EF4-FFF2-40B4-BE49-F238E27FC236}">
-                <a16:creationId xmlns:a16="http://schemas.microsoft.com/office/drawing/2014/main" id="{DCB57C74-5AF1-4D09-9DD8-67B2560DE0FC}"/>
+                <a16:creationId xmlns:a16="http://schemas.microsoft.com/office/drawing/2014/main" id="{4C4DF5A6-4B9F-4597-A7CB-8E15581BEC2B}"/>
               </a:ext>
             </a:extLst>
           </p:cNvPr>
@@ -8447,7 +8533,7 @@
           <p:cNvPr id="9" name="">
             <a:extLst xmlns:a="http://schemas.openxmlformats.org/drawingml/2006/main">
               <a:ext uri="{FF2B5EF4-FFF2-40B4-BE49-F238E27FC236}">
-                <a16:creationId xmlns:a16="http://schemas.microsoft.com/office/drawing/2014/main" id="{AB513A9B-2414-42D4-BA37-E1328317D0CD}"/>
+                <a16:creationId xmlns:a16="http://schemas.microsoft.com/office/drawing/2014/main" id="{F3229367-8B8D-4A8B-98C9-F500C40B82ED}"/>
               </a:ext>
             </a:extLst>
           </p:cNvPr>
@@ -8480,7 +8566,7 @@
           <p:cNvPr id="10" name="">
             <a:extLst xmlns:a="http://schemas.openxmlformats.org/drawingml/2006/main">
               <a:ext uri="{FF2B5EF4-FFF2-40B4-BE49-F238E27FC236}">
-                <a16:creationId xmlns:a16="http://schemas.microsoft.com/office/drawing/2014/main" id="{512B0578-AEC3-4142-9DB6-16E1BD87E9A7}"/>
+                <a16:creationId xmlns:a16="http://schemas.microsoft.com/office/drawing/2014/main" id="{A7B70D2C-F61C-4592-941F-CA3D82535B05}"/>
               </a:ext>
             </a:extLst>
           </p:cNvPr>
@@ -8538,7 +8624,7 @@
           <p:cNvPr id="11" name="">
             <a:extLst xmlns:a="http://schemas.openxmlformats.org/drawingml/2006/main">
               <a:ext uri="{FF2B5EF4-FFF2-40B4-BE49-F238E27FC236}">
-                <a16:creationId xmlns:a16="http://schemas.microsoft.com/office/drawing/2014/main" id="{6940CC7E-F839-47AC-A9A4-B0933DB01466}"/>
+                <a16:creationId xmlns:a16="http://schemas.microsoft.com/office/drawing/2014/main" id="{D6C54B54-61B0-4B74-9028-2A3BD4157A14}"/>
               </a:ext>
             </a:extLst>
           </p:cNvPr>
@@ -8571,7 +8657,7 @@
           <p:cNvPr id="12" name="">
             <a:extLst xmlns:a="http://schemas.openxmlformats.org/drawingml/2006/main">
               <a:ext uri="{FF2B5EF4-FFF2-40B4-BE49-F238E27FC236}">
-                <a16:creationId xmlns:a16="http://schemas.microsoft.com/office/drawing/2014/main" id="{F668D6D7-0A18-4926-9E30-FAF7E7A47B36}"/>
+                <a16:creationId xmlns:a16="http://schemas.microsoft.com/office/drawing/2014/main" id="{93A3C31B-5BA5-4A75-B6A5-D885ADC8FB53}"/>
               </a:ext>
             </a:extLst>
           </p:cNvPr>
@@ -8629,7 +8715,7 @@
           <p:cNvPr id="13" name="">
             <a:extLst xmlns:a="http://schemas.openxmlformats.org/drawingml/2006/main">
               <a:ext uri="{FF2B5EF4-FFF2-40B4-BE49-F238E27FC236}">
-                <a16:creationId xmlns:a16="http://schemas.microsoft.com/office/drawing/2014/main" id="{BD06E7DF-2DEB-448F-BEC0-E681517F9EC5}"/>
+                <a16:creationId xmlns:a16="http://schemas.microsoft.com/office/drawing/2014/main" id="{A0308496-630E-44EA-B34D-D69D6D32E0F2}"/>
               </a:ext>
             </a:extLst>
           </p:cNvPr>
@@ -8662,7 +8748,7 @@
           <p:cNvPr id="14" name="">
             <a:extLst xmlns:a="http://schemas.openxmlformats.org/drawingml/2006/main">
               <a:ext uri="{FF2B5EF4-FFF2-40B4-BE49-F238E27FC236}">
-                <a16:creationId xmlns:a16="http://schemas.microsoft.com/office/drawing/2014/main" id="{6BCDA53A-ABF1-4903-9A7C-20444F0ABAA1}"/>
+                <a16:creationId xmlns:a16="http://schemas.microsoft.com/office/drawing/2014/main" id="{A0D6B24F-FE30-4269-B3F2-AA5EF15C1D9E}"/>
               </a:ext>
             </a:extLst>
           </p:cNvPr>
@@ -8720,7 +8806,7 @@
           <p:cNvPr id="15" name="">
             <a:extLst xmlns:a="http://schemas.openxmlformats.org/drawingml/2006/main">
               <a:ext uri="{FF2B5EF4-FFF2-40B4-BE49-F238E27FC236}">
-                <a16:creationId xmlns:a16="http://schemas.microsoft.com/office/drawing/2014/main" id="{58EEB4CB-44E6-45DB-A591-5EE2DA8EAA02}"/>
+                <a16:creationId xmlns:a16="http://schemas.microsoft.com/office/drawing/2014/main" id="{ADF8AD8D-E648-463D-B9FA-FB7842DE1C7B}"/>
               </a:ext>
             </a:extLst>
           </p:cNvPr>
@@ -8753,7 +8839,7 @@
           <p:cNvPr id="16" name="">
             <a:extLst xmlns:a="http://schemas.openxmlformats.org/drawingml/2006/main">
               <a:ext uri="{FF2B5EF4-FFF2-40B4-BE49-F238E27FC236}">
-                <a16:creationId xmlns:a16="http://schemas.microsoft.com/office/drawing/2014/main" id="{DFBCAA48-9D73-4A2D-AACA-005661F5F331}"/>
+                <a16:creationId xmlns:a16="http://schemas.microsoft.com/office/drawing/2014/main" id="{B6B84D79-E74A-474D-A178-E74CFD312856}"/>
               </a:ext>
             </a:extLst>
           </p:cNvPr>
@@ -8811,7 +8897,7 @@
           <p:cNvPr id="17" name="">
             <a:extLst xmlns:a="http://schemas.openxmlformats.org/drawingml/2006/main">
               <a:ext uri="{FF2B5EF4-FFF2-40B4-BE49-F238E27FC236}">
-                <a16:creationId xmlns:a16="http://schemas.microsoft.com/office/drawing/2014/main" id="{A8CB617B-8E87-4580-9A21-C16DFC8EDF40}"/>
+                <a16:creationId xmlns:a16="http://schemas.microsoft.com/office/drawing/2014/main" id="{F6F8B6F0-F513-4CFD-8F30-F4802662BC98}"/>
               </a:ext>
             </a:extLst>
           </p:cNvPr>
@@ -8867,7 +8953,7 @@
     </p:spTree>
     <p:extLst>
       <p:ext uri="{BB962C8B-B14F-4D97-AF65-F5344CB8AC3E}">
-        <p14:creationId xmlns:p14="http://schemas.microsoft.com/office/powerpoint/2010/main" val="121553118"/>
+        <p14:creationId xmlns:p14="http://schemas.microsoft.com/office/powerpoint/2010/main" val="1958536601"/>
       </p:ext>
     </p:extLst>
   </p:cSld>
@@ -8898,7 +8984,7 @@
           <p:cNvPr id="47" name="">
             <a:extLst xmlns:a="http://schemas.openxmlformats.org/drawingml/2006/main">
               <a:ext uri="{FF2B5EF4-FFF2-40B4-BE49-F238E27FC236}">
-                <a16:creationId xmlns:a16="http://schemas.microsoft.com/office/drawing/2014/main" id="{94B10499-036E-4926-AC7D-E64689FE78BC}"/>
+                <a16:creationId xmlns:a16="http://schemas.microsoft.com/office/drawing/2014/main" id="{49A97CF2-07B2-4445-BC36-7E24CBDB5AE1}"/>
               </a:ext>
             </a:extLst>
           </p:cNvPr>
@@ -8956,7 +9042,7 @@
           <p:cNvPr id="2" name="">
             <a:extLst xmlns:a="http://schemas.openxmlformats.org/drawingml/2006/main">
               <a:ext uri="{FF2B5EF4-FFF2-40B4-BE49-F238E27FC236}">
-                <a16:creationId xmlns:a16="http://schemas.microsoft.com/office/drawing/2014/main" id="{B7E2C11D-DC66-4971-BC3D-BA0DA5DC5A2B}"/>
+                <a16:creationId xmlns:a16="http://schemas.microsoft.com/office/drawing/2014/main" id="{D3DD2608-FF31-42F6-9E21-88FE901BF83C}"/>
               </a:ext>
             </a:extLst>
           </p:cNvPr>
@@ -9014,7 +9100,7 @@
           <p:cNvPr id="3" name="">
             <a:extLst xmlns:a="http://schemas.openxmlformats.org/drawingml/2006/main">
               <a:ext uri="{FF2B5EF4-FFF2-40B4-BE49-F238E27FC236}">
-                <a16:creationId xmlns:a16="http://schemas.microsoft.com/office/drawing/2014/main" id="{278A3C91-8950-4BB8-816D-1509DEEACACA}"/>
+                <a16:creationId xmlns:a16="http://schemas.microsoft.com/office/drawing/2014/main" id="{46D7ECDA-5248-494B-86D3-63ABB75BD927}"/>
               </a:ext>
             </a:extLst>
           </p:cNvPr>
@@ -9047,7 +9133,7 @@
           <p:cNvPr id="4" name="">
             <a:extLst xmlns:a="http://schemas.openxmlformats.org/drawingml/2006/main">
               <a:ext uri="{FF2B5EF4-FFF2-40B4-BE49-F238E27FC236}">
-                <a16:creationId xmlns:a16="http://schemas.microsoft.com/office/drawing/2014/main" id="{F88A61EF-B55C-4B0E-94D7-532FAD95CC4E}"/>
+                <a16:creationId xmlns:a16="http://schemas.microsoft.com/office/drawing/2014/main" id="{5821015F-5DBF-4132-AD0C-DA704B754D34}"/>
               </a:ext>
             </a:extLst>
           </p:cNvPr>
@@ -9105,7 +9191,7 @@
           <p:cNvPr id="5" name="">
             <a:extLst xmlns:a="http://schemas.openxmlformats.org/drawingml/2006/main">
               <a:ext uri="{FF2B5EF4-FFF2-40B4-BE49-F238E27FC236}">
-                <a16:creationId xmlns:a16="http://schemas.microsoft.com/office/drawing/2014/main" id="{E4026C9F-F495-4C13-944B-D1ECD9807FA5}"/>
+                <a16:creationId xmlns:a16="http://schemas.microsoft.com/office/drawing/2014/main" id="{50436A27-82C7-4EF8-A64F-6C07C42EAEE6}"/>
               </a:ext>
             </a:extLst>
           </p:cNvPr>
@@ -9138,7 +9224,7 @@
           <p:cNvPr id="6" name="">
             <a:extLst xmlns:a="http://schemas.openxmlformats.org/drawingml/2006/main">
               <a:ext uri="{FF2B5EF4-FFF2-40B4-BE49-F238E27FC236}">
-                <a16:creationId xmlns:a16="http://schemas.microsoft.com/office/drawing/2014/main" id="{0C2FCF14-535A-4D1F-962D-253E4B77A86D}"/>
+                <a16:creationId xmlns:a16="http://schemas.microsoft.com/office/drawing/2014/main" id="{7E142A55-3599-4D61-8AC5-228D1DC4AF6A}"/>
               </a:ext>
             </a:extLst>
           </p:cNvPr>
@@ -9196,7 +9282,7 @@
           <p:cNvPr id="7" name="">
             <a:extLst xmlns:a="http://schemas.openxmlformats.org/drawingml/2006/main">
               <a:ext uri="{FF2B5EF4-FFF2-40B4-BE49-F238E27FC236}">
-                <a16:creationId xmlns:a16="http://schemas.microsoft.com/office/drawing/2014/main" id="{2DD9B127-44E7-4D6B-A450-61A61FE93252}"/>
+                <a16:creationId xmlns:a16="http://schemas.microsoft.com/office/drawing/2014/main" id="{9C2695C0-42F8-40F3-B52E-7D88BB10C4A4}"/>
               </a:ext>
             </a:extLst>
           </p:cNvPr>
@@ -9229,7 +9315,7 @@
           <p:cNvPr id="8" name="">
             <a:extLst xmlns:a="http://schemas.openxmlformats.org/drawingml/2006/main">
               <a:ext uri="{FF2B5EF4-FFF2-40B4-BE49-F238E27FC236}">
-                <a16:creationId xmlns:a16="http://schemas.microsoft.com/office/drawing/2014/main" id="{91E9E18B-1A41-483E-AEBF-ACD177A3A28C}"/>
+                <a16:creationId xmlns:a16="http://schemas.microsoft.com/office/drawing/2014/main" id="{E2BD6339-66E6-45E4-B756-8FFA4E56160A}"/>
               </a:ext>
             </a:extLst>
           </p:cNvPr>
@@ -9287,7 +9373,7 @@
           <p:cNvPr id="9" name="">
             <a:extLst xmlns:a="http://schemas.openxmlformats.org/drawingml/2006/main">
               <a:ext uri="{FF2B5EF4-FFF2-40B4-BE49-F238E27FC236}">
-                <a16:creationId xmlns:a16="http://schemas.microsoft.com/office/drawing/2014/main" id="{41847E6F-D07F-43D0-B833-67F42A52E4CA}"/>
+                <a16:creationId xmlns:a16="http://schemas.microsoft.com/office/drawing/2014/main" id="{1F8426E1-E9A6-467D-9FC4-173FB81EB0B3}"/>
               </a:ext>
             </a:extLst>
           </p:cNvPr>
@@ -9320,7 +9406,7 @@
           <p:cNvPr id="10" name="">
             <a:extLst xmlns:a="http://schemas.openxmlformats.org/drawingml/2006/main">
               <a:ext uri="{FF2B5EF4-FFF2-40B4-BE49-F238E27FC236}">
-                <a16:creationId xmlns:a16="http://schemas.microsoft.com/office/drawing/2014/main" id="{033B8148-6360-439A-BDC3-79AEA389770B}"/>
+                <a16:creationId xmlns:a16="http://schemas.microsoft.com/office/drawing/2014/main" id="{4927834B-F177-43AB-92AD-7A431D50D0F7}"/>
               </a:ext>
             </a:extLst>
           </p:cNvPr>
@@ -9378,7 +9464,7 @@
           <p:cNvPr id="11" name="">
             <a:extLst xmlns:a="http://schemas.openxmlformats.org/drawingml/2006/main">
               <a:ext uri="{FF2B5EF4-FFF2-40B4-BE49-F238E27FC236}">
-                <a16:creationId xmlns:a16="http://schemas.microsoft.com/office/drawing/2014/main" id="{F6A66BCC-6E97-40FA-A972-A4B96BF0F14D}"/>
+                <a16:creationId xmlns:a16="http://schemas.microsoft.com/office/drawing/2014/main" id="{3B8174AE-02AC-4A64-BB26-0C08305F3743}"/>
               </a:ext>
             </a:extLst>
           </p:cNvPr>
@@ -9411,7 +9497,7 @@
           <p:cNvPr id="12" name="">
             <a:extLst xmlns:a="http://schemas.openxmlformats.org/drawingml/2006/main">
               <a:ext uri="{FF2B5EF4-FFF2-40B4-BE49-F238E27FC236}">
-                <a16:creationId xmlns:a16="http://schemas.microsoft.com/office/drawing/2014/main" id="{AE84E2FA-98E5-4F80-88FC-AB71D4B80B63}"/>
+                <a16:creationId xmlns:a16="http://schemas.microsoft.com/office/drawing/2014/main" id="{ECABF3DC-372E-45F9-97E2-20FBCF9FA65B}"/>
               </a:ext>
             </a:extLst>
           </p:cNvPr>
@@ -9469,7 +9555,7 @@
           <p:cNvPr id="13" name="">
             <a:extLst xmlns:a="http://schemas.openxmlformats.org/drawingml/2006/main">
               <a:ext uri="{FF2B5EF4-FFF2-40B4-BE49-F238E27FC236}">
-                <a16:creationId xmlns:a16="http://schemas.microsoft.com/office/drawing/2014/main" id="{72B22D33-0507-4693-AE9F-AB2665C461BF}"/>
+                <a16:creationId xmlns:a16="http://schemas.microsoft.com/office/drawing/2014/main" id="{B57BE839-C73E-470A-A24E-58ACA77C2B10}"/>
               </a:ext>
             </a:extLst>
           </p:cNvPr>
@@ -9502,7 +9588,7 @@
           <p:cNvPr id="14" name="">
             <a:extLst xmlns:a="http://schemas.openxmlformats.org/drawingml/2006/main">
               <a:ext uri="{FF2B5EF4-FFF2-40B4-BE49-F238E27FC236}">
-                <a16:creationId xmlns:a16="http://schemas.microsoft.com/office/drawing/2014/main" id="{711505D5-D6E6-475E-A9DE-32CEB623090C}"/>
+                <a16:creationId xmlns:a16="http://schemas.microsoft.com/office/drawing/2014/main" id="{BDACE492-50DF-4238-84AF-CECA963C05D0}"/>
               </a:ext>
             </a:extLst>
           </p:cNvPr>
@@ -9560,7 +9646,7 @@
           <p:cNvPr id="15" name="">
             <a:extLst xmlns:a="http://schemas.openxmlformats.org/drawingml/2006/main">
               <a:ext uri="{FF2B5EF4-FFF2-40B4-BE49-F238E27FC236}">
-                <a16:creationId xmlns:a16="http://schemas.microsoft.com/office/drawing/2014/main" id="{B79512A4-CA3A-4658-9A46-BE7D6B38A967}"/>
+                <a16:creationId xmlns:a16="http://schemas.microsoft.com/office/drawing/2014/main" id="{5421655B-F01E-4003-B538-D92088833868}"/>
               </a:ext>
             </a:extLst>
           </p:cNvPr>
@@ -9593,7 +9679,7 @@
           <p:cNvPr id="16" name="">
             <a:extLst xmlns:a="http://schemas.openxmlformats.org/drawingml/2006/main">
               <a:ext uri="{FF2B5EF4-FFF2-40B4-BE49-F238E27FC236}">
-                <a16:creationId xmlns:a16="http://schemas.microsoft.com/office/drawing/2014/main" id="{CCDBA666-A752-4EE7-92D1-A4E17EC026C9}"/>
+                <a16:creationId xmlns:a16="http://schemas.microsoft.com/office/drawing/2014/main" id="{D8DD1620-BBD8-44F7-828C-590251A43AF2}"/>
               </a:ext>
             </a:extLst>
           </p:cNvPr>
@@ -9651,7 +9737,7 @@
           <p:cNvPr id="17" name="">
             <a:extLst xmlns:a="http://schemas.openxmlformats.org/drawingml/2006/main">
               <a:ext uri="{FF2B5EF4-FFF2-40B4-BE49-F238E27FC236}">
-                <a16:creationId xmlns:a16="http://schemas.microsoft.com/office/drawing/2014/main" id="{9F2C4D8F-9A69-46B5-9DB3-216D49550C47}"/>
+                <a16:creationId xmlns:a16="http://schemas.microsoft.com/office/drawing/2014/main" id="{3CD18DB4-6452-4DD2-B4F4-33193FE51949}"/>
               </a:ext>
             </a:extLst>
           </p:cNvPr>
@@ -9684,7 +9770,7 @@
           <p:cNvPr id="18" name="">
             <a:extLst xmlns:a="http://schemas.openxmlformats.org/drawingml/2006/main">
               <a:ext uri="{FF2B5EF4-FFF2-40B4-BE49-F238E27FC236}">
-                <a16:creationId xmlns:a16="http://schemas.microsoft.com/office/drawing/2014/main" id="{2CC4B2DE-9746-4F96-9DE0-01F2DC0173E3}"/>
+                <a16:creationId xmlns:a16="http://schemas.microsoft.com/office/drawing/2014/main" id="{C0F07485-4044-4A76-9002-AA847B889E72}"/>
               </a:ext>
             </a:extLst>
           </p:cNvPr>
@@ -9742,7 +9828,7 @@
           <p:cNvPr id="19" name="">
             <a:extLst xmlns:a="http://schemas.openxmlformats.org/drawingml/2006/main">
               <a:ext uri="{FF2B5EF4-FFF2-40B4-BE49-F238E27FC236}">
-                <a16:creationId xmlns:a16="http://schemas.microsoft.com/office/drawing/2014/main" id="{771CA02C-5504-46D9-82AF-3C67CE3551AC}"/>
+                <a16:creationId xmlns:a16="http://schemas.microsoft.com/office/drawing/2014/main" id="{2FE72A3B-40AE-4FCA-8776-D6496595080A}"/>
               </a:ext>
             </a:extLst>
           </p:cNvPr>
@@ -9775,7 +9861,7 @@
           <p:cNvPr id="20" name="">
             <a:extLst xmlns:a="http://schemas.openxmlformats.org/drawingml/2006/main">
               <a:ext uri="{FF2B5EF4-FFF2-40B4-BE49-F238E27FC236}">
-                <a16:creationId xmlns:a16="http://schemas.microsoft.com/office/drawing/2014/main" id="{2101DA37-814C-4909-9B4F-AE658D373671}"/>
+                <a16:creationId xmlns:a16="http://schemas.microsoft.com/office/drawing/2014/main" id="{4F361143-F3E5-4446-8E30-1683D26B3057}"/>
               </a:ext>
             </a:extLst>
           </p:cNvPr>
@@ -9833,7 +9919,7 @@
           <p:cNvPr id="21" name="">
             <a:extLst xmlns:a="http://schemas.openxmlformats.org/drawingml/2006/main">
               <a:ext uri="{FF2B5EF4-FFF2-40B4-BE49-F238E27FC236}">
-                <a16:creationId xmlns:a16="http://schemas.microsoft.com/office/drawing/2014/main" id="{818BBA46-6039-4D5E-BBE3-84986A4CC6C1}"/>
+                <a16:creationId xmlns:a16="http://schemas.microsoft.com/office/drawing/2014/main" id="{30AED363-CB92-4405-86E4-BE8DCEDC0097}"/>
               </a:ext>
             </a:extLst>
           </p:cNvPr>
@@ -9866,7 +9952,7 @@
           <p:cNvPr id="22" name="">
             <a:extLst xmlns:a="http://schemas.openxmlformats.org/drawingml/2006/main">
               <a:ext uri="{FF2B5EF4-FFF2-40B4-BE49-F238E27FC236}">
-                <a16:creationId xmlns:a16="http://schemas.microsoft.com/office/drawing/2014/main" id="{54394DD3-A440-4542-A858-854D9CCF3AA2}"/>
+                <a16:creationId xmlns:a16="http://schemas.microsoft.com/office/drawing/2014/main" id="{DA8374A7-1A2C-4674-A1FF-560FA551F153}"/>
               </a:ext>
             </a:extLst>
           </p:cNvPr>
@@ -9924,7 +10010,7 @@
           <p:cNvPr id="23" name="">
             <a:extLst xmlns:a="http://schemas.openxmlformats.org/drawingml/2006/main">
               <a:ext uri="{FF2B5EF4-FFF2-40B4-BE49-F238E27FC236}">
-                <a16:creationId xmlns:a16="http://schemas.microsoft.com/office/drawing/2014/main" id="{254754F0-8BC1-401C-A0A2-9BACAEE8124A}"/>
+                <a16:creationId xmlns:a16="http://schemas.microsoft.com/office/drawing/2014/main" id="{964B4EFD-B7E7-48EF-9BED-820C762D3A75}"/>
               </a:ext>
             </a:extLst>
           </p:cNvPr>
@@ -9957,7 +10043,7 @@
           <p:cNvPr id="24" name="">
             <a:extLst xmlns:a="http://schemas.openxmlformats.org/drawingml/2006/main">
               <a:ext uri="{FF2B5EF4-FFF2-40B4-BE49-F238E27FC236}">
-                <a16:creationId xmlns:a16="http://schemas.microsoft.com/office/drawing/2014/main" id="{57B69DB5-6728-4F95-A376-67DC68A1AF78}"/>
+                <a16:creationId xmlns:a16="http://schemas.microsoft.com/office/drawing/2014/main" id="{0BD269C9-4AFB-48A7-A04F-BB2136BF2B4B}"/>
               </a:ext>
             </a:extLst>
           </p:cNvPr>
@@ -10015,7 +10101,7 @@
           <p:cNvPr id="25" name="">
             <a:extLst xmlns:a="http://schemas.openxmlformats.org/drawingml/2006/main">
               <a:ext uri="{FF2B5EF4-FFF2-40B4-BE49-F238E27FC236}">
-                <a16:creationId xmlns:a16="http://schemas.microsoft.com/office/drawing/2014/main" id="{45207080-5DF3-4790-AED8-22FFCD57E660}"/>
+                <a16:creationId xmlns:a16="http://schemas.microsoft.com/office/drawing/2014/main" id="{65A552EC-43C7-4102-8131-84B24FC549A8}"/>
               </a:ext>
             </a:extLst>
           </p:cNvPr>
@@ -10048,7 +10134,7 @@
           <p:cNvPr id="26" name="">
             <a:extLst xmlns:a="http://schemas.openxmlformats.org/drawingml/2006/main">
               <a:ext uri="{FF2B5EF4-FFF2-40B4-BE49-F238E27FC236}">
-                <a16:creationId xmlns:a16="http://schemas.microsoft.com/office/drawing/2014/main" id="{F6EE6F46-D218-4E88-8306-6978E17E39BE}"/>
+                <a16:creationId xmlns:a16="http://schemas.microsoft.com/office/drawing/2014/main" id="{F485980E-14B7-424B-AE03-28723ECA8A84}"/>
               </a:ext>
             </a:extLst>
           </p:cNvPr>
@@ -10106,7 +10192,7 @@
           <p:cNvPr id="27" name="">
             <a:extLst xmlns:a="http://schemas.openxmlformats.org/drawingml/2006/main">
               <a:ext uri="{FF2B5EF4-FFF2-40B4-BE49-F238E27FC236}">
-                <a16:creationId xmlns:a16="http://schemas.microsoft.com/office/drawing/2014/main" id="{D0363E51-9AEA-4350-8FA0-D679593F9352}"/>
+                <a16:creationId xmlns:a16="http://schemas.microsoft.com/office/drawing/2014/main" id="{0D64212C-08F2-4D11-BAC6-6599A97E977F}"/>
               </a:ext>
             </a:extLst>
           </p:cNvPr>
@@ -10139,7 +10225,7 @@
           <p:cNvPr id="28" name="">
             <a:extLst xmlns:a="http://schemas.openxmlformats.org/drawingml/2006/main">
               <a:ext uri="{FF2B5EF4-FFF2-40B4-BE49-F238E27FC236}">
-                <a16:creationId xmlns:a16="http://schemas.microsoft.com/office/drawing/2014/main" id="{98D171AE-F0FA-48F0-BBDA-7ED0A1397E37}"/>
+                <a16:creationId xmlns:a16="http://schemas.microsoft.com/office/drawing/2014/main" id="{67571373-F96D-4D22-99F4-76206989A545}"/>
               </a:ext>
             </a:extLst>
           </p:cNvPr>
@@ -10197,7 +10283,7 @@
           <p:cNvPr id="29" name="">
             <a:extLst xmlns:a="http://schemas.openxmlformats.org/drawingml/2006/main">
               <a:ext uri="{FF2B5EF4-FFF2-40B4-BE49-F238E27FC236}">
-                <a16:creationId xmlns:a16="http://schemas.microsoft.com/office/drawing/2014/main" id="{E3457AD8-F0B2-4014-BDFD-B33F2F0F813A}"/>
+                <a16:creationId xmlns:a16="http://schemas.microsoft.com/office/drawing/2014/main" id="{865FC2F8-3E06-46D2-A4CF-414E46D2083E}"/>
               </a:ext>
             </a:extLst>
           </p:cNvPr>
@@ -10230,7 +10316,7 @@
           <p:cNvPr id="30" name="">
             <a:extLst xmlns:a="http://schemas.openxmlformats.org/drawingml/2006/main">
               <a:ext uri="{FF2B5EF4-FFF2-40B4-BE49-F238E27FC236}">
-                <a16:creationId xmlns:a16="http://schemas.microsoft.com/office/drawing/2014/main" id="{F114FD9E-DBF1-4EF4-A824-80915FF55A9A}"/>
+                <a16:creationId xmlns:a16="http://schemas.microsoft.com/office/drawing/2014/main" id="{332B3F52-C7C3-490F-973F-C75E0E80CD5A}"/>
               </a:ext>
             </a:extLst>
           </p:cNvPr>
@@ -10288,7 +10374,7 @@
           <p:cNvPr id="31" name="">
             <a:extLst xmlns:a="http://schemas.openxmlformats.org/drawingml/2006/main">
               <a:ext uri="{FF2B5EF4-FFF2-40B4-BE49-F238E27FC236}">
-                <a16:creationId xmlns:a16="http://schemas.microsoft.com/office/drawing/2014/main" id="{48BF3BD1-2051-418E-BAB2-1284E7F12C8C}"/>
+                <a16:creationId xmlns:a16="http://schemas.microsoft.com/office/drawing/2014/main" id="{207951D7-85F9-49B8-99F9-9F4ED6168D76}"/>
               </a:ext>
             </a:extLst>
           </p:cNvPr>
@@ -10321,7 +10407,7 @@
           <p:cNvPr id="32" name="">
             <a:extLst xmlns:a="http://schemas.openxmlformats.org/drawingml/2006/main">
               <a:ext uri="{FF2B5EF4-FFF2-40B4-BE49-F238E27FC236}">
-                <a16:creationId xmlns:a16="http://schemas.microsoft.com/office/drawing/2014/main" id="{60B987A4-96BC-4EA2-810B-68EB278CB1A8}"/>
+                <a16:creationId xmlns:a16="http://schemas.microsoft.com/office/drawing/2014/main" id="{19EC53C3-70D9-46A3-A1CE-BE9DDED9B503}"/>
               </a:ext>
             </a:extLst>
           </p:cNvPr>
@@ -10379,7 +10465,7 @@
           <p:cNvPr id="33" name="">
             <a:extLst xmlns:a="http://schemas.openxmlformats.org/drawingml/2006/main">
               <a:ext uri="{FF2B5EF4-FFF2-40B4-BE49-F238E27FC236}">
-                <a16:creationId xmlns:a16="http://schemas.microsoft.com/office/drawing/2014/main" id="{0B683085-9095-45D3-88D2-2090D677318F}"/>
+                <a16:creationId xmlns:a16="http://schemas.microsoft.com/office/drawing/2014/main" id="{328E657B-6BC6-4851-A2BB-197C85751786}"/>
               </a:ext>
             </a:extLst>
           </p:cNvPr>
@@ -10412,7 +10498,7 @@
           <p:cNvPr id="34" name="">
             <a:extLst xmlns:a="http://schemas.openxmlformats.org/drawingml/2006/main">
               <a:ext uri="{FF2B5EF4-FFF2-40B4-BE49-F238E27FC236}">
-                <a16:creationId xmlns:a16="http://schemas.microsoft.com/office/drawing/2014/main" id="{8D24D8EE-3892-4A70-B03D-C858D938BA19}"/>
+                <a16:creationId xmlns:a16="http://schemas.microsoft.com/office/drawing/2014/main" id="{59D731A4-3F92-454D-86D8-1E04F3C65179}"/>
               </a:ext>
             </a:extLst>
           </p:cNvPr>
@@ -10470,7 +10556,7 @@
           <p:cNvPr id="35" name="">
             <a:extLst xmlns:a="http://schemas.openxmlformats.org/drawingml/2006/main">
               <a:ext uri="{FF2B5EF4-FFF2-40B4-BE49-F238E27FC236}">
-                <a16:creationId xmlns:a16="http://schemas.microsoft.com/office/drawing/2014/main" id="{19FCC8BF-2351-4B20-A6AD-83DFD82DFD3F}"/>
+                <a16:creationId xmlns:a16="http://schemas.microsoft.com/office/drawing/2014/main" id="{CB72ED4A-BC1E-42A8-A186-CBF3FFF3188E}"/>
               </a:ext>
             </a:extLst>
           </p:cNvPr>
@@ -10503,7 +10589,7 @@
           <p:cNvPr id="36" name="">
             <a:extLst xmlns:a="http://schemas.openxmlformats.org/drawingml/2006/main">
               <a:ext uri="{FF2B5EF4-FFF2-40B4-BE49-F238E27FC236}">
-                <a16:creationId xmlns:a16="http://schemas.microsoft.com/office/drawing/2014/main" id="{81C5E9FD-43DF-4F0D-87AE-0060210C1A50}"/>
+                <a16:creationId xmlns:a16="http://schemas.microsoft.com/office/drawing/2014/main" id="{C28C1FE4-64B5-43D7-8090-BB9E528D16B7}"/>
               </a:ext>
             </a:extLst>
           </p:cNvPr>
@@ -10561,7 +10647,7 @@
           <p:cNvPr id="37" name="">
             <a:extLst xmlns:a="http://schemas.openxmlformats.org/drawingml/2006/main">
               <a:ext uri="{FF2B5EF4-FFF2-40B4-BE49-F238E27FC236}">
-                <a16:creationId xmlns:a16="http://schemas.microsoft.com/office/drawing/2014/main" id="{0EE70A40-7271-4E26-8D8C-014B2E0AA9FF}"/>
+                <a16:creationId xmlns:a16="http://schemas.microsoft.com/office/drawing/2014/main" id="{D93B5C83-549E-4F99-BB7A-839C9849347E}"/>
               </a:ext>
             </a:extLst>
           </p:cNvPr>
@@ -10619,7 +10705,7 @@
           <p:cNvPr id="38" name="">
             <a:extLst xmlns:a="http://schemas.openxmlformats.org/drawingml/2006/main">
               <a:ext uri="{FF2B5EF4-FFF2-40B4-BE49-F238E27FC236}">
-                <a16:creationId xmlns:a16="http://schemas.microsoft.com/office/drawing/2014/main" id="{3361C557-A0F6-4F56-A851-0CF7F84E5B6D}"/>
+                <a16:creationId xmlns:a16="http://schemas.microsoft.com/office/drawing/2014/main" id="{4AA713F7-F1D2-4076-97E6-36E511BADB0D}"/>
               </a:ext>
             </a:extLst>
           </p:cNvPr>
@@ -10652,7 +10738,7 @@
           <p:cNvPr id="39" name="">
             <a:extLst xmlns:a="http://schemas.openxmlformats.org/drawingml/2006/main">
               <a:ext uri="{FF2B5EF4-FFF2-40B4-BE49-F238E27FC236}">
-                <a16:creationId xmlns:a16="http://schemas.microsoft.com/office/drawing/2014/main" id="{22113C09-F88D-4399-9FFF-4B6CEB1B48AB}"/>
+                <a16:creationId xmlns:a16="http://schemas.microsoft.com/office/drawing/2014/main" id="{9F1D2E3B-0155-423D-9848-C7DF7865EBEF}"/>
               </a:ext>
             </a:extLst>
           </p:cNvPr>
@@ -10710,7 +10796,7 @@
           <p:cNvPr id="40" name="">
             <a:extLst xmlns:a="http://schemas.openxmlformats.org/drawingml/2006/main">
               <a:ext uri="{FF2B5EF4-FFF2-40B4-BE49-F238E27FC236}">
-                <a16:creationId xmlns:a16="http://schemas.microsoft.com/office/drawing/2014/main" id="{72CD9366-4BF6-47AB-B69E-E39D404F24EE}"/>
+                <a16:creationId xmlns:a16="http://schemas.microsoft.com/office/drawing/2014/main" id="{CDA033F5-B02E-4C05-9A5A-4571026F6125}"/>
               </a:ext>
             </a:extLst>
           </p:cNvPr>
@@ -10772,7 +10858,7 @@
           <p:nvPr/>
         </p:nvPicPr>
         <p:blipFill>
-          <a:blip xmlns:r="http://schemas.openxmlformats.org/officeDocument/2006/relationships" xmlns:a="http://schemas.openxmlformats.org/drawingml/2006/main" r:embed="R5ac26753a05f4b6f"/>
+          <a:blip xmlns:r="http://schemas.openxmlformats.org/officeDocument/2006/relationships" xmlns:a="http://schemas.openxmlformats.org/drawingml/2006/main" r:embed="R2a14469aba964a9d"/>
           <a:stretch xmlns:a="http://schemas.openxmlformats.org/drawingml/2006/main"/>
         </p:blipFill>
         <p:spPr>
@@ -10792,7 +10878,7 @@
           <p:cNvPr id="42" name="">
             <a:extLst xmlns:a="http://schemas.openxmlformats.org/drawingml/2006/main">
               <a:ext uri="{FF2B5EF4-FFF2-40B4-BE49-F238E27FC236}">
-                <a16:creationId xmlns:a16="http://schemas.microsoft.com/office/drawing/2014/main" id="{A8A519CF-5AA8-4C98-9781-BA767DEE2877}"/>
+                <a16:creationId xmlns:a16="http://schemas.microsoft.com/office/drawing/2014/main" id="{4830686C-1757-4608-9C96-349F71FE4F06}"/>
               </a:ext>
             </a:extLst>
           </p:cNvPr>
@@ -10850,7 +10936,7 @@
           <p:cNvPr id="43" name="">
             <a:extLst xmlns:a="http://schemas.openxmlformats.org/drawingml/2006/main">
               <a:ext uri="{FF2B5EF4-FFF2-40B4-BE49-F238E27FC236}">
-                <a16:creationId xmlns:a16="http://schemas.microsoft.com/office/drawing/2014/main" id="{FB437893-1DB1-44BC-A22F-2ECEF6C0D081}"/>
+                <a16:creationId xmlns:a16="http://schemas.microsoft.com/office/drawing/2014/main" id="{AB8C543E-D861-48EF-B9CD-02C57F6B1267}"/>
               </a:ext>
             </a:extLst>
           </p:cNvPr>
@@ -10908,7 +10994,7 @@
           <p:cNvPr id="44" name="">
             <a:extLst xmlns:a="http://schemas.openxmlformats.org/drawingml/2006/main">
               <a:ext uri="{FF2B5EF4-FFF2-40B4-BE49-F238E27FC236}">
-                <a16:creationId xmlns:a16="http://schemas.microsoft.com/office/drawing/2014/main" id="{409FF39E-CFCC-4040-9187-DA1CF25001F9}"/>
+                <a16:creationId xmlns:a16="http://schemas.microsoft.com/office/drawing/2014/main" id="{141FF397-1A57-4873-B7F3-892214D4A058}"/>
               </a:ext>
             </a:extLst>
           </p:cNvPr>
@@ -10941,7 +11027,7 @@
           <p:cNvPr id="45" name="">
             <a:extLst xmlns:a="http://schemas.openxmlformats.org/drawingml/2006/main">
               <a:ext uri="{FF2B5EF4-FFF2-40B4-BE49-F238E27FC236}">
-                <a16:creationId xmlns:a16="http://schemas.microsoft.com/office/drawing/2014/main" id="{B3BA60A6-9618-4D17-9B2A-BC713559C620}"/>
+                <a16:creationId xmlns:a16="http://schemas.microsoft.com/office/drawing/2014/main" id="{2D99CB5D-84DA-4284-8AB6-186CEA46043C}"/>
               </a:ext>
             </a:extLst>
           </p:cNvPr>
@@ -10999,7 +11085,7 @@
           <p:cNvPr id="46" name="">
             <a:extLst xmlns:a="http://schemas.openxmlformats.org/drawingml/2006/main">
               <a:ext uri="{FF2B5EF4-FFF2-40B4-BE49-F238E27FC236}">
-                <a16:creationId xmlns:a16="http://schemas.microsoft.com/office/drawing/2014/main" id="{13AC7E0B-7C2B-44A9-9BAB-146A3506D8FF}"/>
+                <a16:creationId xmlns:a16="http://schemas.microsoft.com/office/drawing/2014/main" id="{22E5A8D4-44BC-4EFB-84F0-0BC626BE43FC}"/>
               </a:ext>
             </a:extLst>
           </p:cNvPr>
@@ -11055,7 +11141,7 @@
     </p:spTree>
     <p:extLst>
       <p:ext uri="{BB962C8B-B14F-4D97-AF65-F5344CB8AC3E}">
-        <p14:creationId xmlns:p14="http://schemas.microsoft.com/office/powerpoint/2010/main" val="1286461871"/>
+        <p14:creationId xmlns:p14="http://schemas.microsoft.com/office/powerpoint/2010/main" val="352601058"/>
       </p:ext>
     </p:extLst>
   </p:cSld>
@@ -11083,10 +11169,10 @@
       </p:grpSpPr>
       <p:sp>
         <p:nvSpPr>
-          <p:cNvPr id="24" name="">
-            <a:extLst xmlns:a="http://schemas.openxmlformats.org/drawingml/2006/main">
-              <a:ext uri="{FF2B5EF4-FFF2-40B4-BE49-F238E27FC236}">
-                <a16:creationId xmlns:a16="http://schemas.microsoft.com/office/drawing/2014/main" id="{EA6E5C03-D9D6-43BE-8C32-A6708995020A}"/>
+          <p:cNvPr id="23" name="">
+            <a:extLst xmlns:a="http://schemas.openxmlformats.org/drawingml/2006/main">
+              <a:ext uri="{FF2B5EF4-FFF2-40B4-BE49-F238E27FC236}">
+                <a16:creationId xmlns:a16="http://schemas.microsoft.com/office/drawing/2014/main" id="{9F1CBD1B-BF16-4D86-9802-0C39F2DD1E84}"/>
               </a:ext>
             </a:extLst>
           </p:cNvPr>
@@ -11134,7 +11220,7 @@
                 <a:ea typeface="Aptos"/>
                 <a:cs typeface="Aptos"/>
               </a:rPr>
-              <a:t>RECOMMENDATION</a:t>
+              <a:t>EXTERNAL CHECK</a:t>
             </a:r>
           </a:p>
         </p:txBody>
@@ -11144,7 +11230,7 @@
           <p:cNvPr id="2" name="">
             <a:extLst xmlns:a="http://schemas.openxmlformats.org/drawingml/2006/main">
               <a:ext uri="{FF2B5EF4-FFF2-40B4-BE49-F238E27FC236}">
-                <a16:creationId xmlns:a16="http://schemas.microsoft.com/office/drawing/2014/main" id="{157F660E-9E6C-439D-B862-28A592567968}"/>
+                <a16:creationId xmlns:a16="http://schemas.microsoft.com/office/drawing/2014/main" id="{331DD212-8728-4463-AF52-7A87CAB2C155}"/>
               </a:ext>
             </a:extLst>
           </p:cNvPr>
@@ -11192,7 +11278,7 @@
                 <a:ea typeface="Aptos"/>
                 <a:cs typeface="Aptos"/>
               </a:rPr>
-              <a:t>Useful ranking, bounded claim</a:t>
+              <a:t>The first submission landed in a credible place</a:t>
             </a:r>
           </a:p>
         </p:txBody>
@@ -11202,7 +11288,7 @@
           <p:cNvPr id="3" name="">
             <a:extLst xmlns:a="http://schemas.openxmlformats.org/drawingml/2006/main">
               <a:ext uri="{FF2B5EF4-FFF2-40B4-BE49-F238E27FC236}">
-                <a16:creationId xmlns:a16="http://schemas.microsoft.com/office/drawing/2014/main" id="{D99A4AED-8E1A-46EC-9D64-697E2A2AD4DE}"/>
+                <a16:creationId xmlns:a16="http://schemas.microsoft.com/office/drawing/2014/main" id="{1314BF95-CC2A-4D7A-841B-83F58530BFC0}"/>
               </a:ext>
             </a:extLst>
           </p:cNvPr>
@@ -11235,7 +11321,7 @@
           <p:cNvPr id="4" name="">
             <a:extLst xmlns:a="http://schemas.openxmlformats.org/drawingml/2006/main">
               <a:ext uri="{FF2B5EF4-FFF2-40B4-BE49-F238E27FC236}">
-                <a16:creationId xmlns:a16="http://schemas.microsoft.com/office/drawing/2014/main" id="{4F1A8859-B15F-464A-B5FC-32E851CB743A}"/>
+                <a16:creationId xmlns:a16="http://schemas.microsoft.com/office/drawing/2014/main" id="{86E0B74B-5CA1-44A1-A234-B35E641DE7E6}"/>
               </a:ext>
             </a:extLst>
           </p:cNvPr>
@@ -11283,7 +11369,7 @@
                 <a:ea typeface="Aptos"/>
                 <a:cs typeface="Aptos"/>
               </a:rPr>
-              <a:t>The model is ready for a controlled prioritisation experiment — not an unattended decision.</a:t>
+              <a:t>A local model result became a public leaderboard result.</a:t>
             </a:r>
           </a:p>
         </p:txBody>
@@ -11293,37 +11379,128 @@
           <p:cNvPr id="5" name="">
             <a:extLst xmlns:a="http://schemas.openxmlformats.org/drawingml/2006/main">
               <a:ext uri="{FF2B5EF4-FFF2-40B4-BE49-F238E27FC236}">
-                <a16:creationId xmlns:a16="http://schemas.microsoft.com/office/drawing/2014/main" id="{A4E86047-657A-4092-98C9-4526DC415CDC}"/>
-              </a:ext>
-            </a:extLst>
-          </p:cNvPr>
-          <p:cNvSpPr>
-            <a:spLocks xmlns:a="http://schemas.openxmlformats.org/drawingml/2006/main" noGrp="1"/>
-          </p:cNvSpPr>
-          <p:nvPr/>
-        </p:nvSpPr>
-        <p:spPr>
-          <a:xfrm xmlns:a="http://schemas.openxmlformats.org/drawingml/2006/main">
-            <a:off x="647700" y="2000250"/>
-            <a:ext cx="4000500" cy="285750"/>
-          </a:xfrm>
-          <a:prstGeom xmlns:a="http://schemas.openxmlformats.org/drawingml/2006/main" prst="rect">
-            <a:avLst/>
-          </a:prstGeom>
-          <a:noFill xmlns:a="http://schemas.openxmlformats.org/drawingml/2006/main"/>
-          <a:ln xmlns:a="http://schemas.openxmlformats.org/drawingml/2006/main" w="0">
-            <a:noFill/>
-            <a:prstDash val="solid"/>
-          </a:ln>
-        </p:spPr>
-        <p:txBody>
-          <a:bodyPr xmlns:a="http://schemas.openxmlformats.org/drawingml/2006/main" wrap="square" lIns="0" tIns="0" rIns="0" bIns="0" anchor="t">
-            <a:normAutofit fontScale="100000"/>
-          </a:bodyPr>
-          <a:lstStyle xmlns:a="http://schemas.openxmlformats.org/drawingml/2006/main"/>
-          <a:p xmlns:a="http://schemas.openxmlformats.org/drawingml/2006/main">
-            <a:pPr algn="l">
-              <a:defRPr sz="1800" b="1" i="0">
+                <a16:creationId xmlns:a16="http://schemas.microsoft.com/office/drawing/2014/main" id="{DC5277C5-0F41-454A-A8AC-FC3ACDC7AFB6}"/>
+              </a:ext>
+            </a:extLst>
+          </p:cNvPr>
+          <p:cNvSpPr>
+            <a:spLocks xmlns:a="http://schemas.openxmlformats.org/drawingml/2006/main" noGrp="1"/>
+          </p:cNvSpPr>
+          <p:nvPr/>
+        </p:nvSpPr>
+        <p:spPr>
+          <a:xfrm xmlns:a="http://schemas.openxmlformats.org/drawingml/2006/main">
+            <a:off x="647700" y="2095500"/>
+            <a:ext cx="2286000" cy="990600"/>
+          </a:xfrm>
+          <a:prstGeom xmlns:a="http://schemas.openxmlformats.org/drawingml/2006/main" prst="roundRect">
+            <a:avLst>
+              <a:gd name="adj" fmla="val 7692"/>
+            </a:avLst>
+          </a:prstGeom>
+          <a:solidFill xmlns:a="http://schemas.openxmlformats.org/drawingml/2006/main">
+            <a:srgbClr val="DCEFEA"/>
+          </a:solidFill>
+          <a:ln xmlns:a="http://schemas.openxmlformats.org/drawingml/2006/main" w="0">
+            <a:noFill/>
+            <a:prstDash val="solid"/>
+          </a:ln>
+        </p:spPr>
+      </p:sp>
+      <p:sp>
+        <p:nvSpPr>
+          <p:cNvPr id="6" name="">
+            <a:extLst xmlns:a="http://schemas.openxmlformats.org/drawingml/2006/main">
+              <a:ext uri="{FF2B5EF4-FFF2-40B4-BE49-F238E27FC236}">
+                <a16:creationId xmlns:a16="http://schemas.microsoft.com/office/drawing/2014/main" id="{CF9ADA28-EC1C-4B98-AA7A-72AC871F7A6C}"/>
+              </a:ext>
+            </a:extLst>
+          </p:cNvPr>
+          <p:cNvSpPr>
+            <a:spLocks xmlns:a="http://schemas.openxmlformats.org/drawingml/2006/main" noGrp="1"/>
+          </p:cNvSpPr>
+          <p:nvPr/>
+        </p:nvSpPr>
+        <p:spPr>
+          <a:xfrm xmlns:a="http://schemas.openxmlformats.org/drawingml/2006/main">
+            <a:off x="838200" y="2247900"/>
+            <a:ext cx="1905000" cy="190500"/>
+          </a:xfrm>
+          <a:prstGeom xmlns:a="http://schemas.openxmlformats.org/drawingml/2006/main" prst="rect">
+            <a:avLst/>
+          </a:prstGeom>
+          <a:noFill xmlns:a="http://schemas.openxmlformats.org/drawingml/2006/main"/>
+          <a:ln xmlns:a="http://schemas.openxmlformats.org/drawingml/2006/main" w="0">
+            <a:noFill/>
+            <a:prstDash val="solid"/>
+          </a:ln>
+        </p:spPr>
+        <p:txBody>
+          <a:bodyPr xmlns:a="http://schemas.openxmlformats.org/drawingml/2006/main" wrap="square" lIns="0" tIns="0" rIns="0" bIns="0" anchor="t">
+            <a:normAutofit fontScale="100000"/>
+          </a:bodyPr>
+          <a:lstStyle xmlns:a="http://schemas.openxmlformats.org/drawingml/2006/main"/>
+          <a:p xmlns:a="http://schemas.openxmlformats.org/drawingml/2006/main">
+            <a:pPr algn="l">
+              <a:defRPr sz="900" b="1" i="0">
+                <a:solidFill>
+                  <a:srgbClr val="52606D"/>
+                </a:solidFill>
+                <a:latin typeface="Aptos"/>
+                <a:ea typeface="Aptos"/>
+                <a:cs typeface="Aptos"/>
+              </a:defRPr>
+            </a:pPr>
+            <a:r>
+              <a:rPr sz="900" b="1" i="0">
+                <a:solidFill>
+                  <a:srgbClr val="52606D"/>
+                </a:solidFill>
+                <a:latin typeface="Aptos"/>
+                <a:ea typeface="Aptos"/>
+                <a:cs typeface="Aptos"/>
+              </a:rPr>
+              <a:t>PUBLIC RANK</a:t>
+            </a:r>
+          </a:p>
+        </p:txBody>
+      </p:sp>
+      <p:sp>
+        <p:nvSpPr>
+          <p:cNvPr id="7" name="">
+            <a:extLst xmlns:a="http://schemas.openxmlformats.org/drawingml/2006/main">
+              <a:ext uri="{FF2B5EF4-FFF2-40B4-BE49-F238E27FC236}">
+                <a16:creationId xmlns:a16="http://schemas.microsoft.com/office/drawing/2014/main" id="{CABF3BD5-6037-4958-A308-1AB1B7D82873}"/>
+              </a:ext>
+            </a:extLst>
+          </p:cNvPr>
+          <p:cNvSpPr>
+            <a:spLocks xmlns:a="http://schemas.openxmlformats.org/drawingml/2006/main" noGrp="1"/>
+          </p:cNvSpPr>
+          <p:nvPr/>
+        </p:nvSpPr>
+        <p:spPr>
+          <a:xfrm xmlns:a="http://schemas.openxmlformats.org/drawingml/2006/main">
+            <a:off x="838200" y="2505075"/>
+            <a:ext cx="1905000" cy="495300"/>
+          </a:xfrm>
+          <a:prstGeom xmlns:a="http://schemas.openxmlformats.org/drawingml/2006/main" prst="rect">
+            <a:avLst/>
+          </a:prstGeom>
+          <a:noFill xmlns:a="http://schemas.openxmlformats.org/drawingml/2006/main"/>
+          <a:ln xmlns:a="http://schemas.openxmlformats.org/drawingml/2006/main" w="0">
+            <a:noFill/>
+            <a:prstDash val="solid"/>
+          </a:ln>
+        </p:spPr>
+        <p:txBody>
+          <a:bodyPr xmlns:a="http://schemas.openxmlformats.org/drawingml/2006/main" wrap="square" lIns="0" tIns="0" rIns="0" bIns="0" anchor="t">
+            <a:normAutofit fontScale="100000"/>
+          </a:bodyPr>
+          <a:lstStyle xmlns:a="http://schemas.openxmlformats.org/drawingml/2006/main"/>
+          <a:p xmlns:a="http://schemas.openxmlformats.org/drawingml/2006/main">
+            <a:pPr algn="l">
+              <a:defRPr sz="2250" b="1" i="0">
                 <a:solidFill>
                   <a:srgbClr val="1F776D"/>
                 </a:solidFill>
@@ -11333,7 +11510,7 @@
               </a:defRPr>
             </a:pPr>
             <a:r>
-              <a:rPr sz="1800" b="1" i="0">
+              <a:rPr sz="2250" b="1" i="0">
                 <a:solidFill>
                   <a:srgbClr val="1F776D"/>
                 </a:solidFill>
@@ -11341,28 +11518,235 @@
                 <a:ea typeface="Aptos"/>
                 <a:cs typeface="Aptos"/>
               </a:rPr>
-              <a:t>What we can claim</a:t>
-            </a:r>
-          </a:p>
-        </p:txBody>
-      </p:sp>
-      <p:sp>
-        <p:nvSpPr>
-          <p:cNvPr id="6" name="">
-            <a:extLst xmlns:a="http://schemas.openxmlformats.org/drawingml/2006/main">
-              <a:ext uri="{FF2B5EF4-FFF2-40B4-BE49-F238E27FC236}">
-                <a16:creationId xmlns:a16="http://schemas.microsoft.com/office/drawing/2014/main" id="{3A02BF40-89E0-4F31-8FF1-DEE19F5B1F8A}"/>
-              </a:ext>
-            </a:extLst>
-          </p:cNvPr>
-          <p:cNvSpPr>
-            <a:spLocks xmlns:a="http://schemas.openxmlformats.org/drawingml/2006/main" noGrp="1"/>
-          </p:cNvSpPr>
-          <p:nvPr/>
-        </p:nvSpPr>
-        <p:spPr>
-          <a:xfrm xmlns:a="http://schemas.openxmlformats.org/drawingml/2006/main">
-            <a:off x="666750" y="2552700"/>
+              <a:t>275 / 710</a:t>
+            </a:r>
+          </a:p>
+        </p:txBody>
+      </p:sp>
+      <p:sp>
+        <p:nvSpPr>
+          <p:cNvPr id="8" name="">
+            <a:extLst xmlns:a="http://schemas.openxmlformats.org/drawingml/2006/main">
+              <a:ext uri="{FF2B5EF4-FFF2-40B4-BE49-F238E27FC236}">
+                <a16:creationId xmlns:a16="http://schemas.microsoft.com/office/drawing/2014/main" id="{33FD57D9-E5E8-47A3-ABC7-4AA49795D904}"/>
+              </a:ext>
+            </a:extLst>
+          </p:cNvPr>
+          <p:cNvSpPr>
+            <a:spLocks xmlns:a="http://schemas.openxmlformats.org/drawingml/2006/main" noGrp="1"/>
+          </p:cNvSpPr>
+          <p:nvPr/>
+        </p:nvSpPr>
+        <p:spPr>
+          <a:xfrm xmlns:a="http://schemas.openxmlformats.org/drawingml/2006/main">
+            <a:off x="3181350" y="2095500"/>
+            <a:ext cx="2286000" cy="990600"/>
+          </a:xfrm>
+          <a:prstGeom xmlns:a="http://schemas.openxmlformats.org/drawingml/2006/main" prst="roundRect">
+            <a:avLst>
+              <a:gd name="adj" fmla="val 7692"/>
+            </a:avLst>
+          </a:prstGeom>
+          <a:solidFill xmlns:a="http://schemas.openxmlformats.org/drawingml/2006/main">
+            <a:srgbClr val="F2D3CB"/>
+          </a:solidFill>
+          <a:ln xmlns:a="http://schemas.openxmlformats.org/drawingml/2006/main" w="0">
+            <a:noFill/>
+            <a:prstDash val="solid"/>
+          </a:ln>
+        </p:spPr>
+      </p:sp>
+      <p:sp>
+        <p:nvSpPr>
+          <p:cNvPr id="9" name="">
+            <a:extLst xmlns:a="http://schemas.openxmlformats.org/drawingml/2006/main">
+              <a:ext uri="{FF2B5EF4-FFF2-40B4-BE49-F238E27FC236}">
+                <a16:creationId xmlns:a16="http://schemas.microsoft.com/office/drawing/2014/main" id="{2376D753-0F39-48D0-A774-E5AEBB3097D9}"/>
+              </a:ext>
+            </a:extLst>
+          </p:cNvPr>
+          <p:cNvSpPr>
+            <a:spLocks xmlns:a="http://schemas.openxmlformats.org/drawingml/2006/main" noGrp="1"/>
+          </p:cNvSpPr>
+          <p:nvPr/>
+        </p:nvSpPr>
+        <p:spPr>
+          <a:xfrm xmlns:a="http://schemas.openxmlformats.org/drawingml/2006/main">
+            <a:off x="3371850" y="2247900"/>
+            <a:ext cx="1905000" cy="190500"/>
+          </a:xfrm>
+          <a:prstGeom xmlns:a="http://schemas.openxmlformats.org/drawingml/2006/main" prst="rect">
+            <a:avLst/>
+          </a:prstGeom>
+          <a:noFill xmlns:a="http://schemas.openxmlformats.org/drawingml/2006/main"/>
+          <a:ln xmlns:a="http://schemas.openxmlformats.org/drawingml/2006/main" w="0">
+            <a:noFill/>
+            <a:prstDash val="solid"/>
+          </a:ln>
+        </p:spPr>
+        <p:txBody>
+          <a:bodyPr xmlns:a="http://schemas.openxmlformats.org/drawingml/2006/main" wrap="square" lIns="0" tIns="0" rIns="0" bIns="0" anchor="t">
+            <a:normAutofit fontScale="100000"/>
+          </a:bodyPr>
+          <a:lstStyle xmlns:a="http://schemas.openxmlformats.org/drawingml/2006/main"/>
+          <a:p xmlns:a="http://schemas.openxmlformats.org/drawingml/2006/main">
+            <a:pPr algn="l">
+              <a:defRPr sz="900" b="1" i="0">
+                <a:solidFill>
+                  <a:srgbClr val="52606D"/>
+                </a:solidFill>
+                <a:latin typeface="Aptos"/>
+                <a:ea typeface="Aptos"/>
+                <a:cs typeface="Aptos"/>
+              </a:defRPr>
+            </a:pPr>
+            <a:r>
+              <a:rPr sz="900" b="1" i="0">
+                <a:solidFill>
+                  <a:srgbClr val="52606D"/>
+                </a:solidFill>
+                <a:latin typeface="Aptos"/>
+                <a:ea typeface="Aptos"/>
+                <a:cs typeface="Aptos"/>
+              </a:rPr>
+              <a:t>PUBLIC SCORE</a:t>
+            </a:r>
+          </a:p>
+        </p:txBody>
+      </p:sp>
+      <p:sp>
+        <p:nvSpPr>
+          <p:cNvPr id="10" name="">
+            <a:extLst xmlns:a="http://schemas.openxmlformats.org/drawingml/2006/main">
+              <a:ext uri="{FF2B5EF4-FFF2-40B4-BE49-F238E27FC236}">
+                <a16:creationId xmlns:a16="http://schemas.microsoft.com/office/drawing/2014/main" id="{C0254B59-5289-422F-8B81-F325B027647C}"/>
+              </a:ext>
+            </a:extLst>
+          </p:cNvPr>
+          <p:cNvSpPr>
+            <a:spLocks xmlns:a="http://schemas.openxmlformats.org/drawingml/2006/main" noGrp="1"/>
+          </p:cNvSpPr>
+          <p:nvPr/>
+        </p:nvSpPr>
+        <p:spPr>
+          <a:xfrm xmlns:a="http://schemas.openxmlformats.org/drawingml/2006/main">
+            <a:off x="3371850" y="2505075"/>
+            <a:ext cx="1905000" cy="495300"/>
+          </a:xfrm>
+          <a:prstGeom xmlns:a="http://schemas.openxmlformats.org/drawingml/2006/main" prst="rect">
+            <a:avLst/>
+          </a:prstGeom>
+          <a:noFill xmlns:a="http://schemas.openxmlformats.org/drawingml/2006/main"/>
+          <a:ln xmlns:a="http://schemas.openxmlformats.org/drawingml/2006/main" w="0">
+            <a:noFill/>
+            <a:prstDash val="solid"/>
+          </a:ln>
+        </p:spPr>
+        <p:txBody>
+          <a:bodyPr xmlns:a="http://schemas.openxmlformats.org/drawingml/2006/main" wrap="square" lIns="0" tIns="0" rIns="0" bIns="0" anchor="t">
+            <a:normAutofit fontScale="100000"/>
+          </a:bodyPr>
+          <a:lstStyle xmlns:a="http://schemas.openxmlformats.org/drawingml/2006/main"/>
+          <a:p xmlns:a="http://schemas.openxmlformats.org/drawingml/2006/main">
+            <a:pPr algn="l">
+              <a:defRPr sz="2250" b="1" i="0">
+                <a:solidFill>
+                  <a:srgbClr val="D95D53"/>
+                </a:solidFill>
+                <a:latin typeface="Aptos"/>
+                <a:ea typeface="Aptos"/>
+                <a:cs typeface="Aptos"/>
+              </a:defRPr>
+            </a:pPr>
+            <a:r>
+              <a:rPr sz="2250" b="1" i="0">
+                <a:solidFill>
+                  <a:srgbClr val="D95D53"/>
+                </a:solidFill>
+                <a:latin typeface="Aptos"/>
+                <a:ea typeface="Aptos"/>
+                <a:cs typeface="Aptos"/>
+              </a:rPr>
+              <a:t>0.8260</a:t>
+            </a:r>
+          </a:p>
+        </p:txBody>
+      </p:sp>
+      <p:sp>
+        <p:nvSpPr>
+          <p:cNvPr id="11" name="">
+            <a:extLst xmlns:a="http://schemas.openxmlformats.org/drawingml/2006/main">
+              <a:ext uri="{FF2B5EF4-FFF2-40B4-BE49-F238E27FC236}">
+                <a16:creationId xmlns:a16="http://schemas.microsoft.com/office/drawing/2014/main" id="{C7C03CFE-7207-4E7A-9ED6-10DB21FE2D3F}"/>
+              </a:ext>
+            </a:extLst>
+          </p:cNvPr>
+          <p:cNvSpPr>
+            <a:spLocks xmlns:a="http://schemas.openxmlformats.org/drawingml/2006/main" noGrp="1"/>
+          </p:cNvSpPr>
+          <p:nvPr/>
+        </p:nvSpPr>
+        <p:spPr>
+          <a:xfrm xmlns:a="http://schemas.openxmlformats.org/drawingml/2006/main">
+            <a:off x="647700" y="3429000"/>
+            <a:ext cx="4953000" cy="342900"/>
+          </a:xfrm>
+          <a:prstGeom xmlns:a="http://schemas.openxmlformats.org/drawingml/2006/main" prst="rect">
+            <a:avLst/>
+          </a:prstGeom>
+          <a:noFill xmlns:a="http://schemas.openxmlformats.org/drawingml/2006/main"/>
+          <a:ln xmlns:a="http://schemas.openxmlformats.org/drawingml/2006/main" w="0">
+            <a:noFill/>
+            <a:prstDash val="solid"/>
+          </a:ln>
+        </p:spPr>
+        <p:txBody>
+          <a:bodyPr xmlns:a="http://schemas.openxmlformats.org/drawingml/2006/main" wrap="square" lIns="0" tIns="0" rIns="0" bIns="0" anchor="t">
+            <a:normAutofit fontScale="95812"/>
+          </a:bodyPr>
+          <a:lstStyle xmlns:a="http://schemas.openxmlformats.org/drawingml/2006/main"/>
+          <a:p xmlns:a="http://schemas.openxmlformats.org/drawingml/2006/main">
+            <a:pPr algn="l">
+              <a:defRPr sz="1500" b="1" i="0">
+                <a:solidFill>
+                  <a:srgbClr val="102A43"/>
+                </a:solidFill>
+                <a:latin typeface="Aptos"/>
+                <a:ea typeface="Aptos"/>
+                <a:cs typeface="Aptos"/>
+              </a:defRPr>
+            </a:pPr>
+            <a:r>
+              <a:rPr sz="1500" b="1" i="0">
+                <a:solidFill>
+                  <a:srgbClr val="102A43"/>
+                </a:solidFill>
+                <a:latin typeface="Aptos"/>
+                <a:ea typeface="Aptos"/>
+                <a:cs typeface="Aptos"/>
+              </a:rPr>
+              <a:t>Approximately the top 39% of actually rated participants.</a:t>
+            </a:r>
+          </a:p>
+        </p:txBody>
+      </p:sp>
+      <p:sp>
+        <p:nvSpPr>
+          <p:cNvPr id="12" name="">
+            <a:extLst xmlns:a="http://schemas.openxmlformats.org/drawingml/2006/main">
+              <a:ext uri="{FF2B5EF4-FFF2-40B4-BE49-F238E27FC236}">
+                <a16:creationId xmlns:a16="http://schemas.microsoft.com/office/drawing/2014/main" id="{F68B0729-DAD6-4E43-B4DC-5B2E44F57072}"/>
+              </a:ext>
+            </a:extLst>
+          </p:cNvPr>
+          <p:cNvSpPr>
+            <a:spLocks xmlns:a="http://schemas.openxmlformats.org/drawingml/2006/main" noGrp="1"/>
+          </p:cNvSpPr>
+          <p:nvPr/>
+        </p:nvSpPr>
+        <p:spPr>
+          <a:xfrm xmlns:a="http://schemas.openxmlformats.org/drawingml/2006/main">
+            <a:off x="666750" y="4076700"/>
             <a:ext cx="76200" cy="76200"/>
           </a:xfrm>
           <a:prstGeom xmlns:a="http://schemas.openxmlformats.org/drawingml/2006/main" prst="ellipse">
@@ -11381,22 +11765,22 @@
       </p:sp>
       <p:sp>
         <p:nvSpPr>
-          <p:cNvPr id="7" name="">
-            <a:extLst xmlns:a="http://schemas.openxmlformats.org/drawingml/2006/main">
-              <a:ext uri="{FF2B5EF4-FFF2-40B4-BE49-F238E27FC236}">
-                <a16:creationId xmlns:a16="http://schemas.microsoft.com/office/drawing/2014/main" id="{E6F50831-4016-47E2-9212-5CF70D675901}"/>
-              </a:ext>
-            </a:extLst>
-          </p:cNvPr>
-          <p:cNvSpPr>
-            <a:spLocks xmlns:a="http://schemas.openxmlformats.org/drawingml/2006/main" noGrp="1"/>
-          </p:cNvSpPr>
-          <p:nvPr/>
-        </p:nvSpPr>
-        <p:spPr>
-          <a:xfrm xmlns:a="http://schemas.openxmlformats.org/drawingml/2006/main">
-            <a:off x="876300" y="2476500"/>
-            <a:ext cx="4743450" cy="571500"/>
+          <p:cNvPr id="13" name="">
+            <a:extLst xmlns:a="http://schemas.openxmlformats.org/drawingml/2006/main">
+              <a:ext uri="{FF2B5EF4-FFF2-40B4-BE49-F238E27FC236}">
+                <a16:creationId xmlns:a16="http://schemas.microsoft.com/office/drawing/2014/main" id="{DBCFC600-DA63-4BF0-BC60-4261637A74AC}"/>
+              </a:ext>
+            </a:extLst>
+          </p:cNvPr>
+          <p:cNvSpPr>
+            <a:spLocks xmlns:a="http://schemas.openxmlformats.org/drawingml/2006/main" noGrp="1"/>
+          </p:cNvSpPr>
+          <p:nvPr/>
+        </p:nvSpPr>
+        <p:spPr>
+          <a:xfrm xmlns:a="http://schemas.openxmlformats.org/drawingml/2006/main">
+            <a:off x="876300" y="4000500"/>
+            <a:ext cx="4933950" cy="533400"/>
           </a:xfrm>
           <a:prstGeom xmlns:a="http://schemas.openxmlformats.org/drawingml/2006/main" prst="rect">
             <a:avLst/>
@@ -11432,28 +11816,28 @@
                 <a:ea typeface="Aptos"/>
                 <a:cs typeface="Aptos"/>
               </a:rPr>
-              <a:t>It ranks better than the dummy and logistic baseline.</a:t>
-            </a:r>
-          </a:p>
-        </p:txBody>
-      </p:sp>
-      <p:sp>
-        <p:nvSpPr>
-          <p:cNvPr id="8" name="">
-            <a:extLst xmlns:a="http://schemas.openxmlformats.org/drawingml/2006/main">
-              <a:ext uri="{FF2B5EF4-FFF2-40B4-BE49-F238E27FC236}">
-                <a16:creationId xmlns:a16="http://schemas.microsoft.com/office/drawing/2014/main" id="{B8BF6B10-0065-4BB0-A8FB-8CAA2893628E}"/>
-              </a:ext>
-            </a:extLst>
-          </p:cNvPr>
-          <p:cNvSpPr>
-            <a:spLocks xmlns:a="http://schemas.openxmlformats.org/drawingml/2006/main" noGrp="1"/>
-          </p:cNvSpPr>
-          <p:nvPr/>
-        </p:nvSpPr>
-        <p:spPr>
-          <a:xfrm xmlns:a="http://schemas.openxmlformats.org/drawingml/2006/main">
-            <a:off x="666750" y="3048000"/>
+              <a:t>One submission at the time of the screenshot.</a:t>
+            </a:r>
+          </a:p>
+        </p:txBody>
+      </p:sp>
+      <p:sp>
+        <p:nvSpPr>
+          <p:cNvPr id="14" name="">
+            <a:extLst xmlns:a="http://schemas.openxmlformats.org/drawingml/2006/main">
+              <a:ext uri="{FF2B5EF4-FFF2-40B4-BE49-F238E27FC236}">
+                <a16:creationId xmlns:a16="http://schemas.microsoft.com/office/drawing/2014/main" id="{B21BA02A-0F57-483C-97C3-5F5DDF97D498}"/>
+              </a:ext>
+            </a:extLst>
+          </p:cNvPr>
+          <p:cNvSpPr>
+            <a:spLocks xmlns:a="http://schemas.openxmlformats.org/drawingml/2006/main" noGrp="1"/>
+          </p:cNvSpPr>
+          <p:nvPr/>
+        </p:nvSpPr>
+        <p:spPr>
+          <a:xfrm xmlns:a="http://schemas.openxmlformats.org/drawingml/2006/main">
+            <a:off x="666750" y="4533900"/>
             <a:ext cx="76200" cy="76200"/>
           </a:xfrm>
           <a:prstGeom xmlns:a="http://schemas.openxmlformats.org/drawingml/2006/main" prst="ellipse">
@@ -11472,22 +11856,22 @@
       </p:sp>
       <p:sp>
         <p:nvSpPr>
-          <p:cNvPr id="9" name="">
-            <a:extLst xmlns:a="http://schemas.openxmlformats.org/drawingml/2006/main">
-              <a:ext uri="{FF2B5EF4-FFF2-40B4-BE49-F238E27FC236}">
-                <a16:creationId xmlns:a16="http://schemas.microsoft.com/office/drawing/2014/main" id="{B2B6D6DA-0F06-4AF6-8437-8368DB92273B}"/>
-              </a:ext>
-            </a:extLst>
-          </p:cNvPr>
-          <p:cNvSpPr>
-            <a:spLocks xmlns:a="http://schemas.openxmlformats.org/drawingml/2006/main" noGrp="1"/>
-          </p:cNvSpPr>
-          <p:nvPr/>
-        </p:nvSpPr>
-        <p:spPr>
-          <a:xfrm xmlns:a="http://schemas.openxmlformats.org/drawingml/2006/main">
-            <a:off x="876300" y="2971800"/>
-            <a:ext cx="4743450" cy="571500"/>
+          <p:cNvPr id="15" name="">
+            <a:extLst xmlns:a="http://schemas.openxmlformats.org/drawingml/2006/main">
+              <a:ext uri="{FF2B5EF4-FFF2-40B4-BE49-F238E27FC236}">
+                <a16:creationId xmlns:a16="http://schemas.microsoft.com/office/drawing/2014/main" id="{EC1622D9-D175-4FCD-B905-8969C50F01F2}"/>
+              </a:ext>
+            </a:extLst>
+          </p:cNvPr>
+          <p:cNvSpPr>
+            <a:spLocks xmlns:a="http://schemas.openxmlformats.org/drawingml/2006/main" noGrp="1"/>
+          </p:cNvSpPr>
+          <p:nvPr/>
+        </p:nvSpPr>
+        <p:spPr>
+          <a:xfrm xmlns:a="http://schemas.openxmlformats.org/drawingml/2006/main">
+            <a:off x="876300" y="4457700"/>
+            <a:ext cx="4933950" cy="533400"/>
           </a:xfrm>
           <a:prstGeom xmlns:a="http://schemas.openxmlformats.org/drawingml/2006/main" prst="rect">
             <a:avLst/>
@@ -11523,28 +11907,28 @@
                 <a:ea typeface="Aptos"/>
                 <a:cs typeface="Aptos"/>
               </a:rPr>
-              <a:t>It captures useful signal in a one-time holdout check.</a:t>
-            </a:r>
-          </a:p>
-        </p:txBody>
-      </p:sp>
-      <p:sp>
-        <p:nvSpPr>
-          <p:cNvPr id="10" name="">
-            <a:extLst xmlns:a="http://schemas.openxmlformats.org/drawingml/2006/main">
-              <a:ext uri="{FF2B5EF4-FFF2-40B4-BE49-F238E27FC236}">
-                <a16:creationId xmlns:a16="http://schemas.microsoft.com/office/drawing/2014/main" id="{3AB5AD92-73B3-4F11-BB93-406A3E395554}"/>
-              </a:ext>
-            </a:extLst>
-          </p:cNvPr>
-          <p:cNvSpPr>
-            <a:spLocks xmlns:a="http://schemas.openxmlformats.org/drawingml/2006/main" noGrp="1"/>
-          </p:cNvSpPr>
-          <p:nvPr/>
-        </p:nvSpPr>
-        <p:spPr>
-          <a:xfrm xmlns:a="http://schemas.openxmlformats.org/drawingml/2006/main">
-            <a:off x="666750" y="3543300"/>
+              <a:t>A positive external check beyond our local CV and holdout numbers.</a:t>
+            </a:r>
+          </a:p>
+        </p:txBody>
+      </p:sp>
+      <p:sp>
+        <p:nvSpPr>
+          <p:cNvPr id="16" name="">
+            <a:extLst xmlns:a="http://schemas.openxmlformats.org/drawingml/2006/main">
+              <a:ext uri="{FF2B5EF4-FFF2-40B4-BE49-F238E27FC236}">
+                <a16:creationId xmlns:a16="http://schemas.microsoft.com/office/drawing/2014/main" id="{15F63981-31C2-4646-89A6-34861F9EFA46}"/>
+              </a:ext>
+            </a:extLst>
+          </p:cNvPr>
+          <p:cNvSpPr>
+            <a:spLocks xmlns:a="http://schemas.openxmlformats.org/drawingml/2006/main" noGrp="1"/>
+          </p:cNvSpPr>
+          <p:nvPr/>
+        </p:nvSpPr>
+        <p:spPr>
+          <a:xfrm xmlns:a="http://schemas.openxmlformats.org/drawingml/2006/main">
+            <a:off x="666750" y="4991100"/>
             <a:ext cx="76200" cy="76200"/>
           </a:xfrm>
           <a:prstGeom xmlns:a="http://schemas.openxmlformats.org/drawingml/2006/main" prst="ellipse">
@@ -11563,22 +11947,22 @@
       </p:sp>
       <p:sp>
         <p:nvSpPr>
-          <p:cNvPr id="11" name="">
-            <a:extLst xmlns:a="http://schemas.openxmlformats.org/drawingml/2006/main">
-              <a:ext uri="{FF2B5EF4-FFF2-40B4-BE49-F238E27FC236}">
-                <a16:creationId xmlns:a16="http://schemas.microsoft.com/office/drawing/2014/main" id="{F7D5C6C0-2490-42DF-8955-63FFFD060808}"/>
-              </a:ext>
-            </a:extLst>
-          </p:cNvPr>
-          <p:cNvSpPr>
-            <a:spLocks xmlns:a="http://schemas.openxmlformats.org/drawingml/2006/main" noGrp="1"/>
-          </p:cNvSpPr>
-          <p:nvPr/>
-        </p:nvSpPr>
-        <p:spPr>
-          <a:xfrm xmlns:a="http://schemas.openxmlformats.org/drawingml/2006/main">
-            <a:off x="876300" y="3467100"/>
-            <a:ext cx="4743450" cy="571500"/>
+          <p:cNvPr id="17" name="">
+            <a:extLst xmlns:a="http://schemas.openxmlformats.org/drawingml/2006/main">
+              <a:ext uri="{FF2B5EF4-FFF2-40B4-BE49-F238E27FC236}">
+                <a16:creationId xmlns:a16="http://schemas.microsoft.com/office/drawing/2014/main" id="{1137E5E7-1F40-48EB-B86D-2D35BE790225}"/>
+              </a:ext>
+            </a:extLst>
+          </p:cNvPr>
+          <p:cNvSpPr>
+            <a:spLocks xmlns:a="http://schemas.openxmlformats.org/drawingml/2006/main" noGrp="1"/>
+          </p:cNvSpPr>
+          <p:nvPr/>
+        </p:nvSpPr>
+        <p:spPr>
+          <a:xfrm xmlns:a="http://schemas.openxmlformats.org/drawingml/2006/main">
+            <a:off x="876300" y="4914900"/>
+            <a:ext cx="4933950" cy="533400"/>
           </a:xfrm>
           <a:prstGeom xmlns:a="http://schemas.openxmlformats.org/drawingml/2006/main" prst="rect">
             <a:avLst/>
@@ -11614,439 +11998,99 @@
                 <a:ea typeface="Aptos"/>
                 <a:cs typeface="Aptos"/>
               </a:rPr>
-              <a:t>It gives inspectors a consistent shortlist to evaluate.</a:t>
-            </a:r>
-          </a:p>
-        </p:txBody>
-      </p:sp>
-      <p:sp>
-        <p:nvSpPr>
-          <p:cNvPr id="12" name="">
-            <a:extLst xmlns:a="http://schemas.openxmlformats.org/drawingml/2006/main">
-              <a:ext uri="{FF2B5EF4-FFF2-40B4-BE49-F238E27FC236}">
-                <a16:creationId xmlns:a16="http://schemas.microsoft.com/office/drawing/2014/main" id="{111A42AD-19B7-42A6-B724-CB1CCF17CB37}"/>
-              </a:ext>
-            </a:extLst>
-          </p:cNvPr>
-          <p:cNvSpPr>
-            <a:spLocks xmlns:a="http://schemas.openxmlformats.org/drawingml/2006/main" noGrp="1"/>
-          </p:cNvSpPr>
-          <p:nvPr/>
-        </p:nvSpPr>
-        <p:spPr>
-          <a:xfrm xmlns:a="http://schemas.openxmlformats.org/drawingml/2006/main">
-            <a:off x="6477000" y="2000250"/>
-            <a:ext cx="4000500" cy="285750"/>
-          </a:xfrm>
-          <a:prstGeom xmlns:a="http://schemas.openxmlformats.org/drawingml/2006/main" prst="rect">
-            <a:avLst/>
-          </a:prstGeom>
-          <a:noFill xmlns:a="http://schemas.openxmlformats.org/drawingml/2006/main"/>
-          <a:ln xmlns:a="http://schemas.openxmlformats.org/drawingml/2006/main" w="0">
-            <a:noFill/>
-            <a:prstDash val="solid"/>
-          </a:ln>
-        </p:spPr>
-        <p:txBody>
-          <a:bodyPr xmlns:a="http://schemas.openxmlformats.org/drawingml/2006/main" wrap="square" lIns="0" tIns="0" rIns="0" bIns="0" anchor="t">
-            <a:normAutofit fontScale="100000"/>
-          </a:bodyPr>
-          <a:lstStyle xmlns:a="http://schemas.openxmlformats.org/drawingml/2006/main"/>
-          <a:p xmlns:a="http://schemas.openxmlformats.org/drawingml/2006/main">
-            <a:pPr algn="l">
-              <a:defRPr sz="1800" b="1" i="0">
-                <a:solidFill>
-                  <a:srgbClr val="D95D53"/>
-                </a:solidFill>
-                <a:latin typeface="Aptos"/>
-                <a:ea typeface="Aptos"/>
-                <a:cs typeface="Aptos"/>
-              </a:defRPr>
-            </a:pPr>
-            <a:r>
-              <a:rPr sz="1800" b="1" i="0">
-                <a:solidFill>
-                  <a:srgbClr val="D95D53"/>
-                </a:solidFill>
-                <a:latin typeface="Aptos"/>
-                <a:ea typeface="Aptos"/>
-                <a:cs typeface="Aptos"/>
-              </a:rPr>
-              <a:t>What we cannot claim</a:t>
-            </a:r>
-          </a:p>
-        </p:txBody>
-      </p:sp>
-      <p:sp>
-        <p:nvSpPr>
-          <p:cNvPr id="13" name="">
-            <a:extLst xmlns:a="http://schemas.openxmlformats.org/drawingml/2006/main">
-              <a:ext uri="{FF2B5EF4-FFF2-40B4-BE49-F238E27FC236}">
-                <a16:creationId xmlns:a16="http://schemas.microsoft.com/office/drawing/2014/main" id="{C93AD54D-CC85-4940-A6D1-4093624C1D84}"/>
-              </a:ext>
-            </a:extLst>
-          </p:cNvPr>
-          <p:cNvSpPr>
-            <a:spLocks xmlns:a="http://schemas.openxmlformats.org/drawingml/2006/main" noGrp="1"/>
-          </p:cNvSpPr>
-          <p:nvPr/>
-        </p:nvSpPr>
-        <p:spPr>
-          <a:xfrm xmlns:a="http://schemas.openxmlformats.org/drawingml/2006/main">
-            <a:off x="6496050" y="2552700"/>
-            <a:ext cx="76200" cy="76200"/>
-          </a:xfrm>
-          <a:prstGeom xmlns:a="http://schemas.openxmlformats.org/drawingml/2006/main" prst="ellipse">
-            <a:avLst/>
-          </a:prstGeom>
-          <a:solidFill xmlns:a="http://schemas.openxmlformats.org/drawingml/2006/main">
-            <a:srgbClr val="D95D53"/>
-          </a:solidFill>
-          <a:ln xmlns:a="http://schemas.openxmlformats.org/drawingml/2006/main" w="0">
-            <a:solidFill>
-              <a:srgbClr val="D95D53"/>
-            </a:solidFill>
-            <a:prstDash val="solid"/>
-          </a:ln>
-        </p:spPr>
-      </p:sp>
-      <p:sp>
-        <p:nvSpPr>
-          <p:cNvPr id="14" name="">
-            <a:extLst xmlns:a="http://schemas.openxmlformats.org/drawingml/2006/main">
-              <a:ext uri="{FF2B5EF4-FFF2-40B4-BE49-F238E27FC236}">
-                <a16:creationId xmlns:a16="http://schemas.microsoft.com/office/drawing/2014/main" id="{E073E744-DA70-4C6E-A919-38BE1C201EA9}"/>
-              </a:ext>
-            </a:extLst>
-          </p:cNvPr>
-          <p:cNvSpPr>
-            <a:spLocks xmlns:a="http://schemas.openxmlformats.org/drawingml/2006/main" noGrp="1"/>
-          </p:cNvSpPr>
-          <p:nvPr/>
-        </p:nvSpPr>
-        <p:spPr>
-          <a:xfrm xmlns:a="http://schemas.openxmlformats.org/drawingml/2006/main">
-            <a:off x="6705600" y="2476500"/>
-            <a:ext cx="4743450" cy="571500"/>
-          </a:xfrm>
-          <a:prstGeom xmlns:a="http://schemas.openxmlformats.org/drawingml/2006/main" prst="rect">
-            <a:avLst/>
-          </a:prstGeom>
-          <a:noFill xmlns:a="http://schemas.openxmlformats.org/drawingml/2006/main"/>
-          <a:ln xmlns:a="http://schemas.openxmlformats.org/drawingml/2006/main" w="0">
-            <a:noFill/>
-            <a:prstDash val="solid"/>
-          </a:ln>
-        </p:spPr>
-        <p:txBody>
-          <a:bodyPr xmlns:a="http://schemas.openxmlformats.org/drawingml/2006/main" wrap="square" lIns="0" tIns="0" rIns="0" bIns="0" anchor="t">
-            <a:normAutofit fontScale="100000"/>
-          </a:bodyPr>
-          <a:lstStyle xmlns:a="http://schemas.openxmlformats.org/drawingml/2006/main"/>
-          <a:p xmlns:a="http://schemas.openxmlformats.org/drawingml/2006/main">
-            <a:pPr algn="l">
-              <a:defRPr sz="1275" b="0" i="0">
-                <a:solidFill>
-                  <a:srgbClr val="18232C"/>
-                </a:solidFill>
-                <a:latin typeface="Aptos"/>
-                <a:ea typeface="Aptos"/>
-                <a:cs typeface="Aptos"/>
-              </a:defRPr>
-            </a:pPr>
-            <a:r>
-              <a:rPr sz="1275" b="0" i="0">
-                <a:solidFill>
-                  <a:srgbClr val="18232C"/>
-                </a:solidFill>
-                <a:latin typeface="Aptos"/>
-                <a:ea typeface="Aptos"/>
-                <a:cs typeface="Aptos"/>
-              </a:rPr>
-              <a:t>It does not prove that a client is committing fraud.</a:t>
-            </a:r>
-          </a:p>
-        </p:txBody>
-      </p:sp>
-      <p:sp>
-        <p:nvSpPr>
-          <p:cNvPr id="15" name="">
-            <a:extLst xmlns:a="http://schemas.openxmlformats.org/drawingml/2006/main">
-              <a:ext uri="{FF2B5EF4-FFF2-40B4-BE49-F238E27FC236}">
-                <a16:creationId xmlns:a16="http://schemas.microsoft.com/office/drawing/2014/main" id="{B13C54B7-1329-4235-A1D7-D3AF53187C15}"/>
-              </a:ext>
-            </a:extLst>
-          </p:cNvPr>
-          <p:cNvSpPr>
-            <a:spLocks xmlns:a="http://schemas.openxmlformats.org/drawingml/2006/main" noGrp="1"/>
-          </p:cNvSpPr>
-          <p:nvPr/>
-        </p:nvSpPr>
-        <p:spPr>
-          <a:xfrm xmlns:a="http://schemas.openxmlformats.org/drawingml/2006/main">
-            <a:off x="6496050" y="3048000"/>
-            <a:ext cx="76200" cy="76200"/>
-          </a:xfrm>
-          <a:prstGeom xmlns:a="http://schemas.openxmlformats.org/drawingml/2006/main" prst="ellipse">
-            <a:avLst/>
-          </a:prstGeom>
-          <a:solidFill xmlns:a="http://schemas.openxmlformats.org/drawingml/2006/main">
-            <a:srgbClr val="D95D53"/>
-          </a:solidFill>
-          <a:ln xmlns:a="http://schemas.openxmlformats.org/drawingml/2006/main" w="0">
-            <a:solidFill>
-              <a:srgbClr val="D95D53"/>
-            </a:solidFill>
-            <a:prstDash val="solid"/>
-          </a:ln>
-        </p:spPr>
-      </p:sp>
-      <p:sp>
-        <p:nvSpPr>
-          <p:cNvPr id="16" name="">
-            <a:extLst xmlns:a="http://schemas.openxmlformats.org/drawingml/2006/main">
-              <a:ext uri="{FF2B5EF4-FFF2-40B4-BE49-F238E27FC236}">
-                <a16:creationId xmlns:a16="http://schemas.microsoft.com/office/drawing/2014/main" id="{BF222A59-1927-4CAD-8589-D049D81A3C9D}"/>
-              </a:ext>
-            </a:extLst>
-          </p:cNvPr>
-          <p:cNvSpPr>
-            <a:spLocks xmlns:a="http://schemas.openxmlformats.org/drawingml/2006/main" noGrp="1"/>
-          </p:cNvSpPr>
-          <p:nvPr/>
-        </p:nvSpPr>
-        <p:spPr>
-          <a:xfrm xmlns:a="http://schemas.openxmlformats.org/drawingml/2006/main">
-            <a:off x="6705600" y="2971800"/>
-            <a:ext cx="4743450" cy="571500"/>
-          </a:xfrm>
-          <a:prstGeom xmlns:a="http://schemas.openxmlformats.org/drawingml/2006/main" prst="rect">
-            <a:avLst/>
-          </a:prstGeom>
-          <a:noFill xmlns:a="http://schemas.openxmlformats.org/drawingml/2006/main"/>
-          <a:ln xmlns:a="http://schemas.openxmlformats.org/drawingml/2006/main" w="0">
-            <a:noFill/>
-            <a:prstDash val="solid"/>
-          </a:ln>
-        </p:spPr>
-        <p:txBody>
-          <a:bodyPr xmlns:a="http://schemas.openxmlformats.org/drawingml/2006/main" wrap="square" lIns="0" tIns="0" rIns="0" bIns="0" anchor="t">
-            <a:normAutofit fontScale="100000"/>
-          </a:bodyPr>
-          <a:lstStyle xmlns:a="http://schemas.openxmlformats.org/drawingml/2006/main"/>
-          <a:p xmlns:a="http://schemas.openxmlformats.org/drawingml/2006/main">
-            <a:pPr algn="l">
-              <a:defRPr sz="1275" b="0" i="0">
-                <a:solidFill>
-                  <a:srgbClr val="18232C"/>
-                </a:solidFill>
-                <a:latin typeface="Aptos"/>
-                <a:ea typeface="Aptos"/>
-                <a:cs typeface="Aptos"/>
-              </a:defRPr>
-            </a:pPr>
-            <a:r>
-              <a:rPr sz="1275" b="0" i="0">
-                <a:solidFill>
-                  <a:srgbClr val="18232C"/>
-                </a:solidFill>
-                <a:latin typeface="Aptos"/>
-                <a:ea typeface="Aptos"/>
-                <a:cs typeface="Aptos"/>
-              </a:rPr>
-              <a:t>It is not equally reliable across regions or history lengths.</a:t>
-            </a:r>
-          </a:p>
-        </p:txBody>
-      </p:sp>
-      <p:sp>
-        <p:nvSpPr>
-          <p:cNvPr id="17" name="">
-            <a:extLst xmlns:a="http://schemas.openxmlformats.org/drawingml/2006/main">
-              <a:ext uri="{FF2B5EF4-FFF2-40B4-BE49-F238E27FC236}">
-                <a16:creationId xmlns:a16="http://schemas.microsoft.com/office/drawing/2014/main" id="{2C137DF2-8C20-4B03-A68D-75F2DF1AACE2}"/>
-              </a:ext>
-            </a:extLst>
-          </p:cNvPr>
-          <p:cNvSpPr>
-            <a:spLocks xmlns:a="http://schemas.openxmlformats.org/drawingml/2006/main" noGrp="1"/>
-          </p:cNvSpPr>
-          <p:nvPr/>
-        </p:nvSpPr>
-        <p:spPr>
-          <a:xfrm xmlns:a="http://schemas.openxmlformats.org/drawingml/2006/main">
-            <a:off x="6496050" y="3543300"/>
-            <a:ext cx="76200" cy="76200"/>
-          </a:xfrm>
-          <a:prstGeom xmlns:a="http://schemas.openxmlformats.org/drawingml/2006/main" prst="ellipse">
-            <a:avLst/>
-          </a:prstGeom>
-          <a:solidFill xmlns:a="http://schemas.openxmlformats.org/drawingml/2006/main">
-            <a:srgbClr val="D95D53"/>
-          </a:solidFill>
-          <a:ln xmlns:a="http://schemas.openxmlformats.org/drawingml/2006/main" w="0">
-            <a:solidFill>
-              <a:srgbClr val="D95D53"/>
-            </a:solidFill>
-            <a:prstDash val="solid"/>
-          </a:ln>
-        </p:spPr>
-      </p:sp>
-      <p:sp>
-        <p:nvSpPr>
-          <p:cNvPr id="18" name="">
-            <a:extLst xmlns:a="http://schemas.openxmlformats.org/drawingml/2006/main">
-              <a:ext uri="{FF2B5EF4-FFF2-40B4-BE49-F238E27FC236}">
-                <a16:creationId xmlns:a16="http://schemas.microsoft.com/office/drawing/2014/main" id="{D645DFA7-AD1E-43F0-9B72-B7FE4B435A56}"/>
-              </a:ext>
-            </a:extLst>
-          </p:cNvPr>
-          <p:cNvSpPr>
-            <a:spLocks xmlns:a="http://schemas.openxmlformats.org/drawingml/2006/main" noGrp="1"/>
-          </p:cNvSpPr>
-          <p:nvPr/>
-        </p:nvSpPr>
-        <p:spPr>
-          <a:xfrm xmlns:a="http://schemas.openxmlformats.org/drawingml/2006/main">
-            <a:off x="6705600" y="3467100"/>
-            <a:ext cx="4743450" cy="571500"/>
-          </a:xfrm>
-          <a:prstGeom xmlns:a="http://schemas.openxmlformats.org/drawingml/2006/main" prst="rect">
-            <a:avLst/>
-          </a:prstGeom>
-          <a:noFill xmlns:a="http://schemas.openxmlformats.org/drawingml/2006/main"/>
-          <a:ln xmlns:a="http://schemas.openxmlformats.org/drawingml/2006/main" w="0">
-            <a:noFill/>
-            <a:prstDash val="solid"/>
-          </a:ln>
-        </p:spPr>
-        <p:txBody>
-          <a:bodyPr xmlns:a="http://schemas.openxmlformats.org/drawingml/2006/main" wrap="square" lIns="0" tIns="0" rIns="0" bIns="0" anchor="t">
-            <a:normAutofit fontScale="100000"/>
-          </a:bodyPr>
-          <a:lstStyle xmlns:a="http://schemas.openxmlformats.org/drawingml/2006/main"/>
-          <a:p xmlns:a="http://schemas.openxmlformats.org/drawingml/2006/main">
-            <a:pPr algn="l">
-              <a:defRPr sz="1275" b="0" i="0">
-                <a:solidFill>
-                  <a:srgbClr val="18232C"/>
-                </a:solidFill>
-                <a:latin typeface="Aptos"/>
-                <a:ea typeface="Aptos"/>
-                <a:cs typeface="Aptos"/>
-              </a:defRPr>
-            </a:pPr>
-            <a:r>
-              <a:rPr sz="1275" b="0" i="0">
-                <a:solidFill>
-                  <a:srgbClr val="18232C"/>
-                </a:solidFill>
-                <a:latin typeface="Aptos"/>
-                <a:ea typeface="Aptos"/>
-                <a:cs typeface="Aptos"/>
-              </a:rPr>
-              <a:t>A random split does not prove future-time performance.</a:t>
-            </a:r>
-          </a:p>
-        </p:txBody>
-      </p:sp>
-      <p:sp>
-        <p:nvSpPr>
-          <p:cNvPr id="19" name="">
-            <a:extLst xmlns:a="http://schemas.openxmlformats.org/drawingml/2006/main">
-              <a:ext uri="{FF2B5EF4-FFF2-40B4-BE49-F238E27FC236}">
-                <a16:creationId xmlns:a16="http://schemas.microsoft.com/office/drawing/2014/main" id="{CAE79389-4A24-42A4-A4A1-4DEA2DDE819B}"/>
-              </a:ext>
-            </a:extLst>
-          </p:cNvPr>
-          <p:cNvSpPr>
-            <a:spLocks xmlns:a="http://schemas.openxmlformats.org/drawingml/2006/main" noGrp="1"/>
-          </p:cNvSpPr>
-          <p:nvPr/>
-        </p:nvSpPr>
-        <p:spPr>
-          <a:xfrm xmlns:a="http://schemas.openxmlformats.org/drawingml/2006/main">
-            <a:off x="647700" y="4686300"/>
-            <a:ext cx="10801350" cy="914400"/>
+              <a:t>Kaggle’s public leaderboard is provisional until the competition closes.</a:t>
+            </a:r>
+          </a:p>
+        </p:txBody>
+      </p:sp>
+      <p:pic>
+        <p:nvPicPr>
+          <p:cNvPr id="40" name=""/>
+          <p:cNvPicPr>
+            <a:picLocks xmlns:a="http://schemas.openxmlformats.org/drawingml/2006/main" noChangeAspect="1"/>
+          </p:cNvPicPr>
+          <p:nvPr/>
+        </p:nvPicPr>
+        <p:blipFill>
+          <a:blip xmlns:r="http://schemas.openxmlformats.org/officeDocument/2006/relationships" xmlns:a="http://schemas.openxmlformats.org/drawingml/2006/main" r:embed="Rde07263087754afd"/>
+          <a:stretch xmlns:a="http://schemas.openxmlformats.org/drawingml/2006/main"/>
+        </p:blipFill>
+        <p:spPr>
+          <a:xfrm xmlns:a="http://schemas.openxmlformats.org/drawingml/2006/main">
+            <a:off x="6572250" y="2027818"/>
+            <a:ext cx="4762500" cy="3573890"/>
           </a:xfrm>
           <a:prstGeom xmlns:a="http://schemas.openxmlformats.org/drawingml/2006/main" prst="roundRect">
             <a:avLst>
-              <a:gd name="adj" fmla="val 8333"/>
+              <a:gd name="adj" fmla="val 2824"/>
             </a:avLst>
           </a:prstGeom>
-          <a:solidFill xmlns:a="http://schemas.openxmlformats.org/drawingml/2006/main">
-            <a:srgbClr val="102A43"/>
-          </a:solidFill>
-          <a:ln xmlns:a="http://schemas.openxmlformats.org/drawingml/2006/main" w="0">
-            <a:noFill/>
-            <a:prstDash val="solid"/>
-          </a:ln>
-        </p:spPr>
+        </p:spPr>
+      </p:pic>
+      <p:sp>
+        <p:nvSpPr>
+          <p:cNvPr id="19" name="">
+            <a:extLst xmlns:a="http://schemas.openxmlformats.org/drawingml/2006/main">
+              <a:ext uri="{FF2B5EF4-FFF2-40B4-BE49-F238E27FC236}">
+                <a16:creationId xmlns:a16="http://schemas.microsoft.com/office/drawing/2014/main" id="{577F6CAA-34BB-4C0F-9ADC-1C495F2BF1B1}"/>
+              </a:ext>
+            </a:extLst>
+          </p:cNvPr>
+          <p:cNvSpPr>
+            <a:spLocks xmlns:a="http://schemas.openxmlformats.org/drawingml/2006/main" noGrp="1"/>
+          </p:cNvSpPr>
+          <p:nvPr/>
+        </p:nvSpPr>
+        <p:spPr>
+          <a:xfrm xmlns:a="http://schemas.openxmlformats.org/drawingml/2006/main">
+            <a:off x="647700" y="5905500"/>
+            <a:ext cx="10477500" cy="266700"/>
+          </a:xfrm>
+          <a:prstGeom xmlns:a="http://schemas.openxmlformats.org/drawingml/2006/main" prst="rect">
+            <a:avLst/>
+          </a:prstGeom>
+          <a:noFill xmlns:a="http://schemas.openxmlformats.org/drawingml/2006/main"/>
+          <a:ln xmlns:a="http://schemas.openxmlformats.org/drawingml/2006/main" w="0">
+            <a:noFill/>
+            <a:prstDash val="solid"/>
+          </a:ln>
+        </p:spPr>
+        <p:txBody>
+          <a:bodyPr xmlns:a="http://schemas.openxmlformats.org/drawingml/2006/main" wrap="square" lIns="0" tIns="0" rIns="0" bIns="0" anchor="t">
+            <a:normAutofit fontScale="100000"/>
+          </a:bodyPr>
+          <a:lstStyle xmlns:a="http://schemas.openxmlformats.org/drawingml/2006/main"/>
+          <a:p xmlns:a="http://schemas.openxmlformats.org/drawingml/2006/main">
+            <a:pPr algn="l">
+              <a:defRPr sz="1350" b="1" i="0">
+                <a:solidFill>
+                  <a:srgbClr val="D95D53"/>
+                </a:solidFill>
+                <a:latin typeface="Aptos"/>
+                <a:ea typeface="Aptos"/>
+                <a:cs typeface="Aptos"/>
+              </a:defRPr>
+            </a:pPr>
+            <a:r>
+              <a:rPr sz="1350" b="1" i="0">
+                <a:solidFill>
+                  <a:srgbClr val="D95D53"/>
+                </a:solidFill>
+                <a:latin typeface="Aptos"/>
+                <a:ea typeface="Aptos"/>
+                <a:cs typeface="Aptos"/>
+              </a:rPr>
+              <a:t>Not a winning claim — a credible first result that makes feature quality and temporal validation the next priorities.</a:t>
+            </a:r>
+          </a:p>
+        </p:txBody>
       </p:sp>
       <p:sp>
         <p:nvSpPr>
           <p:cNvPr id="20" name="">
             <a:extLst xmlns:a="http://schemas.openxmlformats.org/drawingml/2006/main">
               <a:ext uri="{FF2B5EF4-FFF2-40B4-BE49-F238E27FC236}">
-                <a16:creationId xmlns:a16="http://schemas.microsoft.com/office/drawing/2014/main" id="{521068D8-59F7-4A3B-9182-2CDDC580CB1C}"/>
-              </a:ext>
-            </a:extLst>
-          </p:cNvPr>
-          <p:cNvSpPr>
-            <a:spLocks xmlns:a="http://schemas.openxmlformats.org/drawingml/2006/main" noGrp="1"/>
-          </p:cNvSpPr>
-          <p:nvPr/>
-        </p:nvSpPr>
-        <p:spPr>
-          <a:xfrm xmlns:a="http://schemas.openxmlformats.org/drawingml/2006/main">
-            <a:off x="895350" y="4933950"/>
-            <a:ext cx="10287000" cy="419100"/>
-          </a:xfrm>
-          <a:prstGeom xmlns:a="http://schemas.openxmlformats.org/drawingml/2006/main" prst="rect">
-            <a:avLst/>
-          </a:prstGeom>
-          <a:noFill xmlns:a="http://schemas.openxmlformats.org/drawingml/2006/main"/>
-          <a:ln xmlns:a="http://schemas.openxmlformats.org/drawingml/2006/main" w="0">
-            <a:noFill/>
-            <a:prstDash val="solid"/>
-          </a:ln>
-        </p:spPr>
-        <p:txBody>
-          <a:bodyPr xmlns:a="http://schemas.openxmlformats.org/drawingml/2006/main" wrap="square" lIns="0" tIns="0" rIns="0" bIns="0" anchor="ctr">
-            <a:normAutofit fontScale="79710"/>
-          </a:bodyPr>
-          <a:lstStyle xmlns:a="http://schemas.openxmlformats.org/drawingml/2006/main"/>
-          <a:p xmlns:a="http://schemas.openxmlformats.org/drawingml/2006/main">
-            <a:pPr algn="ctr">
-              <a:defRPr sz="1725" b="1" i="0">
-                <a:solidFill>
-                  <a:srgbClr val="FFFFFF"/>
-                </a:solidFill>
-                <a:latin typeface="Aptos"/>
-                <a:ea typeface="Aptos"/>
-                <a:cs typeface="Aptos"/>
-              </a:defRPr>
-            </a:pPr>
-            <a:r>
-              <a:rPr sz="1725" b="1" i="0">
-                <a:solidFill>
-                  <a:srgbClr val="FFFFFF"/>
-                </a:solidFill>
-                <a:latin typeface="Aptos"/>
-                <a:ea typeface="Aptos"/>
-                <a:cs typeface="Aptos"/>
-              </a:rPr>
-              <a:t>Deployment guardrail: choose the inspection capacity first, then set the score threshold and monitor precision/recall by segment.</a:t>
-            </a:r>
-          </a:p>
-        </p:txBody>
-      </p:sp>
-      <p:sp>
-        <p:nvSpPr>
-          <p:cNvPr id="21" name="">
-            <a:extLst xmlns:a="http://schemas.openxmlformats.org/drawingml/2006/main">
-              <a:ext uri="{FF2B5EF4-FFF2-40B4-BE49-F238E27FC236}">
-                <a16:creationId xmlns:a16="http://schemas.microsoft.com/office/drawing/2014/main" id="{2C8EE0A7-A451-47FC-AD94-B00B28BD3B48}"/>
+                <a16:creationId xmlns:a16="http://schemas.microsoft.com/office/drawing/2014/main" id="{16B7847A-A0B5-4AAF-994A-4D971583032B}"/>
               </a:ext>
             </a:extLst>
           </p:cNvPr>
@@ -12076,10 +12120,10 @@
       </p:sp>
       <p:sp>
         <p:nvSpPr>
-          <p:cNvPr id="22" name="">
-            <a:extLst xmlns:a="http://schemas.openxmlformats.org/drawingml/2006/main">
-              <a:ext uri="{FF2B5EF4-FFF2-40B4-BE49-F238E27FC236}">
-                <a16:creationId xmlns:a16="http://schemas.microsoft.com/office/drawing/2014/main" id="{D9C01CC6-CAC8-4A16-8793-3C49A7644151}"/>
+          <p:cNvPr id="21" name="">
+            <a:extLst xmlns:a="http://schemas.openxmlformats.org/drawingml/2006/main">
+              <a:ext uri="{FF2B5EF4-FFF2-40B4-BE49-F238E27FC236}">
+                <a16:creationId xmlns:a16="http://schemas.microsoft.com/office/drawing/2014/main" id="{36100642-7790-470A-B6C7-65D9BE3AB1DA}"/>
               </a:ext>
             </a:extLst>
           </p:cNvPr>
@@ -12134,10 +12178,10 @@
       </p:sp>
       <p:sp>
         <p:nvSpPr>
-          <p:cNvPr id="23" name="">
-            <a:extLst xmlns:a="http://schemas.openxmlformats.org/drawingml/2006/main">
-              <a:ext uri="{FF2B5EF4-FFF2-40B4-BE49-F238E27FC236}">
-                <a16:creationId xmlns:a16="http://schemas.microsoft.com/office/drawing/2014/main" id="{F4E2781B-D2C4-468B-B0F6-CA8CFB52DF75}"/>
+          <p:cNvPr id="22" name="">
+            <a:extLst xmlns:a="http://schemas.openxmlformats.org/drawingml/2006/main">
+              <a:ext uri="{FF2B5EF4-FFF2-40B4-BE49-F238E27FC236}">
+                <a16:creationId xmlns:a16="http://schemas.microsoft.com/office/drawing/2014/main" id="{7C4C02F4-C078-4662-A894-F435AF1A04B5}"/>
               </a:ext>
             </a:extLst>
           </p:cNvPr>
@@ -12193,7 +12237,7 @@
     </p:spTree>
     <p:extLst>
       <p:ext uri="{BB962C8B-B14F-4D97-AF65-F5344CB8AC3E}">
-        <p14:creationId xmlns:p14="http://schemas.microsoft.com/office/powerpoint/2010/main" val="711371459"/>
+        <p14:creationId xmlns:p14="http://schemas.microsoft.com/office/powerpoint/2010/main" val="1385877605"/>
       </p:ext>
     </p:extLst>
   </p:cSld>
@@ -12221,10 +12265,10 @@
       </p:grpSpPr>
       <p:sp>
         <p:nvSpPr>
-          <p:cNvPr id="29" name="">
-            <a:extLst xmlns:a="http://schemas.openxmlformats.org/drawingml/2006/main">
-              <a:ext uri="{FF2B5EF4-FFF2-40B4-BE49-F238E27FC236}">
-                <a16:creationId xmlns:a16="http://schemas.microsoft.com/office/drawing/2014/main" id="{B5C9F78B-F842-4DA7-B15D-97C9089C8EB3}"/>
+          <p:cNvPr id="24" name="">
+            <a:extLst xmlns:a="http://schemas.openxmlformats.org/drawingml/2006/main">
+              <a:ext uri="{FF2B5EF4-FFF2-40B4-BE49-F238E27FC236}">
+                <a16:creationId xmlns:a16="http://schemas.microsoft.com/office/drawing/2014/main" id="{BEE154D2-393A-49F0-9663-C01B9FFED853}"/>
               </a:ext>
             </a:extLst>
           </p:cNvPr>
@@ -12272,7 +12316,7 @@
                 <a:ea typeface="Aptos"/>
                 <a:cs typeface="Aptos"/>
               </a:rPr>
-              <a:t>NEXT ITERATION</a:t>
+              <a:t>RECOMMENDATION</a:t>
             </a:r>
           </a:p>
         </p:txBody>
@@ -12282,7 +12326,7 @@
           <p:cNvPr id="2" name="">
             <a:extLst xmlns:a="http://schemas.openxmlformats.org/drawingml/2006/main">
               <a:ext uri="{FF2B5EF4-FFF2-40B4-BE49-F238E27FC236}">
-                <a16:creationId xmlns:a16="http://schemas.microsoft.com/office/drawing/2014/main" id="{C85B215F-87EA-49AC-B2AD-294B126D750A}"/>
+                <a16:creationId xmlns:a16="http://schemas.microsoft.com/office/drawing/2014/main" id="{BF0332C1-0536-4388-A193-67C5236209D5}"/>
               </a:ext>
             </a:extLst>
           </p:cNvPr>
@@ -12330,7 +12374,7 @@
                 <a:ea typeface="Aptos"/>
                 <a:cs typeface="Aptos"/>
               </a:rPr>
-              <a:t>The next lift is more likely to come from data than tuning</a:t>
+              <a:t>Useful ranking, bounded claim</a:t>
             </a:r>
           </a:p>
         </p:txBody>
@@ -12340,7 +12384,7 @@
           <p:cNvPr id="3" name="">
             <a:extLst xmlns:a="http://schemas.openxmlformats.org/drawingml/2006/main">
               <a:ext uri="{FF2B5EF4-FFF2-40B4-BE49-F238E27FC236}">
-                <a16:creationId xmlns:a16="http://schemas.microsoft.com/office/drawing/2014/main" id="{258B9A27-8DAB-4ABF-807C-164A1AD142BE}"/>
+                <a16:creationId xmlns:a16="http://schemas.microsoft.com/office/drawing/2014/main" id="{F0AB9470-63CB-4F15-BD49-A8ED8ACD6997}"/>
               </a:ext>
             </a:extLst>
           </p:cNvPr>
@@ -12373,7 +12417,7 @@
           <p:cNvPr id="4" name="">
             <a:extLst xmlns:a="http://schemas.openxmlformats.org/drawingml/2006/main">
               <a:ext uri="{FF2B5EF4-FFF2-40B4-BE49-F238E27FC236}">
-                <a16:creationId xmlns:a16="http://schemas.microsoft.com/office/drawing/2014/main" id="{E485BFA2-0DF2-4CEE-89D4-C14DC49EE58F}"/>
+                <a16:creationId xmlns:a16="http://schemas.microsoft.com/office/drawing/2014/main" id="{81A1EA75-91AC-4280-A589-E43914EC9A0A}"/>
               </a:ext>
             </a:extLst>
           </p:cNvPr>
@@ -12421,7 +12465,7 @@
                 <a:ea typeface="Aptos"/>
                 <a:cs typeface="Aptos"/>
               </a:rPr>
-              <a:t>The error analysis tells us where to invest next.</a:t>
+              <a:t>The model is ready for a controlled prioritisation experiment — not an unattended decision.</a:t>
             </a:r>
           </a:p>
         </p:txBody>
@@ -12431,37 +12475,37 @@
           <p:cNvPr id="5" name="">
             <a:extLst xmlns:a="http://schemas.openxmlformats.org/drawingml/2006/main">
               <a:ext uri="{FF2B5EF4-FFF2-40B4-BE49-F238E27FC236}">
-                <a16:creationId xmlns:a16="http://schemas.microsoft.com/office/drawing/2014/main" id="{15EFB3A5-2A82-41AB-B78B-498A8D7B4A74}"/>
-              </a:ext>
-            </a:extLst>
-          </p:cNvPr>
-          <p:cNvSpPr>
-            <a:spLocks xmlns:a="http://schemas.openxmlformats.org/drawingml/2006/main" noGrp="1"/>
-          </p:cNvSpPr>
-          <p:nvPr/>
-        </p:nvSpPr>
-        <p:spPr>
-          <a:xfrm xmlns:a="http://schemas.openxmlformats.org/drawingml/2006/main">
-            <a:off x="723900" y="1885950"/>
-            <a:ext cx="514350" cy="285750"/>
-          </a:xfrm>
-          <a:prstGeom xmlns:a="http://schemas.openxmlformats.org/drawingml/2006/main" prst="rect">
-            <a:avLst/>
-          </a:prstGeom>
-          <a:noFill xmlns:a="http://schemas.openxmlformats.org/drawingml/2006/main"/>
-          <a:ln xmlns:a="http://schemas.openxmlformats.org/drawingml/2006/main" w="0">
-            <a:noFill/>
-            <a:prstDash val="solid"/>
-          </a:ln>
-        </p:spPr>
-        <p:txBody>
-          <a:bodyPr xmlns:a="http://schemas.openxmlformats.org/drawingml/2006/main" wrap="square" lIns="0" tIns="0" rIns="0" bIns="0" anchor="t">
-            <a:normAutofit fontScale="100000"/>
-          </a:bodyPr>
-          <a:lstStyle xmlns:a="http://schemas.openxmlformats.org/drawingml/2006/main"/>
-          <a:p xmlns:a="http://schemas.openxmlformats.org/drawingml/2006/main">
-            <a:pPr algn="l">
-              <a:defRPr sz="1500" b="1" i="0">
+                <a16:creationId xmlns:a16="http://schemas.microsoft.com/office/drawing/2014/main" id="{C2A6046E-3ABF-4CA5-AC06-4CF1F8145638}"/>
+              </a:ext>
+            </a:extLst>
+          </p:cNvPr>
+          <p:cNvSpPr>
+            <a:spLocks xmlns:a="http://schemas.openxmlformats.org/drawingml/2006/main" noGrp="1"/>
+          </p:cNvSpPr>
+          <p:nvPr/>
+        </p:nvSpPr>
+        <p:spPr>
+          <a:xfrm xmlns:a="http://schemas.openxmlformats.org/drawingml/2006/main">
+            <a:off x="647700" y="2000250"/>
+            <a:ext cx="4000500" cy="285750"/>
+          </a:xfrm>
+          <a:prstGeom xmlns:a="http://schemas.openxmlformats.org/drawingml/2006/main" prst="rect">
+            <a:avLst/>
+          </a:prstGeom>
+          <a:noFill xmlns:a="http://schemas.openxmlformats.org/drawingml/2006/main"/>
+          <a:ln xmlns:a="http://schemas.openxmlformats.org/drawingml/2006/main" w="0">
+            <a:noFill/>
+            <a:prstDash val="solid"/>
+          </a:ln>
+        </p:spPr>
+        <p:txBody>
+          <a:bodyPr xmlns:a="http://schemas.openxmlformats.org/drawingml/2006/main" wrap="square" lIns="0" tIns="0" rIns="0" bIns="0" anchor="t">
+            <a:normAutofit fontScale="100000"/>
+          </a:bodyPr>
+          <a:lstStyle xmlns:a="http://schemas.openxmlformats.org/drawingml/2006/main"/>
+          <a:p xmlns:a="http://schemas.openxmlformats.org/drawingml/2006/main">
+            <a:pPr algn="l">
+              <a:defRPr sz="1800" b="1" i="0">
                 <a:solidFill>
                   <a:srgbClr val="1F776D"/>
                 </a:solidFill>
@@ -12471,7 +12515,7 @@
               </a:defRPr>
             </a:pPr>
             <a:r>
-              <a:rPr sz="1500" b="1" i="0">
+              <a:rPr sz="1800" b="1" i="0">
                 <a:solidFill>
                   <a:srgbClr val="1F776D"/>
                 </a:solidFill>
@@ -12479,7 +12523,7 @@
                 <a:ea typeface="Aptos"/>
                 <a:cs typeface="Aptos"/>
               </a:rPr>
-              <a:t>01</a:t>
+              <a:t>What we can claim</a:t>
             </a:r>
           </a:p>
         </p:txBody>
@@ -12489,113 +12533,88 @@
           <p:cNvPr id="6" name="">
             <a:extLst xmlns:a="http://schemas.openxmlformats.org/drawingml/2006/main">
               <a:ext uri="{FF2B5EF4-FFF2-40B4-BE49-F238E27FC236}">
-                <a16:creationId xmlns:a16="http://schemas.microsoft.com/office/drawing/2014/main" id="{96BEB724-98F7-4E52-87B9-0AB3B15F61FB}"/>
-              </a:ext>
-            </a:extLst>
-          </p:cNvPr>
-          <p:cNvSpPr>
-            <a:spLocks xmlns:a="http://schemas.openxmlformats.org/drawingml/2006/main" noGrp="1"/>
-          </p:cNvSpPr>
-          <p:nvPr/>
-        </p:nvSpPr>
-        <p:spPr>
-          <a:xfrm xmlns:a="http://schemas.openxmlformats.org/drawingml/2006/main">
-            <a:off x="1428750" y="1885950"/>
-            <a:ext cx="3143250" cy="285750"/>
-          </a:xfrm>
-          <a:prstGeom xmlns:a="http://schemas.openxmlformats.org/drawingml/2006/main" prst="rect">
-            <a:avLst/>
-          </a:prstGeom>
-          <a:noFill xmlns:a="http://schemas.openxmlformats.org/drawingml/2006/main"/>
-          <a:ln xmlns:a="http://schemas.openxmlformats.org/drawingml/2006/main" w="0">
-            <a:noFill/>
-            <a:prstDash val="solid"/>
-          </a:ln>
-        </p:spPr>
-        <p:txBody>
-          <a:bodyPr xmlns:a="http://schemas.openxmlformats.org/drawingml/2006/main" wrap="square" lIns="0" tIns="0" rIns="0" bIns="0" anchor="t">
-            <a:normAutofit fontScale="100000"/>
-          </a:bodyPr>
-          <a:lstStyle xmlns:a="http://schemas.openxmlformats.org/drawingml/2006/main"/>
-          <a:p xmlns:a="http://schemas.openxmlformats.org/drawingml/2006/main">
-            <a:pPr algn="l">
-              <a:defRPr sz="1650" b="1" i="0">
-                <a:solidFill>
-                  <a:srgbClr val="102A43"/>
-                </a:solidFill>
-                <a:latin typeface="Aptos"/>
-                <a:ea typeface="Aptos"/>
-                <a:cs typeface="Aptos"/>
-              </a:defRPr>
-            </a:pPr>
-            <a:r>
-              <a:rPr sz="1650" b="1" i="0">
-                <a:solidFill>
-                  <a:srgbClr val="102A43"/>
-                </a:solidFill>
-                <a:latin typeface="Aptos"/>
-                <a:ea typeface="Aptos"/>
-                <a:cs typeface="Aptos"/>
-              </a:rPr>
-              <a:t>Define the operating point</a:t>
-            </a:r>
-          </a:p>
-        </p:txBody>
+                <a16:creationId xmlns:a16="http://schemas.microsoft.com/office/drawing/2014/main" id="{965F82AC-B9C3-4874-9496-4854C333872A}"/>
+              </a:ext>
+            </a:extLst>
+          </p:cNvPr>
+          <p:cNvSpPr>
+            <a:spLocks xmlns:a="http://schemas.openxmlformats.org/drawingml/2006/main" noGrp="1"/>
+          </p:cNvSpPr>
+          <p:nvPr/>
+        </p:nvSpPr>
+        <p:spPr>
+          <a:xfrm xmlns:a="http://schemas.openxmlformats.org/drawingml/2006/main">
+            <a:off x="666750" y="2552700"/>
+            <a:ext cx="76200" cy="76200"/>
+          </a:xfrm>
+          <a:prstGeom xmlns:a="http://schemas.openxmlformats.org/drawingml/2006/main" prst="ellipse">
+            <a:avLst/>
+          </a:prstGeom>
+          <a:solidFill xmlns:a="http://schemas.openxmlformats.org/drawingml/2006/main">
+            <a:srgbClr val="2A9D8F"/>
+          </a:solidFill>
+          <a:ln xmlns:a="http://schemas.openxmlformats.org/drawingml/2006/main" w="0">
+            <a:solidFill>
+              <a:srgbClr val="2A9D8F"/>
+            </a:solidFill>
+            <a:prstDash val="solid"/>
+          </a:ln>
+        </p:spPr>
       </p:sp>
       <p:sp>
         <p:nvSpPr>
           <p:cNvPr id="7" name="">
             <a:extLst xmlns:a="http://schemas.openxmlformats.org/drawingml/2006/main">
               <a:ext uri="{FF2B5EF4-FFF2-40B4-BE49-F238E27FC236}">
-                <a16:creationId xmlns:a16="http://schemas.microsoft.com/office/drawing/2014/main" id="{45FD9606-680C-4902-94DE-231B0E25B81A}"/>
-              </a:ext>
-            </a:extLst>
-          </p:cNvPr>
-          <p:cNvSpPr>
-            <a:spLocks xmlns:a="http://schemas.openxmlformats.org/drawingml/2006/main" noGrp="1"/>
-          </p:cNvSpPr>
-          <p:nvPr/>
-        </p:nvSpPr>
-        <p:spPr>
-          <a:xfrm xmlns:a="http://schemas.openxmlformats.org/drawingml/2006/main">
-            <a:off x="4762500" y="1905000"/>
-            <a:ext cx="6191250" cy="285750"/>
-          </a:xfrm>
-          <a:prstGeom xmlns:a="http://schemas.openxmlformats.org/drawingml/2006/main" prst="rect">
-            <a:avLst/>
-          </a:prstGeom>
-          <a:noFill xmlns:a="http://schemas.openxmlformats.org/drawingml/2006/main"/>
-          <a:ln xmlns:a="http://schemas.openxmlformats.org/drawingml/2006/main" w="0">
-            <a:noFill/>
-            <a:prstDash val="solid"/>
-          </a:ln>
-        </p:spPr>
-        <p:txBody>
-          <a:bodyPr xmlns:a="http://schemas.openxmlformats.org/drawingml/2006/main" wrap="square" lIns="0" tIns="0" rIns="0" bIns="0" anchor="t">
-            <a:normAutofit fontScale="100000"/>
-          </a:bodyPr>
-          <a:lstStyle xmlns:a="http://schemas.openxmlformats.org/drawingml/2006/main"/>
-          <a:p xmlns:a="http://schemas.openxmlformats.org/drawingml/2006/main">
-            <a:pPr algn="l">
-              <a:defRPr sz="1350" b="0" i="0">
-                <a:solidFill>
-                  <a:srgbClr val="52606D"/>
-                </a:solidFill>
-                <a:latin typeface="Aptos"/>
-                <a:ea typeface="Aptos"/>
-                <a:cs typeface="Aptos"/>
-              </a:defRPr>
-            </a:pPr>
-            <a:r>
-              <a:rPr sz="1350" b="0" i="0">
-                <a:solidFill>
-                  <a:srgbClr val="52606D"/>
-                </a:solidFill>
-                <a:latin typeface="Aptos"/>
-                <a:ea typeface="Aptos"/>
-                <a:cs typeface="Aptos"/>
-              </a:rPr>
-              <a:t>inspection capacity and cost of false positives vs missed fraud</a:t>
+                <a16:creationId xmlns:a16="http://schemas.microsoft.com/office/drawing/2014/main" id="{AAA59FB5-0CE5-4E5D-B7D2-4DF6AF866DB3}"/>
+              </a:ext>
+            </a:extLst>
+          </p:cNvPr>
+          <p:cNvSpPr>
+            <a:spLocks xmlns:a="http://schemas.openxmlformats.org/drawingml/2006/main" noGrp="1"/>
+          </p:cNvSpPr>
+          <p:nvPr/>
+        </p:nvSpPr>
+        <p:spPr>
+          <a:xfrm xmlns:a="http://schemas.openxmlformats.org/drawingml/2006/main">
+            <a:off x="876300" y="2476500"/>
+            <a:ext cx="4743450" cy="571500"/>
+          </a:xfrm>
+          <a:prstGeom xmlns:a="http://schemas.openxmlformats.org/drawingml/2006/main" prst="rect">
+            <a:avLst/>
+          </a:prstGeom>
+          <a:noFill xmlns:a="http://schemas.openxmlformats.org/drawingml/2006/main"/>
+          <a:ln xmlns:a="http://schemas.openxmlformats.org/drawingml/2006/main" w="0">
+            <a:noFill/>
+            <a:prstDash val="solid"/>
+          </a:ln>
+        </p:spPr>
+        <p:txBody>
+          <a:bodyPr xmlns:a="http://schemas.openxmlformats.org/drawingml/2006/main" wrap="square" lIns="0" tIns="0" rIns="0" bIns="0" anchor="t">
+            <a:normAutofit fontScale="100000"/>
+          </a:bodyPr>
+          <a:lstStyle xmlns:a="http://schemas.openxmlformats.org/drawingml/2006/main"/>
+          <a:p xmlns:a="http://schemas.openxmlformats.org/drawingml/2006/main">
+            <a:pPr algn="l">
+              <a:defRPr sz="1275" b="0" i="0">
+                <a:solidFill>
+                  <a:srgbClr val="18232C"/>
+                </a:solidFill>
+                <a:latin typeface="Aptos"/>
+                <a:ea typeface="Aptos"/>
+                <a:cs typeface="Aptos"/>
+              </a:defRPr>
+            </a:pPr>
+            <a:r>
+              <a:rPr sz="1275" b="0" i="0">
+                <a:solidFill>
+                  <a:srgbClr val="18232C"/>
+                </a:solidFill>
+                <a:latin typeface="Aptos"/>
+                <a:ea typeface="Aptos"/>
+                <a:cs typeface="Aptos"/>
+              </a:rPr>
+              <a:t>It ranks better than the dummy and logistic baseline.</a:t>
             </a:r>
           </a:p>
         </p:txBody>
@@ -12605,19 +12624,623 @@
           <p:cNvPr id="8" name="">
             <a:extLst xmlns:a="http://schemas.openxmlformats.org/drawingml/2006/main">
               <a:ext uri="{FF2B5EF4-FFF2-40B4-BE49-F238E27FC236}">
-                <a16:creationId xmlns:a16="http://schemas.microsoft.com/office/drawing/2014/main" id="{0BE2E10C-9DEA-44EA-927D-DE49C829BDFE}"/>
-              </a:ext>
-            </a:extLst>
-          </p:cNvPr>
-          <p:cNvSpPr>
-            <a:spLocks xmlns:a="http://schemas.openxmlformats.org/drawingml/2006/main" noGrp="1"/>
-          </p:cNvSpPr>
-          <p:nvPr/>
-        </p:nvSpPr>
-        <p:spPr>
-          <a:xfrm xmlns:a="http://schemas.openxmlformats.org/drawingml/2006/main">
-            <a:off x="1428750" y="2381250"/>
-            <a:ext cx="9525000" cy="9525"/>
+                <a16:creationId xmlns:a16="http://schemas.microsoft.com/office/drawing/2014/main" id="{4D0C73E1-F341-4170-9EEA-6C81DF7899BD}"/>
+              </a:ext>
+            </a:extLst>
+          </p:cNvPr>
+          <p:cNvSpPr>
+            <a:spLocks xmlns:a="http://schemas.openxmlformats.org/drawingml/2006/main" noGrp="1"/>
+          </p:cNvSpPr>
+          <p:nvPr/>
+        </p:nvSpPr>
+        <p:spPr>
+          <a:xfrm xmlns:a="http://schemas.openxmlformats.org/drawingml/2006/main">
+            <a:off x="666750" y="3048000"/>
+            <a:ext cx="76200" cy="76200"/>
+          </a:xfrm>
+          <a:prstGeom xmlns:a="http://schemas.openxmlformats.org/drawingml/2006/main" prst="ellipse">
+            <a:avLst/>
+          </a:prstGeom>
+          <a:solidFill xmlns:a="http://schemas.openxmlformats.org/drawingml/2006/main">
+            <a:srgbClr val="2A9D8F"/>
+          </a:solidFill>
+          <a:ln xmlns:a="http://schemas.openxmlformats.org/drawingml/2006/main" w="0">
+            <a:solidFill>
+              <a:srgbClr val="2A9D8F"/>
+            </a:solidFill>
+            <a:prstDash val="solid"/>
+          </a:ln>
+        </p:spPr>
+      </p:sp>
+      <p:sp>
+        <p:nvSpPr>
+          <p:cNvPr id="9" name="">
+            <a:extLst xmlns:a="http://schemas.openxmlformats.org/drawingml/2006/main">
+              <a:ext uri="{FF2B5EF4-FFF2-40B4-BE49-F238E27FC236}">
+                <a16:creationId xmlns:a16="http://schemas.microsoft.com/office/drawing/2014/main" id="{993086B4-0C1E-46DD-9290-4BCC2038EAC3}"/>
+              </a:ext>
+            </a:extLst>
+          </p:cNvPr>
+          <p:cNvSpPr>
+            <a:spLocks xmlns:a="http://schemas.openxmlformats.org/drawingml/2006/main" noGrp="1"/>
+          </p:cNvSpPr>
+          <p:nvPr/>
+        </p:nvSpPr>
+        <p:spPr>
+          <a:xfrm xmlns:a="http://schemas.openxmlformats.org/drawingml/2006/main">
+            <a:off x="876300" y="2971800"/>
+            <a:ext cx="4743450" cy="571500"/>
+          </a:xfrm>
+          <a:prstGeom xmlns:a="http://schemas.openxmlformats.org/drawingml/2006/main" prst="rect">
+            <a:avLst/>
+          </a:prstGeom>
+          <a:noFill xmlns:a="http://schemas.openxmlformats.org/drawingml/2006/main"/>
+          <a:ln xmlns:a="http://schemas.openxmlformats.org/drawingml/2006/main" w="0">
+            <a:noFill/>
+            <a:prstDash val="solid"/>
+          </a:ln>
+        </p:spPr>
+        <p:txBody>
+          <a:bodyPr xmlns:a="http://schemas.openxmlformats.org/drawingml/2006/main" wrap="square" lIns="0" tIns="0" rIns="0" bIns="0" anchor="t">
+            <a:normAutofit fontScale="100000"/>
+          </a:bodyPr>
+          <a:lstStyle xmlns:a="http://schemas.openxmlformats.org/drawingml/2006/main"/>
+          <a:p xmlns:a="http://schemas.openxmlformats.org/drawingml/2006/main">
+            <a:pPr algn="l">
+              <a:defRPr sz="1275" b="0" i="0">
+                <a:solidFill>
+                  <a:srgbClr val="18232C"/>
+                </a:solidFill>
+                <a:latin typeface="Aptos"/>
+                <a:ea typeface="Aptos"/>
+                <a:cs typeface="Aptos"/>
+              </a:defRPr>
+            </a:pPr>
+            <a:r>
+              <a:rPr sz="1275" b="0" i="0">
+                <a:solidFill>
+                  <a:srgbClr val="18232C"/>
+                </a:solidFill>
+                <a:latin typeface="Aptos"/>
+                <a:ea typeface="Aptos"/>
+                <a:cs typeface="Aptos"/>
+              </a:rPr>
+              <a:t>It captures useful signal in a one-time holdout check.</a:t>
+            </a:r>
+          </a:p>
+        </p:txBody>
+      </p:sp>
+      <p:sp>
+        <p:nvSpPr>
+          <p:cNvPr id="10" name="">
+            <a:extLst xmlns:a="http://schemas.openxmlformats.org/drawingml/2006/main">
+              <a:ext uri="{FF2B5EF4-FFF2-40B4-BE49-F238E27FC236}">
+                <a16:creationId xmlns:a16="http://schemas.microsoft.com/office/drawing/2014/main" id="{D367FD4F-962B-43BB-93DD-76795C2450A7}"/>
+              </a:ext>
+            </a:extLst>
+          </p:cNvPr>
+          <p:cNvSpPr>
+            <a:spLocks xmlns:a="http://schemas.openxmlformats.org/drawingml/2006/main" noGrp="1"/>
+          </p:cNvSpPr>
+          <p:nvPr/>
+        </p:nvSpPr>
+        <p:spPr>
+          <a:xfrm xmlns:a="http://schemas.openxmlformats.org/drawingml/2006/main">
+            <a:off x="666750" y="3543300"/>
+            <a:ext cx="76200" cy="76200"/>
+          </a:xfrm>
+          <a:prstGeom xmlns:a="http://schemas.openxmlformats.org/drawingml/2006/main" prst="ellipse">
+            <a:avLst/>
+          </a:prstGeom>
+          <a:solidFill xmlns:a="http://schemas.openxmlformats.org/drawingml/2006/main">
+            <a:srgbClr val="2A9D8F"/>
+          </a:solidFill>
+          <a:ln xmlns:a="http://schemas.openxmlformats.org/drawingml/2006/main" w="0">
+            <a:solidFill>
+              <a:srgbClr val="2A9D8F"/>
+            </a:solidFill>
+            <a:prstDash val="solid"/>
+          </a:ln>
+        </p:spPr>
+      </p:sp>
+      <p:sp>
+        <p:nvSpPr>
+          <p:cNvPr id="11" name="">
+            <a:extLst xmlns:a="http://schemas.openxmlformats.org/drawingml/2006/main">
+              <a:ext uri="{FF2B5EF4-FFF2-40B4-BE49-F238E27FC236}">
+                <a16:creationId xmlns:a16="http://schemas.microsoft.com/office/drawing/2014/main" id="{71BA84B2-C562-4A0C-BDB8-887F95BCDF84}"/>
+              </a:ext>
+            </a:extLst>
+          </p:cNvPr>
+          <p:cNvSpPr>
+            <a:spLocks xmlns:a="http://schemas.openxmlformats.org/drawingml/2006/main" noGrp="1"/>
+          </p:cNvSpPr>
+          <p:nvPr/>
+        </p:nvSpPr>
+        <p:spPr>
+          <a:xfrm xmlns:a="http://schemas.openxmlformats.org/drawingml/2006/main">
+            <a:off x="876300" y="3467100"/>
+            <a:ext cx="4743450" cy="571500"/>
+          </a:xfrm>
+          <a:prstGeom xmlns:a="http://schemas.openxmlformats.org/drawingml/2006/main" prst="rect">
+            <a:avLst/>
+          </a:prstGeom>
+          <a:noFill xmlns:a="http://schemas.openxmlformats.org/drawingml/2006/main"/>
+          <a:ln xmlns:a="http://schemas.openxmlformats.org/drawingml/2006/main" w="0">
+            <a:noFill/>
+            <a:prstDash val="solid"/>
+          </a:ln>
+        </p:spPr>
+        <p:txBody>
+          <a:bodyPr xmlns:a="http://schemas.openxmlformats.org/drawingml/2006/main" wrap="square" lIns="0" tIns="0" rIns="0" bIns="0" anchor="t">
+            <a:normAutofit fontScale="100000"/>
+          </a:bodyPr>
+          <a:lstStyle xmlns:a="http://schemas.openxmlformats.org/drawingml/2006/main"/>
+          <a:p xmlns:a="http://schemas.openxmlformats.org/drawingml/2006/main">
+            <a:pPr algn="l">
+              <a:defRPr sz="1275" b="0" i="0">
+                <a:solidFill>
+                  <a:srgbClr val="18232C"/>
+                </a:solidFill>
+                <a:latin typeface="Aptos"/>
+                <a:ea typeface="Aptos"/>
+                <a:cs typeface="Aptos"/>
+              </a:defRPr>
+            </a:pPr>
+            <a:r>
+              <a:rPr sz="1275" b="0" i="0">
+                <a:solidFill>
+                  <a:srgbClr val="18232C"/>
+                </a:solidFill>
+                <a:latin typeface="Aptos"/>
+                <a:ea typeface="Aptos"/>
+                <a:cs typeface="Aptos"/>
+              </a:rPr>
+              <a:t>It gives inspectors a consistent shortlist to evaluate.</a:t>
+            </a:r>
+          </a:p>
+        </p:txBody>
+      </p:sp>
+      <p:sp>
+        <p:nvSpPr>
+          <p:cNvPr id="12" name="">
+            <a:extLst xmlns:a="http://schemas.openxmlformats.org/drawingml/2006/main">
+              <a:ext uri="{FF2B5EF4-FFF2-40B4-BE49-F238E27FC236}">
+                <a16:creationId xmlns:a16="http://schemas.microsoft.com/office/drawing/2014/main" id="{9DCA5678-79F0-4FB1-AD95-5334DA6D8753}"/>
+              </a:ext>
+            </a:extLst>
+          </p:cNvPr>
+          <p:cNvSpPr>
+            <a:spLocks xmlns:a="http://schemas.openxmlformats.org/drawingml/2006/main" noGrp="1"/>
+          </p:cNvSpPr>
+          <p:nvPr/>
+        </p:nvSpPr>
+        <p:spPr>
+          <a:xfrm xmlns:a="http://schemas.openxmlformats.org/drawingml/2006/main">
+            <a:off x="6477000" y="2000250"/>
+            <a:ext cx="4000500" cy="285750"/>
+          </a:xfrm>
+          <a:prstGeom xmlns:a="http://schemas.openxmlformats.org/drawingml/2006/main" prst="rect">
+            <a:avLst/>
+          </a:prstGeom>
+          <a:noFill xmlns:a="http://schemas.openxmlformats.org/drawingml/2006/main"/>
+          <a:ln xmlns:a="http://schemas.openxmlformats.org/drawingml/2006/main" w="0">
+            <a:noFill/>
+            <a:prstDash val="solid"/>
+          </a:ln>
+        </p:spPr>
+        <p:txBody>
+          <a:bodyPr xmlns:a="http://schemas.openxmlformats.org/drawingml/2006/main" wrap="square" lIns="0" tIns="0" rIns="0" bIns="0" anchor="t">
+            <a:normAutofit fontScale="100000"/>
+          </a:bodyPr>
+          <a:lstStyle xmlns:a="http://schemas.openxmlformats.org/drawingml/2006/main"/>
+          <a:p xmlns:a="http://schemas.openxmlformats.org/drawingml/2006/main">
+            <a:pPr algn="l">
+              <a:defRPr sz="1800" b="1" i="0">
+                <a:solidFill>
+                  <a:srgbClr val="D95D53"/>
+                </a:solidFill>
+                <a:latin typeface="Aptos"/>
+                <a:ea typeface="Aptos"/>
+                <a:cs typeface="Aptos"/>
+              </a:defRPr>
+            </a:pPr>
+            <a:r>
+              <a:rPr sz="1800" b="1" i="0">
+                <a:solidFill>
+                  <a:srgbClr val="D95D53"/>
+                </a:solidFill>
+                <a:latin typeface="Aptos"/>
+                <a:ea typeface="Aptos"/>
+                <a:cs typeface="Aptos"/>
+              </a:rPr>
+              <a:t>What we cannot claim</a:t>
+            </a:r>
+          </a:p>
+        </p:txBody>
+      </p:sp>
+      <p:sp>
+        <p:nvSpPr>
+          <p:cNvPr id="13" name="">
+            <a:extLst xmlns:a="http://schemas.openxmlformats.org/drawingml/2006/main">
+              <a:ext uri="{FF2B5EF4-FFF2-40B4-BE49-F238E27FC236}">
+                <a16:creationId xmlns:a16="http://schemas.microsoft.com/office/drawing/2014/main" id="{3DB3814B-993B-4B34-899B-CD4C84CAD87C}"/>
+              </a:ext>
+            </a:extLst>
+          </p:cNvPr>
+          <p:cNvSpPr>
+            <a:spLocks xmlns:a="http://schemas.openxmlformats.org/drawingml/2006/main" noGrp="1"/>
+          </p:cNvSpPr>
+          <p:nvPr/>
+        </p:nvSpPr>
+        <p:spPr>
+          <a:xfrm xmlns:a="http://schemas.openxmlformats.org/drawingml/2006/main">
+            <a:off x="6496050" y="2552700"/>
+            <a:ext cx="76200" cy="76200"/>
+          </a:xfrm>
+          <a:prstGeom xmlns:a="http://schemas.openxmlformats.org/drawingml/2006/main" prst="ellipse">
+            <a:avLst/>
+          </a:prstGeom>
+          <a:solidFill xmlns:a="http://schemas.openxmlformats.org/drawingml/2006/main">
+            <a:srgbClr val="D95D53"/>
+          </a:solidFill>
+          <a:ln xmlns:a="http://schemas.openxmlformats.org/drawingml/2006/main" w="0">
+            <a:solidFill>
+              <a:srgbClr val="D95D53"/>
+            </a:solidFill>
+            <a:prstDash val="solid"/>
+          </a:ln>
+        </p:spPr>
+      </p:sp>
+      <p:sp>
+        <p:nvSpPr>
+          <p:cNvPr id="14" name="">
+            <a:extLst xmlns:a="http://schemas.openxmlformats.org/drawingml/2006/main">
+              <a:ext uri="{FF2B5EF4-FFF2-40B4-BE49-F238E27FC236}">
+                <a16:creationId xmlns:a16="http://schemas.microsoft.com/office/drawing/2014/main" id="{D033ECF7-06A0-4968-8FBA-C2EB196E689B}"/>
+              </a:ext>
+            </a:extLst>
+          </p:cNvPr>
+          <p:cNvSpPr>
+            <a:spLocks xmlns:a="http://schemas.openxmlformats.org/drawingml/2006/main" noGrp="1"/>
+          </p:cNvSpPr>
+          <p:nvPr/>
+        </p:nvSpPr>
+        <p:spPr>
+          <a:xfrm xmlns:a="http://schemas.openxmlformats.org/drawingml/2006/main">
+            <a:off x="6705600" y="2476500"/>
+            <a:ext cx="4743450" cy="571500"/>
+          </a:xfrm>
+          <a:prstGeom xmlns:a="http://schemas.openxmlformats.org/drawingml/2006/main" prst="rect">
+            <a:avLst/>
+          </a:prstGeom>
+          <a:noFill xmlns:a="http://schemas.openxmlformats.org/drawingml/2006/main"/>
+          <a:ln xmlns:a="http://schemas.openxmlformats.org/drawingml/2006/main" w="0">
+            <a:noFill/>
+            <a:prstDash val="solid"/>
+          </a:ln>
+        </p:spPr>
+        <p:txBody>
+          <a:bodyPr xmlns:a="http://schemas.openxmlformats.org/drawingml/2006/main" wrap="square" lIns="0" tIns="0" rIns="0" bIns="0" anchor="t">
+            <a:normAutofit fontScale="100000"/>
+          </a:bodyPr>
+          <a:lstStyle xmlns:a="http://schemas.openxmlformats.org/drawingml/2006/main"/>
+          <a:p xmlns:a="http://schemas.openxmlformats.org/drawingml/2006/main">
+            <a:pPr algn="l">
+              <a:defRPr sz="1275" b="0" i="0">
+                <a:solidFill>
+                  <a:srgbClr val="18232C"/>
+                </a:solidFill>
+                <a:latin typeface="Aptos"/>
+                <a:ea typeface="Aptos"/>
+                <a:cs typeface="Aptos"/>
+              </a:defRPr>
+            </a:pPr>
+            <a:r>
+              <a:rPr sz="1275" b="0" i="0">
+                <a:solidFill>
+                  <a:srgbClr val="18232C"/>
+                </a:solidFill>
+                <a:latin typeface="Aptos"/>
+                <a:ea typeface="Aptos"/>
+                <a:cs typeface="Aptos"/>
+              </a:rPr>
+              <a:t>It does not prove that a client is committing fraud.</a:t>
+            </a:r>
+          </a:p>
+        </p:txBody>
+      </p:sp>
+      <p:sp>
+        <p:nvSpPr>
+          <p:cNvPr id="15" name="">
+            <a:extLst xmlns:a="http://schemas.openxmlformats.org/drawingml/2006/main">
+              <a:ext uri="{FF2B5EF4-FFF2-40B4-BE49-F238E27FC236}">
+                <a16:creationId xmlns:a16="http://schemas.microsoft.com/office/drawing/2014/main" id="{6D00A958-20F6-49FA-9489-AF22C1D59009}"/>
+              </a:ext>
+            </a:extLst>
+          </p:cNvPr>
+          <p:cNvSpPr>
+            <a:spLocks xmlns:a="http://schemas.openxmlformats.org/drawingml/2006/main" noGrp="1"/>
+          </p:cNvSpPr>
+          <p:nvPr/>
+        </p:nvSpPr>
+        <p:spPr>
+          <a:xfrm xmlns:a="http://schemas.openxmlformats.org/drawingml/2006/main">
+            <a:off x="6496050" y="3048000"/>
+            <a:ext cx="76200" cy="76200"/>
+          </a:xfrm>
+          <a:prstGeom xmlns:a="http://schemas.openxmlformats.org/drawingml/2006/main" prst="ellipse">
+            <a:avLst/>
+          </a:prstGeom>
+          <a:solidFill xmlns:a="http://schemas.openxmlformats.org/drawingml/2006/main">
+            <a:srgbClr val="D95D53"/>
+          </a:solidFill>
+          <a:ln xmlns:a="http://schemas.openxmlformats.org/drawingml/2006/main" w="0">
+            <a:solidFill>
+              <a:srgbClr val="D95D53"/>
+            </a:solidFill>
+            <a:prstDash val="solid"/>
+          </a:ln>
+        </p:spPr>
+      </p:sp>
+      <p:sp>
+        <p:nvSpPr>
+          <p:cNvPr id="16" name="">
+            <a:extLst xmlns:a="http://schemas.openxmlformats.org/drawingml/2006/main">
+              <a:ext uri="{FF2B5EF4-FFF2-40B4-BE49-F238E27FC236}">
+                <a16:creationId xmlns:a16="http://schemas.microsoft.com/office/drawing/2014/main" id="{413B7B4D-D829-46F8-9799-1BFF626E350B}"/>
+              </a:ext>
+            </a:extLst>
+          </p:cNvPr>
+          <p:cNvSpPr>
+            <a:spLocks xmlns:a="http://schemas.openxmlformats.org/drawingml/2006/main" noGrp="1"/>
+          </p:cNvSpPr>
+          <p:nvPr/>
+        </p:nvSpPr>
+        <p:spPr>
+          <a:xfrm xmlns:a="http://schemas.openxmlformats.org/drawingml/2006/main">
+            <a:off x="6705600" y="2971800"/>
+            <a:ext cx="4743450" cy="571500"/>
+          </a:xfrm>
+          <a:prstGeom xmlns:a="http://schemas.openxmlformats.org/drawingml/2006/main" prst="rect">
+            <a:avLst/>
+          </a:prstGeom>
+          <a:noFill xmlns:a="http://schemas.openxmlformats.org/drawingml/2006/main"/>
+          <a:ln xmlns:a="http://schemas.openxmlformats.org/drawingml/2006/main" w="0">
+            <a:noFill/>
+            <a:prstDash val="solid"/>
+          </a:ln>
+        </p:spPr>
+        <p:txBody>
+          <a:bodyPr xmlns:a="http://schemas.openxmlformats.org/drawingml/2006/main" wrap="square" lIns="0" tIns="0" rIns="0" bIns="0" anchor="t">
+            <a:normAutofit fontScale="100000"/>
+          </a:bodyPr>
+          <a:lstStyle xmlns:a="http://schemas.openxmlformats.org/drawingml/2006/main"/>
+          <a:p xmlns:a="http://schemas.openxmlformats.org/drawingml/2006/main">
+            <a:pPr algn="l">
+              <a:defRPr sz="1275" b="0" i="0">
+                <a:solidFill>
+                  <a:srgbClr val="18232C"/>
+                </a:solidFill>
+                <a:latin typeface="Aptos"/>
+                <a:ea typeface="Aptos"/>
+                <a:cs typeface="Aptos"/>
+              </a:defRPr>
+            </a:pPr>
+            <a:r>
+              <a:rPr sz="1275" b="0" i="0">
+                <a:solidFill>
+                  <a:srgbClr val="18232C"/>
+                </a:solidFill>
+                <a:latin typeface="Aptos"/>
+                <a:ea typeface="Aptos"/>
+                <a:cs typeface="Aptos"/>
+              </a:rPr>
+              <a:t>It is not equally reliable across regions or history lengths.</a:t>
+            </a:r>
+          </a:p>
+        </p:txBody>
+      </p:sp>
+      <p:sp>
+        <p:nvSpPr>
+          <p:cNvPr id="17" name="">
+            <a:extLst xmlns:a="http://schemas.openxmlformats.org/drawingml/2006/main">
+              <a:ext uri="{FF2B5EF4-FFF2-40B4-BE49-F238E27FC236}">
+                <a16:creationId xmlns:a16="http://schemas.microsoft.com/office/drawing/2014/main" id="{1AF618D7-E4CD-48F0-B204-C401BD67A9EB}"/>
+              </a:ext>
+            </a:extLst>
+          </p:cNvPr>
+          <p:cNvSpPr>
+            <a:spLocks xmlns:a="http://schemas.openxmlformats.org/drawingml/2006/main" noGrp="1"/>
+          </p:cNvSpPr>
+          <p:nvPr/>
+        </p:nvSpPr>
+        <p:spPr>
+          <a:xfrm xmlns:a="http://schemas.openxmlformats.org/drawingml/2006/main">
+            <a:off x="6496050" y="3543300"/>
+            <a:ext cx="76200" cy="76200"/>
+          </a:xfrm>
+          <a:prstGeom xmlns:a="http://schemas.openxmlformats.org/drawingml/2006/main" prst="ellipse">
+            <a:avLst/>
+          </a:prstGeom>
+          <a:solidFill xmlns:a="http://schemas.openxmlformats.org/drawingml/2006/main">
+            <a:srgbClr val="D95D53"/>
+          </a:solidFill>
+          <a:ln xmlns:a="http://schemas.openxmlformats.org/drawingml/2006/main" w="0">
+            <a:solidFill>
+              <a:srgbClr val="D95D53"/>
+            </a:solidFill>
+            <a:prstDash val="solid"/>
+          </a:ln>
+        </p:spPr>
+      </p:sp>
+      <p:sp>
+        <p:nvSpPr>
+          <p:cNvPr id="18" name="">
+            <a:extLst xmlns:a="http://schemas.openxmlformats.org/drawingml/2006/main">
+              <a:ext uri="{FF2B5EF4-FFF2-40B4-BE49-F238E27FC236}">
+                <a16:creationId xmlns:a16="http://schemas.microsoft.com/office/drawing/2014/main" id="{E922F6CE-217F-45AE-8261-8AEF2B59799E}"/>
+              </a:ext>
+            </a:extLst>
+          </p:cNvPr>
+          <p:cNvSpPr>
+            <a:spLocks xmlns:a="http://schemas.openxmlformats.org/drawingml/2006/main" noGrp="1"/>
+          </p:cNvSpPr>
+          <p:nvPr/>
+        </p:nvSpPr>
+        <p:spPr>
+          <a:xfrm xmlns:a="http://schemas.openxmlformats.org/drawingml/2006/main">
+            <a:off x="6705600" y="3467100"/>
+            <a:ext cx="4743450" cy="571500"/>
+          </a:xfrm>
+          <a:prstGeom xmlns:a="http://schemas.openxmlformats.org/drawingml/2006/main" prst="rect">
+            <a:avLst/>
+          </a:prstGeom>
+          <a:noFill xmlns:a="http://schemas.openxmlformats.org/drawingml/2006/main"/>
+          <a:ln xmlns:a="http://schemas.openxmlformats.org/drawingml/2006/main" w="0">
+            <a:noFill/>
+            <a:prstDash val="solid"/>
+          </a:ln>
+        </p:spPr>
+        <p:txBody>
+          <a:bodyPr xmlns:a="http://schemas.openxmlformats.org/drawingml/2006/main" wrap="square" lIns="0" tIns="0" rIns="0" bIns="0" anchor="t">
+            <a:normAutofit fontScale="100000"/>
+          </a:bodyPr>
+          <a:lstStyle xmlns:a="http://schemas.openxmlformats.org/drawingml/2006/main"/>
+          <a:p xmlns:a="http://schemas.openxmlformats.org/drawingml/2006/main">
+            <a:pPr algn="l">
+              <a:defRPr sz="1275" b="0" i="0">
+                <a:solidFill>
+                  <a:srgbClr val="18232C"/>
+                </a:solidFill>
+                <a:latin typeface="Aptos"/>
+                <a:ea typeface="Aptos"/>
+                <a:cs typeface="Aptos"/>
+              </a:defRPr>
+            </a:pPr>
+            <a:r>
+              <a:rPr sz="1275" b="0" i="0">
+                <a:solidFill>
+                  <a:srgbClr val="18232C"/>
+                </a:solidFill>
+                <a:latin typeface="Aptos"/>
+                <a:ea typeface="Aptos"/>
+                <a:cs typeface="Aptos"/>
+              </a:rPr>
+              <a:t>A random split does not prove future-time performance.</a:t>
+            </a:r>
+          </a:p>
+        </p:txBody>
+      </p:sp>
+      <p:sp>
+        <p:nvSpPr>
+          <p:cNvPr id="19" name="">
+            <a:extLst xmlns:a="http://schemas.openxmlformats.org/drawingml/2006/main">
+              <a:ext uri="{FF2B5EF4-FFF2-40B4-BE49-F238E27FC236}">
+                <a16:creationId xmlns:a16="http://schemas.microsoft.com/office/drawing/2014/main" id="{A3D09ECC-949E-46EE-8F45-1F662BC6FE76}"/>
+              </a:ext>
+            </a:extLst>
+          </p:cNvPr>
+          <p:cNvSpPr>
+            <a:spLocks xmlns:a="http://schemas.openxmlformats.org/drawingml/2006/main" noGrp="1"/>
+          </p:cNvSpPr>
+          <p:nvPr/>
+        </p:nvSpPr>
+        <p:spPr>
+          <a:xfrm xmlns:a="http://schemas.openxmlformats.org/drawingml/2006/main">
+            <a:off x="647700" y="4686300"/>
+            <a:ext cx="10801350" cy="914400"/>
+          </a:xfrm>
+          <a:prstGeom xmlns:a="http://schemas.openxmlformats.org/drawingml/2006/main" prst="roundRect">
+            <a:avLst>
+              <a:gd name="adj" fmla="val 8333"/>
+            </a:avLst>
+          </a:prstGeom>
+          <a:solidFill xmlns:a="http://schemas.openxmlformats.org/drawingml/2006/main">
+            <a:srgbClr val="102A43"/>
+          </a:solidFill>
+          <a:ln xmlns:a="http://schemas.openxmlformats.org/drawingml/2006/main" w="0">
+            <a:noFill/>
+            <a:prstDash val="solid"/>
+          </a:ln>
+        </p:spPr>
+      </p:sp>
+      <p:sp>
+        <p:nvSpPr>
+          <p:cNvPr id="20" name="">
+            <a:extLst xmlns:a="http://schemas.openxmlformats.org/drawingml/2006/main">
+              <a:ext uri="{FF2B5EF4-FFF2-40B4-BE49-F238E27FC236}">
+                <a16:creationId xmlns:a16="http://schemas.microsoft.com/office/drawing/2014/main" id="{3D4FA42E-EEB2-49D3-8BA7-F75E791E2F82}"/>
+              </a:ext>
+            </a:extLst>
+          </p:cNvPr>
+          <p:cNvSpPr>
+            <a:spLocks xmlns:a="http://schemas.openxmlformats.org/drawingml/2006/main" noGrp="1"/>
+          </p:cNvSpPr>
+          <p:nvPr/>
+        </p:nvSpPr>
+        <p:spPr>
+          <a:xfrm xmlns:a="http://schemas.openxmlformats.org/drawingml/2006/main">
+            <a:off x="895350" y="4933950"/>
+            <a:ext cx="10287000" cy="419100"/>
+          </a:xfrm>
+          <a:prstGeom xmlns:a="http://schemas.openxmlformats.org/drawingml/2006/main" prst="rect">
+            <a:avLst/>
+          </a:prstGeom>
+          <a:noFill xmlns:a="http://schemas.openxmlformats.org/drawingml/2006/main"/>
+          <a:ln xmlns:a="http://schemas.openxmlformats.org/drawingml/2006/main" w="0">
+            <a:noFill/>
+            <a:prstDash val="solid"/>
+          </a:ln>
+        </p:spPr>
+        <p:txBody>
+          <a:bodyPr xmlns:a="http://schemas.openxmlformats.org/drawingml/2006/main" wrap="square" lIns="0" tIns="0" rIns="0" bIns="0" anchor="ctr">
+            <a:normAutofit fontScale="79710"/>
+          </a:bodyPr>
+          <a:lstStyle xmlns:a="http://schemas.openxmlformats.org/drawingml/2006/main"/>
+          <a:p xmlns:a="http://schemas.openxmlformats.org/drawingml/2006/main">
+            <a:pPr algn="ctr">
+              <a:defRPr sz="1725" b="1" i="0">
+                <a:solidFill>
+                  <a:srgbClr val="FFFFFF"/>
+                </a:solidFill>
+                <a:latin typeface="Aptos"/>
+                <a:ea typeface="Aptos"/>
+                <a:cs typeface="Aptos"/>
+              </a:defRPr>
+            </a:pPr>
+            <a:r>
+              <a:rPr sz="1725" b="1" i="0">
+                <a:solidFill>
+                  <a:srgbClr val="FFFFFF"/>
+                </a:solidFill>
+                <a:latin typeface="Aptos"/>
+                <a:ea typeface="Aptos"/>
+                <a:cs typeface="Aptos"/>
+              </a:rPr>
+              <a:t>Deployment guardrail: choose the inspection capacity first, then set the score threshold and monitor precision/recall by segment.</a:t>
+            </a:r>
+          </a:p>
+        </p:txBody>
+      </p:sp>
+      <p:sp>
+        <p:nvSpPr>
+          <p:cNvPr id="21" name="">
+            <a:extLst xmlns:a="http://schemas.openxmlformats.org/drawingml/2006/main">
+              <a:ext uri="{FF2B5EF4-FFF2-40B4-BE49-F238E27FC236}">
+                <a16:creationId xmlns:a16="http://schemas.microsoft.com/office/drawing/2014/main" id="{C86FCD98-3FA5-48CA-9554-D26ECAC81BCF}"/>
+              </a:ext>
+            </a:extLst>
+          </p:cNvPr>
+          <p:cNvSpPr>
+            <a:spLocks xmlns:a="http://schemas.openxmlformats.org/drawingml/2006/main" noGrp="1"/>
+          </p:cNvSpPr>
+          <p:nvPr/>
+        </p:nvSpPr>
+        <p:spPr>
+          <a:xfrm xmlns:a="http://schemas.openxmlformats.org/drawingml/2006/main">
+            <a:off x="647700" y="6534150"/>
+            <a:ext cx="10896600" cy="9525"/>
           </a:xfrm>
           <a:prstGeom xmlns:a="http://schemas.openxmlformats.org/drawingml/2006/main" prst="rect">
             <a:avLst/>
@@ -12635,929 +13258,10 @@
       </p:sp>
       <p:sp>
         <p:nvSpPr>
-          <p:cNvPr id="9" name="">
-            <a:extLst xmlns:a="http://schemas.openxmlformats.org/drawingml/2006/main">
-              <a:ext uri="{FF2B5EF4-FFF2-40B4-BE49-F238E27FC236}">
-                <a16:creationId xmlns:a16="http://schemas.microsoft.com/office/drawing/2014/main" id="{5898E07D-B9A1-4C15-A2F3-FC5C063F35D7}"/>
-              </a:ext>
-            </a:extLst>
-          </p:cNvPr>
-          <p:cNvSpPr>
-            <a:spLocks xmlns:a="http://schemas.openxmlformats.org/drawingml/2006/main" noGrp="1"/>
-          </p:cNvSpPr>
-          <p:nvPr/>
-        </p:nvSpPr>
-        <p:spPr>
-          <a:xfrm xmlns:a="http://schemas.openxmlformats.org/drawingml/2006/main">
-            <a:off x="723900" y="2667000"/>
-            <a:ext cx="514350" cy="285750"/>
-          </a:xfrm>
-          <a:prstGeom xmlns:a="http://schemas.openxmlformats.org/drawingml/2006/main" prst="rect">
-            <a:avLst/>
-          </a:prstGeom>
-          <a:noFill xmlns:a="http://schemas.openxmlformats.org/drawingml/2006/main"/>
-          <a:ln xmlns:a="http://schemas.openxmlformats.org/drawingml/2006/main" w="0">
-            <a:noFill/>
-            <a:prstDash val="solid"/>
-          </a:ln>
-        </p:spPr>
-        <p:txBody>
-          <a:bodyPr xmlns:a="http://schemas.openxmlformats.org/drawingml/2006/main" wrap="square" lIns="0" tIns="0" rIns="0" bIns="0" anchor="t">
-            <a:normAutofit fontScale="100000"/>
-          </a:bodyPr>
-          <a:lstStyle xmlns:a="http://schemas.openxmlformats.org/drawingml/2006/main"/>
-          <a:p xmlns:a="http://schemas.openxmlformats.org/drawingml/2006/main">
-            <a:pPr algn="l">
-              <a:defRPr sz="1500" b="1" i="0">
-                <a:solidFill>
-                  <a:srgbClr val="1F776D"/>
-                </a:solidFill>
-                <a:latin typeface="Aptos"/>
-                <a:ea typeface="Aptos"/>
-                <a:cs typeface="Aptos"/>
-              </a:defRPr>
-            </a:pPr>
-            <a:r>
-              <a:rPr sz="1500" b="1" i="0">
-                <a:solidFill>
-                  <a:srgbClr val="1F776D"/>
-                </a:solidFill>
-                <a:latin typeface="Aptos"/>
-                <a:ea typeface="Aptos"/>
-                <a:cs typeface="Aptos"/>
-              </a:rPr>
-              <a:t>02</a:t>
-            </a:r>
-          </a:p>
-        </p:txBody>
-      </p:sp>
-      <p:sp>
-        <p:nvSpPr>
-          <p:cNvPr id="10" name="">
-            <a:extLst xmlns:a="http://schemas.openxmlformats.org/drawingml/2006/main">
-              <a:ext uri="{FF2B5EF4-FFF2-40B4-BE49-F238E27FC236}">
-                <a16:creationId xmlns:a16="http://schemas.microsoft.com/office/drawing/2014/main" id="{726FF1B5-7559-43B9-9E71-0F6F5F5D600D}"/>
-              </a:ext>
-            </a:extLst>
-          </p:cNvPr>
-          <p:cNvSpPr>
-            <a:spLocks xmlns:a="http://schemas.openxmlformats.org/drawingml/2006/main" noGrp="1"/>
-          </p:cNvSpPr>
-          <p:nvPr/>
-        </p:nvSpPr>
-        <p:spPr>
-          <a:xfrm xmlns:a="http://schemas.openxmlformats.org/drawingml/2006/main">
-            <a:off x="1428750" y="2667000"/>
-            <a:ext cx="3143250" cy="285750"/>
-          </a:xfrm>
-          <a:prstGeom xmlns:a="http://schemas.openxmlformats.org/drawingml/2006/main" prst="rect">
-            <a:avLst/>
-          </a:prstGeom>
-          <a:noFill xmlns:a="http://schemas.openxmlformats.org/drawingml/2006/main"/>
-          <a:ln xmlns:a="http://schemas.openxmlformats.org/drawingml/2006/main" w="0">
-            <a:noFill/>
-            <a:prstDash val="solid"/>
-          </a:ln>
-        </p:spPr>
-        <p:txBody>
-          <a:bodyPr xmlns:a="http://schemas.openxmlformats.org/drawingml/2006/main" wrap="square" lIns="0" tIns="0" rIns="0" bIns="0" anchor="t">
-            <a:normAutofit fontScale="100000"/>
-          </a:bodyPr>
-          <a:lstStyle xmlns:a="http://schemas.openxmlformats.org/drawingml/2006/main"/>
-          <a:p xmlns:a="http://schemas.openxmlformats.org/drawingml/2006/main">
-            <a:pPr algn="l">
-              <a:defRPr sz="1650" b="1" i="0">
-                <a:solidFill>
-                  <a:srgbClr val="102A43"/>
-                </a:solidFill>
-                <a:latin typeface="Aptos"/>
-                <a:ea typeface="Aptos"/>
-                <a:cs typeface="Aptos"/>
-              </a:defRPr>
-            </a:pPr>
-            <a:r>
-              <a:rPr sz="1650" b="1" i="0">
-                <a:solidFill>
-                  <a:srgbClr val="102A43"/>
-                </a:solidFill>
-                <a:latin typeface="Aptos"/>
-                <a:ea typeface="Aptos"/>
-                <a:cs typeface="Aptos"/>
-              </a:rPr>
-              <a:t>Add short-history signal</a:t>
-            </a:r>
-          </a:p>
-        </p:txBody>
-      </p:sp>
-      <p:sp>
-        <p:nvSpPr>
-          <p:cNvPr id="11" name="">
-            <a:extLst xmlns:a="http://schemas.openxmlformats.org/drawingml/2006/main">
-              <a:ext uri="{FF2B5EF4-FFF2-40B4-BE49-F238E27FC236}">
-                <a16:creationId xmlns:a16="http://schemas.microsoft.com/office/drawing/2014/main" id="{EC476707-6D05-487A-9A66-1F57493E426C}"/>
-              </a:ext>
-            </a:extLst>
-          </p:cNvPr>
-          <p:cNvSpPr>
-            <a:spLocks xmlns:a="http://schemas.openxmlformats.org/drawingml/2006/main" noGrp="1"/>
-          </p:cNvSpPr>
-          <p:nvPr/>
-        </p:nvSpPr>
-        <p:spPr>
-          <a:xfrm xmlns:a="http://schemas.openxmlformats.org/drawingml/2006/main">
-            <a:off x="4762500" y="2686050"/>
-            <a:ext cx="6191250" cy="285750"/>
-          </a:xfrm>
-          <a:prstGeom xmlns:a="http://schemas.openxmlformats.org/drawingml/2006/main" prst="rect">
-            <a:avLst/>
-          </a:prstGeom>
-          <a:noFill xmlns:a="http://schemas.openxmlformats.org/drawingml/2006/main"/>
-          <a:ln xmlns:a="http://schemas.openxmlformats.org/drawingml/2006/main" w="0">
-            <a:noFill/>
-            <a:prstDash val="solid"/>
-          </a:ln>
-        </p:spPr>
-        <p:txBody>
-          <a:bodyPr xmlns:a="http://schemas.openxmlformats.org/drawingml/2006/main" wrap="square" lIns="0" tIns="0" rIns="0" bIns="0" anchor="t">
-            <a:normAutofit fontScale="100000"/>
-          </a:bodyPr>
-          <a:lstStyle xmlns:a="http://schemas.openxmlformats.org/drawingml/2006/main"/>
-          <a:p xmlns:a="http://schemas.openxmlformats.org/drawingml/2006/main">
-            <a:pPr algn="l">
-              <a:defRPr sz="1350" b="0" i="0">
-                <a:solidFill>
-                  <a:srgbClr val="52606D"/>
-                </a:solidFill>
-                <a:latin typeface="Aptos"/>
-                <a:ea typeface="Aptos"/>
-                <a:cs typeface="Aptos"/>
-              </a:defRPr>
-            </a:pPr>
-            <a:r>
-              <a:rPr sz="1350" b="0" i="0">
-                <a:solidFill>
-                  <a:srgbClr val="52606D"/>
-                </a:solidFill>
-                <a:latin typeface="Aptos"/>
-                <a:ea typeface="Aptos"/>
-                <a:cs typeface="Aptos"/>
-              </a:rPr>
-              <a:t>relative or sequence features that work with only a few invoices</a:t>
-            </a:r>
-          </a:p>
-        </p:txBody>
-      </p:sp>
-      <p:sp>
-        <p:nvSpPr>
-          <p:cNvPr id="12" name="">
-            <a:extLst xmlns:a="http://schemas.openxmlformats.org/drawingml/2006/main">
-              <a:ext uri="{FF2B5EF4-FFF2-40B4-BE49-F238E27FC236}">
-                <a16:creationId xmlns:a16="http://schemas.microsoft.com/office/drawing/2014/main" id="{C84C787F-DCFB-4E28-97C7-B7DADCAE63DC}"/>
-              </a:ext>
-            </a:extLst>
-          </p:cNvPr>
-          <p:cNvSpPr>
-            <a:spLocks xmlns:a="http://schemas.openxmlformats.org/drawingml/2006/main" noGrp="1"/>
-          </p:cNvSpPr>
-          <p:nvPr/>
-        </p:nvSpPr>
-        <p:spPr>
-          <a:xfrm xmlns:a="http://schemas.openxmlformats.org/drawingml/2006/main">
-            <a:off x="1428750" y="3162300"/>
-            <a:ext cx="9525000" cy="9525"/>
-          </a:xfrm>
-          <a:prstGeom xmlns:a="http://schemas.openxmlformats.org/drawingml/2006/main" prst="rect">
-            <a:avLst/>
-          </a:prstGeom>
-          <a:solidFill xmlns:a="http://schemas.openxmlformats.org/drawingml/2006/main">
-            <a:srgbClr val="D5CEC1"/>
-          </a:solidFill>
-          <a:ln xmlns:a="http://schemas.openxmlformats.org/drawingml/2006/main" w="0">
-            <a:solidFill>
-              <a:srgbClr val="D5CEC1"/>
-            </a:solidFill>
-            <a:prstDash val="solid"/>
-          </a:ln>
-        </p:spPr>
-      </p:sp>
-      <p:sp>
-        <p:nvSpPr>
-          <p:cNvPr id="13" name="">
-            <a:extLst xmlns:a="http://schemas.openxmlformats.org/drawingml/2006/main">
-              <a:ext uri="{FF2B5EF4-FFF2-40B4-BE49-F238E27FC236}">
-                <a16:creationId xmlns:a16="http://schemas.microsoft.com/office/drawing/2014/main" id="{A4316793-2ECB-444B-8EF1-8E553789152E}"/>
-              </a:ext>
-            </a:extLst>
-          </p:cNvPr>
-          <p:cNvSpPr>
-            <a:spLocks xmlns:a="http://schemas.openxmlformats.org/drawingml/2006/main" noGrp="1"/>
-          </p:cNvSpPr>
-          <p:nvPr/>
-        </p:nvSpPr>
-        <p:spPr>
-          <a:xfrm xmlns:a="http://schemas.openxmlformats.org/drawingml/2006/main">
-            <a:off x="723900" y="3448050"/>
-            <a:ext cx="514350" cy="285750"/>
-          </a:xfrm>
-          <a:prstGeom xmlns:a="http://schemas.openxmlformats.org/drawingml/2006/main" prst="rect">
-            <a:avLst/>
-          </a:prstGeom>
-          <a:noFill xmlns:a="http://schemas.openxmlformats.org/drawingml/2006/main"/>
-          <a:ln xmlns:a="http://schemas.openxmlformats.org/drawingml/2006/main" w="0">
-            <a:noFill/>
-            <a:prstDash val="solid"/>
-          </a:ln>
-        </p:spPr>
-        <p:txBody>
-          <a:bodyPr xmlns:a="http://schemas.openxmlformats.org/drawingml/2006/main" wrap="square" lIns="0" tIns="0" rIns="0" bIns="0" anchor="t">
-            <a:normAutofit fontScale="100000"/>
-          </a:bodyPr>
-          <a:lstStyle xmlns:a="http://schemas.openxmlformats.org/drawingml/2006/main"/>
-          <a:p xmlns:a="http://schemas.openxmlformats.org/drawingml/2006/main">
-            <a:pPr algn="l">
-              <a:defRPr sz="1500" b="1" i="0">
-                <a:solidFill>
-                  <a:srgbClr val="1F776D"/>
-                </a:solidFill>
-                <a:latin typeface="Aptos"/>
-                <a:ea typeface="Aptos"/>
-                <a:cs typeface="Aptos"/>
-              </a:defRPr>
-            </a:pPr>
-            <a:r>
-              <a:rPr sz="1500" b="1" i="0">
-                <a:solidFill>
-                  <a:srgbClr val="1F776D"/>
-                </a:solidFill>
-                <a:latin typeface="Aptos"/>
-                <a:ea typeface="Aptos"/>
-                <a:cs typeface="Aptos"/>
-              </a:rPr>
-              <a:t>03</a:t>
-            </a:r>
-          </a:p>
-        </p:txBody>
-      </p:sp>
-      <p:sp>
-        <p:nvSpPr>
-          <p:cNvPr id="14" name="">
-            <a:extLst xmlns:a="http://schemas.openxmlformats.org/drawingml/2006/main">
-              <a:ext uri="{FF2B5EF4-FFF2-40B4-BE49-F238E27FC236}">
-                <a16:creationId xmlns:a16="http://schemas.microsoft.com/office/drawing/2014/main" id="{FFACEF84-0498-47E0-BA85-858BBDC8311B}"/>
-              </a:ext>
-            </a:extLst>
-          </p:cNvPr>
-          <p:cNvSpPr>
-            <a:spLocks xmlns:a="http://schemas.openxmlformats.org/drawingml/2006/main" noGrp="1"/>
-          </p:cNvSpPr>
-          <p:nvPr/>
-        </p:nvSpPr>
-        <p:spPr>
-          <a:xfrm xmlns:a="http://schemas.openxmlformats.org/drawingml/2006/main">
-            <a:off x="1428750" y="3448050"/>
-            <a:ext cx="3143250" cy="285750"/>
-          </a:xfrm>
-          <a:prstGeom xmlns:a="http://schemas.openxmlformats.org/drawingml/2006/main" prst="rect">
-            <a:avLst/>
-          </a:prstGeom>
-          <a:noFill xmlns:a="http://schemas.openxmlformats.org/drawingml/2006/main"/>
-          <a:ln xmlns:a="http://schemas.openxmlformats.org/drawingml/2006/main" w="0">
-            <a:noFill/>
-            <a:prstDash val="solid"/>
-          </a:ln>
-        </p:spPr>
-        <p:txBody>
-          <a:bodyPr xmlns:a="http://schemas.openxmlformats.org/drawingml/2006/main" wrap="square" lIns="0" tIns="0" rIns="0" bIns="0" anchor="t">
-            <a:normAutofit fontScale="100000"/>
-          </a:bodyPr>
-          <a:lstStyle xmlns:a="http://schemas.openxmlformats.org/drawingml/2006/main"/>
-          <a:p xmlns:a="http://schemas.openxmlformats.org/drawingml/2006/main">
-            <a:pPr algn="l">
-              <a:defRPr sz="1650" b="1" i="0">
-                <a:solidFill>
-                  <a:srgbClr val="102A43"/>
-                </a:solidFill>
-                <a:latin typeface="Aptos"/>
-                <a:ea typeface="Aptos"/>
-                <a:cs typeface="Aptos"/>
-              </a:defRPr>
-            </a:pPr>
-            <a:r>
-              <a:rPr sz="1650" b="1" i="0">
-                <a:solidFill>
-                  <a:srgbClr val="102A43"/>
-                </a:solidFill>
-                <a:latin typeface="Aptos"/>
-                <a:ea typeface="Aptos"/>
-                <a:cs typeface="Aptos"/>
-              </a:rPr>
-              <a:t>Validate semantics</a:t>
-            </a:r>
-          </a:p>
-        </p:txBody>
-      </p:sp>
-      <p:sp>
-        <p:nvSpPr>
-          <p:cNvPr id="15" name="">
-            <a:extLst xmlns:a="http://schemas.openxmlformats.org/drawingml/2006/main">
-              <a:ext uri="{FF2B5EF4-FFF2-40B4-BE49-F238E27FC236}">
-                <a16:creationId xmlns:a16="http://schemas.microsoft.com/office/drawing/2014/main" id="{760BBB37-2FE8-4539-BA4D-D1C4795A12A0}"/>
-              </a:ext>
-            </a:extLst>
-          </p:cNvPr>
-          <p:cNvSpPr>
-            <a:spLocks xmlns:a="http://schemas.openxmlformats.org/drawingml/2006/main" noGrp="1"/>
-          </p:cNvSpPr>
-          <p:nvPr/>
-        </p:nvSpPr>
-        <p:spPr>
-          <a:xfrm xmlns:a="http://schemas.openxmlformats.org/drawingml/2006/main">
-            <a:off x="4762500" y="3467100"/>
-            <a:ext cx="6191250" cy="285750"/>
-          </a:xfrm>
-          <a:prstGeom xmlns:a="http://schemas.openxmlformats.org/drawingml/2006/main" prst="rect">
-            <a:avLst/>
-          </a:prstGeom>
-          <a:noFill xmlns:a="http://schemas.openxmlformats.org/drawingml/2006/main"/>
-          <a:ln xmlns:a="http://schemas.openxmlformats.org/drawingml/2006/main" w="0">
-            <a:noFill/>
-            <a:prstDash val="solid"/>
-          </a:ln>
-        </p:spPr>
-        <p:txBody>
-          <a:bodyPr xmlns:a="http://schemas.openxmlformats.org/drawingml/2006/main" wrap="square" lIns="0" tIns="0" rIns="0" bIns="0" anchor="t">
-            <a:normAutofit fontScale="100000"/>
-          </a:bodyPr>
-          <a:lstStyle xmlns:a="http://schemas.openxmlformats.org/drawingml/2006/main"/>
-          <a:p xmlns:a="http://schemas.openxmlformats.org/drawingml/2006/main">
-            <a:pPr algn="l">
-              <a:defRPr sz="1350" b="0" i="0">
-                <a:solidFill>
-                  <a:srgbClr val="52606D"/>
-                </a:solidFill>
-                <a:latin typeface="Aptos"/>
-                <a:ea typeface="Aptos"/>
-                <a:cs typeface="Aptos"/>
-              </a:defRPr>
-            </a:pPr>
-            <a:r>
-              <a:rPr sz="1350" b="0" i="0">
-                <a:solidFill>
-                  <a:srgbClr val="52606D"/>
-                </a:solidFill>
-                <a:latin typeface="Aptos"/>
-                <a:ea typeface="Aptos"/>
-                <a:cs typeface="Aptos"/>
-              </a:rPr>
-              <a:t>meter identifiers and the reconciliation threshold with experts</a:t>
-            </a:r>
-          </a:p>
-        </p:txBody>
-      </p:sp>
-      <p:sp>
-        <p:nvSpPr>
-          <p:cNvPr id="16" name="">
-            <a:extLst xmlns:a="http://schemas.openxmlformats.org/drawingml/2006/main">
-              <a:ext uri="{FF2B5EF4-FFF2-40B4-BE49-F238E27FC236}">
-                <a16:creationId xmlns:a16="http://schemas.microsoft.com/office/drawing/2014/main" id="{7DC260EE-07B3-48D8-A810-0C7CB97EEFDA}"/>
-              </a:ext>
-            </a:extLst>
-          </p:cNvPr>
-          <p:cNvSpPr>
-            <a:spLocks xmlns:a="http://schemas.openxmlformats.org/drawingml/2006/main" noGrp="1"/>
-          </p:cNvSpPr>
-          <p:nvPr/>
-        </p:nvSpPr>
-        <p:spPr>
-          <a:xfrm xmlns:a="http://schemas.openxmlformats.org/drawingml/2006/main">
-            <a:off x="1428750" y="3943350"/>
-            <a:ext cx="9525000" cy="9525"/>
-          </a:xfrm>
-          <a:prstGeom xmlns:a="http://schemas.openxmlformats.org/drawingml/2006/main" prst="rect">
-            <a:avLst/>
-          </a:prstGeom>
-          <a:solidFill xmlns:a="http://schemas.openxmlformats.org/drawingml/2006/main">
-            <a:srgbClr val="D5CEC1"/>
-          </a:solidFill>
-          <a:ln xmlns:a="http://schemas.openxmlformats.org/drawingml/2006/main" w="0">
-            <a:solidFill>
-              <a:srgbClr val="D5CEC1"/>
-            </a:solidFill>
-            <a:prstDash val="solid"/>
-          </a:ln>
-        </p:spPr>
-      </p:sp>
-      <p:sp>
-        <p:nvSpPr>
-          <p:cNvPr id="17" name="">
-            <a:extLst xmlns:a="http://schemas.openxmlformats.org/drawingml/2006/main">
-              <a:ext uri="{FF2B5EF4-FFF2-40B4-BE49-F238E27FC236}">
-                <a16:creationId xmlns:a16="http://schemas.microsoft.com/office/drawing/2014/main" id="{76AF9C66-8922-4B0E-A52E-249CF8E3CF75}"/>
-              </a:ext>
-            </a:extLst>
-          </p:cNvPr>
-          <p:cNvSpPr>
-            <a:spLocks xmlns:a="http://schemas.openxmlformats.org/drawingml/2006/main" noGrp="1"/>
-          </p:cNvSpPr>
-          <p:nvPr/>
-        </p:nvSpPr>
-        <p:spPr>
-          <a:xfrm xmlns:a="http://schemas.openxmlformats.org/drawingml/2006/main">
-            <a:off x="723900" y="4229100"/>
-            <a:ext cx="514350" cy="285750"/>
-          </a:xfrm>
-          <a:prstGeom xmlns:a="http://schemas.openxmlformats.org/drawingml/2006/main" prst="rect">
-            <a:avLst/>
-          </a:prstGeom>
-          <a:noFill xmlns:a="http://schemas.openxmlformats.org/drawingml/2006/main"/>
-          <a:ln xmlns:a="http://schemas.openxmlformats.org/drawingml/2006/main" w="0">
-            <a:noFill/>
-            <a:prstDash val="solid"/>
-          </a:ln>
-        </p:spPr>
-        <p:txBody>
-          <a:bodyPr xmlns:a="http://schemas.openxmlformats.org/drawingml/2006/main" wrap="square" lIns="0" tIns="0" rIns="0" bIns="0" anchor="t">
-            <a:normAutofit fontScale="100000"/>
-          </a:bodyPr>
-          <a:lstStyle xmlns:a="http://schemas.openxmlformats.org/drawingml/2006/main"/>
-          <a:p xmlns:a="http://schemas.openxmlformats.org/drawingml/2006/main">
-            <a:pPr algn="l">
-              <a:defRPr sz="1500" b="1" i="0">
-                <a:solidFill>
-                  <a:srgbClr val="1F776D"/>
-                </a:solidFill>
-                <a:latin typeface="Aptos"/>
-                <a:ea typeface="Aptos"/>
-                <a:cs typeface="Aptos"/>
-              </a:defRPr>
-            </a:pPr>
-            <a:r>
-              <a:rPr sz="1500" b="1" i="0">
-                <a:solidFill>
-                  <a:srgbClr val="1F776D"/>
-                </a:solidFill>
-                <a:latin typeface="Aptos"/>
-                <a:ea typeface="Aptos"/>
-                <a:cs typeface="Aptos"/>
-              </a:rPr>
-              <a:t>04</a:t>
-            </a:r>
-          </a:p>
-        </p:txBody>
-      </p:sp>
-      <p:sp>
-        <p:nvSpPr>
-          <p:cNvPr id="18" name="">
-            <a:extLst xmlns:a="http://schemas.openxmlformats.org/drawingml/2006/main">
-              <a:ext uri="{FF2B5EF4-FFF2-40B4-BE49-F238E27FC236}">
-                <a16:creationId xmlns:a16="http://schemas.microsoft.com/office/drawing/2014/main" id="{F578B7CE-DC48-4DCE-88F7-905CDFF4A638}"/>
-              </a:ext>
-            </a:extLst>
-          </p:cNvPr>
-          <p:cNvSpPr>
-            <a:spLocks xmlns:a="http://schemas.openxmlformats.org/drawingml/2006/main" noGrp="1"/>
-          </p:cNvSpPr>
-          <p:nvPr/>
-        </p:nvSpPr>
-        <p:spPr>
-          <a:xfrm xmlns:a="http://schemas.openxmlformats.org/drawingml/2006/main">
-            <a:off x="1428750" y="4229100"/>
-            <a:ext cx="3143250" cy="285750"/>
-          </a:xfrm>
-          <a:prstGeom xmlns:a="http://schemas.openxmlformats.org/drawingml/2006/main" prst="rect">
-            <a:avLst/>
-          </a:prstGeom>
-          <a:noFill xmlns:a="http://schemas.openxmlformats.org/drawingml/2006/main"/>
-          <a:ln xmlns:a="http://schemas.openxmlformats.org/drawingml/2006/main" w="0">
-            <a:noFill/>
-            <a:prstDash val="solid"/>
-          </a:ln>
-        </p:spPr>
-        <p:txBody>
-          <a:bodyPr xmlns:a="http://schemas.openxmlformats.org/drawingml/2006/main" wrap="square" lIns="0" tIns="0" rIns="0" bIns="0" anchor="t">
-            <a:normAutofit fontScale="100000"/>
-          </a:bodyPr>
-          <a:lstStyle xmlns:a="http://schemas.openxmlformats.org/drawingml/2006/main"/>
-          <a:p xmlns:a="http://schemas.openxmlformats.org/drawingml/2006/main">
-            <a:pPr algn="l">
-              <a:defRPr sz="1650" b="1" i="0">
-                <a:solidFill>
-                  <a:srgbClr val="102A43"/>
-                </a:solidFill>
-                <a:latin typeface="Aptos"/>
-                <a:ea typeface="Aptos"/>
-                <a:cs typeface="Aptos"/>
-              </a:defRPr>
-            </a:pPr>
-            <a:r>
-              <a:rPr sz="1650" b="1" i="0">
-                <a:solidFill>
-                  <a:srgbClr val="102A43"/>
-                </a:solidFill>
-                <a:latin typeface="Aptos"/>
-                <a:ea typeface="Aptos"/>
-                <a:cs typeface="Aptos"/>
-              </a:rPr>
-              <a:t>Test time</a:t>
-            </a:r>
-          </a:p>
-        </p:txBody>
-      </p:sp>
-      <p:sp>
-        <p:nvSpPr>
-          <p:cNvPr id="19" name="">
-            <a:extLst xmlns:a="http://schemas.openxmlformats.org/drawingml/2006/main">
-              <a:ext uri="{FF2B5EF4-FFF2-40B4-BE49-F238E27FC236}">
-                <a16:creationId xmlns:a16="http://schemas.microsoft.com/office/drawing/2014/main" id="{1904A384-4B24-411A-9C0B-FE718BEA8592}"/>
-              </a:ext>
-            </a:extLst>
-          </p:cNvPr>
-          <p:cNvSpPr>
-            <a:spLocks xmlns:a="http://schemas.openxmlformats.org/drawingml/2006/main" noGrp="1"/>
-          </p:cNvSpPr>
-          <p:nvPr/>
-        </p:nvSpPr>
-        <p:spPr>
-          <a:xfrm xmlns:a="http://schemas.openxmlformats.org/drawingml/2006/main">
-            <a:off x="4762500" y="4248150"/>
-            <a:ext cx="6191250" cy="285750"/>
-          </a:xfrm>
-          <a:prstGeom xmlns:a="http://schemas.openxmlformats.org/drawingml/2006/main" prst="rect">
-            <a:avLst/>
-          </a:prstGeom>
-          <a:noFill xmlns:a="http://schemas.openxmlformats.org/drawingml/2006/main"/>
-          <a:ln xmlns:a="http://schemas.openxmlformats.org/drawingml/2006/main" w="0">
-            <a:noFill/>
-            <a:prstDash val="solid"/>
-          </a:ln>
-        </p:spPr>
-        <p:txBody>
-          <a:bodyPr xmlns:a="http://schemas.openxmlformats.org/drawingml/2006/main" wrap="square" lIns="0" tIns="0" rIns="0" bIns="0" anchor="t">
-            <a:normAutofit fontScale="100000"/>
-          </a:bodyPr>
-          <a:lstStyle xmlns:a="http://schemas.openxmlformats.org/drawingml/2006/main"/>
-          <a:p xmlns:a="http://schemas.openxmlformats.org/drawingml/2006/main">
-            <a:pPr algn="l">
-              <a:defRPr sz="1350" b="0" i="0">
-                <a:solidFill>
-                  <a:srgbClr val="52606D"/>
-                </a:solidFill>
-                <a:latin typeface="Aptos"/>
-                <a:ea typeface="Aptos"/>
-                <a:cs typeface="Aptos"/>
-              </a:defRPr>
-            </a:pPr>
-            <a:r>
-              <a:rPr sz="1350" b="0" i="0">
-                <a:solidFill>
-                  <a:srgbClr val="52606D"/>
-                </a:solidFill>
-                <a:latin typeface="Aptos"/>
-                <a:ea typeface="Aptos"/>
-                <a:cs typeface="Aptos"/>
-              </a:rPr>
-              <a:t>as-of cutoff and temporal backtesting</a:t>
-            </a:r>
-          </a:p>
-        </p:txBody>
-      </p:sp>
-      <p:sp>
-        <p:nvSpPr>
-          <p:cNvPr id="20" name="">
-            <a:extLst xmlns:a="http://schemas.openxmlformats.org/drawingml/2006/main">
-              <a:ext uri="{FF2B5EF4-FFF2-40B4-BE49-F238E27FC236}">
-                <a16:creationId xmlns:a16="http://schemas.microsoft.com/office/drawing/2014/main" id="{5633841A-0094-4528-9B7A-5E1C8BD637FD}"/>
-              </a:ext>
-            </a:extLst>
-          </p:cNvPr>
-          <p:cNvSpPr>
-            <a:spLocks xmlns:a="http://schemas.openxmlformats.org/drawingml/2006/main" noGrp="1"/>
-          </p:cNvSpPr>
-          <p:nvPr/>
-        </p:nvSpPr>
-        <p:spPr>
-          <a:xfrm xmlns:a="http://schemas.openxmlformats.org/drawingml/2006/main">
-            <a:off x="1428750" y="4724400"/>
-            <a:ext cx="9525000" cy="9525"/>
-          </a:xfrm>
-          <a:prstGeom xmlns:a="http://schemas.openxmlformats.org/drawingml/2006/main" prst="rect">
-            <a:avLst/>
-          </a:prstGeom>
-          <a:solidFill xmlns:a="http://schemas.openxmlformats.org/drawingml/2006/main">
-            <a:srgbClr val="D5CEC1"/>
-          </a:solidFill>
-          <a:ln xmlns:a="http://schemas.openxmlformats.org/drawingml/2006/main" w="0">
-            <a:solidFill>
-              <a:srgbClr val="D5CEC1"/>
-            </a:solidFill>
-            <a:prstDash val="solid"/>
-          </a:ln>
-        </p:spPr>
-      </p:sp>
-      <p:sp>
-        <p:nvSpPr>
-          <p:cNvPr id="21" name="">
-            <a:extLst xmlns:a="http://schemas.openxmlformats.org/drawingml/2006/main">
-              <a:ext uri="{FF2B5EF4-FFF2-40B4-BE49-F238E27FC236}">
-                <a16:creationId xmlns:a16="http://schemas.microsoft.com/office/drawing/2014/main" id="{7BE4D244-1405-4445-8020-35745CF6BB86}"/>
-              </a:ext>
-            </a:extLst>
-          </p:cNvPr>
-          <p:cNvSpPr>
-            <a:spLocks xmlns:a="http://schemas.openxmlformats.org/drawingml/2006/main" noGrp="1"/>
-          </p:cNvSpPr>
-          <p:nvPr/>
-        </p:nvSpPr>
-        <p:spPr>
-          <a:xfrm xmlns:a="http://schemas.openxmlformats.org/drawingml/2006/main">
-            <a:off x="723900" y="5010150"/>
-            <a:ext cx="514350" cy="285750"/>
-          </a:xfrm>
-          <a:prstGeom xmlns:a="http://schemas.openxmlformats.org/drawingml/2006/main" prst="rect">
-            <a:avLst/>
-          </a:prstGeom>
-          <a:noFill xmlns:a="http://schemas.openxmlformats.org/drawingml/2006/main"/>
-          <a:ln xmlns:a="http://schemas.openxmlformats.org/drawingml/2006/main" w="0">
-            <a:noFill/>
-            <a:prstDash val="solid"/>
-          </a:ln>
-        </p:spPr>
-        <p:txBody>
-          <a:bodyPr xmlns:a="http://schemas.openxmlformats.org/drawingml/2006/main" wrap="square" lIns="0" tIns="0" rIns="0" bIns="0" anchor="t">
-            <a:normAutofit fontScale="100000"/>
-          </a:bodyPr>
-          <a:lstStyle xmlns:a="http://schemas.openxmlformats.org/drawingml/2006/main"/>
-          <a:p xmlns:a="http://schemas.openxmlformats.org/drawingml/2006/main">
-            <a:pPr algn="l">
-              <a:defRPr sz="1500" b="1" i="0">
-                <a:solidFill>
-                  <a:srgbClr val="1F776D"/>
-                </a:solidFill>
-                <a:latin typeface="Aptos"/>
-                <a:ea typeface="Aptos"/>
-                <a:cs typeface="Aptos"/>
-              </a:defRPr>
-            </a:pPr>
-            <a:r>
-              <a:rPr sz="1500" b="1" i="0">
-                <a:solidFill>
-                  <a:srgbClr val="1F776D"/>
-                </a:solidFill>
-                <a:latin typeface="Aptos"/>
-                <a:ea typeface="Aptos"/>
-                <a:cs typeface="Aptos"/>
-              </a:rPr>
-              <a:t>05</a:t>
-            </a:r>
-          </a:p>
-        </p:txBody>
-      </p:sp>
-      <p:sp>
-        <p:nvSpPr>
           <p:cNvPr id="22" name="">
             <a:extLst xmlns:a="http://schemas.openxmlformats.org/drawingml/2006/main">
               <a:ext uri="{FF2B5EF4-FFF2-40B4-BE49-F238E27FC236}">
-                <a16:creationId xmlns:a16="http://schemas.microsoft.com/office/drawing/2014/main" id="{37D544D9-B613-4754-8944-38B2B8D80D12}"/>
-              </a:ext>
-            </a:extLst>
-          </p:cNvPr>
-          <p:cNvSpPr>
-            <a:spLocks xmlns:a="http://schemas.openxmlformats.org/drawingml/2006/main" noGrp="1"/>
-          </p:cNvSpPr>
-          <p:nvPr/>
-        </p:nvSpPr>
-        <p:spPr>
-          <a:xfrm xmlns:a="http://schemas.openxmlformats.org/drawingml/2006/main">
-            <a:off x="1428750" y="5010150"/>
-            <a:ext cx="3143250" cy="285750"/>
-          </a:xfrm>
-          <a:prstGeom xmlns:a="http://schemas.openxmlformats.org/drawingml/2006/main" prst="rect">
-            <a:avLst/>
-          </a:prstGeom>
-          <a:noFill xmlns:a="http://schemas.openxmlformats.org/drawingml/2006/main"/>
-          <a:ln xmlns:a="http://schemas.openxmlformats.org/drawingml/2006/main" w="0">
-            <a:noFill/>
-            <a:prstDash val="solid"/>
-          </a:ln>
-        </p:spPr>
-        <p:txBody>
-          <a:bodyPr xmlns:a="http://schemas.openxmlformats.org/drawingml/2006/main" wrap="square" lIns="0" tIns="0" rIns="0" bIns="0" anchor="t">
-            <a:normAutofit fontScale="100000"/>
-          </a:bodyPr>
-          <a:lstStyle xmlns:a="http://schemas.openxmlformats.org/drawingml/2006/main"/>
-          <a:p xmlns:a="http://schemas.openxmlformats.org/drawingml/2006/main">
-            <a:pPr algn="l">
-              <a:defRPr sz="1650" b="1" i="0">
-                <a:solidFill>
-                  <a:srgbClr val="102A43"/>
-                </a:solidFill>
-                <a:latin typeface="Aptos"/>
-                <a:ea typeface="Aptos"/>
-                <a:cs typeface="Aptos"/>
-              </a:defRPr>
-            </a:pPr>
-            <a:r>
-              <a:rPr sz="1650" b="1" i="0">
-                <a:solidFill>
-                  <a:srgbClr val="102A43"/>
-                </a:solidFill>
-                <a:latin typeface="Aptos"/>
-                <a:ea typeface="Aptos"/>
-                <a:cs typeface="Aptos"/>
-              </a:rPr>
-              <a:t>Check segments</a:t>
-            </a:r>
-          </a:p>
-        </p:txBody>
-      </p:sp>
-      <p:sp>
-        <p:nvSpPr>
-          <p:cNvPr id="23" name="">
-            <a:extLst xmlns:a="http://schemas.openxmlformats.org/drawingml/2006/main">
-              <a:ext uri="{FF2B5EF4-FFF2-40B4-BE49-F238E27FC236}">
-                <a16:creationId xmlns:a16="http://schemas.microsoft.com/office/drawing/2014/main" id="{A5B37676-73AD-459F-8B92-4CAC0916581F}"/>
-              </a:ext>
-            </a:extLst>
-          </p:cNvPr>
-          <p:cNvSpPr>
-            <a:spLocks xmlns:a="http://schemas.openxmlformats.org/drawingml/2006/main" noGrp="1"/>
-          </p:cNvSpPr>
-          <p:nvPr/>
-        </p:nvSpPr>
-        <p:spPr>
-          <a:xfrm xmlns:a="http://schemas.openxmlformats.org/drawingml/2006/main">
-            <a:off x="4762500" y="5029200"/>
-            <a:ext cx="6191250" cy="285750"/>
-          </a:xfrm>
-          <a:prstGeom xmlns:a="http://schemas.openxmlformats.org/drawingml/2006/main" prst="rect">
-            <a:avLst/>
-          </a:prstGeom>
-          <a:noFill xmlns:a="http://schemas.openxmlformats.org/drawingml/2006/main"/>
-          <a:ln xmlns:a="http://schemas.openxmlformats.org/drawingml/2006/main" w="0">
-            <a:noFill/>
-            <a:prstDash val="solid"/>
-          </a:ln>
-        </p:spPr>
-        <p:txBody>
-          <a:bodyPr xmlns:a="http://schemas.openxmlformats.org/drawingml/2006/main" wrap="square" lIns="0" tIns="0" rIns="0" bIns="0" anchor="t">
-            <a:normAutofit fontScale="100000"/>
-          </a:bodyPr>
-          <a:lstStyle xmlns:a="http://schemas.openxmlformats.org/drawingml/2006/main"/>
-          <a:p xmlns:a="http://schemas.openxmlformats.org/drawingml/2006/main">
-            <a:pPr algn="l">
-              <a:defRPr sz="1350" b="0" i="0">
-                <a:solidFill>
-                  <a:srgbClr val="52606D"/>
-                </a:solidFill>
-                <a:latin typeface="Aptos"/>
-                <a:ea typeface="Aptos"/>
-                <a:cs typeface="Aptos"/>
-              </a:defRPr>
-            </a:pPr>
-            <a:r>
-              <a:rPr sz="1350" b="0" i="0">
-                <a:solidFill>
-                  <a:srgbClr val="52606D"/>
-                </a:solidFill>
-                <a:latin typeface="Aptos"/>
-                <a:ea typeface="Aptos"/>
-                <a:cs typeface="Aptos"/>
-              </a:rPr>
-              <a:t>region, category, history length, and meter availability</a:t>
-            </a:r>
-          </a:p>
-        </p:txBody>
-      </p:sp>
-      <p:sp>
-        <p:nvSpPr>
-          <p:cNvPr id="24" name="">
-            <a:extLst xmlns:a="http://schemas.openxmlformats.org/drawingml/2006/main">
-              <a:ext uri="{FF2B5EF4-FFF2-40B4-BE49-F238E27FC236}">
-                <a16:creationId xmlns:a16="http://schemas.microsoft.com/office/drawing/2014/main" id="{B5D478C5-1E8A-47B3-8C81-E2F4D43513B2}"/>
-              </a:ext>
-            </a:extLst>
-          </p:cNvPr>
-          <p:cNvSpPr>
-            <a:spLocks xmlns:a="http://schemas.openxmlformats.org/drawingml/2006/main" noGrp="1"/>
-          </p:cNvSpPr>
-          <p:nvPr/>
-        </p:nvSpPr>
-        <p:spPr>
-          <a:xfrm xmlns:a="http://schemas.openxmlformats.org/drawingml/2006/main">
-            <a:off x="1428750" y="5505450"/>
-            <a:ext cx="9525000" cy="9525"/>
-          </a:xfrm>
-          <a:prstGeom xmlns:a="http://schemas.openxmlformats.org/drawingml/2006/main" prst="rect">
-            <a:avLst/>
-          </a:prstGeom>
-          <a:solidFill xmlns:a="http://schemas.openxmlformats.org/drawingml/2006/main">
-            <a:srgbClr val="D5CEC1"/>
-          </a:solidFill>
-          <a:ln xmlns:a="http://schemas.openxmlformats.org/drawingml/2006/main" w="0">
-            <a:solidFill>
-              <a:srgbClr val="D5CEC1"/>
-            </a:solidFill>
-            <a:prstDash val="solid"/>
-          </a:ln>
-        </p:spPr>
-      </p:sp>
-      <p:sp>
-        <p:nvSpPr>
-          <p:cNvPr id="25" name="">
-            <a:extLst xmlns:a="http://schemas.openxmlformats.org/drawingml/2006/main">
-              <a:ext uri="{FF2B5EF4-FFF2-40B4-BE49-F238E27FC236}">
-                <a16:creationId xmlns:a16="http://schemas.microsoft.com/office/drawing/2014/main" id="{573C9A6C-4EB1-414D-9700-03B8165D074B}"/>
-              </a:ext>
-            </a:extLst>
-          </p:cNvPr>
-          <p:cNvSpPr>
-            <a:spLocks xmlns:a="http://schemas.openxmlformats.org/drawingml/2006/main" noGrp="1"/>
-          </p:cNvSpPr>
-          <p:nvPr/>
-        </p:nvSpPr>
-        <p:spPr>
-          <a:xfrm xmlns:a="http://schemas.openxmlformats.org/drawingml/2006/main">
-            <a:off x="1428750" y="5924550"/>
-            <a:ext cx="9334500" cy="285750"/>
-          </a:xfrm>
-          <a:prstGeom xmlns:a="http://schemas.openxmlformats.org/drawingml/2006/main" prst="rect">
-            <a:avLst/>
-          </a:prstGeom>
-          <a:noFill xmlns:a="http://schemas.openxmlformats.org/drawingml/2006/main"/>
-          <a:ln xmlns:a="http://schemas.openxmlformats.org/drawingml/2006/main" w="0">
-            <a:noFill/>
-            <a:prstDash val="solid"/>
-          </a:ln>
-        </p:spPr>
-        <p:txBody>
-          <a:bodyPr xmlns:a="http://schemas.openxmlformats.org/drawingml/2006/main" wrap="square" lIns="0" tIns="0" rIns="0" bIns="0" anchor="t">
-            <a:normAutofit fontScale="100000"/>
-          </a:bodyPr>
-          <a:lstStyle xmlns:a="http://schemas.openxmlformats.org/drawingml/2006/main"/>
-          <a:p xmlns:a="http://schemas.openxmlformats.org/drawingml/2006/main">
-            <a:pPr algn="l">
-              <a:defRPr sz="1425" b="1" i="0">
-                <a:solidFill>
-                  <a:srgbClr val="D95D53"/>
-                </a:solidFill>
-                <a:latin typeface="Aptos"/>
-                <a:ea typeface="Aptos"/>
-                <a:cs typeface="Aptos"/>
-              </a:defRPr>
-            </a:pPr>
-            <a:r>
-              <a:rPr sz="1425" b="1" i="0">
-                <a:solidFill>
-                  <a:srgbClr val="D95D53"/>
-                </a:solidFill>
-                <a:latin typeface="Aptos"/>
-                <a:ea typeface="Aptos"/>
-                <a:cs typeface="Aptos"/>
-              </a:rPr>
-              <a:t>Protect the final holdout until the feature contract and threshold are frozen.</a:t>
-            </a:r>
-          </a:p>
-        </p:txBody>
-      </p:sp>
-      <p:sp>
-        <p:nvSpPr>
-          <p:cNvPr id="26" name="">
-            <a:extLst xmlns:a="http://schemas.openxmlformats.org/drawingml/2006/main">
-              <a:ext uri="{FF2B5EF4-FFF2-40B4-BE49-F238E27FC236}">
-                <a16:creationId xmlns:a16="http://schemas.microsoft.com/office/drawing/2014/main" id="{ADF41215-B88F-4909-B5F2-0A5913C89B0A}"/>
-              </a:ext>
-            </a:extLst>
-          </p:cNvPr>
-          <p:cNvSpPr>
-            <a:spLocks xmlns:a="http://schemas.openxmlformats.org/drawingml/2006/main" noGrp="1"/>
-          </p:cNvSpPr>
-          <p:nvPr/>
-        </p:nvSpPr>
-        <p:spPr>
-          <a:xfrm xmlns:a="http://schemas.openxmlformats.org/drawingml/2006/main">
-            <a:off x="647700" y="6534150"/>
-            <a:ext cx="10896600" cy="9525"/>
-          </a:xfrm>
-          <a:prstGeom xmlns:a="http://schemas.openxmlformats.org/drawingml/2006/main" prst="rect">
-            <a:avLst/>
-          </a:prstGeom>
-          <a:solidFill xmlns:a="http://schemas.openxmlformats.org/drawingml/2006/main">
-            <a:srgbClr val="D5CEC1"/>
-          </a:solidFill>
-          <a:ln xmlns:a="http://schemas.openxmlformats.org/drawingml/2006/main" w="0">
-            <a:solidFill>
-              <a:srgbClr val="D5CEC1"/>
-            </a:solidFill>
-            <a:prstDash val="solid"/>
-          </a:ln>
-        </p:spPr>
-      </p:sp>
-      <p:sp>
-        <p:nvSpPr>
-          <p:cNvPr id="27" name="">
-            <a:extLst xmlns:a="http://schemas.openxmlformats.org/drawingml/2006/main">
-              <a:ext uri="{FF2B5EF4-FFF2-40B4-BE49-F238E27FC236}">
-                <a16:creationId xmlns:a16="http://schemas.microsoft.com/office/drawing/2014/main" id="{2832594A-0406-4903-9F7A-8D045C43F364}"/>
+                <a16:creationId xmlns:a16="http://schemas.microsoft.com/office/drawing/2014/main" id="{51F8B7FB-FB11-4E3E-9B4A-A88175B2CE92}"/>
               </a:ext>
             </a:extLst>
           </p:cNvPr>
@@ -13612,10 +13316,10 @@
       </p:sp>
       <p:sp>
         <p:nvSpPr>
-          <p:cNvPr id="28" name="">
-            <a:extLst xmlns:a="http://schemas.openxmlformats.org/drawingml/2006/main">
-              <a:ext uri="{FF2B5EF4-FFF2-40B4-BE49-F238E27FC236}">
-                <a16:creationId xmlns:a16="http://schemas.microsoft.com/office/drawing/2014/main" id="{EBD6188F-1758-4940-A5B1-580FE58CDE82}"/>
+          <p:cNvPr id="23" name="">
+            <a:extLst xmlns:a="http://schemas.openxmlformats.org/drawingml/2006/main">
+              <a:ext uri="{FF2B5EF4-FFF2-40B4-BE49-F238E27FC236}">
+                <a16:creationId xmlns:a16="http://schemas.microsoft.com/office/drawing/2014/main" id="{2026D479-8C86-41E6-B23C-382130A73E4E}"/>
               </a:ext>
             </a:extLst>
           </p:cNvPr>
@@ -13671,7 +13375,7 @@
     </p:spTree>
     <p:extLst>
       <p:ext uri="{BB962C8B-B14F-4D97-AF65-F5344CB8AC3E}">
-        <p14:creationId xmlns:p14="http://schemas.microsoft.com/office/powerpoint/2010/main" val="642464640"/>
+        <p14:creationId xmlns:p14="http://schemas.microsoft.com/office/powerpoint/2010/main" val="1980545378"/>
       </p:ext>
     </p:extLst>
   </p:cSld>
@@ -13679,6 +13383,1484 @@
 </file>
 
 <file path=ppt/slides/slide16.xml><?xml version="1.0" encoding="utf-8"?>
+<p:sld xmlns:p="http://schemas.openxmlformats.org/presentationml/2006/main">
+  <p:cSld>
+    <p:bg>
+      <p:bgPr>
+        <a:solidFill xmlns:a="http://schemas.openxmlformats.org/drawingml/2006/main">
+          <a:srgbClr val="F5F1E8"/>
+        </a:solidFill>
+      </p:bgPr>
+    </p:bg>
+    <p:spTree>
+      <p:nvGrpSpPr>
+        <p:cNvPr id="1" name=""/>
+        <p:cNvGrpSpPr/>
+        <p:nvPr/>
+      </p:nvGrpSpPr>
+      <p:grpSpPr>
+        <a:xfrm xmlns:a="http://schemas.openxmlformats.org/drawingml/2006/main"/>
+      </p:grpSpPr>
+      <p:sp>
+        <p:nvSpPr>
+          <p:cNvPr id="29" name="">
+            <a:extLst xmlns:a="http://schemas.openxmlformats.org/drawingml/2006/main">
+              <a:ext uri="{FF2B5EF4-FFF2-40B4-BE49-F238E27FC236}">
+                <a16:creationId xmlns:a16="http://schemas.microsoft.com/office/drawing/2014/main" id="{19C5A709-026F-417F-89B3-9F3856618B21}"/>
+              </a:ext>
+            </a:extLst>
+          </p:cNvPr>
+          <p:cNvSpPr>
+            <a:spLocks xmlns:a="http://schemas.openxmlformats.org/drawingml/2006/main" noGrp="1"/>
+          </p:cNvSpPr>
+          <p:nvPr/>
+        </p:nvSpPr>
+        <p:spPr>
+          <a:xfrm xmlns:a="http://schemas.openxmlformats.org/drawingml/2006/main">
+            <a:off x="647700" y="323850"/>
+            <a:ext cx="3333750" cy="228600"/>
+          </a:xfrm>
+          <a:prstGeom xmlns:a="http://schemas.openxmlformats.org/drawingml/2006/main" prst="rect">
+            <a:avLst/>
+          </a:prstGeom>
+          <a:noFill xmlns:a="http://schemas.openxmlformats.org/drawingml/2006/main"/>
+          <a:ln xmlns:a="http://schemas.openxmlformats.org/drawingml/2006/main" w="0">
+            <a:noFill/>
+            <a:prstDash val="solid"/>
+          </a:ln>
+        </p:spPr>
+        <p:txBody>
+          <a:bodyPr xmlns:a="http://schemas.openxmlformats.org/drawingml/2006/main" wrap="square" lIns="0" tIns="0" rIns="0" bIns="0" anchor="t">
+            <a:normAutofit fontScale="100000"/>
+          </a:bodyPr>
+          <a:lstStyle xmlns:a="http://schemas.openxmlformats.org/drawingml/2006/main"/>
+          <a:p xmlns:a="http://schemas.openxmlformats.org/drawingml/2006/main">
+            <a:pPr algn="l">
+              <a:defRPr sz="1050" b="1" i="0">
+                <a:solidFill>
+                  <a:srgbClr val="1F776D"/>
+                </a:solidFill>
+                <a:latin typeface="Aptos"/>
+                <a:ea typeface="Aptos"/>
+                <a:cs typeface="Aptos"/>
+              </a:defRPr>
+            </a:pPr>
+            <a:r>
+              <a:rPr sz="1050" b="1" i="0">
+                <a:solidFill>
+                  <a:srgbClr val="1F776D"/>
+                </a:solidFill>
+                <a:latin typeface="Aptos"/>
+                <a:ea typeface="Aptos"/>
+                <a:cs typeface="Aptos"/>
+              </a:rPr>
+              <a:t>NEXT ITERATION</a:t>
+            </a:r>
+          </a:p>
+        </p:txBody>
+      </p:sp>
+      <p:sp>
+        <p:nvSpPr>
+          <p:cNvPr id="2" name="">
+            <a:extLst xmlns:a="http://schemas.openxmlformats.org/drawingml/2006/main">
+              <a:ext uri="{FF2B5EF4-FFF2-40B4-BE49-F238E27FC236}">
+                <a16:creationId xmlns:a16="http://schemas.microsoft.com/office/drawing/2014/main" id="{C78EC7F7-372F-4558-B144-3E01D46157BE}"/>
+              </a:ext>
+            </a:extLst>
+          </p:cNvPr>
+          <p:cNvSpPr>
+            <a:spLocks xmlns:a="http://schemas.openxmlformats.org/drawingml/2006/main" noGrp="1"/>
+          </p:cNvSpPr>
+          <p:nvPr/>
+        </p:nvSpPr>
+        <p:spPr>
+          <a:xfrm xmlns:a="http://schemas.openxmlformats.org/drawingml/2006/main">
+            <a:off x="647700" y="647700"/>
+            <a:ext cx="10668000" cy="552450"/>
+          </a:xfrm>
+          <a:prstGeom xmlns:a="http://schemas.openxmlformats.org/drawingml/2006/main" prst="rect">
+            <a:avLst/>
+          </a:prstGeom>
+          <a:noFill xmlns:a="http://schemas.openxmlformats.org/drawingml/2006/main"/>
+          <a:ln xmlns:a="http://schemas.openxmlformats.org/drawingml/2006/main" w="0">
+            <a:noFill/>
+            <a:prstDash val="solid"/>
+          </a:ln>
+        </p:spPr>
+        <p:txBody>
+          <a:bodyPr xmlns:a="http://schemas.openxmlformats.org/drawingml/2006/main" wrap="square" lIns="0" tIns="0" rIns="0" bIns="0" anchor="t">
+            <a:normAutofit fontScale="100000"/>
+          </a:bodyPr>
+          <a:lstStyle xmlns:a="http://schemas.openxmlformats.org/drawingml/2006/main"/>
+          <a:p xmlns:a="http://schemas.openxmlformats.org/drawingml/2006/main">
+            <a:pPr algn="l">
+              <a:defRPr sz="2550" b="1" i="0">
+                <a:solidFill>
+                  <a:srgbClr val="102A43"/>
+                </a:solidFill>
+                <a:latin typeface="Aptos"/>
+                <a:ea typeface="Aptos"/>
+                <a:cs typeface="Aptos"/>
+              </a:defRPr>
+            </a:pPr>
+            <a:r>
+              <a:rPr sz="2550" b="1" i="0">
+                <a:solidFill>
+                  <a:srgbClr val="102A43"/>
+                </a:solidFill>
+                <a:latin typeface="Aptos"/>
+                <a:ea typeface="Aptos"/>
+                <a:cs typeface="Aptos"/>
+              </a:rPr>
+              <a:t>The next lift is more likely to come from data than tuning</a:t>
+            </a:r>
+          </a:p>
+        </p:txBody>
+      </p:sp>
+      <p:sp>
+        <p:nvSpPr>
+          <p:cNvPr id="3" name="">
+            <a:extLst xmlns:a="http://schemas.openxmlformats.org/drawingml/2006/main">
+              <a:ext uri="{FF2B5EF4-FFF2-40B4-BE49-F238E27FC236}">
+                <a16:creationId xmlns:a16="http://schemas.microsoft.com/office/drawing/2014/main" id="{296DAC3C-64F1-4F2A-A723-D08F9EAFDA57}"/>
+              </a:ext>
+            </a:extLst>
+          </p:cNvPr>
+          <p:cNvSpPr>
+            <a:spLocks xmlns:a="http://schemas.openxmlformats.org/drawingml/2006/main" noGrp="1"/>
+          </p:cNvSpPr>
+          <p:nvPr/>
+        </p:nvSpPr>
+        <p:spPr>
+          <a:xfrm xmlns:a="http://schemas.openxmlformats.org/drawingml/2006/main">
+            <a:off x="647700" y="1257300"/>
+            <a:ext cx="10896600" cy="9525"/>
+          </a:xfrm>
+          <a:prstGeom xmlns:a="http://schemas.openxmlformats.org/drawingml/2006/main" prst="rect">
+            <a:avLst/>
+          </a:prstGeom>
+          <a:solidFill xmlns:a="http://schemas.openxmlformats.org/drawingml/2006/main">
+            <a:srgbClr val="D5CEC1"/>
+          </a:solidFill>
+          <a:ln xmlns:a="http://schemas.openxmlformats.org/drawingml/2006/main" w="0">
+            <a:solidFill>
+              <a:srgbClr val="D5CEC1"/>
+            </a:solidFill>
+            <a:prstDash val="solid"/>
+          </a:ln>
+        </p:spPr>
+      </p:sp>
+      <p:sp>
+        <p:nvSpPr>
+          <p:cNvPr id="4" name="">
+            <a:extLst xmlns:a="http://schemas.openxmlformats.org/drawingml/2006/main">
+              <a:ext uri="{FF2B5EF4-FFF2-40B4-BE49-F238E27FC236}">
+                <a16:creationId xmlns:a16="http://schemas.microsoft.com/office/drawing/2014/main" id="{95A0E0FF-B893-4FC7-BF5C-73C7ADB2C6F1}"/>
+              </a:ext>
+            </a:extLst>
+          </p:cNvPr>
+          <p:cNvSpPr>
+            <a:spLocks xmlns:a="http://schemas.openxmlformats.org/drawingml/2006/main" noGrp="1"/>
+          </p:cNvSpPr>
+          <p:nvPr/>
+        </p:nvSpPr>
+        <p:spPr>
+          <a:xfrm xmlns:a="http://schemas.openxmlformats.org/drawingml/2006/main">
+            <a:off x="647700" y="1390650"/>
+            <a:ext cx="10668000" cy="266700"/>
+          </a:xfrm>
+          <a:prstGeom xmlns:a="http://schemas.openxmlformats.org/drawingml/2006/main" prst="rect">
+            <a:avLst/>
+          </a:prstGeom>
+          <a:noFill xmlns:a="http://schemas.openxmlformats.org/drawingml/2006/main"/>
+          <a:ln xmlns:a="http://schemas.openxmlformats.org/drawingml/2006/main" w="0">
+            <a:noFill/>
+            <a:prstDash val="solid"/>
+          </a:ln>
+        </p:spPr>
+        <p:txBody>
+          <a:bodyPr xmlns:a="http://schemas.openxmlformats.org/drawingml/2006/main" wrap="square" lIns="0" tIns="0" rIns="0" bIns="0" anchor="t">
+            <a:normAutofit fontScale="100000"/>
+          </a:bodyPr>
+          <a:lstStyle xmlns:a="http://schemas.openxmlformats.org/drawingml/2006/main"/>
+          <a:p xmlns:a="http://schemas.openxmlformats.org/drawingml/2006/main">
+            <a:pPr algn="l">
+              <a:defRPr sz="1275" b="0" i="0">
+                <a:solidFill>
+                  <a:srgbClr val="52606D"/>
+                </a:solidFill>
+                <a:latin typeface="Aptos"/>
+                <a:ea typeface="Aptos"/>
+                <a:cs typeface="Aptos"/>
+              </a:defRPr>
+            </a:pPr>
+            <a:r>
+              <a:rPr sz="1275" b="0" i="0">
+                <a:solidFill>
+                  <a:srgbClr val="52606D"/>
+                </a:solidFill>
+                <a:latin typeface="Aptos"/>
+                <a:ea typeface="Aptos"/>
+                <a:cs typeface="Aptos"/>
+              </a:rPr>
+              <a:t>The error analysis tells us where to invest next.</a:t>
+            </a:r>
+          </a:p>
+        </p:txBody>
+      </p:sp>
+      <p:sp>
+        <p:nvSpPr>
+          <p:cNvPr id="5" name="">
+            <a:extLst xmlns:a="http://schemas.openxmlformats.org/drawingml/2006/main">
+              <a:ext uri="{FF2B5EF4-FFF2-40B4-BE49-F238E27FC236}">
+                <a16:creationId xmlns:a16="http://schemas.microsoft.com/office/drawing/2014/main" id="{06439EEC-3653-4B5C-AC9E-E34B0A214774}"/>
+              </a:ext>
+            </a:extLst>
+          </p:cNvPr>
+          <p:cNvSpPr>
+            <a:spLocks xmlns:a="http://schemas.openxmlformats.org/drawingml/2006/main" noGrp="1"/>
+          </p:cNvSpPr>
+          <p:nvPr/>
+        </p:nvSpPr>
+        <p:spPr>
+          <a:xfrm xmlns:a="http://schemas.openxmlformats.org/drawingml/2006/main">
+            <a:off x="723900" y="1885950"/>
+            <a:ext cx="514350" cy="285750"/>
+          </a:xfrm>
+          <a:prstGeom xmlns:a="http://schemas.openxmlformats.org/drawingml/2006/main" prst="rect">
+            <a:avLst/>
+          </a:prstGeom>
+          <a:noFill xmlns:a="http://schemas.openxmlformats.org/drawingml/2006/main"/>
+          <a:ln xmlns:a="http://schemas.openxmlformats.org/drawingml/2006/main" w="0">
+            <a:noFill/>
+            <a:prstDash val="solid"/>
+          </a:ln>
+        </p:spPr>
+        <p:txBody>
+          <a:bodyPr xmlns:a="http://schemas.openxmlformats.org/drawingml/2006/main" wrap="square" lIns="0" tIns="0" rIns="0" bIns="0" anchor="t">
+            <a:normAutofit fontScale="100000"/>
+          </a:bodyPr>
+          <a:lstStyle xmlns:a="http://schemas.openxmlformats.org/drawingml/2006/main"/>
+          <a:p xmlns:a="http://schemas.openxmlformats.org/drawingml/2006/main">
+            <a:pPr algn="l">
+              <a:defRPr sz="1500" b="1" i="0">
+                <a:solidFill>
+                  <a:srgbClr val="1F776D"/>
+                </a:solidFill>
+                <a:latin typeface="Aptos"/>
+                <a:ea typeface="Aptos"/>
+                <a:cs typeface="Aptos"/>
+              </a:defRPr>
+            </a:pPr>
+            <a:r>
+              <a:rPr sz="1500" b="1" i="0">
+                <a:solidFill>
+                  <a:srgbClr val="1F776D"/>
+                </a:solidFill>
+                <a:latin typeface="Aptos"/>
+                <a:ea typeface="Aptos"/>
+                <a:cs typeface="Aptos"/>
+              </a:rPr>
+              <a:t>01</a:t>
+            </a:r>
+          </a:p>
+        </p:txBody>
+      </p:sp>
+      <p:sp>
+        <p:nvSpPr>
+          <p:cNvPr id="6" name="">
+            <a:extLst xmlns:a="http://schemas.openxmlformats.org/drawingml/2006/main">
+              <a:ext uri="{FF2B5EF4-FFF2-40B4-BE49-F238E27FC236}">
+                <a16:creationId xmlns:a16="http://schemas.microsoft.com/office/drawing/2014/main" id="{B1C9CF9D-D1C3-44A9-96D4-C74858069912}"/>
+              </a:ext>
+            </a:extLst>
+          </p:cNvPr>
+          <p:cNvSpPr>
+            <a:spLocks xmlns:a="http://schemas.openxmlformats.org/drawingml/2006/main" noGrp="1"/>
+          </p:cNvSpPr>
+          <p:nvPr/>
+        </p:nvSpPr>
+        <p:spPr>
+          <a:xfrm xmlns:a="http://schemas.openxmlformats.org/drawingml/2006/main">
+            <a:off x="1428750" y="1885950"/>
+            <a:ext cx="3143250" cy="285750"/>
+          </a:xfrm>
+          <a:prstGeom xmlns:a="http://schemas.openxmlformats.org/drawingml/2006/main" prst="rect">
+            <a:avLst/>
+          </a:prstGeom>
+          <a:noFill xmlns:a="http://schemas.openxmlformats.org/drawingml/2006/main"/>
+          <a:ln xmlns:a="http://schemas.openxmlformats.org/drawingml/2006/main" w="0">
+            <a:noFill/>
+            <a:prstDash val="solid"/>
+          </a:ln>
+        </p:spPr>
+        <p:txBody>
+          <a:bodyPr xmlns:a="http://schemas.openxmlformats.org/drawingml/2006/main" wrap="square" lIns="0" tIns="0" rIns="0" bIns="0" anchor="t">
+            <a:normAutofit fontScale="100000"/>
+          </a:bodyPr>
+          <a:lstStyle xmlns:a="http://schemas.openxmlformats.org/drawingml/2006/main"/>
+          <a:p xmlns:a="http://schemas.openxmlformats.org/drawingml/2006/main">
+            <a:pPr algn="l">
+              <a:defRPr sz="1650" b="1" i="0">
+                <a:solidFill>
+                  <a:srgbClr val="102A43"/>
+                </a:solidFill>
+                <a:latin typeface="Aptos"/>
+                <a:ea typeface="Aptos"/>
+                <a:cs typeface="Aptos"/>
+              </a:defRPr>
+            </a:pPr>
+            <a:r>
+              <a:rPr sz="1650" b="1" i="0">
+                <a:solidFill>
+                  <a:srgbClr val="102A43"/>
+                </a:solidFill>
+                <a:latin typeface="Aptos"/>
+                <a:ea typeface="Aptos"/>
+                <a:cs typeface="Aptos"/>
+              </a:rPr>
+              <a:t>Define the operating point</a:t>
+            </a:r>
+          </a:p>
+        </p:txBody>
+      </p:sp>
+      <p:sp>
+        <p:nvSpPr>
+          <p:cNvPr id="7" name="">
+            <a:extLst xmlns:a="http://schemas.openxmlformats.org/drawingml/2006/main">
+              <a:ext uri="{FF2B5EF4-FFF2-40B4-BE49-F238E27FC236}">
+                <a16:creationId xmlns:a16="http://schemas.microsoft.com/office/drawing/2014/main" id="{F7F0ED18-45F6-4120-A108-FA82B899632F}"/>
+              </a:ext>
+            </a:extLst>
+          </p:cNvPr>
+          <p:cNvSpPr>
+            <a:spLocks xmlns:a="http://schemas.openxmlformats.org/drawingml/2006/main" noGrp="1"/>
+          </p:cNvSpPr>
+          <p:nvPr/>
+        </p:nvSpPr>
+        <p:spPr>
+          <a:xfrm xmlns:a="http://schemas.openxmlformats.org/drawingml/2006/main">
+            <a:off x="4762500" y="1905000"/>
+            <a:ext cx="6191250" cy="285750"/>
+          </a:xfrm>
+          <a:prstGeom xmlns:a="http://schemas.openxmlformats.org/drawingml/2006/main" prst="rect">
+            <a:avLst/>
+          </a:prstGeom>
+          <a:noFill xmlns:a="http://schemas.openxmlformats.org/drawingml/2006/main"/>
+          <a:ln xmlns:a="http://schemas.openxmlformats.org/drawingml/2006/main" w="0">
+            <a:noFill/>
+            <a:prstDash val="solid"/>
+          </a:ln>
+        </p:spPr>
+        <p:txBody>
+          <a:bodyPr xmlns:a="http://schemas.openxmlformats.org/drawingml/2006/main" wrap="square" lIns="0" tIns="0" rIns="0" bIns="0" anchor="t">
+            <a:normAutofit fontScale="100000"/>
+          </a:bodyPr>
+          <a:lstStyle xmlns:a="http://schemas.openxmlformats.org/drawingml/2006/main"/>
+          <a:p xmlns:a="http://schemas.openxmlformats.org/drawingml/2006/main">
+            <a:pPr algn="l">
+              <a:defRPr sz="1350" b="0" i="0">
+                <a:solidFill>
+                  <a:srgbClr val="52606D"/>
+                </a:solidFill>
+                <a:latin typeface="Aptos"/>
+                <a:ea typeface="Aptos"/>
+                <a:cs typeface="Aptos"/>
+              </a:defRPr>
+            </a:pPr>
+            <a:r>
+              <a:rPr sz="1350" b="0" i="0">
+                <a:solidFill>
+                  <a:srgbClr val="52606D"/>
+                </a:solidFill>
+                <a:latin typeface="Aptos"/>
+                <a:ea typeface="Aptos"/>
+                <a:cs typeface="Aptos"/>
+              </a:rPr>
+              <a:t>inspection capacity and cost of false positives vs missed fraud</a:t>
+            </a:r>
+          </a:p>
+        </p:txBody>
+      </p:sp>
+      <p:sp>
+        <p:nvSpPr>
+          <p:cNvPr id="8" name="">
+            <a:extLst xmlns:a="http://schemas.openxmlformats.org/drawingml/2006/main">
+              <a:ext uri="{FF2B5EF4-FFF2-40B4-BE49-F238E27FC236}">
+                <a16:creationId xmlns:a16="http://schemas.microsoft.com/office/drawing/2014/main" id="{95450C2D-9390-4758-ADA0-191DB4EFCF6E}"/>
+              </a:ext>
+            </a:extLst>
+          </p:cNvPr>
+          <p:cNvSpPr>
+            <a:spLocks xmlns:a="http://schemas.openxmlformats.org/drawingml/2006/main" noGrp="1"/>
+          </p:cNvSpPr>
+          <p:nvPr/>
+        </p:nvSpPr>
+        <p:spPr>
+          <a:xfrm xmlns:a="http://schemas.openxmlformats.org/drawingml/2006/main">
+            <a:off x="1428750" y="2381250"/>
+            <a:ext cx="9525000" cy="9525"/>
+          </a:xfrm>
+          <a:prstGeom xmlns:a="http://schemas.openxmlformats.org/drawingml/2006/main" prst="rect">
+            <a:avLst/>
+          </a:prstGeom>
+          <a:solidFill xmlns:a="http://schemas.openxmlformats.org/drawingml/2006/main">
+            <a:srgbClr val="D5CEC1"/>
+          </a:solidFill>
+          <a:ln xmlns:a="http://schemas.openxmlformats.org/drawingml/2006/main" w="0">
+            <a:solidFill>
+              <a:srgbClr val="D5CEC1"/>
+            </a:solidFill>
+            <a:prstDash val="solid"/>
+          </a:ln>
+        </p:spPr>
+      </p:sp>
+      <p:sp>
+        <p:nvSpPr>
+          <p:cNvPr id="9" name="">
+            <a:extLst xmlns:a="http://schemas.openxmlformats.org/drawingml/2006/main">
+              <a:ext uri="{FF2B5EF4-FFF2-40B4-BE49-F238E27FC236}">
+                <a16:creationId xmlns:a16="http://schemas.microsoft.com/office/drawing/2014/main" id="{E6BC7FAA-2871-4A0E-B9A6-EDAF6022CF9B}"/>
+              </a:ext>
+            </a:extLst>
+          </p:cNvPr>
+          <p:cNvSpPr>
+            <a:spLocks xmlns:a="http://schemas.openxmlformats.org/drawingml/2006/main" noGrp="1"/>
+          </p:cNvSpPr>
+          <p:nvPr/>
+        </p:nvSpPr>
+        <p:spPr>
+          <a:xfrm xmlns:a="http://schemas.openxmlformats.org/drawingml/2006/main">
+            <a:off x="723900" y="2667000"/>
+            <a:ext cx="514350" cy="285750"/>
+          </a:xfrm>
+          <a:prstGeom xmlns:a="http://schemas.openxmlformats.org/drawingml/2006/main" prst="rect">
+            <a:avLst/>
+          </a:prstGeom>
+          <a:noFill xmlns:a="http://schemas.openxmlformats.org/drawingml/2006/main"/>
+          <a:ln xmlns:a="http://schemas.openxmlformats.org/drawingml/2006/main" w="0">
+            <a:noFill/>
+            <a:prstDash val="solid"/>
+          </a:ln>
+        </p:spPr>
+        <p:txBody>
+          <a:bodyPr xmlns:a="http://schemas.openxmlformats.org/drawingml/2006/main" wrap="square" lIns="0" tIns="0" rIns="0" bIns="0" anchor="t">
+            <a:normAutofit fontScale="100000"/>
+          </a:bodyPr>
+          <a:lstStyle xmlns:a="http://schemas.openxmlformats.org/drawingml/2006/main"/>
+          <a:p xmlns:a="http://schemas.openxmlformats.org/drawingml/2006/main">
+            <a:pPr algn="l">
+              <a:defRPr sz="1500" b="1" i="0">
+                <a:solidFill>
+                  <a:srgbClr val="1F776D"/>
+                </a:solidFill>
+                <a:latin typeface="Aptos"/>
+                <a:ea typeface="Aptos"/>
+                <a:cs typeface="Aptos"/>
+              </a:defRPr>
+            </a:pPr>
+            <a:r>
+              <a:rPr sz="1500" b="1" i="0">
+                <a:solidFill>
+                  <a:srgbClr val="1F776D"/>
+                </a:solidFill>
+                <a:latin typeface="Aptos"/>
+                <a:ea typeface="Aptos"/>
+                <a:cs typeface="Aptos"/>
+              </a:rPr>
+              <a:t>02</a:t>
+            </a:r>
+          </a:p>
+        </p:txBody>
+      </p:sp>
+      <p:sp>
+        <p:nvSpPr>
+          <p:cNvPr id="10" name="">
+            <a:extLst xmlns:a="http://schemas.openxmlformats.org/drawingml/2006/main">
+              <a:ext uri="{FF2B5EF4-FFF2-40B4-BE49-F238E27FC236}">
+                <a16:creationId xmlns:a16="http://schemas.microsoft.com/office/drawing/2014/main" id="{BAFEF8EC-0897-4DDC-9FA1-47572DB64193}"/>
+              </a:ext>
+            </a:extLst>
+          </p:cNvPr>
+          <p:cNvSpPr>
+            <a:spLocks xmlns:a="http://schemas.openxmlformats.org/drawingml/2006/main" noGrp="1"/>
+          </p:cNvSpPr>
+          <p:nvPr/>
+        </p:nvSpPr>
+        <p:spPr>
+          <a:xfrm xmlns:a="http://schemas.openxmlformats.org/drawingml/2006/main">
+            <a:off x="1428750" y="2667000"/>
+            <a:ext cx="3143250" cy="285750"/>
+          </a:xfrm>
+          <a:prstGeom xmlns:a="http://schemas.openxmlformats.org/drawingml/2006/main" prst="rect">
+            <a:avLst/>
+          </a:prstGeom>
+          <a:noFill xmlns:a="http://schemas.openxmlformats.org/drawingml/2006/main"/>
+          <a:ln xmlns:a="http://schemas.openxmlformats.org/drawingml/2006/main" w="0">
+            <a:noFill/>
+            <a:prstDash val="solid"/>
+          </a:ln>
+        </p:spPr>
+        <p:txBody>
+          <a:bodyPr xmlns:a="http://schemas.openxmlformats.org/drawingml/2006/main" wrap="square" lIns="0" tIns="0" rIns="0" bIns="0" anchor="t">
+            <a:normAutofit fontScale="100000"/>
+          </a:bodyPr>
+          <a:lstStyle xmlns:a="http://schemas.openxmlformats.org/drawingml/2006/main"/>
+          <a:p xmlns:a="http://schemas.openxmlformats.org/drawingml/2006/main">
+            <a:pPr algn="l">
+              <a:defRPr sz="1650" b="1" i="0">
+                <a:solidFill>
+                  <a:srgbClr val="102A43"/>
+                </a:solidFill>
+                <a:latin typeface="Aptos"/>
+                <a:ea typeface="Aptos"/>
+                <a:cs typeface="Aptos"/>
+              </a:defRPr>
+            </a:pPr>
+            <a:r>
+              <a:rPr sz="1650" b="1" i="0">
+                <a:solidFill>
+                  <a:srgbClr val="102A43"/>
+                </a:solidFill>
+                <a:latin typeface="Aptos"/>
+                <a:ea typeface="Aptos"/>
+                <a:cs typeface="Aptos"/>
+              </a:rPr>
+              <a:t>Add short-history signal</a:t>
+            </a:r>
+          </a:p>
+        </p:txBody>
+      </p:sp>
+      <p:sp>
+        <p:nvSpPr>
+          <p:cNvPr id="11" name="">
+            <a:extLst xmlns:a="http://schemas.openxmlformats.org/drawingml/2006/main">
+              <a:ext uri="{FF2B5EF4-FFF2-40B4-BE49-F238E27FC236}">
+                <a16:creationId xmlns:a16="http://schemas.microsoft.com/office/drawing/2014/main" id="{817FE225-0CC5-4231-B252-DDE777334976}"/>
+              </a:ext>
+            </a:extLst>
+          </p:cNvPr>
+          <p:cNvSpPr>
+            <a:spLocks xmlns:a="http://schemas.openxmlformats.org/drawingml/2006/main" noGrp="1"/>
+          </p:cNvSpPr>
+          <p:nvPr/>
+        </p:nvSpPr>
+        <p:spPr>
+          <a:xfrm xmlns:a="http://schemas.openxmlformats.org/drawingml/2006/main">
+            <a:off x="4762500" y="2686050"/>
+            <a:ext cx="6191250" cy="285750"/>
+          </a:xfrm>
+          <a:prstGeom xmlns:a="http://schemas.openxmlformats.org/drawingml/2006/main" prst="rect">
+            <a:avLst/>
+          </a:prstGeom>
+          <a:noFill xmlns:a="http://schemas.openxmlformats.org/drawingml/2006/main"/>
+          <a:ln xmlns:a="http://schemas.openxmlformats.org/drawingml/2006/main" w="0">
+            <a:noFill/>
+            <a:prstDash val="solid"/>
+          </a:ln>
+        </p:spPr>
+        <p:txBody>
+          <a:bodyPr xmlns:a="http://schemas.openxmlformats.org/drawingml/2006/main" wrap="square" lIns="0" tIns="0" rIns="0" bIns="0" anchor="t">
+            <a:normAutofit fontScale="100000"/>
+          </a:bodyPr>
+          <a:lstStyle xmlns:a="http://schemas.openxmlformats.org/drawingml/2006/main"/>
+          <a:p xmlns:a="http://schemas.openxmlformats.org/drawingml/2006/main">
+            <a:pPr algn="l">
+              <a:defRPr sz="1350" b="0" i="0">
+                <a:solidFill>
+                  <a:srgbClr val="52606D"/>
+                </a:solidFill>
+                <a:latin typeface="Aptos"/>
+                <a:ea typeface="Aptos"/>
+                <a:cs typeface="Aptos"/>
+              </a:defRPr>
+            </a:pPr>
+            <a:r>
+              <a:rPr sz="1350" b="0" i="0">
+                <a:solidFill>
+                  <a:srgbClr val="52606D"/>
+                </a:solidFill>
+                <a:latin typeface="Aptos"/>
+                <a:ea typeface="Aptos"/>
+                <a:cs typeface="Aptos"/>
+              </a:rPr>
+              <a:t>relative or sequence features that work with only a few invoices</a:t>
+            </a:r>
+          </a:p>
+        </p:txBody>
+      </p:sp>
+      <p:sp>
+        <p:nvSpPr>
+          <p:cNvPr id="12" name="">
+            <a:extLst xmlns:a="http://schemas.openxmlformats.org/drawingml/2006/main">
+              <a:ext uri="{FF2B5EF4-FFF2-40B4-BE49-F238E27FC236}">
+                <a16:creationId xmlns:a16="http://schemas.microsoft.com/office/drawing/2014/main" id="{828F998D-D76E-423A-B646-7928F1BCE1C2}"/>
+              </a:ext>
+            </a:extLst>
+          </p:cNvPr>
+          <p:cNvSpPr>
+            <a:spLocks xmlns:a="http://schemas.openxmlformats.org/drawingml/2006/main" noGrp="1"/>
+          </p:cNvSpPr>
+          <p:nvPr/>
+        </p:nvSpPr>
+        <p:spPr>
+          <a:xfrm xmlns:a="http://schemas.openxmlformats.org/drawingml/2006/main">
+            <a:off x="1428750" y="3162300"/>
+            <a:ext cx="9525000" cy="9525"/>
+          </a:xfrm>
+          <a:prstGeom xmlns:a="http://schemas.openxmlformats.org/drawingml/2006/main" prst="rect">
+            <a:avLst/>
+          </a:prstGeom>
+          <a:solidFill xmlns:a="http://schemas.openxmlformats.org/drawingml/2006/main">
+            <a:srgbClr val="D5CEC1"/>
+          </a:solidFill>
+          <a:ln xmlns:a="http://schemas.openxmlformats.org/drawingml/2006/main" w="0">
+            <a:solidFill>
+              <a:srgbClr val="D5CEC1"/>
+            </a:solidFill>
+            <a:prstDash val="solid"/>
+          </a:ln>
+        </p:spPr>
+      </p:sp>
+      <p:sp>
+        <p:nvSpPr>
+          <p:cNvPr id="13" name="">
+            <a:extLst xmlns:a="http://schemas.openxmlformats.org/drawingml/2006/main">
+              <a:ext uri="{FF2B5EF4-FFF2-40B4-BE49-F238E27FC236}">
+                <a16:creationId xmlns:a16="http://schemas.microsoft.com/office/drawing/2014/main" id="{5673E449-565E-4F5C-AC47-4818FEB2F1C6}"/>
+              </a:ext>
+            </a:extLst>
+          </p:cNvPr>
+          <p:cNvSpPr>
+            <a:spLocks xmlns:a="http://schemas.openxmlformats.org/drawingml/2006/main" noGrp="1"/>
+          </p:cNvSpPr>
+          <p:nvPr/>
+        </p:nvSpPr>
+        <p:spPr>
+          <a:xfrm xmlns:a="http://schemas.openxmlformats.org/drawingml/2006/main">
+            <a:off x="723900" y="3448050"/>
+            <a:ext cx="514350" cy="285750"/>
+          </a:xfrm>
+          <a:prstGeom xmlns:a="http://schemas.openxmlformats.org/drawingml/2006/main" prst="rect">
+            <a:avLst/>
+          </a:prstGeom>
+          <a:noFill xmlns:a="http://schemas.openxmlformats.org/drawingml/2006/main"/>
+          <a:ln xmlns:a="http://schemas.openxmlformats.org/drawingml/2006/main" w="0">
+            <a:noFill/>
+            <a:prstDash val="solid"/>
+          </a:ln>
+        </p:spPr>
+        <p:txBody>
+          <a:bodyPr xmlns:a="http://schemas.openxmlformats.org/drawingml/2006/main" wrap="square" lIns="0" tIns="0" rIns="0" bIns="0" anchor="t">
+            <a:normAutofit fontScale="100000"/>
+          </a:bodyPr>
+          <a:lstStyle xmlns:a="http://schemas.openxmlformats.org/drawingml/2006/main"/>
+          <a:p xmlns:a="http://schemas.openxmlformats.org/drawingml/2006/main">
+            <a:pPr algn="l">
+              <a:defRPr sz="1500" b="1" i="0">
+                <a:solidFill>
+                  <a:srgbClr val="1F776D"/>
+                </a:solidFill>
+                <a:latin typeface="Aptos"/>
+                <a:ea typeface="Aptos"/>
+                <a:cs typeface="Aptos"/>
+              </a:defRPr>
+            </a:pPr>
+            <a:r>
+              <a:rPr sz="1500" b="1" i="0">
+                <a:solidFill>
+                  <a:srgbClr val="1F776D"/>
+                </a:solidFill>
+                <a:latin typeface="Aptos"/>
+                <a:ea typeface="Aptos"/>
+                <a:cs typeface="Aptos"/>
+              </a:rPr>
+              <a:t>03</a:t>
+            </a:r>
+          </a:p>
+        </p:txBody>
+      </p:sp>
+      <p:sp>
+        <p:nvSpPr>
+          <p:cNvPr id="14" name="">
+            <a:extLst xmlns:a="http://schemas.openxmlformats.org/drawingml/2006/main">
+              <a:ext uri="{FF2B5EF4-FFF2-40B4-BE49-F238E27FC236}">
+                <a16:creationId xmlns:a16="http://schemas.microsoft.com/office/drawing/2014/main" id="{ED48BE15-C4A0-45AF-9CEB-CB8AA96D5B33}"/>
+              </a:ext>
+            </a:extLst>
+          </p:cNvPr>
+          <p:cNvSpPr>
+            <a:spLocks xmlns:a="http://schemas.openxmlformats.org/drawingml/2006/main" noGrp="1"/>
+          </p:cNvSpPr>
+          <p:nvPr/>
+        </p:nvSpPr>
+        <p:spPr>
+          <a:xfrm xmlns:a="http://schemas.openxmlformats.org/drawingml/2006/main">
+            <a:off x="1428750" y="3448050"/>
+            <a:ext cx="3143250" cy="285750"/>
+          </a:xfrm>
+          <a:prstGeom xmlns:a="http://schemas.openxmlformats.org/drawingml/2006/main" prst="rect">
+            <a:avLst/>
+          </a:prstGeom>
+          <a:noFill xmlns:a="http://schemas.openxmlformats.org/drawingml/2006/main"/>
+          <a:ln xmlns:a="http://schemas.openxmlformats.org/drawingml/2006/main" w="0">
+            <a:noFill/>
+            <a:prstDash val="solid"/>
+          </a:ln>
+        </p:spPr>
+        <p:txBody>
+          <a:bodyPr xmlns:a="http://schemas.openxmlformats.org/drawingml/2006/main" wrap="square" lIns="0" tIns="0" rIns="0" bIns="0" anchor="t">
+            <a:normAutofit fontScale="100000"/>
+          </a:bodyPr>
+          <a:lstStyle xmlns:a="http://schemas.openxmlformats.org/drawingml/2006/main"/>
+          <a:p xmlns:a="http://schemas.openxmlformats.org/drawingml/2006/main">
+            <a:pPr algn="l">
+              <a:defRPr sz="1650" b="1" i="0">
+                <a:solidFill>
+                  <a:srgbClr val="102A43"/>
+                </a:solidFill>
+                <a:latin typeface="Aptos"/>
+                <a:ea typeface="Aptos"/>
+                <a:cs typeface="Aptos"/>
+              </a:defRPr>
+            </a:pPr>
+            <a:r>
+              <a:rPr sz="1650" b="1" i="0">
+                <a:solidFill>
+                  <a:srgbClr val="102A43"/>
+                </a:solidFill>
+                <a:latin typeface="Aptos"/>
+                <a:ea typeface="Aptos"/>
+                <a:cs typeface="Aptos"/>
+              </a:rPr>
+              <a:t>Validate semantics</a:t>
+            </a:r>
+          </a:p>
+        </p:txBody>
+      </p:sp>
+      <p:sp>
+        <p:nvSpPr>
+          <p:cNvPr id="15" name="">
+            <a:extLst xmlns:a="http://schemas.openxmlformats.org/drawingml/2006/main">
+              <a:ext uri="{FF2B5EF4-FFF2-40B4-BE49-F238E27FC236}">
+                <a16:creationId xmlns:a16="http://schemas.microsoft.com/office/drawing/2014/main" id="{39F4F0FD-C9C2-41B1-9564-38F425803516}"/>
+              </a:ext>
+            </a:extLst>
+          </p:cNvPr>
+          <p:cNvSpPr>
+            <a:spLocks xmlns:a="http://schemas.openxmlformats.org/drawingml/2006/main" noGrp="1"/>
+          </p:cNvSpPr>
+          <p:nvPr/>
+        </p:nvSpPr>
+        <p:spPr>
+          <a:xfrm xmlns:a="http://schemas.openxmlformats.org/drawingml/2006/main">
+            <a:off x="4762500" y="3467100"/>
+            <a:ext cx="6191250" cy="285750"/>
+          </a:xfrm>
+          <a:prstGeom xmlns:a="http://schemas.openxmlformats.org/drawingml/2006/main" prst="rect">
+            <a:avLst/>
+          </a:prstGeom>
+          <a:noFill xmlns:a="http://schemas.openxmlformats.org/drawingml/2006/main"/>
+          <a:ln xmlns:a="http://schemas.openxmlformats.org/drawingml/2006/main" w="0">
+            <a:noFill/>
+            <a:prstDash val="solid"/>
+          </a:ln>
+        </p:spPr>
+        <p:txBody>
+          <a:bodyPr xmlns:a="http://schemas.openxmlformats.org/drawingml/2006/main" wrap="square" lIns="0" tIns="0" rIns="0" bIns="0" anchor="t">
+            <a:normAutofit fontScale="100000"/>
+          </a:bodyPr>
+          <a:lstStyle xmlns:a="http://schemas.openxmlformats.org/drawingml/2006/main"/>
+          <a:p xmlns:a="http://schemas.openxmlformats.org/drawingml/2006/main">
+            <a:pPr algn="l">
+              <a:defRPr sz="1350" b="0" i="0">
+                <a:solidFill>
+                  <a:srgbClr val="52606D"/>
+                </a:solidFill>
+                <a:latin typeface="Aptos"/>
+                <a:ea typeface="Aptos"/>
+                <a:cs typeface="Aptos"/>
+              </a:defRPr>
+            </a:pPr>
+            <a:r>
+              <a:rPr sz="1350" b="0" i="0">
+                <a:solidFill>
+                  <a:srgbClr val="52606D"/>
+                </a:solidFill>
+                <a:latin typeface="Aptos"/>
+                <a:ea typeface="Aptos"/>
+                <a:cs typeface="Aptos"/>
+              </a:rPr>
+              <a:t>meter identifiers and the reconciliation threshold with experts</a:t>
+            </a:r>
+          </a:p>
+        </p:txBody>
+      </p:sp>
+      <p:sp>
+        <p:nvSpPr>
+          <p:cNvPr id="16" name="">
+            <a:extLst xmlns:a="http://schemas.openxmlformats.org/drawingml/2006/main">
+              <a:ext uri="{FF2B5EF4-FFF2-40B4-BE49-F238E27FC236}">
+                <a16:creationId xmlns:a16="http://schemas.microsoft.com/office/drawing/2014/main" id="{481FBF3E-70FE-4685-9172-93B04702FB31}"/>
+              </a:ext>
+            </a:extLst>
+          </p:cNvPr>
+          <p:cNvSpPr>
+            <a:spLocks xmlns:a="http://schemas.openxmlformats.org/drawingml/2006/main" noGrp="1"/>
+          </p:cNvSpPr>
+          <p:nvPr/>
+        </p:nvSpPr>
+        <p:spPr>
+          <a:xfrm xmlns:a="http://schemas.openxmlformats.org/drawingml/2006/main">
+            <a:off x="1428750" y="3943350"/>
+            <a:ext cx="9525000" cy="9525"/>
+          </a:xfrm>
+          <a:prstGeom xmlns:a="http://schemas.openxmlformats.org/drawingml/2006/main" prst="rect">
+            <a:avLst/>
+          </a:prstGeom>
+          <a:solidFill xmlns:a="http://schemas.openxmlformats.org/drawingml/2006/main">
+            <a:srgbClr val="D5CEC1"/>
+          </a:solidFill>
+          <a:ln xmlns:a="http://schemas.openxmlformats.org/drawingml/2006/main" w="0">
+            <a:solidFill>
+              <a:srgbClr val="D5CEC1"/>
+            </a:solidFill>
+            <a:prstDash val="solid"/>
+          </a:ln>
+        </p:spPr>
+      </p:sp>
+      <p:sp>
+        <p:nvSpPr>
+          <p:cNvPr id="17" name="">
+            <a:extLst xmlns:a="http://schemas.openxmlformats.org/drawingml/2006/main">
+              <a:ext uri="{FF2B5EF4-FFF2-40B4-BE49-F238E27FC236}">
+                <a16:creationId xmlns:a16="http://schemas.microsoft.com/office/drawing/2014/main" id="{CD9ED2B8-3679-45F0-820F-A434CBB2C6CB}"/>
+              </a:ext>
+            </a:extLst>
+          </p:cNvPr>
+          <p:cNvSpPr>
+            <a:spLocks xmlns:a="http://schemas.openxmlformats.org/drawingml/2006/main" noGrp="1"/>
+          </p:cNvSpPr>
+          <p:nvPr/>
+        </p:nvSpPr>
+        <p:spPr>
+          <a:xfrm xmlns:a="http://schemas.openxmlformats.org/drawingml/2006/main">
+            <a:off x="723900" y="4229100"/>
+            <a:ext cx="514350" cy="285750"/>
+          </a:xfrm>
+          <a:prstGeom xmlns:a="http://schemas.openxmlformats.org/drawingml/2006/main" prst="rect">
+            <a:avLst/>
+          </a:prstGeom>
+          <a:noFill xmlns:a="http://schemas.openxmlformats.org/drawingml/2006/main"/>
+          <a:ln xmlns:a="http://schemas.openxmlformats.org/drawingml/2006/main" w="0">
+            <a:noFill/>
+            <a:prstDash val="solid"/>
+          </a:ln>
+        </p:spPr>
+        <p:txBody>
+          <a:bodyPr xmlns:a="http://schemas.openxmlformats.org/drawingml/2006/main" wrap="square" lIns="0" tIns="0" rIns="0" bIns="0" anchor="t">
+            <a:normAutofit fontScale="100000"/>
+          </a:bodyPr>
+          <a:lstStyle xmlns:a="http://schemas.openxmlformats.org/drawingml/2006/main"/>
+          <a:p xmlns:a="http://schemas.openxmlformats.org/drawingml/2006/main">
+            <a:pPr algn="l">
+              <a:defRPr sz="1500" b="1" i="0">
+                <a:solidFill>
+                  <a:srgbClr val="1F776D"/>
+                </a:solidFill>
+                <a:latin typeface="Aptos"/>
+                <a:ea typeface="Aptos"/>
+                <a:cs typeface="Aptos"/>
+              </a:defRPr>
+            </a:pPr>
+            <a:r>
+              <a:rPr sz="1500" b="1" i="0">
+                <a:solidFill>
+                  <a:srgbClr val="1F776D"/>
+                </a:solidFill>
+                <a:latin typeface="Aptos"/>
+                <a:ea typeface="Aptos"/>
+                <a:cs typeface="Aptos"/>
+              </a:rPr>
+              <a:t>04</a:t>
+            </a:r>
+          </a:p>
+        </p:txBody>
+      </p:sp>
+      <p:sp>
+        <p:nvSpPr>
+          <p:cNvPr id="18" name="">
+            <a:extLst xmlns:a="http://schemas.openxmlformats.org/drawingml/2006/main">
+              <a:ext uri="{FF2B5EF4-FFF2-40B4-BE49-F238E27FC236}">
+                <a16:creationId xmlns:a16="http://schemas.microsoft.com/office/drawing/2014/main" id="{96CA237C-8566-4A5B-B929-901B1752AC19}"/>
+              </a:ext>
+            </a:extLst>
+          </p:cNvPr>
+          <p:cNvSpPr>
+            <a:spLocks xmlns:a="http://schemas.openxmlformats.org/drawingml/2006/main" noGrp="1"/>
+          </p:cNvSpPr>
+          <p:nvPr/>
+        </p:nvSpPr>
+        <p:spPr>
+          <a:xfrm xmlns:a="http://schemas.openxmlformats.org/drawingml/2006/main">
+            <a:off x="1428750" y="4229100"/>
+            <a:ext cx="3143250" cy="285750"/>
+          </a:xfrm>
+          <a:prstGeom xmlns:a="http://schemas.openxmlformats.org/drawingml/2006/main" prst="rect">
+            <a:avLst/>
+          </a:prstGeom>
+          <a:noFill xmlns:a="http://schemas.openxmlformats.org/drawingml/2006/main"/>
+          <a:ln xmlns:a="http://schemas.openxmlformats.org/drawingml/2006/main" w="0">
+            <a:noFill/>
+            <a:prstDash val="solid"/>
+          </a:ln>
+        </p:spPr>
+        <p:txBody>
+          <a:bodyPr xmlns:a="http://schemas.openxmlformats.org/drawingml/2006/main" wrap="square" lIns="0" tIns="0" rIns="0" bIns="0" anchor="t">
+            <a:normAutofit fontScale="100000"/>
+          </a:bodyPr>
+          <a:lstStyle xmlns:a="http://schemas.openxmlformats.org/drawingml/2006/main"/>
+          <a:p xmlns:a="http://schemas.openxmlformats.org/drawingml/2006/main">
+            <a:pPr algn="l">
+              <a:defRPr sz="1650" b="1" i="0">
+                <a:solidFill>
+                  <a:srgbClr val="102A43"/>
+                </a:solidFill>
+                <a:latin typeface="Aptos"/>
+                <a:ea typeface="Aptos"/>
+                <a:cs typeface="Aptos"/>
+              </a:defRPr>
+            </a:pPr>
+            <a:r>
+              <a:rPr sz="1650" b="1" i="0">
+                <a:solidFill>
+                  <a:srgbClr val="102A43"/>
+                </a:solidFill>
+                <a:latin typeface="Aptos"/>
+                <a:ea typeface="Aptos"/>
+                <a:cs typeface="Aptos"/>
+              </a:rPr>
+              <a:t>Test time</a:t>
+            </a:r>
+          </a:p>
+        </p:txBody>
+      </p:sp>
+      <p:sp>
+        <p:nvSpPr>
+          <p:cNvPr id="19" name="">
+            <a:extLst xmlns:a="http://schemas.openxmlformats.org/drawingml/2006/main">
+              <a:ext uri="{FF2B5EF4-FFF2-40B4-BE49-F238E27FC236}">
+                <a16:creationId xmlns:a16="http://schemas.microsoft.com/office/drawing/2014/main" id="{B7564B61-1A2D-41F0-B3BF-B7F1CE22177A}"/>
+              </a:ext>
+            </a:extLst>
+          </p:cNvPr>
+          <p:cNvSpPr>
+            <a:spLocks xmlns:a="http://schemas.openxmlformats.org/drawingml/2006/main" noGrp="1"/>
+          </p:cNvSpPr>
+          <p:nvPr/>
+        </p:nvSpPr>
+        <p:spPr>
+          <a:xfrm xmlns:a="http://schemas.openxmlformats.org/drawingml/2006/main">
+            <a:off x="4762500" y="4248150"/>
+            <a:ext cx="6191250" cy="285750"/>
+          </a:xfrm>
+          <a:prstGeom xmlns:a="http://schemas.openxmlformats.org/drawingml/2006/main" prst="rect">
+            <a:avLst/>
+          </a:prstGeom>
+          <a:noFill xmlns:a="http://schemas.openxmlformats.org/drawingml/2006/main"/>
+          <a:ln xmlns:a="http://schemas.openxmlformats.org/drawingml/2006/main" w="0">
+            <a:noFill/>
+            <a:prstDash val="solid"/>
+          </a:ln>
+        </p:spPr>
+        <p:txBody>
+          <a:bodyPr xmlns:a="http://schemas.openxmlformats.org/drawingml/2006/main" wrap="square" lIns="0" tIns="0" rIns="0" bIns="0" anchor="t">
+            <a:normAutofit fontScale="100000"/>
+          </a:bodyPr>
+          <a:lstStyle xmlns:a="http://schemas.openxmlformats.org/drawingml/2006/main"/>
+          <a:p xmlns:a="http://schemas.openxmlformats.org/drawingml/2006/main">
+            <a:pPr algn="l">
+              <a:defRPr sz="1350" b="0" i="0">
+                <a:solidFill>
+                  <a:srgbClr val="52606D"/>
+                </a:solidFill>
+                <a:latin typeface="Aptos"/>
+                <a:ea typeface="Aptos"/>
+                <a:cs typeface="Aptos"/>
+              </a:defRPr>
+            </a:pPr>
+            <a:r>
+              <a:rPr sz="1350" b="0" i="0">
+                <a:solidFill>
+                  <a:srgbClr val="52606D"/>
+                </a:solidFill>
+                <a:latin typeface="Aptos"/>
+                <a:ea typeface="Aptos"/>
+                <a:cs typeface="Aptos"/>
+              </a:rPr>
+              <a:t>as-of cutoff and temporal backtesting</a:t>
+            </a:r>
+          </a:p>
+        </p:txBody>
+      </p:sp>
+      <p:sp>
+        <p:nvSpPr>
+          <p:cNvPr id="20" name="">
+            <a:extLst xmlns:a="http://schemas.openxmlformats.org/drawingml/2006/main">
+              <a:ext uri="{FF2B5EF4-FFF2-40B4-BE49-F238E27FC236}">
+                <a16:creationId xmlns:a16="http://schemas.microsoft.com/office/drawing/2014/main" id="{F689E3D1-65AB-4056-B5DB-3F16F98967E4}"/>
+              </a:ext>
+            </a:extLst>
+          </p:cNvPr>
+          <p:cNvSpPr>
+            <a:spLocks xmlns:a="http://schemas.openxmlformats.org/drawingml/2006/main" noGrp="1"/>
+          </p:cNvSpPr>
+          <p:nvPr/>
+        </p:nvSpPr>
+        <p:spPr>
+          <a:xfrm xmlns:a="http://schemas.openxmlformats.org/drawingml/2006/main">
+            <a:off x="1428750" y="4724400"/>
+            <a:ext cx="9525000" cy="9525"/>
+          </a:xfrm>
+          <a:prstGeom xmlns:a="http://schemas.openxmlformats.org/drawingml/2006/main" prst="rect">
+            <a:avLst/>
+          </a:prstGeom>
+          <a:solidFill xmlns:a="http://schemas.openxmlformats.org/drawingml/2006/main">
+            <a:srgbClr val="D5CEC1"/>
+          </a:solidFill>
+          <a:ln xmlns:a="http://schemas.openxmlformats.org/drawingml/2006/main" w="0">
+            <a:solidFill>
+              <a:srgbClr val="D5CEC1"/>
+            </a:solidFill>
+            <a:prstDash val="solid"/>
+          </a:ln>
+        </p:spPr>
+      </p:sp>
+      <p:sp>
+        <p:nvSpPr>
+          <p:cNvPr id="21" name="">
+            <a:extLst xmlns:a="http://schemas.openxmlformats.org/drawingml/2006/main">
+              <a:ext uri="{FF2B5EF4-FFF2-40B4-BE49-F238E27FC236}">
+                <a16:creationId xmlns:a16="http://schemas.microsoft.com/office/drawing/2014/main" id="{0006E007-F8C3-4037-A666-297D1A490857}"/>
+              </a:ext>
+            </a:extLst>
+          </p:cNvPr>
+          <p:cNvSpPr>
+            <a:spLocks xmlns:a="http://schemas.openxmlformats.org/drawingml/2006/main" noGrp="1"/>
+          </p:cNvSpPr>
+          <p:nvPr/>
+        </p:nvSpPr>
+        <p:spPr>
+          <a:xfrm xmlns:a="http://schemas.openxmlformats.org/drawingml/2006/main">
+            <a:off x="723900" y="5010150"/>
+            <a:ext cx="514350" cy="285750"/>
+          </a:xfrm>
+          <a:prstGeom xmlns:a="http://schemas.openxmlformats.org/drawingml/2006/main" prst="rect">
+            <a:avLst/>
+          </a:prstGeom>
+          <a:noFill xmlns:a="http://schemas.openxmlformats.org/drawingml/2006/main"/>
+          <a:ln xmlns:a="http://schemas.openxmlformats.org/drawingml/2006/main" w="0">
+            <a:noFill/>
+            <a:prstDash val="solid"/>
+          </a:ln>
+        </p:spPr>
+        <p:txBody>
+          <a:bodyPr xmlns:a="http://schemas.openxmlformats.org/drawingml/2006/main" wrap="square" lIns="0" tIns="0" rIns="0" bIns="0" anchor="t">
+            <a:normAutofit fontScale="100000"/>
+          </a:bodyPr>
+          <a:lstStyle xmlns:a="http://schemas.openxmlformats.org/drawingml/2006/main"/>
+          <a:p xmlns:a="http://schemas.openxmlformats.org/drawingml/2006/main">
+            <a:pPr algn="l">
+              <a:defRPr sz="1500" b="1" i="0">
+                <a:solidFill>
+                  <a:srgbClr val="1F776D"/>
+                </a:solidFill>
+                <a:latin typeface="Aptos"/>
+                <a:ea typeface="Aptos"/>
+                <a:cs typeface="Aptos"/>
+              </a:defRPr>
+            </a:pPr>
+            <a:r>
+              <a:rPr sz="1500" b="1" i="0">
+                <a:solidFill>
+                  <a:srgbClr val="1F776D"/>
+                </a:solidFill>
+                <a:latin typeface="Aptos"/>
+                <a:ea typeface="Aptos"/>
+                <a:cs typeface="Aptos"/>
+              </a:rPr>
+              <a:t>05</a:t>
+            </a:r>
+          </a:p>
+        </p:txBody>
+      </p:sp>
+      <p:sp>
+        <p:nvSpPr>
+          <p:cNvPr id="22" name="">
+            <a:extLst xmlns:a="http://schemas.openxmlformats.org/drawingml/2006/main">
+              <a:ext uri="{FF2B5EF4-FFF2-40B4-BE49-F238E27FC236}">
+                <a16:creationId xmlns:a16="http://schemas.microsoft.com/office/drawing/2014/main" id="{60E47AD2-FAE1-4C8A-9BE6-10052693AA3C}"/>
+              </a:ext>
+            </a:extLst>
+          </p:cNvPr>
+          <p:cNvSpPr>
+            <a:spLocks xmlns:a="http://schemas.openxmlformats.org/drawingml/2006/main" noGrp="1"/>
+          </p:cNvSpPr>
+          <p:nvPr/>
+        </p:nvSpPr>
+        <p:spPr>
+          <a:xfrm xmlns:a="http://schemas.openxmlformats.org/drawingml/2006/main">
+            <a:off x="1428750" y="5010150"/>
+            <a:ext cx="3143250" cy="285750"/>
+          </a:xfrm>
+          <a:prstGeom xmlns:a="http://schemas.openxmlformats.org/drawingml/2006/main" prst="rect">
+            <a:avLst/>
+          </a:prstGeom>
+          <a:noFill xmlns:a="http://schemas.openxmlformats.org/drawingml/2006/main"/>
+          <a:ln xmlns:a="http://schemas.openxmlformats.org/drawingml/2006/main" w="0">
+            <a:noFill/>
+            <a:prstDash val="solid"/>
+          </a:ln>
+        </p:spPr>
+        <p:txBody>
+          <a:bodyPr xmlns:a="http://schemas.openxmlformats.org/drawingml/2006/main" wrap="square" lIns="0" tIns="0" rIns="0" bIns="0" anchor="t">
+            <a:normAutofit fontScale="100000"/>
+          </a:bodyPr>
+          <a:lstStyle xmlns:a="http://schemas.openxmlformats.org/drawingml/2006/main"/>
+          <a:p xmlns:a="http://schemas.openxmlformats.org/drawingml/2006/main">
+            <a:pPr algn="l">
+              <a:defRPr sz="1650" b="1" i="0">
+                <a:solidFill>
+                  <a:srgbClr val="102A43"/>
+                </a:solidFill>
+                <a:latin typeface="Aptos"/>
+                <a:ea typeface="Aptos"/>
+                <a:cs typeface="Aptos"/>
+              </a:defRPr>
+            </a:pPr>
+            <a:r>
+              <a:rPr sz="1650" b="1" i="0">
+                <a:solidFill>
+                  <a:srgbClr val="102A43"/>
+                </a:solidFill>
+                <a:latin typeface="Aptos"/>
+                <a:ea typeface="Aptos"/>
+                <a:cs typeface="Aptos"/>
+              </a:rPr>
+              <a:t>Check segments</a:t>
+            </a:r>
+          </a:p>
+        </p:txBody>
+      </p:sp>
+      <p:sp>
+        <p:nvSpPr>
+          <p:cNvPr id="23" name="">
+            <a:extLst xmlns:a="http://schemas.openxmlformats.org/drawingml/2006/main">
+              <a:ext uri="{FF2B5EF4-FFF2-40B4-BE49-F238E27FC236}">
+                <a16:creationId xmlns:a16="http://schemas.microsoft.com/office/drawing/2014/main" id="{08AFCEE4-5F96-4855-A614-C24D7A4613FA}"/>
+              </a:ext>
+            </a:extLst>
+          </p:cNvPr>
+          <p:cNvSpPr>
+            <a:spLocks xmlns:a="http://schemas.openxmlformats.org/drawingml/2006/main" noGrp="1"/>
+          </p:cNvSpPr>
+          <p:nvPr/>
+        </p:nvSpPr>
+        <p:spPr>
+          <a:xfrm xmlns:a="http://schemas.openxmlformats.org/drawingml/2006/main">
+            <a:off x="4762500" y="5029200"/>
+            <a:ext cx="6191250" cy="285750"/>
+          </a:xfrm>
+          <a:prstGeom xmlns:a="http://schemas.openxmlformats.org/drawingml/2006/main" prst="rect">
+            <a:avLst/>
+          </a:prstGeom>
+          <a:noFill xmlns:a="http://schemas.openxmlformats.org/drawingml/2006/main"/>
+          <a:ln xmlns:a="http://schemas.openxmlformats.org/drawingml/2006/main" w="0">
+            <a:noFill/>
+            <a:prstDash val="solid"/>
+          </a:ln>
+        </p:spPr>
+        <p:txBody>
+          <a:bodyPr xmlns:a="http://schemas.openxmlformats.org/drawingml/2006/main" wrap="square" lIns="0" tIns="0" rIns="0" bIns="0" anchor="t">
+            <a:normAutofit fontScale="100000"/>
+          </a:bodyPr>
+          <a:lstStyle xmlns:a="http://schemas.openxmlformats.org/drawingml/2006/main"/>
+          <a:p xmlns:a="http://schemas.openxmlformats.org/drawingml/2006/main">
+            <a:pPr algn="l">
+              <a:defRPr sz="1350" b="0" i="0">
+                <a:solidFill>
+                  <a:srgbClr val="52606D"/>
+                </a:solidFill>
+                <a:latin typeface="Aptos"/>
+                <a:ea typeface="Aptos"/>
+                <a:cs typeface="Aptos"/>
+              </a:defRPr>
+            </a:pPr>
+            <a:r>
+              <a:rPr sz="1350" b="0" i="0">
+                <a:solidFill>
+                  <a:srgbClr val="52606D"/>
+                </a:solidFill>
+                <a:latin typeface="Aptos"/>
+                <a:ea typeface="Aptos"/>
+                <a:cs typeface="Aptos"/>
+              </a:rPr>
+              <a:t>region, category, history length, and meter availability</a:t>
+            </a:r>
+          </a:p>
+        </p:txBody>
+      </p:sp>
+      <p:sp>
+        <p:nvSpPr>
+          <p:cNvPr id="24" name="">
+            <a:extLst xmlns:a="http://schemas.openxmlformats.org/drawingml/2006/main">
+              <a:ext uri="{FF2B5EF4-FFF2-40B4-BE49-F238E27FC236}">
+                <a16:creationId xmlns:a16="http://schemas.microsoft.com/office/drawing/2014/main" id="{5795B451-E61A-4282-84F0-769B30C96D0C}"/>
+              </a:ext>
+            </a:extLst>
+          </p:cNvPr>
+          <p:cNvSpPr>
+            <a:spLocks xmlns:a="http://schemas.openxmlformats.org/drawingml/2006/main" noGrp="1"/>
+          </p:cNvSpPr>
+          <p:nvPr/>
+        </p:nvSpPr>
+        <p:spPr>
+          <a:xfrm xmlns:a="http://schemas.openxmlformats.org/drawingml/2006/main">
+            <a:off x="1428750" y="5505450"/>
+            <a:ext cx="9525000" cy="9525"/>
+          </a:xfrm>
+          <a:prstGeom xmlns:a="http://schemas.openxmlformats.org/drawingml/2006/main" prst="rect">
+            <a:avLst/>
+          </a:prstGeom>
+          <a:solidFill xmlns:a="http://schemas.openxmlformats.org/drawingml/2006/main">
+            <a:srgbClr val="D5CEC1"/>
+          </a:solidFill>
+          <a:ln xmlns:a="http://schemas.openxmlformats.org/drawingml/2006/main" w="0">
+            <a:solidFill>
+              <a:srgbClr val="D5CEC1"/>
+            </a:solidFill>
+            <a:prstDash val="solid"/>
+          </a:ln>
+        </p:spPr>
+      </p:sp>
+      <p:sp>
+        <p:nvSpPr>
+          <p:cNvPr id="25" name="">
+            <a:extLst xmlns:a="http://schemas.openxmlformats.org/drawingml/2006/main">
+              <a:ext uri="{FF2B5EF4-FFF2-40B4-BE49-F238E27FC236}">
+                <a16:creationId xmlns:a16="http://schemas.microsoft.com/office/drawing/2014/main" id="{F2C6AA3B-3991-4335-A848-77683BEC8543}"/>
+              </a:ext>
+            </a:extLst>
+          </p:cNvPr>
+          <p:cNvSpPr>
+            <a:spLocks xmlns:a="http://schemas.openxmlformats.org/drawingml/2006/main" noGrp="1"/>
+          </p:cNvSpPr>
+          <p:nvPr/>
+        </p:nvSpPr>
+        <p:spPr>
+          <a:xfrm xmlns:a="http://schemas.openxmlformats.org/drawingml/2006/main">
+            <a:off x="1428750" y="5924550"/>
+            <a:ext cx="9334500" cy="285750"/>
+          </a:xfrm>
+          <a:prstGeom xmlns:a="http://schemas.openxmlformats.org/drawingml/2006/main" prst="rect">
+            <a:avLst/>
+          </a:prstGeom>
+          <a:noFill xmlns:a="http://schemas.openxmlformats.org/drawingml/2006/main"/>
+          <a:ln xmlns:a="http://schemas.openxmlformats.org/drawingml/2006/main" w="0">
+            <a:noFill/>
+            <a:prstDash val="solid"/>
+          </a:ln>
+        </p:spPr>
+        <p:txBody>
+          <a:bodyPr xmlns:a="http://schemas.openxmlformats.org/drawingml/2006/main" wrap="square" lIns="0" tIns="0" rIns="0" bIns="0" anchor="t">
+            <a:normAutofit fontScale="100000"/>
+          </a:bodyPr>
+          <a:lstStyle xmlns:a="http://schemas.openxmlformats.org/drawingml/2006/main"/>
+          <a:p xmlns:a="http://schemas.openxmlformats.org/drawingml/2006/main">
+            <a:pPr algn="l">
+              <a:defRPr sz="1425" b="1" i="0">
+                <a:solidFill>
+                  <a:srgbClr val="D95D53"/>
+                </a:solidFill>
+                <a:latin typeface="Aptos"/>
+                <a:ea typeface="Aptos"/>
+                <a:cs typeface="Aptos"/>
+              </a:defRPr>
+            </a:pPr>
+            <a:r>
+              <a:rPr sz="1425" b="1" i="0">
+                <a:solidFill>
+                  <a:srgbClr val="D95D53"/>
+                </a:solidFill>
+                <a:latin typeface="Aptos"/>
+                <a:ea typeface="Aptos"/>
+                <a:cs typeface="Aptos"/>
+              </a:rPr>
+              <a:t>Protect the final holdout until the feature contract and threshold are frozen.</a:t>
+            </a:r>
+          </a:p>
+        </p:txBody>
+      </p:sp>
+      <p:sp>
+        <p:nvSpPr>
+          <p:cNvPr id="26" name="">
+            <a:extLst xmlns:a="http://schemas.openxmlformats.org/drawingml/2006/main">
+              <a:ext uri="{FF2B5EF4-FFF2-40B4-BE49-F238E27FC236}">
+                <a16:creationId xmlns:a16="http://schemas.microsoft.com/office/drawing/2014/main" id="{BE49276F-3C65-4523-A163-1D2D36A65C08}"/>
+              </a:ext>
+            </a:extLst>
+          </p:cNvPr>
+          <p:cNvSpPr>
+            <a:spLocks xmlns:a="http://schemas.openxmlformats.org/drawingml/2006/main" noGrp="1"/>
+          </p:cNvSpPr>
+          <p:nvPr/>
+        </p:nvSpPr>
+        <p:spPr>
+          <a:xfrm xmlns:a="http://schemas.openxmlformats.org/drawingml/2006/main">
+            <a:off x="647700" y="6534150"/>
+            <a:ext cx="10896600" cy="9525"/>
+          </a:xfrm>
+          <a:prstGeom xmlns:a="http://schemas.openxmlformats.org/drawingml/2006/main" prst="rect">
+            <a:avLst/>
+          </a:prstGeom>
+          <a:solidFill xmlns:a="http://schemas.openxmlformats.org/drawingml/2006/main">
+            <a:srgbClr val="D5CEC1"/>
+          </a:solidFill>
+          <a:ln xmlns:a="http://schemas.openxmlformats.org/drawingml/2006/main" w="0">
+            <a:solidFill>
+              <a:srgbClr val="D5CEC1"/>
+            </a:solidFill>
+            <a:prstDash val="solid"/>
+          </a:ln>
+        </p:spPr>
+      </p:sp>
+      <p:sp>
+        <p:nvSpPr>
+          <p:cNvPr id="27" name="">
+            <a:extLst xmlns:a="http://schemas.openxmlformats.org/drawingml/2006/main">
+              <a:ext uri="{FF2B5EF4-FFF2-40B4-BE49-F238E27FC236}">
+                <a16:creationId xmlns:a16="http://schemas.microsoft.com/office/drawing/2014/main" id="{B4E02323-402A-4C9B-9002-2E55CAE0598B}"/>
+              </a:ext>
+            </a:extLst>
+          </p:cNvPr>
+          <p:cNvSpPr>
+            <a:spLocks xmlns:a="http://schemas.openxmlformats.org/drawingml/2006/main" noGrp="1"/>
+          </p:cNvSpPr>
+          <p:nvPr/>
+        </p:nvSpPr>
+        <p:spPr>
+          <a:xfrm xmlns:a="http://schemas.openxmlformats.org/drawingml/2006/main">
+            <a:off x="647700" y="6610350"/>
+            <a:ext cx="3429000" cy="152400"/>
+          </a:xfrm>
+          <a:prstGeom xmlns:a="http://schemas.openxmlformats.org/drawingml/2006/main" prst="rect">
+            <a:avLst/>
+          </a:prstGeom>
+          <a:noFill xmlns:a="http://schemas.openxmlformats.org/drawingml/2006/main"/>
+          <a:ln xmlns:a="http://schemas.openxmlformats.org/drawingml/2006/main" w="0">
+            <a:noFill/>
+            <a:prstDash val="solid"/>
+          </a:ln>
+        </p:spPr>
+        <p:txBody>
+          <a:bodyPr xmlns:a="http://schemas.openxmlformats.org/drawingml/2006/main" wrap="square" lIns="0" tIns="0" rIns="0" bIns="0" anchor="t">
+            <a:normAutofit fontScale="100000"/>
+          </a:bodyPr>
+          <a:lstStyle xmlns:a="http://schemas.openxmlformats.org/drawingml/2006/main"/>
+          <a:p xmlns:a="http://schemas.openxmlformats.org/drawingml/2006/main">
+            <a:pPr algn="l">
+              <a:defRPr sz="825" b="1" i="0">
+                <a:solidFill>
+                  <a:srgbClr val="52606D"/>
+                </a:solidFill>
+                <a:latin typeface="Aptos"/>
+                <a:ea typeface="Aptos"/>
+                <a:cs typeface="Aptos"/>
+              </a:defRPr>
+            </a:pPr>
+            <a:r>
+              <a:rPr sz="825" b="1" i="0">
+                <a:solidFill>
+                  <a:srgbClr val="52606D"/>
+                </a:solidFill>
+                <a:latin typeface="Aptos"/>
+                <a:ea typeface="Aptos"/>
+                <a:cs typeface="Aptos"/>
+              </a:rPr>
+              <a:t>ROY + SEAN  ·  FRAUD DETECTION</a:t>
+            </a:r>
+          </a:p>
+        </p:txBody>
+      </p:sp>
+      <p:sp>
+        <p:nvSpPr>
+          <p:cNvPr id="28" name="">
+            <a:extLst xmlns:a="http://schemas.openxmlformats.org/drawingml/2006/main">
+              <a:ext uri="{FF2B5EF4-FFF2-40B4-BE49-F238E27FC236}">
+                <a16:creationId xmlns:a16="http://schemas.microsoft.com/office/drawing/2014/main" id="{31E6A8BF-C4D8-42F4-B2C6-345050C2DBD4}"/>
+              </a:ext>
+            </a:extLst>
+          </p:cNvPr>
+          <p:cNvSpPr>
+            <a:spLocks xmlns:a="http://schemas.openxmlformats.org/drawingml/2006/main" noGrp="1"/>
+          </p:cNvSpPr>
+          <p:nvPr/>
+        </p:nvSpPr>
+        <p:spPr>
+          <a:xfrm xmlns:a="http://schemas.openxmlformats.org/drawingml/2006/main">
+            <a:off x="10810875" y="6591300"/>
+            <a:ext cx="733425" cy="171450"/>
+          </a:xfrm>
+          <a:prstGeom xmlns:a="http://schemas.openxmlformats.org/drawingml/2006/main" prst="rect">
+            <a:avLst/>
+          </a:prstGeom>
+          <a:noFill xmlns:a="http://schemas.openxmlformats.org/drawingml/2006/main"/>
+          <a:ln xmlns:a="http://schemas.openxmlformats.org/drawingml/2006/main" w="0">
+            <a:noFill/>
+            <a:prstDash val="solid"/>
+          </a:ln>
+        </p:spPr>
+        <p:txBody>
+          <a:bodyPr xmlns:a="http://schemas.openxmlformats.org/drawingml/2006/main" wrap="square" lIns="0" tIns="0" rIns="0" bIns="0" anchor="t">
+            <a:normAutofit fontScale="100000"/>
+          </a:bodyPr>
+          <a:lstStyle xmlns:a="http://schemas.openxmlformats.org/drawingml/2006/main"/>
+          <a:p xmlns:a="http://schemas.openxmlformats.org/drawingml/2006/main">
+            <a:pPr algn="r">
+              <a:defRPr sz="900" b="1" i="0">
+                <a:solidFill>
+                  <a:srgbClr val="52606D"/>
+                </a:solidFill>
+                <a:latin typeface="Aptos"/>
+                <a:ea typeface="Aptos"/>
+                <a:cs typeface="Aptos"/>
+              </a:defRPr>
+            </a:pPr>
+            <a:r>
+              <a:rPr sz="900" b="1" i="0">
+                <a:solidFill>
+                  <a:srgbClr val="52606D"/>
+                </a:solidFill>
+                <a:latin typeface="Aptos"/>
+                <a:ea typeface="Aptos"/>
+                <a:cs typeface="Aptos"/>
+              </a:rPr>
+              <a:t>16</a:t>
+            </a:r>
+          </a:p>
+        </p:txBody>
+      </p:sp>
+    </p:spTree>
+    <p:extLst>
+      <p:ext uri="{BB962C8B-B14F-4D97-AF65-F5344CB8AC3E}">
+        <p14:creationId xmlns:p14="http://schemas.microsoft.com/office/powerpoint/2010/main" val="1207028974"/>
+      </p:ext>
+    </p:extLst>
+  </p:cSld>
+</p:sld>
+</file>
+
+<file path=ppt/slides/slide17.xml><?xml version="1.0" encoding="utf-8"?>
 <p:sld xmlns:p="http://schemas.openxmlformats.org/presentationml/2006/main">
   <p:cSld>
     <p:bg>
@@ -13702,7 +14884,7 @@
           <p:cNvPr id="19" name="">
             <a:extLst xmlns:a="http://schemas.openxmlformats.org/drawingml/2006/main">
               <a:ext uri="{FF2B5EF4-FFF2-40B4-BE49-F238E27FC236}">
-                <a16:creationId xmlns:a16="http://schemas.microsoft.com/office/drawing/2014/main" id="{0615597E-C878-406E-8AA0-923FDA89EBB7}"/>
+                <a16:creationId xmlns:a16="http://schemas.microsoft.com/office/drawing/2014/main" id="{F0E66607-CEAE-414C-87DD-FB2C4B052061}"/>
               </a:ext>
             </a:extLst>
           </p:cNvPr>
@@ -13760,7 +14942,7 @@
           <p:cNvPr id="2" name="">
             <a:extLst xmlns:a="http://schemas.openxmlformats.org/drawingml/2006/main">
               <a:ext uri="{FF2B5EF4-FFF2-40B4-BE49-F238E27FC236}">
-                <a16:creationId xmlns:a16="http://schemas.microsoft.com/office/drawing/2014/main" id="{5796B5E8-2A30-4174-91A3-DD6B32009201}"/>
+                <a16:creationId xmlns:a16="http://schemas.microsoft.com/office/drawing/2014/main" id="{C628E180-6B92-4172-B996-0B63E64639C5}"/>
               </a:ext>
             </a:extLst>
           </p:cNvPr>
@@ -13841,7 +15023,7 @@
           <p:cNvPr id="3" name="">
             <a:extLst xmlns:a="http://schemas.openxmlformats.org/drawingml/2006/main">
               <a:ext uri="{FF2B5EF4-FFF2-40B4-BE49-F238E27FC236}">
-                <a16:creationId xmlns:a16="http://schemas.microsoft.com/office/drawing/2014/main" id="{99B8E50A-9E2B-425A-81AA-FAFCAB477B7D}"/>
+                <a16:creationId xmlns:a16="http://schemas.microsoft.com/office/drawing/2014/main" id="{9A523225-520A-4F04-9B1E-40E1E29CCE47}"/>
               </a:ext>
             </a:extLst>
           </p:cNvPr>
@@ -13874,7 +15056,7 @@
           <p:cNvPr id="4" name="">
             <a:extLst xmlns:a="http://schemas.openxmlformats.org/drawingml/2006/main">
               <a:ext uri="{FF2B5EF4-FFF2-40B4-BE49-F238E27FC236}">
-                <a16:creationId xmlns:a16="http://schemas.microsoft.com/office/drawing/2014/main" id="{4E977741-4D17-469C-B046-5708117B5307}"/>
+                <a16:creationId xmlns:a16="http://schemas.microsoft.com/office/drawing/2014/main" id="{DD71D707-AA1E-46A9-99AC-7749757695EC}"/>
               </a:ext>
             </a:extLst>
           </p:cNvPr>
@@ -13932,7 +15114,7 @@
           <p:cNvPr id="5" name="">
             <a:extLst xmlns:a="http://schemas.openxmlformats.org/drawingml/2006/main">
               <a:ext uri="{FF2B5EF4-FFF2-40B4-BE49-F238E27FC236}">
-                <a16:creationId xmlns:a16="http://schemas.microsoft.com/office/drawing/2014/main" id="{72B57083-8BDE-464F-8562-DB63CAAC763A}"/>
+                <a16:creationId xmlns:a16="http://schemas.microsoft.com/office/drawing/2014/main" id="{09682828-C02F-4FD8-8A3C-91B64182B2CB}"/>
               </a:ext>
             </a:extLst>
           </p:cNvPr>
@@ -13990,7 +15172,7 @@
           <p:cNvPr id="6" name="">
             <a:extLst xmlns:a="http://schemas.openxmlformats.org/drawingml/2006/main">
               <a:ext uri="{FF2B5EF4-FFF2-40B4-BE49-F238E27FC236}">
-                <a16:creationId xmlns:a16="http://schemas.microsoft.com/office/drawing/2014/main" id="{E2A5F3CD-0874-4191-9622-8DE12A35BE3B}"/>
+                <a16:creationId xmlns:a16="http://schemas.microsoft.com/office/drawing/2014/main" id="{3DC0D59F-EDCD-4672-8732-3A23B20BFD99}"/>
               </a:ext>
             </a:extLst>
           </p:cNvPr>
@@ -14023,7 +15205,7 @@
           <p:cNvPr id="7" name="">
             <a:extLst xmlns:a="http://schemas.openxmlformats.org/drawingml/2006/main">
               <a:ext uri="{FF2B5EF4-FFF2-40B4-BE49-F238E27FC236}">
-                <a16:creationId xmlns:a16="http://schemas.microsoft.com/office/drawing/2014/main" id="{0232C03C-60AC-4EFC-8D11-DF0924ECF4AF}"/>
+                <a16:creationId xmlns:a16="http://schemas.microsoft.com/office/drawing/2014/main" id="{93E2575E-54DB-415E-AABA-17C09F596FD4}"/>
               </a:ext>
             </a:extLst>
           </p:cNvPr>
@@ -14081,7 +15263,7 @@
           <p:cNvPr id="8" name="">
             <a:extLst xmlns:a="http://schemas.openxmlformats.org/drawingml/2006/main">
               <a:ext uri="{FF2B5EF4-FFF2-40B4-BE49-F238E27FC236}">
-                <a16:creationId xmlns:a16="http://schemas.microsoft.com/office/drawing/2014/main" id="{0E4A6E89-CEAC-4150-B075-97DD59DE3D80}"/>
+                <a16:creationId xmlns:a16="http://schemas.microsoft.com/office/drawing/2014/main" id="{FD946CA3-45C5-433B-A8CF-B9D3645CA3FE}"/>
               </a:ext>
             </a:extLst>
           </p:cNvPr>
@@ -14139,7 +15321,7 @@
           <p:cNvPr id="9" name="">
             <a:extLst xmlns:a="http://schemas.openxmlformats.org/drawingml/2006/main">
               <a:ext uri="{FF2B5EF4-FFF2-40B4-BE49-F238E27FC236}">
-                <a16:creationId xmlns:a16="http://schemas.microsoft.com/office/drawing/2014/main" id="{1FBB020E-8AD2-4D89-B45B-712B8593620A}"/>
+                <a16:creationId xmlns:a16="http://schemas.microsoft.com/office/drawing/2014/main" id="{B877867F-A736-467C-A5DA-6C7BBD9E82F6}"/>
               </a:ext>
             </a:extLst>
           </p:cNvPr>
@@ -14172,7 +15354,7 @@
           <p:cNvPr id="10" name="">
             <a:extLst xmlns:a="http://schemas.openxmlformats.org/drawingml/2006/main">
               <a:ext uri="{FF2B5EF4-FFF2-40B4-BE49-F238E27FC236}">
-                <a16:creationId xmlns:a16="http://schemas.microsoft.com/office/drawing/2014/main" id="{34331013-C262-43CE-A251-38D7107EA8DF}"/>
+                <a16:creationId xmlns:a16="http://schemas.microsoft.com/office/drawing/2014/main" id="{8381E2AA-8819-4E9A-A4F9-C1131507F83F}"/>
               </a:ext>
             </a:extLst>
           </p:cNvPr>
@@ -14230,7 +15412,7 @@
           <p:cNvPr id="11" name="">
             <a:extLst xmlns:a="http://schemas.openxmlformats.org/drawingml/2006/main">
               <a:ext uri="{FF2B5EF4-FFF2-40B4-BE49-F238E27FC236}">
-                <a16:creationId xmlns:a16="http://schemas.microsoft.com/office/drawing/2014/main" id="{2AAE7A48-3214-4814-B84E-97DF60D82988}"/>
+                <a16:creationId xmlns:a16="http://schemas.microsoft.com/office/drawing/2014/main" id="{5CF4A0C7-8074-4FA4-ACBB-0351D3BA2B3B}"/>
               </a:ext>
             </a:extLst>
           </p:cNvPr>
@@ -14288,7 +15470,7 @@
           <p:cNvPr id="12" name="">
             <a:extLst xmlns:a="http://schemas.openxmlformats.org/drawingml/2006/main">
               <a:ext uri="{FF2B5EF4-FFF2-40B4-BE49-F238E27FC236}">
-                <a16:creationId xmlns:a16="http://schemas.microsoft.com/office/drawing/2014/main" id="{6A05551B-C4AC-404A-A373-53A948F4D99C}"/>
+                <a16:creationId xmlns:a16="http://schemas.microsoft.com/office/drawing/2014/main" id="{5A50CE3C-4A5C-4972-8EC9-D326F1BB9B48}"/>
               </a:ext>
             </a:extLst>
           </p:cNvPr>
@@ -14321,7 +15503,7 @@
           <p:cNvPr id="13" name="">
             <a:extLst xmlns:a="http://schemas.openxmlformats.org/drawingml/2006/main">
               <a:ext uri="{FF2B5EF4-FFF2-40B4-BE49-F238E27FC236}">
-                <a16:creationId xmlns:a16="http://schemas.microsoft.com/office/drawing/2014/main" id="{4B34BB6A-85D5-46DD-B01A-903272B2238B}"/>
+                <a16:creationId xmlns:a16="http://schemas.microsoft.com/office/drawing/2014/main" id="{454520FC-95A1-4924-8325-A6D69E856C69}"/>
               </a:ext>
             </a:extLst>
           </p:cNvPr>
@@ -14379,7 +15561,7 @@
           <p:cNvPr id="14" name="">
             <a:extLst xmlns:a="http://schemas.openxmlformats.org/drawingml/2006/main">
               <a:ext uri="{FF2B5EF4-FFF2-40B4-BE49-F238E27FC236}">
-                <a16:creationId xmlns:a16="http://schemas.microsoft.com/office/drawing/2014/main" id="{6931287B-06CD-4994-ACFB-39FC82A0E2E8}"/>
+                <a16:creationId xmlns:a16="http://schemas.microsoft.com/office/drawing/2014/main" id="{183D9B88-7951-483C-A792-E4F1BB2FA7E6}"/>
               </a:ext>
             </a:extLst>
           </p:cNvPr>
@@ -14437,7 +15619,7 @@
           <p:cNvPr id="15" name="">
             <a:extLst xmlns:a="http://schemas.openxmlformats.org/drawingml/2006/main">
               <a:ext uri="{FF2B5EF4-FFF2-40B4-BE49-F238E27FC236}">
-                <a16:creationId xmlns:a16="http://schemas.microsoft.com/office/drawing/2014/main" id="{C3715E79-D2F8-4DAD-8600-801A96AEA5A1}"/>
+                <a16:creationId xmlns:a16="http://schemas.microsoft.com/office/drawing/2014/main" id="{C943BDE1-F9C2-48C1-9B84-88559A6152A7}"/>
               </a:ext>
             </a:extLst>
           </p:cNvPr>
@@ -14495,7 +15677,7 @@
           <p:cNvPr id="16" name="">
             <a:extLst xmlns:a="http://schemas.openxmlformats.org/drawingml/2006/main">
               <a:ext uri="{FF2B5EF4-FFF2-40B4-BE49-F238E27FC236}">
-                <a16:creationId xmlns:a16="http://schemas.microsoft.com/office/drawing/2014/main" id="{86981928-8913-4B46-B61D-4FD2E76E879A}"/>
+                <a16:creationId xmlns:a16="http://schemas.microsoft.com/office/drawing/2014/main" id="{75BF6B56-1C62-4563-BC62-4D85F7FBFE38}"/>
               </a:ext>
             </a:extLst>
           </p:cNvPr>
@@ -14528,7 +15710,7 @@
           <p:cNvPr id="17" name="">
             <a:extLst xmlns:a="http://schemas.openxmlformats.org/drawingml/2006/main">
               <a:ext uri="{FF2B5EF4-FFF2-40B4-BE49-F238E27FC236}">
-                <a16:creationId xmlns:a16="http://schemas.microsoft.com/office/drawing/2014/main" id="{CE2BBA4D-3391-45F3-BD8C-D10A3F20C388}"/>
+                <a16:creationId xmlns:a16="http://schemas.microsoft.com/office/drawing/2014/main" id="{EBFD5343-30E6-4819-BD81-27BC5FC32459}"/>
               </a:ext>
             </a:extLst>
           </p:cNvPr>
@@ -14586,7 +15768,7 @@
           <p:cNvPr id="18" name="">
             <a:extLst xmlns:a="http://schemas.openxmlformats.org/drawingml/2006/main">
               <a:ext uri="{FF2B5EF4-FFF2-40B4-BE49-F238E27FC236}">
-                <a16:creationId xmlns:a16="http://schemas.microsoft.com/office/drawing/2014/main" id="{A11E523F-635A-4D3C-9B4B-8892EA60BFC9}"/>
+                <a16:creationId xmlns:a16="http://schemas.microsoft.com/office/drawing/2014/main" id="{76404905-4BDE-452D-8030-EB277FFF448A}"/>
               </a:ext>
             </a:extLst>
           </p:cNvPr>
@@ -14634,7 +15816,7 @@
                 <a:ea typeface="Aptos"/>
                 <a:cs typeface="Aptos"/>
               </a:rPr>
-              <a:t>16</a:t>
+              <a:t>17</a:t>
             </a:r>
           </a:p>
         </p:txBody>
@@ -14642,7 +15824,7 @@
     </p:spTree>
     <p:extLst>
       <p:ext uri="{BB962C8B-B14F-4D97-AF65-F5344CB8AC3E}">
-        <p14:creationId xmlns:p14="http://schemas.microsoft.com/office/powerpoint/2010/main" val="1584573982"/>
+        <p14:creationId xmlns:p14="http://schemas.microsoft.com/office/powerpoint/2010/main" val="992786724"/>
       </p:ext>
     </p:extLst>
   </p:cSld>
@@ -14673,7 +15855,7 @@
           <p:cNvPr id="21" name="">
             <a:extLst xmlns:a="http://schemas.openxmlformats.org/drawingml/2006/main">
               <a:ext uri="{FF2B5EF4-FFF2-40B4-BE49-F238E27FC236}">
-                <a16:creationId xmlns:a16="http://schemas.microsoft.com/office/drawing/2014/main" id="{69AF1463-D910-4E78-AFE1-1E1EB4B17AA7}"/>
+                <a16:creationId xmlns:a16="http://schemas.microsoft.com/office/drawing/2014/main" id="{FB61C9EF-15B5-400B-BCAE-7F96F129548C}"/>
               </a:ext>
             </a:extLst>
           </p:cNvPr>
@@ -14731,7 +15913,7 @@
           <p:cNvPr id="2" name="">
             <a:extLst xmlns:a="http://schemas.openxmlformats.org/drawingml/2006/main">
               <a:ext uri="{FF2B5EF4-FFF2-40B4-BE49-F238E27FC236}">
-                <a16:creationId xmlns:a16="http://schemas.microsoft.com/office/drawing/2014/main" id="{6158D7B7-2C99-4F06-8D03-F304001AB906}"/>
+                <a16:creationId xmlns:a16="http://schemas.microsoft.com/office/drawing/2014/main" id="{74EAF57C-0466-4245-9E36-5C65F3955157}"/>
               </a:ext>
             </a:extLst>
           </p:cNvPr>
@@ -14789,7 +15971,7 @@
           <p:cNvPr id="3" name="">
             <a:extLst xmlns:a="http://schemas.openxmlformats.org/drawingml/2006/main">
               <a:ext uri="{FF2B5EF4-FFF2-40B4-BE49-F238E27FC236}">
-                <a16:creationId xmlns:a16="http://schemas.microsoft.com/office/drawing/2014/main" id="{21CDE692-05AF-4374-9BA1-C42A8B6B4E03}"/>
+                <a16:creationId xmlns:a16="http://schemas.microsoft.com/office/drawing/2014/main" id="{F9140368-537C-4991-BEDC-3AA8AACBD653}"/>
               </a:ext>
             </a:extLst>
           </p:cNvPr>
@@ -14822,7 +16004,7 @@
           <p:cNvPr id="4" name="">
             <a:extLst xmlns:a="http://schemas.openxmlformats.org/drawingml/2006/main">
               <a:ext uri="{FF2B5EF4-FFF2-40B4-BE49-F238E27FC236}">
-                <a16:creationId xmlns:a16="http://schemas.microsoft.com/office/drawing/2014/main" id="{E6A5E3FE-B3C2-4787-A71B-DA8358EBD865}"/>
+                <a16:creationId xmlns:a16="http://schemas.microsoft.com/office/drawing/2014/main" id="{5EA6D30E-C8A4-4488-9ED5-08E683199F7E}"/>
               </a:ext>
             </a:extLst>
           </p:cNvPr>
@@ -14880,7 +16062,7 @@
           <p:cNvPr id="5" name="">
             <a:extLst xmlns:a="http://schemas.openxmlformats.org/drawingml/2006/main">
               <a:ext uri="{FF2B5EF4-FFF2-40B4-BE49-F238E27FC236}">
-                <a16:creationId xmlns:a16="http://schemas.microsoft.com/office/drawing/2014/main" id="{D160D9E8-F6ED-4ADE-8CE9-D23DB02B98E0}"/>
+                <a16:creationId xmlns:a16="http://schemas.microsoft.com/office/drawing/2014/main" id="{8E4A16CF-E568-48FB-ABB3-4D62D27CEFB4}"/>
               </a:ext>
             </a:extLst>
           </p:cNvPr>
@@ -14938,7 +16120,7 @@
           <p:cNvPr id="6" name="">
             <a:extLst xmlns:a="http://schemas.openxmlformats.org/drawingml/2006/main">
               <a:ext uri="{FF2B5EF4-FFF2-40B4-BE49-F238E27FC236}">
-                <a16:creationId xmlns:a16="http://schemas.microsoft.com/office/drawing/2014/main" id="{067CE37B-522A-4216-8E85-5714866AE28A}"/>
+                <a16:creationId xmlns:a16="http://schemas.microsoft.com/office/drawing/2014/main" id="{3D59601F-F330-4A04-8256-28C16C072B70}"/>
               </a:ext>
             </a:extLst>
           </p:cNvPr>
@@ -14971,7 +16153,7 @@
           <p:cNvPr id="7" name="">
             <a:extLst xmlns:a="http://schemas.openxmlformats.org/drawingml/2006/main">
               <a:ext uri="{FF2B5EF4-FFF2-40B4-BE49-F238E27FC236}">
-                <a16:creationId xmlns:a16="http://schemas.microsoft.com/office/drawing/2014/main" id="{0B39BF9C-55AB-4008-8DF3-3C8508C05706}"/>
+                <a16:creationId xmlns:a16="http://schemas.microsoft.com/office/drawing/2014/main" id="{E4DD24A8-101E-4C90-ABAF-EBC99216D04B}"/>
               </a:ext>
             </a:extLst>
           </p:cNvPr>
@@ -15029,7 +16211,7 @@
           <p:cNvPr id="8" name="">
             <a:extLst xmlns:a="http://schemas.openxmlformats.org/drawingml/2006/main">
               <a:ext uri="{FF2B5EF4-FFF2-40B4-BE49-F238E27FC236}">
-                <a16:creationId xmlns:a16="http://schemas.microsoft.com/office/drawing/2014/main" id="{5D96DFC6-E4C9-47CB-85EA-5398E621A420}"/>
+                <a16:creationId xmlns:a16="http://schemas.microsoft.com/office/drawing/2014/main" id="{D5C3A746-14AD-4426-BF90-BF96741B72CF}"/>
               </a:ext>
             </a:extLst>
           </p:cNvPr>
@@ -15087,7 +16269,7 @@
           <p:cNvPr id="9" name="">
             <a:extLst xmlns:a="http://schemas.openxmlformats.org/drawingml/2006/main">
               <a:ext uri="{FF2B5EF4-FFF2-40B4-BE49-F238E27FC236}">
-                <a16:creationId xmlns:a16="http://schemas.microsoft.com/office/drawing/2014/main" id="{9E6A1681-91ED-47AA-980C-A928614DD200}"/>
+                <a16:creationId xmlns:a16="http://schemas.microsoft.com/office/drawing/2014/main" id="{4BC2B277-4D68-453F-942D-066DA62541AF}"/>
               </a:ext>
             </a:extLst>
           </p:cNvPr>
@@ -15120,7 +16302,7 @@
           <p:cNvPr id="10" name="">
             <a:extLst xmlns:a="http://schemas.openxmlformats.org/drawingml/2006/main">
               <a:ext uri="{FF2B5EF4-FFF2-40B4-BE49-F238E27FC236}">
-                <a16:creationId xmlns:a16="http://schemas.microsoft.com/office/drawing/2014/main" id="{17722964-FF54-4423-B1E9-CDEEEAC27CDF}"/>
+                <a16:creationId xmlns:a16="http://schemas.microsoft.com/office/drawing/2014/main" id="{3E4DAAA1-3E1B-4CFB-9F88-22D496DF3DCC}"/>
               </a:ext>
             </a:extLst>
           </p:cNvPr>
@@ -15178,7 +16360,7 @@
           <p:cNvPr id="11" name="">
             <a:extLst xmlns:a="http://schemas.openxmlformats.org/drawingml/2006/main">
               <a:ext uri="{FF2B5EF4-FFF2-40B4-BE49-F238E27FC236}">
-                <a16:creationId xmlns:a16="http://schemas.microsoft.com/office/drawing/2014/main" id="{9A8EBACE-D7FC-49CB-8C3C-F197220A6264}"/>
+                <a16:creationId xmlns:a16="http://schemas.microsoft.com/office/drawing/2014/main" id="{CFED8896-6710-45A0-99FB-DD47D216A91D}"/>
               </a:ext>
             </a:extLst>
           </p:cNvPr>
@@ -15236,7 +16418,7 @@
           <p:cNvPr id="12" name="">
             <a:extLst xmlns:a="http://schemas.openxmlformats.org/drawingml/2006/main">
               <a:ext uri="{FF2B5EF4-FFF2-40B4-BE49-F238E27FC236}">
-                <a16:creationId xmlns:a16="http://schemas.microsoft.com/office/drawing/2014/main" id="{DB255B0B-EB98-482A-865F-346F3D039C68}"/>
+                <a16:creationId xmlns:a16="http://schemas.microsoft.com/office/drawing/2014/main" id="{2037290F-3CCC-4BA3-BEAA-9744580773F3}"/>
               </a:ext>
             </a:extLst>
           </p:cNvPr>
@@ -15269,7 +16451,7 @@
           <p:cNvPr id="13" name="">
             <a:extLst xmlns:a="http://schemas.openxmlformats.org/drawingml/2006/main">
               <a:ext uri="{FF2B5EF4-FFF2-40B4-BE49-F238E27FC236}">
-                <a16:creationId xmlns:a16="http://schemas.microsoft.com/office/drawing/2014/main" id="{B4C59247-0DDA-40FC-9549-CCF762702544}"/>
+                <a16:creationId xmlns:a16="http://schemas.microsoft.com/office/drawing/2014/main" id="{E863E479-2BDA-4867-BFC4-B259D191513D}"/>
               </a:ext>
             </a:extLst>
           </p:cNvPr>
@@ -15327,7 +16509,7 @@
           <p:cNvPr id="14" name="">
             <a:extLst xmlns:a="http://schemas.openxmlformats.org/drawingml/2006/main">
               <a:ext uri="{FF2B5EF4-FFF2-40B4-BE49-F238E27FC236}">
-                <a16:creationId xmlns:a16="http://schemas.microsoft.com/office/drawing/2014/main" id="{60344BE5-EFFC-40CF-8525-31AB2CF01037}"/>
+                <a16:creationId xmlns:a16="http://schemas.microsoft.com/office/drawing/2014/main" id="{761D7334-FCDE-4C3C-B075-8B381A54E714}"/>
               </a:ext>
             </a:extLst>
           </p:cNvPr>
@@ -15385,7 +16567,7 @@
           <p:cNvPr id="15" name="">
             <a:extLst xmlns:a="http://schemas.openxmlformats.org/drawingml/2006/main">
               <a:ext uri="{FF2B5EF4-FFF2-40B4-BE49-F238E27FC236}">
-                <a16:creationId xmlns:a16="http://schemas.microsoft.com/office/drawing/2014/main" id="{3999ABA4-566A-4454-85F0-BD471517234E}"/>
+                <a16:creationId xmlns:a16="http://schemas.microsoft.com/office/drawing/2014/main" id="{C73DF932-8EFA-45C2-88E1-90BEE37C4AD3}"/>
               </a:ext>
             </a:extLst>
           </p:cNvPr>
@@ -15418,7 +16600,7 @@
           <p:cNvPr id="16" name="">
             <a:extLst xmlns:a="http://schemas.openxmlformats.org/drawingml/2006/main">
               <a:ext uri="{FF2B5EF4-FFF2-40B4-BE49-F238E27FC236}">
-                <a16:creationId xmlns:a16="http://schemas.microsoft.com/office/drawing/2014/main" id="{B939B3E8-0525-4C3D-959D-F482B88228DA}"/>
+                <a16:creationId xmlns:a16="http://schemas.microsoft.com/office/drawing/2014/main" id="{58F4755D-BDE3-4660-9082-31882A468D02}"/>
               </a:ext>
             </a:extLst>
           </p:cNvPr>
@@ -15499,7 +16681,7 @@
           <p:cNvPr id="17" name="">
             <a:extLst xmlns:a="http://schemas.openxmlformats.org/drawingml/2006/main">
               <a:ext uri="{FF2B5EF4-FFF2-40B4-BE49-F238E27FC236}">
-                <a16:creationId xmlns:a16="http://schemas.microsoft.com/office/drawing/2014/main" id="{0DB96B24-AF1F-4008-B027-DB500367F232}"/>
+                <a16:creationId xmlns:a16="http://schemas.microsoft.com/office/drawing/2014/main" id="{5F3D1339-AFCB-489C-87DE-5AACE3371F01}"/>
               </a:ext>
             </a:extLst>
           </p:cNvPr>
@@ -15557,7 +16739,7 @@
           <p:cNvPr id="18" name="">
             <a:extLst xmlns:a="http://schemas.openxmlformats.org/drawingml/2006/main">
               <a:ext uri="{FF2B5EF4-FFF2-40B4-BE49-F238E27FC236}">
-                <a16:creationId xmlns:a16="http://schemas.microsoft.com/office/drawing/2014/main" id="{440AF04A-3520-440D-A8A5-BB1C63E234AE}"/>
+                <a16:creationId xmlns:a16="http://schemas.microsoft.com/office/drawing/2014/main" id="{E76EEDF3-FB43-4A0F-8C31-8D62D0049393}"/>
               </a:ext>
             </a:extLst>
           </p:cNvPr>
@@ -15590,7 +16772,7 @@
           <p:cNvPr id="19" name="">
             <a:extLst xmlns:a="http://schemas.openxmlformats.org/drawingml/2006/main">
               <a:ext uri="{FF2B5EF4-FFF2-40B4-BE49-F238E27FC236}">
-                <a16:creationId xmlns:a16="http://schemas.microsoft.com/office/drawing/2014/main" id="{D18A9B12-432B-40B4-8D76-94F7335E0E50}"/>
+                <a16:creationId xmlns:a16="http://schemas.microsoft.com/office/drawing/2014/main" id="{53F417E9-1866-4744-8302-8814CD941520}"/>
               </a:ext>
             </a:extLst>
           </p:cNvPr>
@@ -15648,7 +16830,7 @@
           <p:cNvPr id="20" name="">
             <a:extLst xmlns:a="http://schemas.openxmlformats.org/drawingml/2006/main">
               <a:ext uri="{FF2B5EF4-FFF2-40B4-BE49-F238E27FC236}">
-                <a16:creationId xmlns:a16="http://schemas.microsoft.com/office/drawing/2014/main" id="{244A08CA-4CE2-4496-B080-4691869ECA62}"/>
+                <a16:creationId xmlns:a16="http://schemas.microsoft.com/office/drawing/2014/main" id="{E74A7442-9417-4D2E-B518-794DA29A9A7C}"/>
               </a:ext>
             </a:extLst>
           </p:cNvPr>
@@ -15704,7 +16886,7 @@
     </p:spTree>
     <p:extLst>
       <p:ext uri="{BB962C8B-B14F-4D97-AF65-F5344CB8AC3E}">
-        <p14:creationId xmlns:p14="http://schemas.microsoft.com/office/powerpoint/2010/main" val="690963300"/>
+        <p14:creationId xmlns:p14="http://schemas.microsoft.com/office/powerpoint/2010/main" val="757443305"/>
       </p:ext>
     </p:extLst>
   </p:cSld>
@@ -15735,7 +16917,7 @@
           <p:cNvPr id="26" name="">
             <a:extLst xmlns:a="http://schemas.openxmlformats.org/drawingml/2006/main">
               <a:ext uri="{FF2B5EF4-FFF2-40B4-BE49-F238E27FC236}">
-                <a16:creationId xmlns:a16="http://schemas.microsoft.com/office/drawing/2014/main" id="{88EBBDBE-B564-430E-92D5-E6BE8D49FFCE}"/>
+                <a16:creationId xmlns:a16="http://schemas.microsoft.com/office/drawing/2014/main" id="{AF6A74BB-44C4-4FBE-9D79-3D0E24CECFC8}"/>
               </a:ext>
             </a:extLst>
           </p:cNvPr>
@@ -15793,7 +16975,7 @@
           <p:cNvPr id="2" name="">
             <a:extLst xmlns:a="http://schemas.openxmlformats.org/drawingml/2006/main">
               <a:ext uri="{FF2B5EF4-FFF2-40B4-BE49-F238E27FC236}">
-                <a16:creationId xmlns:a16="http://schemas.microsoft.com/office/drawing/2014/main" id="{748B89EB-FDD3-41E0-A8A7-27E4649243A8}"/>
+                <a16:creationId xmlns:a16="http://schemas.microsoft.com/office/drawing/2014/main" id="{65419317-0FA3-4BF3-84AF-FDCE56AE49B6}"/>
               </a:ext>
             </a:extLst>
           </p:cNvPr>
@@ -15851,7 +17033,7 @@
           <p:cNvPr id="3" name="">
             <a:extLst xmlns:a="http://schemas.openxmlformats.org/drawingml/2006/main">
               <a:ext uri="{FF2B5EF4-FFF2-40B4-BE49-F238E27FC236}">
-                <a16:creationId xmlns:a16="http://schemas.microsoft.com/office/drawing/2014/main" id="{2348F950-8519-4381-9626-639C579E4AA0}"/>
+                <a16:creationId xmlns:a16="http://schemas.microsoft.com/office/drawing/2014/main" id="{B127ACB2-CF57-4421-80DC-7703408A9546}"/>
               </a:ext>
             </a:extLst>
           </p:cNvPr>
@@ -15884,7 +17066,7 @@
           <p:cNvPr id="4" name="">
             <a:extLst xmlns:a="http://schemas.openxmlformats.org/drawingml/2006/main">
               <a:ext uri="{FF2B5EF4-FFF2-40B4-BE49-F238E27FC236}">
-                <a16:creationId xmlns:a16="http://schemas.microsoft.com/office/drawing/2014/main" id="{AFF89978-327B-46F6-B82A-B79F0A3573B1}"/>
+                <a16:creationId xmlns:a16="http://schemas.microsoft.com/office/drawing/2014/main" id="{ED9E2639-9C74-4D05-870F-813DD10A6D13}"/>
               </a:ext>
             </a:extLst>
           </p:cNvPr>
@@ -15942,7 +17124,7 @@
           <p:cNvPr id="5" name="">
             <a:extLst xmlns:a="http://schemas.openxmlformats.org/drawingml/2006/main">
               <a:ext uri="{FF2B5EF4-FFF2-40B4-BE49-F238E27FC236}">
-                <a16:creationId xmlns:a16="http://schemas.microsoft.com/office/drawing/2014/main" id="{D2859D1F-281E-4FA4-BCE9-94D87D5CB5D4}"/>
+                <a16:creationId xmlns:a16="http://schemas.microsoft.com/office/drawing/2014/main" id="{B5FA6D1F-3ECA-47F6-8739-F0FBC6ED9BB2}"/>
               </a:ext>
             </a:extLst>
           </p:cNvPr>
@@ -15975,7 +17157,7 @@
           <p:cNvPr id="6" name="">
             <a:extLst xmlns:a="http://schemas.openxmlformats.org/drawingml/2006/main">
               <a:ext uri="{FF2B5EF4-FFF2-40B4-BE49-F238E27FC236}">
-                <a16:creationId xmlns:a16="http://schemas.microsoft.com/office/drawing/2014/main" id="{338CA0C8-5FEE-4569-A8EB-894EFA19608F}"/>
+                <a16:creationId xmlns:a16="http://schemas.microsoft.com/office/drawing/2014/main" id="{0B3AC2D0-B72D-4DB5-B15E-46A062C9F4C1}"/>
               </a:ext>
             </a:extLst>
           </p:cNvPr>
@@ -16033,7 +17215,7 @@
           <p:cNvPr id="7" name="">
             <a:extLst xmlns:a="http://schemas.openxmlformats.org/drawingml/2006/main">
               <a:ext uri="{FF2B5EF4-FFF2-40B4-BE49-F238E27FC236}">
-                <a16:creationId xmlns:a16="http://schemas.microsoft.com/office/drawing/2014/main" id="{47E2E2E5-133E-4377-B85E-FB3890B557B1}"/>
+                <a16:creationId xmlns:a16="http://schemas.microsoft.com/office/drawing/2014/main" id="{B574483A-AEF3-4E3E-A4B6-40FCD6C4D91F}"/>
               </a:ext>
             </a:extLst>
           </p:cNvPr>
@@ -16091,7 +17273,7 @@
           <p:cNvPr id="8" name="">
             <a:extLst xmlns:a="http://schemas.openxmlformats.org/drawingml/2006/main">
               <a:ext uri="{FF2B5EF4-FFF2-40B4-BE49-F238E27FC236}">
-                <a16:creationId xmlns:a16="http://schemas.microsoft.com/office/drawing/2014/main" id="{02626AE4-21ED-411B-A0C1-A9A72F69BC60}"/>
+                <a16:creationId xmlns:a16="http://schemas.microsoft.com/office/drawing/2014/main" id="{44023828-466F-48C7-BA70-34AC7F85C8D9}"/>
               </a:ext>
             </a:extLst>
           </p:cNvPr>
@@ -16124,7 +17306,7 @@
           <p:cNvPr id="9" name="">
             <a:extLst xmlns:a="http://schemas.openxmlformats.org/drawingml/2006/main">
               <a:ext uri="{FF2B5EF4-FFF2-40B4-BE49-F238E27FC236}">
-                <a16:creationId xmlns:a16="http://schemas.microsoft.com/office/drawing/2014/main" id="{5AA8E276-75A1-4A14-BBB3-31662CE5EED7}"/>
+                <a16:creationId xmlns:a16="http://schemas.microsoft.com/office/drawing/2014/main" id="{EDF3BBB3-816C-415E-8119-A340C0213FBF}"/>
               </a:ext>
             </a:extLst>
           </p:cNvPr>
@@ -16182,7 +17364,7 @@
           <p:cNvPr id="10" name="">
             <a:extLst xmlns:a="http://schemas.openxmlformats.org/drawingml/2006/main">
               <a:ext uri="{FF2B5EF4-FFF2-40B4-BE49-F238E27FC236}">
-                <a16:creationId xmlns:a16="http://schemas.microsoft.com/office/drawing/2014/main" id="{CBFCB9E6-FB4E-4EDD-B4E4-A57780022783}"/>
+                <a16:creationId xmlns:a16="http://schemas.microsoft.com/office/drawing/2014/main" id="{FD259F21-3870-4C4B-BC22-14D0857A7647}"/>
               </a:ext>
             </a:extLst>
           </p:cNvPr>
@@ -16240,7 +17422,7 @@
           <p:cNvPr id="11" name="">
             <a:extLst xmlns:a="http://schemas.openxmlformats.org/drawingml/2006/main">
               <a:ext uri="{FF2B5EF4-FFF2-40B4-BE49-F238E27FC236}">
-                <a16:creationId xmlns:a16="http://schemas.microsoft.com/office/drawing/2014/main" id="{8E3857D6-2FDC-415D-9658-62A54EDD5876}"/>
+                <a16:creationId xmlns:a16="http://schemas.microsoft.com/office/drawing/2014/main" id="{51880C22-D428-4BA7-BFB3-A7A4C795B1FA}"/>
               </a:ext>
             </a:extLst>
           </p:cNvPr>
@@ -16273,7 +17455,7 @@
           <p:cNvPr id="12" name="">
             <a:extLst xmlns:a="http://schemas.openxmlformats.org/drawingml/2006/main">
               <a:ext uri="{FF2B5EF4-FFF2-40B4-BE49-F238E27FC236}">
-                <a16:creationId xmlns:a16="http://schemas.microsoft.com/office/drawing/2014/main" id="{9B8AE293-869C-47DF-A583-28B56B6E4926}"/>
+                <a16:creationId xmlns:a16="http://schemas.microsoft.com/office/drawing/2014/main" id="{8E094F1F-5DAD-4B6F-9FDA-B5DB083F6BE2}"/>
               </a:ext>
             </a:extLst>
           </p:cNvPr>
@@ -16331,7 +17513,7 @@
           <p:cNvPr id="13" name="">
             <a:extLst xmlns:a="http://schemas.openxmlformats.org/drawingml/2006/main">
               <a:ext uri="{FF2B5EF4-FFF2-40B4-BE49-F238E27FC236}">
-                <a16:creationId xmlns:a16="http://schemas.microsoft.com/office/drawing/2014/main" id="{841DB09C-205A-4D69-94CE-9784E69169F0}"/>
+                <a16:creationId xmlns:a16="http://schemas.microsoft.com/office/drawing/2014/main" id="{2AC29981-B9E0-4F93-BA16-B742627F96F0}"/>
               </a:ext>
             </a:extLst>
           </p:cNvPr>
@@ -16389,7 +17571,7 @@
           <p:cNvPr id="14" name="">
             <a:extLst xmlns:a="http://schemas.openxmlformats.org/drawingml/2006/main">
               <a:ext uri="{FF2B5EF4-FFF2-40B4-BE49-F238E27FC236}">
-                <a16:creationId xmlns:a16="http://schemas.microsoft.com/office/drawing/2014/main" id="{DCD414C2-5F0F-4532-88F1-5460CB909147}"/>
+                <a16:creationId xmlns:a16="http://schemas.microsoft.com/office/drawing/2014/main" id="{6F93A3AC-FB14-47FD-881E-296170956109}"/>
               </a:ext>
             </a:extLst>
           </p:cNvPr>
@@ -16447,7 +17629,7 @@
           <p:cNvPr id="15" name="">
             <a:extLst xmlns:a="http://schemas.openxmlformats.org/drawingml/2006/main">
               <a:ext uri="{FF2B5EF4-FFF2-40B4-BE49-F238E27FC236}">
-                <a16:creationId xmlns:a16="http://schemas.microsoft.com/office/drawing/2014/main" id="{03A3E09D-1335-48E8-874A-02C643F88D76}"/>
+                <a16:creationId xmlns:a16="http://schemas.microsoft.com/office/drawing/2014/main" id="{0A64C5A9-DA3D-4F6A-B29B-680271A91517}"/>
               </a:ext>
             </a:extLst>
           </p:cNvPr>
@@ -16480,7 +17662,7 @@
           <p:cNvPr id="16" name="">
             <a:extLst xmlns:a="http://schemas.openxmlformats.org/drawingml/2006/main">
               <a:ext uri="{FF2B5EF4-FFF2-40B4-BE49-F238E27FC236}">
-                <a16:creationId xmlns:a16="http://schemas.microsoft.com/office/drawing/2014/main" id="{8F27D923-101D-4EB1-8691-6AA67D33096A}"/>
+                <a16:creationId xmlns:a16="http://schemas.microsoft.com/office/drawing/2014/main" id="{1FEBA597-9CC3-439E-81E3-97D870BEED05}"/>
               </a:ext>
             </a:extLst>
           </p:cNvPr>
@@ -16538,7 +17720,7 @@
           <p:cNvPr id="17" name="">
             <a:extLst xmlns:a="http://schemas.openxmlformats.org/drawingml/2006/main">
               <a:ext uri="{FF2B5EF4-FFF2-40B4-BE49-F238E27FC236}">
-                <a16:creationId xmlns:a16="http://schemas.microsoft.com/office/drawing/2014/main" id="{5E246715-7F74-446D-A67A-46E7A4E1937C}"/>
+                <a16:creationId xmlns:a16="http://schemas.microsoft.com/office/drawing/2014/main" id="{33CA90C8-4AC0-47B5-B0E0-396CBF44F947}"/>
               </a:ext>
             </a:extLst>
           </p:cNvPr>
@@ -16571,7 +17753,7 @@
           <p:cNvPr id="18" name="">
             <a:extLst xmlns:a="http://schemas.openxmlformats.org/drawingml/2006/main">
               <a:ext uri="{FF2B5EF4-FFF2-40B4-BE49-F238E27FC236}">
-                <a16:creationId xmlns:a16="http://schemas.microsoft.com/office/drawing/2014/main" id="{BAD4A09C-BCA9-47BA-90B3-76E3BF159A02}"/>
+                <a16:creationId xmlns:a16="http://schemas.microsoft.com/office/drawing/2014/main" id="{6DE6742E-EE7C-400F-9BA8-10309F65477C}"/>
               </a:ext>
             </a:extLst>
           </p:cNvPr>
@@ -16629,7 +17811,7 @@
           <p:cNvPr id="19" name="">
             <a:extLst xmlns:a="http://schemas.openxmlformats.org/drawingml/2006/main">
               <a:ext uri="{FF2B5EF4-FFF2-40B4-BE49-F238E27FC236}">
-                <a16:creationId xmlns:a16="http://schemas.microsoft.com/office/drawing/2014/main" id="{683CFC3D-290D-42FC-B09A-CCB8509BE246}"/>
+                <a16:creationId xmlns:a16="http://schemas.microsoft.com/office/drawing/2014/main" id="{5F24C791-0768-48C4-828A-A991063EEB6C}"/>
               </a:ext>
             </a:extLst>
           </p:cNvPr>
@@ -16662,7 +17844,7 @@
           <p:cNvPr id="20" name="">
             <a:extLst xmlns:a="http://schemas.openxmlformats.org/drawingml/2006/main">
               <a:ext uri="{FF2B5EF4-FFF2-40B4-BE49-F238E27FC236}">
-                <a16:creationId xmlns:a16="http://schemas.microsoft.com/office/drawing/2014/main" id="{9A88D813-8499-4CCD-A76D-807CA58B1BB7}"/>
+                <a16:creationId xmlns:a16="http://schemas.microsoft.com/office/drawing/2014/main" id="{9BF1B08E-65E8-46D0-B1CF-0BB6E4828247}"/>
               </a:ext>
             </a:extLst>
           </p:cNvPr>
@@ -16720,7 +17902,7 @@
           <p:cNvPr id="21" name="">
             <a:extLst xmlns:a="http://schemas.openxmlformats.org/drawingml/2006/main">
               <a:ext uri="{FF2B5EF4-FFF2-40B4-BE49-F238E27FC236}">
-                <a16:creationId xmlns:a16="http://schemas.microsoft.com/office/drawing/2014/main" id="{BB43BEBA-EF92-425F-BA9E-1E49C727A2E6}"/>
+                <a16:creationId xmlns:a16="http://schemas.microsoft.com/office/drawing/2014/main" id="{82119206-AA06-48B9-809A-3AD7BDCC1420}"/>
               </a:ext>
             </a:extLst>
           </p:cNvPr>
@@ -16753,7 +17935,7 @@
           <p:cNvPr id="22" name="">
             <a:extLst xmlns:a="http://schemas.openxmlformats.org/drawingml/2006/main">
               <a:ext uri="{FF2B5EF4-FFF2-40B4-BE49-F238E27FC236}">
-                <a16:creationId xmlns:a16="http://schemas.microsoft.com/office/drawing/2014/main" id="{27D54833-0301-4EBA-ACA2-53BD656E01CD}"/>
+                <a16:creationId xmlns:a16="http://schemas.microsoft.com/office/drawing/2014/main" id="{08F67F5E-4BA2-40F2-AD4F-6B4F510DD630}"/>
               </a:ext>
             </a:extLst>
           </p:cNvPr>
@@ -16811,7 +17993,7 @@
           <p:cNvPr id="23" name="">
             <a:extLst xmlns:a="http://schemas.openxmlformats.org/drawingml/2006/main">
               <a:ext uri="{FF2B5EF4-FFF2-40B4-BE49-F238E27FC236}">
-                <a16:creationId xmlns:a16="http://schemas.microsoft.com/office/drawing/2014/main" id="{2E97FCDA-78E5-4DFE-9971-4F827AA0D5BC}"/>
+                <a16:creationId xmlns:a16="http://schemas.microsoft.com/office/drawing/2014/main" id="{A25CECDE-F02D-46C7-97D6-95B27C389BF4}"/>
               </a:ext>
             </a:extLst>
           </p:cNvPr>
@@ -16844,7 +18026,7 @@
           <p:cNvPr id="24" name="">
             <a:extLst xmlns:a="http://schemas.openxmlformats.org/drawingml/2006/main">
               <a:ext uri="{FF2B5EF4-FFF2-40B4-BE49-F238E27FC236}">
-                <a16:creationId xmlns:a16="http://schemas.microsoft.com/office/drawing/2014/main" id="{AD080735-4E21-4CC7-ABE4-13B9E464F411}"/>
+                <a16:creationId xmlns:a16="http://schemas.microsoft.com/office/drawing/2014/main" id="{A53E6B96-E88E-49D2-9C37-FB6FFC19352A}"/>
               </a:ext>
             </a:extLst>
           </p:cNvPr>
@@ -16902,7 +18084,7 @@
           <p:cNvPr id="25" name="">
             <a:extLst xmlns:a="http://schemas.openxmlformats.org/drawingml/2006/main">
               <a:ext uri="{FF2B5EF4-FFF2-40B4-BE49-F238E27FC236}">
-                <a16:creationId xmlns:a16="http://schemas.microsoft.com/office/drawing/2014/main" id="{A2A7E029-311C-492F-AA3A-F56A5522F699}"/>
+                <a16:creationId xmlns:a16="http://schemas.microsoft.com/office/drawing/2014/main" id="{86CD37EA-29AF-401D-A865-AA487B808B60}"/>
               </a:ext>
             </a:extLst>
           </p:cNvPr>
@@ -16958,7 +18140,7 @@
     </p:spTree>
     <p:extLst>
       <p:ext uri="{BB962C8B-B14F-4D97-AF65-F5344CB8AC3E}">
-        <p14:creationId xmlns:p14="http://schemas.microsoft.com/office/powerpoint/2010/main" val="1307868205"/>
+        <p14:creationId xmlns:p14="http://schemas.microsoft.com/office/powerpoint/2010/main" val="1638577949"/>
       </p:ext>
     </p:extLst>
   </p:cSld>
@@ -16989,7 +18171,7 @@
           <p:cNvPr id="23" name="">
             <a:extLst xmlns:a="http://schemas.openxmlformats.org/drawingml/2006/main">
               <a:ext uri="{FF2B5EF4-FFF2-40B4-BE49-F238E27FC236}">
-                <a16:creationId xmlns:a16="http://schemas.microsoft.com/office/drawing/2014/main" id="{47E2E8AE-B9E3-48F9-A368-AC0E1BFF645C}"/>
+                <a16:creationId xmlns:a16="http://schemas.microsoft.com/office/drawing/2014/main" id="{6B68C936-ED2C-4D9E-980C-6B2C9615B661}"/>
               </a:ext>
             </a:extLst>
           </p:cNvPr>
@@ -17047,7 +18229,7 @@
           <p:cNvPr id="2" name="">
             <a:extLst xmlns:a="http://schemas.openxmlformats.org/drawingml/2006/main">
               <a:ext uri="{FF2B5EF4-FFF2-40B4-BE49-F238E27FC236}">
-                <a16:creationId xmlns:a16="http://schemas.microsoft.com/office/drawing/2014/main" id="{D81E50F4-6929-461A-84FA-F4ED9FC53F45}"/>
+                <a16:creationId xmlns:a16="http://schemas.microsoft.com/office/drawing/2014/main" id="{C8919990-4B08-4B11-AFD9-0C59C9826D23}"/>
               </a:ext>
             </a:extLst>
           </p:cNvPr>
@@ -17128,7 +18310,7 @@
           <p:cNvPr id="3" name="">
             <a:extLst xmlns:a="http://schemas.openxmlformats.org/drawingml/2006/main">
               <a:ext uri="{FF2B5EF4-FFF2-40B4-BE49-F238E27FC236}">
-                <a16:creationId xmlns:a16="http://schemas.microsoft.com/office/drawing/2014/main" id="{36C2D23E-098D-4D59-9427-E19A3382DE0D}"/>
+                <a16:creationId xmlns:a16="http://schemas.microsoft.com/office/drawing/2014/main" id="{EBDE10E9-F56E-4C5F-BE50-91DA0219872C}"/>
               </a:ext>
             </a:extLst>
           </p:cNvPr>
@@ -17186,7 +18368,7 @@
           <p:cNvPr id="4" name="">
             <a:extLst xmlns:a="http://schemas.openxmlformats.org/drawingml/2006/main">
               <a:ext uri="{FF2B5EF4-FFF2-40B4-BE49-F238E27FC236}">
-                <a16:creationId xmlns:a16="http://schemas.microsoft.com/office/drawing/2014/main" id="{01F82323-E130-4B47-A2E1-B002B1FA4934}"/>
+                <a16:creationId xmlns:a16="http://schemas.microsoft.com/office/drawing/2014/main" id="{1B5A9D08-8378-4530-A1C1-240A25D24247}"/>
               </a:ext>
             </a:extLst>
           </p:cNvPr>
@@ -17219,7 +18401,7 @@
           <p:cNvPr id="5" name="">
             <a:extLst xmlns:a="http://schemas.openxmlformats.org/drawingml/2006/main">
               <a:ext uri="{FF2B5EF4-FFF2-40B4-BE49-F238E27FC236}">
-                <a16:creationId xmlns:a16="http://schemas.microsoft.com/office/drawing/2014/main" id="{DFE3B939-B00A-4502-8264-C46A93BBE2E0}"/>
+                <a16:creationId xmlns:a16="http://schemas.microsoft.com/office/drawing/2014/main" id="{2B96E37D-40C3-49F1-8684-4949C6FADDD5}"/>
               </a:ext>
             </a:extLst>
           </p:cNvPr>
@@ -17277,7 +18459,7 @@
           <p:cNvPr id="6" name="">
             <a:extLst xmlns:a="http://schemas.openxmlformats.org/drawingml/2006/main">
               <a:ext uri="{FF2B5EF4-FFF2-40B4-BE49-F238E27FC236}">
-                <a16:creationId xmlns:a16="http://schemas.microsoft.com/office/drawing/2014/main" id="{EBAC844B-CBD6-498F-BAD2-21B8CD7C8CA9}"/>
+                <a16:creationId xmlns:a16="http://schemas.microsoft.com/office/drawing/2014/main" id="{578EA004-8E20-4540-B4BD-BD438670F267}"/>
               </a:ext>
             </a:extLst>
           </p:cNvPr>
@@ -17335,7 +18517,7 @@
           <p:cNvPr id="7" name="">
             <a:extLst xmlns:a="http://schemas.openxmlformats.org/drawingml/2006/main">
               <a:ext uri="{FF2B5EF4-FFF2-40B4-BE49-F238E27FC236}">
-                <a16:creationId xmlns:a16="http://schemas.microsoft.com/office/drawing/2014/main" id="{A0E07883-CF85-4D3D-8B0E-2799CAEC9214}"/>
+                <a16:creationId xmlns:a16="http://schemas.microsoft.com/office/drawing/2014/main" id="{3179EB1C-C696-4BEA-A45A-7C4BE97D9A3B}"/>
               </a:ext>
             </a:extLst>
           </p:cNvPr>
@@ -17368,7 +18550,7 @@
           <p:cNvPr id="8" name="">
             <a:extLst xmlns:a="http://schemas.openxmlformats.org/drawingml/2006/main">
               <a:ext uri="{FF2B5EF4-FFF2-40B4-BE49-F238E27FC236}">
-                <a16:creationId xmlns:a16="http://schemas.microsoft.com/office/drawing/2014/main" id="{D42B316A-0AB6-4A2B-A14E-BE9425DA180E}"/>
+                <a16:creationId xmlns:a16="http://schemas.microsoft.com/office/drawing/2014/main" id="{A9297161-F14E-4527-B8D6-CEF065691861}"/>
               </a:ext>
             </a:extLst>
           </p:cNvPr>
@@ -17426,7 +18608,7 @@
           <p:cNvPr id="9" name="">
             <a:extLst xmlns:a="http://schemas.openxmlformats.org/drawingml/2006/main">
               <a:ext uri="{FF2B5EF4-FFF2-40B4-BE49-F238E27FC236}">
-                <a16:creationId xmlns:a16="http://schemas.microsoft.com/office/drawing/2014/main" id="{CC0BE7B2-88EA-4384-9A1E-43EFFA0FB7D7}"/>
+                <a16:creationId xmlns:a16="http://schemas.microsoft.com/office/drawing/2014/main" id="{57265CB8-91D4-4F5C-BD68-52F678AFCAC4}"/>
               </a:ext>
             </a:extLst>
           </p:cNvPr>
@@ -17484,7 +18666,7 @@
           <p:cNvPr id="10" name="">
             <a:extLst xmlns:a="http://schemas.openxmlformats.org/drawingml/2006/main">
               <a:ext uri="{FF2B5EF4-FFF2-40B4-BE49-F238E27FC236}">
-                <a16:creationId xmlns:a16="http://schemas.microsoft.com/office/drawing/2014/main" id="{52B85910-5D01-44A1-A333-C1CDF3B4F087}"/>
+                <a16:creationId xmlns:a16="http://schemas.microsoft.com/office/drawing/2014/main" id="{293400CB-E6C9-4F9C-A4C2-773794D8F970}"/>
               </a:ext>
             </a:extLst>
           </p:cNvPr>
@@ -17542,7 +18724,7 @@
           <p:cNvPr id="11" name="">
             <a:extLst xmlns:a="http://schemas.openxmlformats.org/drawingml/2006/main">
               <a:ext uri="{FF2B5EF4-FFF2-40B4-BE49-F238E27FC236}">
-                <a16:creationId xmlns:a16="http://schemas.microsoft.com/office/drawing/2014/main" id="{E79F2766-B69F-4465-892E-0C4C0056D09D}"/>
+                <a16:creationId xmlns:a16="http://schemas.microsoft.com/office/drawing/2014/main" id="{1E116614-D15A-4C1E-933E-CDF3B44518CA}"/>
               </a:ext>
             </a:extLst>
           </p:cNvPr>
@@ -17575,7 +18757,7 @@
           <p:cNvPr id="12" name="">
             <a:extLst xmlns:a="http://schemas.openxmlformats.org/drawingml/2006/main">
               <a:ext uri="{FF2B5EF4-FFF2-40B4-BE49-F238E27FC236}">
-                <a16:creationId xmlns:a16="http://schemas.microsoft.com/office/drawing/2014/main" id="{9B5D7D65-F782-49FE-A686-6B329FF07D0D}"/>
+                <a16:creationId xmlns:a16="http://schemas.microsoft.com/office/drawing/2014/main" id="{6612DDBA-DF2B-487D-9B97-C8446D7C937D}"/>
               </a:ext>
             </a:extLst>
           </p:cNvPr>
@@ -17633,7 +18815,7 @@
           <p:cNvPr id="13" name="">
             <a:extLst xmlns:a="http://schemas.openxmlformats.org/drawingml/2006/main">
               <a:ext uri="{FF2B5EF4-FFF2-40B4-BE49-F238E27FC236}">
-                <a16:creationId xmlns:a16="http://schemas.microsoft.com/office/drawing/2014/main" id="{4B780A22-E8CE-4221-B329-173F55A23C7C}"/>
+                <a16:creationId xmlns:a16="http://schemas.microsoft.com/office/drawing/2014/main" id="{C2D67197-3613-4031-BB67-E20844C87285}"/>
               </a:ext>
             </a:extLst>
           </p:cNvPr>
@@ -17666,7 +18848,7 @@
           <p:cNvPr id="14" name="">
             <a:extLst xmlns:a="http://schemas.openxmlformats.org/drawingml/2006/main">
               <a:ext uri="{FF2B5EF4-FFF2-40B4-BE49-F238E27FC236}">
-                <a16:creationId xmlns:a16="http://schemas.microsoft.com/office/drawing/2014/main" id="{634E5F61-588B-4D9A-886D-CF360CBE2262}"/>
+                <a16:creationId xmlns:a16="http://schemas.microsoft.com/office/drawing/2014/main" id="{C2B07103-F4F5-4B20-AE26-BD35CB91B414}"/>
               </a:ext>
             </a:extLst>
           </p:cNvPr>
@@ -17724,7 +18906,7 @@
           <p:cNvPr id="15" name="">
             <a:extLst xmlns:a="http://schemas.openxmlformats.org/drawingml/2006/main">
               <a:ext uri="{FF2B5EF4-FFF2-40B4-BE49-F238E27FC236}">
-                <a16:creationId xmlns:a16="http://schemas.microsoft.com/office/drawing/2014/main" id="{F7E97F71-F2E6-4850-992C-926AADE77DA9}"/>
+                <a16:creationId xmlns:a16="http://schemas.microsoft.com/office/drawing/2014/main" id="{E8B0DD61-2A31-4D4C-8885-0DAB08FAD7F1}"/>
               </a:ext>
             </a:extLst>
           </p:cNvPr>
@@ -17757,7 +18939,7 @@
           <p:cNvPr id="16" name="">
             <a:extLst xmlns:a="http://schemas.openxmlformats.org/drawingml/2006/main">
               <a:ext uri="{FF2B5EF4-FFF2-40B4-BE49-F238E27FC236}">
-                <a16:creationId xmlns:a16="http://schemas.microsoft.com/office/drawing/2014/main" id="{17389BEB-A1E6-4587-B026-E471B90967B4}"/>
+                <a16:creationId xmlns:a16="http://schemas.microsoft.com/office/drawing/2014/main" id="{8F1AD424-D9F0-4683-BB30-353570556B4F}"/>
               </a:ext>
             </a:extLst>
           </p:cNvPr>
@@ -17815,7 +18997,7 @@
           <p:cNvPr id="17" name="">
             <a:extLst xmlns:a="http://schemas.openxmlformats.org/drawingml/2006/main">
               <a:ext uri="{FF2B5EF4-FFF2-40B4-BE49-F238E27FC236}">
-                <a16:creationId xmlns:a16="http://schemas.microsoft.com/office/drawing/2014/main" id="{ACF9B7C3-B7F8-4330-9C55-D76254A23B3E}"/>
+                <a16:creationId xmlns:a16="http://schemas.microsoft.com/office/drawing/2014/main" id="{B3A9F6B3-B15F-4B8C-837A-11BF4456D9AA}"/>
               </a:ext>
             </a:extLst>
           </p:cNvPr>
@@ -17848,7 +19030,7 @@
           <p:cNvPr id="18" name="">
             <a:extLst xmlns:a="http://schemas.openxmlformats.org/drawingml/2006/main">
               <a:ext uri="{FF2B5EF4-FFF2-40B4-BE49-F238E27FC236}">
-                <a16:creationId xmlns:a16="http://schemas.microsoft.com/office/drawing/2014/main" id="{0C155C06-934A-4C92-8290-C300D37D6A69}"/>
+                <a16:creationId xmlns:a16="http://schemas.microsoft.com/office/drawing/2014/main" id="{E1B438ED-2625-4789-8DE6-42EFD6EAD8BE}"/>
               </a:ext>
             </a:extLst>
           </p:cNvPr>
@@ -17906,7 +19088,7 @@
           <p:cNvPr id="19" name="">
             <a:extLst xmlns:a="http://schemas.openxmlformats.org/drawingml/2006/main">
               <a:ext uri="{FF2B5EF4-FFF2-40B4-BE49-F238E27FC236}">
-                <a16:creationId xmlns:a16="http://schemas.microsoft.com/office/drawing/2014/main" id="{6094D4C6-5DCC-4C56-A787-4F5BB7FBE321}"/>
+                <a16:creationId xmlns:a16="http://schemas.microsoft.com/office/drawing/2014/main" id="{DC91AB82-AF79-483B-B42A-E164EC33CC70}"/>
               </a:ext>
             </a:extLst>
           </p:cNvPr>
@@ -17964,7 +19146,7 @@
           <p:cNvPr id="20" name="">
             <a:extLst xmlns:a="http://schemas.openxmlformats.org/drawingml/2006/main">
               <a:ext uri="{FF2B5EF4-FFF2-40B4-BE49-F238E27FC236}">
-                <a16:creationId xmlns:a16="http://schemas.microsoft.com/office/drawing/2014/main" id="{F1C40729-AC1A-4E0B-B8CD-1F5C77138F91}"/>
+                <a16:creationId xmlns:a16="http://schemas.microsoft.com/office/drawing/2014/main" id="{90DE824F-AF8D-4504-8E87-311C1EFE8595}"/>
               </a:ext>
             </a:extLst>
           </p:cNvPr>
@@ -17997,7 +19179,7 @@
           <p:cNvPr id="21" name="">
             <a:extLst xmlns:a="http://schemas.openxmlformats.org/drawingml/2006/main">
               <a:ext uri="{FF2B5EF4-FFF2-40B4-BE49-F238E27FC236}">
-                <a16:creationId xmlns:a16="http://schemas.microsoft.com/office/drawing/2014/main" id="{8AC6C63D-1070-41B5-9930-CF188AE189FE}"/>
+                <a16:creationId xmlns:a16="http://schemas.microsoft.com/office/drawing/2014/main" id="{9D7D6FF7-A2CF-40EA-9601-42ACD767CF34}"/>
               </a:ext>
             </a:extLst>
           </p:cNvPr>
@@ -18055,7 +19237,7 @@
           <p:cNvPr id="22" name="">
             <a:extLst xmlns:a="http://schemas.openxmlformats.org/drawingml/2006/main">
               <a:ext uri="{FF2B5EF4-FFF2-40B4-BE49-F238E27FC236}">
-                <a16:creationId xmlns:a16="http://schemas.microsoft.com/office/drawing/2014/main" id="{EB3E4B68-BE48-486F-B884-DE7D838CDF0C}"/>
+                <a16:creationId xmlns:a16="http://schemas.microsoft.com/office/drawing/2014/main" id="{1E9CC806-099E-4819-927B-FBDABB7BCE2B}"/>
               </a:ext>
             </a:extLst>
           </p:cNvPr>
@@ -18111,7 +19293,7 @@
     </p:spTree>
     <p:extLst>
       <p:ext uri="{BB962C8B-B14F-4D97-AF65-F5344CB8AC3E}">
-        <p14:creationId xmlns:p14="http://schemas.microsoft.com/office/powerpoint/2010/main" val="797682326"/>
+        <p14:creationId xmlns:p14="http://schemas.microsoft.com/office/powerpoint/2010/main" val="77354384"/>
       </p:ext>
     </p:extLst>
   </p:cSld>
@@ -18142,7 +19324,7 @@
           <p:cNvPr id="25" name="">
             <a:extLst xmlns:a="http://schemas.openxmlformats.org/drawingml/2006/main">
               <a:ext uri="{FF2B5EF4-FFF2-40B4-BE49-F238E27FC236}">
-                <a16:creationId xmlns:a16="http://schemas.microsoft.com/office/drawing/2014/main" id="{01B2E743-19BC-4487-BF35-790188AEF39F}"/>
+                <a16:creationId xmlns:a16="http://schemas.microsoft.com/office/drawing/2014/main" id="{A72F7547-460F-4C43-8646-0669A211221B}"/>
               </a:ext>
             </a:extLst>
           </p:cNvPr>
@@ -18200,7 +19382,7 @@
           <p:cNvPr id="2" name="">
             <a:extLst xmlns:a="http://schemas.openxmlformats.org/drawingml/2006/main">
               <a:ext uri="{FF2B5EF4-FFF2-40B4-BE49-F238E27FC236}">
-                <a16:creationId xmlns:a16="http://schemas.microsoft.com/office/drawing/2014/main" id="{63D7E388-07DD-44E0-879E-CB04DEE68201}"/>
+                <a16:creationId xmlns:a16="http://schemas.microsoft.com/office/drawing/2014/main" id="{F6FC40AE-E3E1-4F75-B6AC-C852895A45D4}"/>
               </a:ext>
             </a:extLst>
           </p:cNvPr>
@@ -18258,7 +19440,7 @@
           <p:cNvPr id="3" name="">
             <a:extLst xmlns:a="http://schemas.openxmlformats.org/drawingml/2006/main">
               <a:ext uri="{FF2B5EF4-FFF2-40B4-BE49-F238E27FC236}">
-                <a16:creationId xmlns:a16="http://schemas.microsoft.com/office/drawing/2014/main" id="{E4D0CC88-4A20-4D8F-84A0-0BED668838D7}"/>
+                <a16:creationId xmlns:a16="http://schemas.microsoft.com/office/drawing/2014/main" id="{C7098FDF-723A-4209-9965-CE606595C0D1}"/>
               </a:ext>
             </a:extLst>
           </p:cNvPr>
@@ -18291,7 +19473,7 @@
           <p:cNvPr id="4" name="">
             <a:extLst xmlns:a="http://schemas.openxmlformats.org/drawingml/2006/main">
               <a:ext uri="{FF2B5EF4-FFF2-40B4-BE49-F238E27FC236}">
-                <a16:creationId xmlns:a16="http://schemas.microsoft.com/office/drawing/2014/main" id="{7AA39C83-3D4D-406D-99A0-E4CB98D491BA}"/>
+                <a16:creationId xmlns:a16="http://schemas.microsoft.com/office/drawing/2014/main" id="{B26BCE24-2F37-4526-8B4E-0803434BECDC}"/>
               </a:ext>
             </a:extLst>
           </p:cNvPr>
@@ -18349,7 +19531,7 @@
           <p:cNvPr id="5" name="">
             <a:extLst xmlns:a="http://schemas.openxmlformats.org/drawingml/2006/main">
               <a:ext uri="{FF2B5EF4-FFF2-40B4-BE49-F238E27FC236}">
-                <a16:creationId xmlns:a16="http://schemas.microsoft.com/office/drawing/2014/main" id="{011608D7-A801-4BEC-B268-9D308CBABCCA}"/>
+                <a16:creationId xmlns:a16="http://schemas.microsoft.com/office/drawing/2014/main" id="{3A875F1D-FCD2-464A-8922-5720AAC3FB5B}"/>
               </a:ext>
             </a:extLst>
           </p:cNvPr>
@@ -18382,7 +19564,7 @@
           <p:cNvPr id="6" name="">
             <a:extLst xmlns:a="http://schemas.openxmlformats.org/drawingml/2006/main">
               <a:ext uri="{FF2B5EF4-FFF2-40B4-BE49-F238E27FC236}">
-                <a16:creationId xmlns:a16="http://schemas.microsoft.com/office/drawing/2014/main" id="{241FB990-AA1B-4FC3-86D8-12DBA25C5473}"/>
+                <a16:creationId xmlns:a16="http://schemas.microsoft.com/office/drawing/2014/main" id="{CD8A0D4B-E3AD-4623-B1C3-4635ACED7C79}"/>
               </a:ext>
             </a:extLst>
           </p:cNvPr>
@@ -18440,7 +19622,7 @@
           <p:cNvPr id="7" name="">
             <a:extLst xmlns:a="http://schemas.openxmlformats.org/drawingml/2006/main">
               <a:ext uri="{FF2B5EF4-FFF2-40B4-BE49-F238E27FC236}">
-                <a16:creationId xmlns:a16="http://schemas.microsoft.com/office/drawing/2014/main" id="{B1618128-FB5B-42BE-B50C-DB175F3482D9}"/>
+                <a16:creationId xmlns:a16="http://schemas.microsoft.com/office/drawing/2014/main" id="{76522DAB-8C3D-4618-98C0-FE89EAD229BD}"/>
               </a:ext>
             </a:extLst>
           </p:cNvPr>
@@ -18521,7 +19703,7 @@
           <p:cNvPr id="8" name="">
             <a:extLst xmlns:a="http://schemas.openxmlformats.org/drawingml/2006/main">
               <a:ext uri="{FF2B5EF4-FFF2-40B4-BE49-F238E27FC236}">
-                <a16:creationId xmlns:a16="http://schemas.microsoft.com/office/drawing/2014/main" id="{BAF247D9-8FDB-428A-8CB2-22A05A56A736}"/>
+                <a16:creationId xmlns:a16="http://schemas.microsoft.com/office/drawing/2014/main" id="{3757647D-BC25-4265-9BE2-C9C71332396C}"/>
               </a:ext>
             </a:extLst>
           </p:cNvPr>
@@ -18579,7 +19761,7 @@
           <p:cNvPr id="9" name="">
             <a:extLst xmlns:a="http://schemas.openxmlformats.org/drawingml/2006/main">
               <a:ext uri="{FF2B5EF4-FFF2-40B4-BE49-F238E27FC236}">
-                <a16:creationId xmlns:a16="http://schemas.microsoft.com/office/drawing/2014/main" id="{B3EABF88-CE1B-47AC-B53A-EF491A0E3744}"/>
+                <a16:creationId xmlns:a16="http://schemas.microsoft.com/office/drawing/2014/main" id="{F44309F1-5B62-4458-A389-A3E6FF120A91}"/>
               </a:ext>
             </a:extLst>
           </p:cNvPr>
@@ -18612,7 +19794,7 @@
           <p:cNvPr id="10" name="">
             <a:extLst xmlns:a="http://schemas.openxmlformats.org/drawingml/2006/main">
               <a:ext uri="{FF2B5EF4-FFF2-40B4-BE49-F238E27FC236}">
-                <a16:creationId xmlns:a16="http://schemas.microsoft.com/office/drawing/2014/main" id="{38F0DC9E-602E-4EC3-8DD0-F07ECDE54674}"/>
+                <a16:creationId xmlns:a16="http://schemas.microsoft.com/office/drawing/2014/main" id="{D85EC324-7135-4E9A-9889-0F3CEC221345}"/>
               </a:ext>
             </a:extLst>
           </p:cNvPr>
@@ -18670,7 +19852,7 @@
           <p:cNvPr id="11" name="">
             <a:extLst xmlns:a="http://schemas.openxmlformats.org/drawingml/2006/main">
               <a:ext uri="{FF2B5EF4-FFF2-40B4-BE49-F238E27FC236}">
-                <a16:creationId xmlns:a16="http://schemas.microsoft.com/office/drawing/2014/main" id="{6C62191C-73A6-44A0-8523-B3C40236F483}"/>
+                <a16:creationId xmlns:a16="http://schemas.microsoft.com/office/drawing/2014/main" id="{09DADB25-4E70-4BAC-BE2C-15ED6D62E70D}"/>
               </a:ext>
             </a:extLst>
           </p:cNvPr>
@@ -18751,7 +19933,7 @@
           <p:cNvPr id="12" name="">
             <a:extLst xmlns:a="http://schemas.openxmlformats.org/drawingml/2006/main">
               <a:ext uri="{FF2B5EF4-FFF2-40B4-BE49-F238E27FC236}">
-                <a16:creationId xmlns:a16="http://schemas.microsoft.com/office/drawing/2014/main" id="{9DD602D6-1939-46A3-8A12-E341718AD4AB}"/>
+                <a16:creationId xmlns:a16="http://schemas.microsoft.com/office/drawing/2014/main" id="{43CC8A8D-C3CC-4A51-9C07-12AE394AA791}"/>
               </a:ext>
             </a:extLst>
           </p:cNvPr>
@@ -18809,7 +19991,7 @@
           <p:cNvPr id="13" name="">
             <a:extLst xmlns:a="http://schemas.openxmlformats.org/drawingml/2006/main">
               <a:ext uri="{FF2B5EF4-FFF2-40B4-BE49-F238E27FC236}">
-                <a16:creationId xmlns:a16="http://schemas.microsoft.com/office/drawing/2014/main" id="{8BB35A24-D867-49B4-A31D-5DF088ACE6B8}"/>
+                <a16:creationId xmlns:a16="http://schemas.microsoft.com/office/drawing/2014/main" id="{C60807AC-2A36-4BD2-9ADE-83EE8D63CA8A}"/>
               </a:ext>
             </a:extLst>
           </p:cNvPr>
@@ -18842,7 +20024,7 @@
           <p:cNvPr id="14" name="">
             <a:extLst xmlns:a="http://schemas.openxmlformats.org/drawingml/2006/main">
               <a:ext uri="{FF2B5EF4-FFF2-40B4-BE49-F238E27FC236}">
-                <a16:creationId xmlns:a16="http://schemas.microsoft.com/office/drawing/2014/main" id="{F3337691-8BFA-4BF5-A7F2-F0D72A99C7AB}"/>
+                <a16:creationId xmlns:a16="http://schemas.microsoft.com/office/drawing/2014/main" id="{4C52B8E7-5DCB-4FDA-96E3-C851D3793668}"/>
               </a:ext>
             </a:extLst>
           </p:cNvPr>
@@ -18900,7 +20082,7 @@
           <p:cNvPr id="15" name="">
             <a:extLst xmlns:a="http://schemas.openxmlformats.org/drawingml/2006/main">
               <a:ext uri="{FF2B5EF4-FFF2-40B4-BE49-F238E27FC236}">
-                <a16:creationId xmlns:a16="http://schemas.microsoft.com/office/drawing/2014/main" id="{3036BEA8-2B74-4A9C-A7AF-AA5FDBC358AE}"/>
+                <a16:creationId xmlns:a16="http://schemas.microsoft.com/office/drawing/2014/main" id="{0AD62234-C292-4E9D-954C-1FCF0F4ACF69}"/>
               </a:ext>
             </a:extLst>
           </p:cNvPr>
@@ -18981,7 +20163,7 @@
           <p:cNvPr id="16" name="">
             <a:extLst xmlns:a="http://schemas.openxmlformats.org/drawingml/2006/main">
               <a:ext uri="{FF2B5EF4-FFF2-40B4-BE49-F238E27FC236}">
-                <a16:creationId xmlns:a16="http://schemas.microsoft.com/office/drawing/2014/main" id="{7121A729-A8D8-41A8-AE37-901536D3E930}"/>
+                <a16:creationId xmlns:a16="http://schemas.microsoft.com/office/drawing/2014/main" id="{78DC5502-6591-4E3F-8183-E38451AC6DE6}"/>
               </a:ext>
             </a:extLst>
           </p:cNvPr>
@@ -19039,7 +20221,7 @@
           <p:cNvPr id="17" name="">
             <a:extLst xmlns:a="http://schemas.openxmlformats.org/drawingml/2006/main">
               <a:ext uri="{FF2B5EF4-FFF2-40B4-BE49-F238E27FC236}">
-                <a16:creationId xmlns:a16="http://schemas.microsoft.com/office/drawing/2014/main" id="{8DFB710A-E0B2-4F2E-A0C1-D8268958AEC2}"/>
+                <a16:creationId xmlns:a16="http://schemas.microsoft.com/office/drawing/2014/main" id="{85D8F817-6A6E-4AFD-BEAA-563C08CA2503}"/>
               </a:ext>
             </a:extLst>
           </p:cNvPr>
@@ -19072,7 +20254,7 @@
           <p:cNvPr id="18" name="">
             <a:extLst xmlns:a="http://schemas.openxmlformats.org/drawingml/2006/main">
               <a:ext uri="{FF2B5EF4-FFF2-40B4-BE49-F238E27FC236}">
-                <a16:creationId xmlns:a16="http://schemas.microsoft.com/office/drawing/2014/main" id="{A9D5AC63-0E46-4756-B461-300C01BB03F4}"/>
+                <a16:creationId xmlns:a16="http://schemas.microsoft.com/office/drawing/2014/main" id="{29CF8C91-623A-4923-9B07-D05595EEEA0B}"/>
               </a:ext>
             </a:extLst>
           </p:cNvPr>
@@ -19130,7 +20312,7 @@
           <p:cNvPr id="19" name="">
             <a:extLst xmlns:a="http://schemas.openxmlformats.org/drawingml/2006/main">
               <a:ext uri="{FF2B5EF4-FFF2-40B4-BE49-F238E27FC236}">
-                <a16:creationId xmlns:a16="http://schemas.microsoft.com/office/drawing/2014/main" id="{17F53995-CC1C-4663-B4D6-4F5B5CA5F6DC}"/>
+                <a16:creationId xmlns:a16="http://schemas.microsoft.com/office/drawing/2014/main" id="{B124C3F1-D1F5-47A8-BC27-E14DE7606594}"/>
               </a:ext>
             </a:extLst>
           </p:cNvPr>
@@ -19211,7 +20393,7 @@
           <p:cNvPr id="20" name="">
             <a:extLst xmlns:a="http://schemas.openxmlformats.org/drawingml/2006/main">
               <a:ext uri="{FF2B5EF4-FFF2-40B4-BE49-F238E27FC236}">
-                <a16:creationId xmlns:a16="http://schemas.microsoft.com/office/drawing/2014/main" id="{45564476-0AD0-4AC8-A05A-3C76363C9AB9}"/>
+                <a16:creationId xmlns:a16="http://schemas.microsoft.com/office/drawing/2014/main" id="{F17BB746-6515-4094-A7A1-258B809AA47F}"/>
               </a:ext>
             </a:extLst>
           </p:cNvPr>
@@ -19269,7 +20451,7 @@
           <p:cNvPr id="21" name="">
             <a:extLst xmlns:a="http://schemas.openxmlformats.org/drawingml/2006/main">
               <a:ext uri="{FF2B5EF4-FFF2-40B4-BE49-F238E27FC236}">
-                <a16:creationId xmlns:a16="http://schemas.microsoft.com/office/drawing/2014/main" id="{42AA773C-671C-4C19-AFA0-09BE826F507A}"/>
+                <a16:creationId xmlns:a16="http://schemas.microsoft.com/office/drawing/2014/main" id="{F5526A23-03F6-4F95-968B-B68827E14F6D}"/>
               </a:ext>
             </a:extLst>
           </p:cNvPr>
@@ -19327,7 +20509,7 @@
           <p:cNvPr id="22" name="">
             <a:extLst xmlns:a="http://schemas.openxmlformats.org/drawingml/2006/main">
               <a:ext uri="{FF2B5EF4-FFF2-40B4-BE49-F238E27FC236}">
-                <a16:creationId xmlns:a16="http://schemas.microsoft.com/office/drawing/2014/main" id="{04650243-066B-4C9D-BD18-5E31753DE646}"/>
+                <a16:creationId xmlns:a16="http://schemas.microsoft.com/office/drawing/2014/main" id="{8A71FCB7-5CAD-459D-9753-0160A262C4A4}"/>
               </a:ext>
             </a:extLst>
           </p:cNvPr>
@@ -19360,7 +20542,7 @@
           <p:cNvPr id="23" name="">
             <a:extLst xmlns:a="http://schemas.openxmlformats.org/drawingml/2006/main">
               <a:ext uri="{FF2B5EF4-FFF2-40B4-BE49-F238E27FC236}">
-                <a16:creationId xmlns:a16="http://schemas.microsoft.com/office/drawing/2014/main" id="{92D939F9-8B24-4EBA-A411-3C69D0F9EE6C}"/>
+                <a16:creationId xmlns:a16="http://schemas.microsoft.com/office/drawing/2014/main" id="{FD995446-9B22-4EE2-8D61-C4CBF163DEA0}"/>
               </a:ext>
             </a:extLst>
           </p:cNvPr>
@@ -19418,7 +20600,7 @@
           <p:cNvPr id="24" name="">
             <a:extLst xmlns:a="http://schemas.openxmlformats.org/drawingml/2006/main">
               <a:ext uri="{FF2B5EF4-FFF2-40B4-BE49-F238E27FC236}">
-                <a16:creationId xmlns:a16="http://schemas.microsoft.com/office/drawing/2014/main" id="{11067AD5-224C-4C89-92C4-27A204ED7A7F}"/>
+                <a16:creationId xmlns:a16="http://schemas.microsoft.com/office/drawing/2014/main" id="{2D4C96B4-0B84-419C-866B-0BDB16408806}"/>
               </a:ext>
             </a:extLst>
           </p:cNvPr>
@@ -19474,7 +20656,7 @@
     </p:spTree>
     <p:extLst>
       <p:ext uri="{BB962C8B-B14F-4D97-AF65-F5344CB8AC3E}">
-        <p14:creationId xmlns:p14="http://schemas.microsoft.com/office/powerpoint/2010/main" val="463276019"/>
+        <p14:creationId xmlns:p14="http://schemas.microsoft.com/office/powerpoint/2010/main" val="124142532"/>
       </p:ext>
     </p:extLst>
   </p:cSld>
@@ -19505,7 +20687,7 @@
           <p:cNvPr id="48" name="">
             <a:extLst xmlns:a="http://schemas.openxmlformats.org/drawingml/2006/main">
               <a:ext uri="{FF2B5EF4-FFF2-40B4-BE49-F238E27FC236}">
-                <a16:creationId xmlns:a16="http://schemas.microsoft.com/office/drawing/2014/main" id="{1957F0D5-4ECF-471D-A3C8-134D6EA8DC45}"/>
+                <a16:creationId xmlns:a16="http://schemas.microsoft.com/office/drawing/2014/main" id="{E1D0110D-F9A4-444B-B903-7D36B739B34D}"/>
               </a:ext>
             </a:extLst>
           </p:cNvPr>
@@ -19563,7 +20745,7 @@
           <p:cNvPr id="2" name="">
             <a:extLst xmlns:a="http://schemas.openxmlformats.org/drawingml/2006/main">
               <a:ext uri="{FF2B5EF4-FFF2-40B4-BE49-F238E27FC236}">
-                <a16:creationId xmlns:a16="http://schemas.microsoft.com/office/drawing/2014/main" id="{40654AD8-56A7-42E3-9FAA-B62DBBEC14C4}"/>
+                <a16:creationId xmlns:a16="http://schemas.microsoft.com/office/drawing/2014/main" id="{F41832F5-2F4D-4283-9846-BAF49D6DB79A}"/>
               </a:ext>
             </a:extLst>
           </p:cNvPr>
@@ -19621,7 +20803,7 @@
           <p:cNvPr id="3" name="">
             <a:extLst xmlns:a="http://schemas.openxmlformats.org/drawingml/2006/main">
               <a:ext uri="{FF2B5EF4-FFF2-40B4-BE49-F238E27FC236}">
-                <a16:creationId xmlns:a16="http://schemas.microsoft.com/office/drawing/2014/main" id="{60E09BD7-26E4-4537-BE4E-D2A3B348D0E8}"/>
+                <a16:creationId xmlns:a16="http://schemas.microsoft.com/office/drawing/2014/main" id="{5EC854BF-4F55-418F-BF2D-E1EAAFAA90B8}"/>
               </a:ext>
             </a:extLst>
           </p:cNvPr>
@@ -19654,7 +20836,7 @@
           <p:cNvPr id="4" name="">
             <a:extLst xmlns:a="http://schemas.openxmlformats.org/drawingml/2006/main">
               <a:ext uri="{FF2B5EF4-FFF2-40B4-BE49-F238E27FC236}">
-                <a16:creationId xmlns:a16="http://schemas.microsoft.com/office/drawing/2014/main" id="{E6B43109-326E-466B-835B-69A95CE0E6F4}"/>
+                <a16:creationId xmlns:a16="http://schemas.microsoft.com/office/drawing/2014/main" id="{91CAAD6A-5C7D-4AB9-9084-E7F265DDC615}"/>
               </a:ext>
             </a:extLst>
           </p:cNvPr>
@@ -19712,7 +20894,7 @@
           <p:cNvPr id="5" name="">
             <a:extLst xmlns:a="http://schemas.openxmlformats.org/drawingml/2006/main">
               <a:ext uri="{FF2B5EF4-FFF2-40B4-BE49-F238E27FC236}">
-                <a16:creationId xmlns:a16="http://schemas.microsoft.com/office/drawing/2014/main" id="{EE805529-31FC-4C47-BDC5-ACD6F68C9238}"/>
+                <a16:creationId xmlns:a16="http://schemas.microsoft.com/office/drawing/2014/main" id="{755E6228-6AC4-4FBC-B005-4DCC6B9C9BD3}"/>
               </a:ext>
             </a:extLst>
           </p:cNvPr>
@@ -19745,7 +20927,7 @@
           <p:cNvPr id="6" name="">
             <a:extLst xmlns:a="http://schemas.openxmlformats.org/drawingml/2006/main">
               <a:ext uri="{FF2B5EF4-FFF2-40B4-BE49-F238E27FC236}">
-                <a16:creationId xmlns:a16="http://schemas.microsoft.com/office/drawing/2014/main" id="{35E7B030-6B56-43F7-99AA-1BB6F7280362}"/>
+                <a16:creationId xmlns:a16="http://schemas.microsoft.com/office/drawing/2014/main" id="{FA10B05A-AE0A-4D1D-9334-A334015DC202}"/>
               </a:ext>
             </a:extLst>
           </p:cNvPr>
@@ -19803,7 +20985,7 @@
           <p:cNvPr id="7" name="">
             <a:extLst xmlns:a="http://schemas.openxmlformats.org/drawingml/2006/main">
               <a:ext uri="{FF2B5EF4-FFF2-40B4-BE49-F238E27FC236}">
-                <a16:creationId xmlns:a16="http://schemas.microsoft.com/office/drawing/2014/main" id="{60288782-AE50-4C3D-80D6-5DC1380AC31E}"/>
+                <a16:creationId xmlns:a16="http://schemas.microsoft.com/office/drawing/2014/main" id="{B52B1302-3EB3-4B2B-867E-73731F8AD2C6}"/>
               </a:ext>
             </a:extLst>
           </p:cNvPr>
@@ -19836,7 +21018,7 @@
           <p:cNvPr id="8" name="">
             <a:extLst xmlns:a="http://schemas.openxmlformats.org/drawingml/2006/main">
               <a:ext uri="{FF2B5EF4-FFF2-40B4-BE49-F238E27FC236}">
-                <a16:creationId xmlns:a16="http://schemas.microsoft.com/office/drawing/2014/main" id="{6C13864C-F9BD-4C75-93CC-B5E02B5B4D9D}"/>
+                <a16:creationId xmlns:a16="http://schemas.microsoft.com/office/drawing/2014/main" id="{0402BBB5-3DDD-4B2A-A897-70AC55D586C5}"/>
               </a:ext>
             </a:extLst>
           </p:cNvPr>
@@ -19894,7 +21076,7 @@
           <p:cNvPr id="9" name="">
             <a:extLst xmlns:a="http://schemas.openxmlformats.org/drawingml/2006/main">
               <a:ext uri="{FF2B5EF4-FFF2-40B4-BE49-F238E27FC236}">
-                <a16:creationId xmlns:a16="http://schemas.microsoft.com/office/drawing/2014/main" id="{128E48AD-AEDE-480A-B4DA-DA2A28E684CE}"/>
+                <a16:creationId xmlns:a16="http://schemas.microsoft.com/office/drawing/2014/main" id="{1AECE332-8090-4804-A5A5-5E9DE1E5EDE6}"/>
               </a:ext>
             </a:extLst>
           </p:cNvPr>
@@ -19927,7 +21109,7 @@
           <p:cNvPr id="10" name="">
             <a:extLst xmlns:a="http://schemas.openxmlformats.org/drawingml/2006/main">
               <a:ext uri="{FF2B5EF4-FFF2-40B4-BE49-F238E27FC236}">
-                <a16:creationId xmlns:a16="http://schemas.microsoft.com/office/drawing/2014/main" id="{848F7257-2548-4675-BA97-C7E5CC7C1026}"/>
+                <a16:creationId xmlns:a16="http://schemas.microsoft.com/office/drawing/2014/main" id="{F41D6722-2BFA-40EB-B4D3-23FB5DC1F962}"/>
               </a:ext>
             </a:extLst>
           </p:cNvPr>
@@ -19985,7 +21167,7 @@
           <p:cNvPr id="11" name="">
             <a:extLst xmlns:a="http://schemas.openxmlformats.org/drawingml/2006/main">
               <a:ext uri="{FF2B5EF4-FFF2-40B4-BE49-F238E27FC236}">
-                <a16:creationId xmlns:a16="http://schemas.microsoft.com/office/drawing/2014/main" id="{F1F76242-82CA-4865-833A-EA90F9977F61}"/>
+                <a16:creationId xmlns:a16="http://schemas.microsoft.com/office/drawing/2014/main" id="{56354805-019D-48DE-BD49-EDF930F62662}"/>
               </a:ext>
             </a:extLst>
           </p:cNvPr>
@@ -20018,7 +21200,7 @@
           <p:cNvPr id="12" name="">
             <a:extLst xmlns:a="http://schemas.openxmlformats.org/drawingml/2006/main">
               <a:ext uri="{FF2B5EF4-FFF2-40B4-BE49-F238E27FC236}">
-                <a16:creationId xmlns:a16="http://schemas.microsoft.com/office/drawing/2014/main" id="{5CEF89A6-0CE6-4990-B97C-74C87F34ED75}"/>
+                <a16:creationId xmlns:a16="http://schemas.microsoft.com/office/drawing/2014/main" id="{55E39518-3B1C-4E7D-B802-631181E866A8}"/>
               </a:ext>
             </a:extLst>
           </p:cNvPr>
@@ -20076,7 +21258,7 @@
           <p:cNvPr id="13" name="">
             <a:extLst xmlns:a="http://schemas.openxmlformats.org/drawingml/2006/main">
               <a:ext uri="{FF2B5EF4-FFF2-40B4-BE49-F238E27FC236}">
-                <a16:creationId xmlns:a16="http://schemas.microsoft.com/office/drawing/2014/main" id="{0BB3F73C-0A27-43A4-AE76-D91F2534C1F9}"/>
+                <a16:creationId xmlns:a16="http://schemas.microsoft.com/office/drawing/2014/main" id="{C805EC76-DFC1-4792-A751-2433AF79B1A7}"/>
               </a:ext>
             </a:extLst>
           </p:cNvPr>
@@ -20109,7 +21291,7 @@
           <p:cNvPr id="14" name="">
             <a:extLst xmlns:a="http://schemas.openxmlformats.org/drawingml/2006/main">
               <a:ext uri="{FF2B5EF4-FFF2-40B4-BE49-F238E27FC236}">
-                <a16:creationId xmlns:a16="http://schemas.microsoft.com/office/drawing/2014/main" id="{F67F7F45-414B-4358-91FA-BAAE43EFB59B}"/>
+                <a16:creationId xmlns:a16="http://schemas.microsoft.com/office/drawing/2014/main" id="{A4E9081F-CD3F-4F26-933A-7F008FB086A1}"/>
               </a:ext>
             </a:extLst>
           </p:cNvPr>
@@ -20167,7 +21349,7 @@
           <p:cNvPr id="15" name="">
             <a:extLst xmlns:a="http://schemas.openxmlformats.org/drawingml/2006/main">
               <a:ext uri="{FF2B5EF4-FFF2-40B4-BE49-F238E27FC236}">
-                <a16:creationId xmlns:a16="http://schemas.microsoft.com/office/drawing/2014/main" id="{619737B9-E09C-448E-B406-B5A26DDA620E}"/>
+                <a16:creationId xmlns:a16="http://schemas.microsoft.com/office/drawing/2014/main" id="{C53C8E4E-238A-404B-AD25-3020F4144A84}"/>
               </a:ext>
             </a:extLst>
           </p:cNvPr>
@@ -20200,7 +21382,7 @@
           <p:cNvPr id="16" name="">
             <a:extLst xmlns:a="http://schemas.openxmlformats.org/drawingml/2006/main">
               <a:ext uri="{FF2B5EF4-FFF2-40B4-BE49-F238E27FC236}">
-                <a16:creationId xmlns:a16="http://schemas.microsoft.com/office/drawing/2014/main" id="{F1A0C749-F4F8-4496-9C72-6ADFA78A0177}"/>
+                <a16:creationId xmlns:a16="http://schemas.microsoft.com/office/drawing/2014/main" id="{D5AD2A5C-8C78-4357-AEBD-B3182109F535}"/>
               </a:ext>
             </a:extLst>
           </p:cNvPr>
@@ -20258,7 +21440,7 @@
           <p:cNvPr id="17" name="">
             <a:extLst xmlns:a="http://schemas.openxmlformats.org/drawingml/2006/main">
               <a:ext uri="{FF2B5EF4-FFF2-40B4-BE49-F238E27FC236}">
-                <a16:creationId xmlns:a16="http://schemas.microsoft.com/office/drawing/2014/main" id="{B36F32ED-264B-43E5-88F9-BC053A3CED23}"/>
+                <a16:creationId xmlns:a16="http://schemas.microsoft.com/office/drawing/2014/main" id="{6FAADF4C-488B-4DB0-9BE2-BC8E13118410}"/>
               </a:ext>
             </a:extLst>
           </p:cNvPr>
@@ -20291,7 +21473,7 @@
           <p:cNvPr id="18" name="">
             <a:extLst xmlns:a="http://schemas.openxmlformats.org/drawingml/2006/main">
               <a:ext uri="{FF2B5EF4-FFF2-40B4-BE49-F238E27FC236}">
-                <a16:creationId xmlns:a16="http://schemas.microsoft.com/office/drawing/2014/main" id="{64AF3CFE-EB92-43F5-A440-772C2CF6481E}"/>
+                <a16:creationId xmlns:a16="http://schemas.microsoft.com/office/drawing/2014/main" id="{D7A2B53A-013D-4E01-B062-9AE75A429EEE}"/>
               </a:ext>
             </a:extLst>
           </p:cNvPr>
@@ -20349,7 +21531,7 @@
           <p:cNvPr id="19" name="">
             <a:extLst xmlns:a="http://schemas.openxmlformats.org/drawingml/2006/main">
               <a:ext uri="{FF2B5EF4-FFF2-40B4-BE49-F238E27FC236}">
-                <a16:creationId xmlns:a16="http://schemas.microsoft.com/office/drawing/2014/main" id="{A3D1F31F-840D-4DBB-939C-CC32CAE20795}"/>
+                <a16:creationId xmlns:a16="http://schemas.microsoft.com/office/drawing/2014/main" id="{85A4DE5C-3919-4841-9BAD-1A04AB183FEC}"/>
               </a:ext>
             </a:extLst>
           </p:cNvPr>
@@ -20382,7 +21564,7 @@
           <p:cNvPr id="20" name="">
             <a:extLst xmlns:a="http://schemas.openxmlformats.org/drawingml/2006/main">
               <a:ext uri="{FF2B5EF4-FFF2-40B4-BE49-F238E27FC236}">
-                <a16:creationId xmlns:a16="http://schemas.microsoft.com/office/drawing/2014/main" id="{BE5B3ADD-C1AF-4B3D-9384-C573F0827EDF}"/>
+                <a16:creationId xmlns:a16="http://schemas.microsoft.com/office/drawing/2014/main" id="{7491EBAC-C0AD-45F2-A6A0-0EAEFF0DACBE}"/>
               </a:ext>
             </a:extLst>
           </p:cNvPr>
@@ -20440,7 +21622,7 @@
           <p:cNvPr id="21" name="">
             <a:extLst xmlns:a="http://schemas.openxmlformats.org/drawingml/2006/main">
               <a:ext uri="{FF2B5EF4-FFF2-40B4-BE49-F238E27FC236}">
-                <a16:creationId xmlns:a16="http://schemas.microsoft.com/office/drawing/2014/main" id="{B65B3EDD-922C-4262-8AC3-27EE4C034656}"/>
+                <a16:creationId xmlns:a16="http://schemas.microsoft.com/office/drawing/2014/main" id="{B1D77642-7268-4D0F-A90D-78079C84C416}"/>
               </a:ext>
             </a:extLst>
           </p:cNvPr>
@@ -20473,7 +21655,7 @@
           <p:cNvPr id="22" name="">
             <a:extLst xmlns:a="http://schemas.openxmlformats.org/drawingml/2006/main">
               <a:ext uri="{FF2B5EF4-FFF2-40B4-BE49-F238E27FC236}">
-                <a16:creationId xmlns:a16="http://schemas.microsoft.com/office/drawing/2014/main" id="{AE4F4282-87A5-420B-ACC8-34DCACB33625}"/>
+                <a16:creationId xmlns:a16="http://schemas.microsoft.com/office/drawing/2014/main" id="{5BD6DE51-F41F-4AD3-A713-BB76C4E464FC}"/>
               </a:ext>
             </a:extLst>
           </p:cNvPr>
@@ -20531,7 +21713,7 @@
           <p:cNvPr id="23" name="">
             <a:extLst xmlns:a="http://schemas.openxmlformats.org/drawingml/2006/main">
               <a:ext uri="{FF2B5EF4-FFF2-40B4-BE49-F238E27FC236}">
-                <a16:creationId xmlns:a16="http://schemas.microsoft.com/office/drawing/2014/main" id="{AB7E4CB8-7E17-405E-9E99-01B5471BE77A}"/>
+                <a16:creationId xmlns:a16="http://schemas.microsoft.com/office/drawing/2014/main" id="{1BB49C4D-2E36-4166-925B-DA988D440D5E}"/>
               </a:ext>
             </a:extLst>
           </p:cNvPr>
@@ -20564,7 +21746,7 @@
           <p:cNvPr id="24" name="">
             <a:extLst xmlns:a="http://schemas.openxmlformats.org/drawingml/2006/main">
               <a:ext uri="{FF2B5EF4-FFF2-40B4-BE49-F238E27FC236}">
-                <a16:creationId xmlns:a16="http://schemas.microsoft.com/office/drawing/2014/main" id="{90B432B3-F286-4E10-8461-D6C9828DC2B3}"/>
+                <a16:creationId xmlns:a16="http://schemas.microsoft.com/office/drawing/2014/main" id="{E330B6F7-FB18-4B77-826B-D9B8805D49C5}"/>
               </a:ext>
             </a:extLst>
           </p:cNvPr>
@@ -20622,7 +21804,7 @@
           <p:cNvPr id="25" name="">
             <a:extLst xmlns:a="http://schemas.openxmlformats.org/drawingml/2006/main">
               <a:ext uri="{FF2B5EF4-FFF2-40B4-BE49-F238E27FC236}">
-                <a16:creationId xmlns:a16="http://schemas.microsoft.com/office/drawing/2014/main" id="{8C322D32-6641-489E-8465-AA73C500D20C}"/>
+                <a16:creationId xmlns:a16="http://schemas.microsoft.com/office/drawing/2014/main" id="{044E420D-41AB-4647-AC91-07F3B0780BB5}"/>
               </a:ext>
             </a:extLst>
           </p:cNvPr>
@@ -20655,7 +21837,7 @@
           <p:cNvPr id="26" name="">
             <a:extLst xmlns:a="http://schemas.openxmlformats.org/drawingml/2006/main">
               <a:ext uri="{FF2B5EF4-FFF2-40B4-BE49-F238E27FC236}">
-                <a16:creationId xmlns:a16="http://schemas.microsoft.com/office/drawing/2014/main" id="{04F828E3-DEB4-46AD-972A-D7E63A89D124}"/>
+                <a16:creationId xmlns:a16="http://schemas.microsoft.com/office/drawing/2014/main" id="{02A084A0-E257-47ED-BB27-0C4D4AE0990A}"/>
               </a:ext>
             </a:extLst>
           </p:cNvPr>
@@ -20713,7 +21895,7 @@
           <p:cNvPr id="27" name="">
             <a:extLst xmlns:a="http://schemas.openxmlformats.org/drawingml/2006/main">
               <a:ext uri="{FF2B5EF4-FFF2-40B4-BE49-F238E27FC236}">
-                <a16:creationId xmlns:a16="http://schemas.microsoft.com/office/drawing/2014/main" id="{8156494C-41A4-46CD-B2D7-D00ED84C3751}"/>
+                <a16:creationId xmlns:a16="http://schemas.microsoft.com/office/drawing/2014/main" id="{E9562C6F-E026-4DCE-AFF8-9BA1630654F1}"/>
               </a:ext>
             </a:extLst>
           </p:cNvPr>
@@ -20746,7 +21928,7 @@
           <p:cNvPr id="28" name="">
             <a:extLst xmlns:a="http://schemas.openxmlformats.org/drawingml/2006/main">
               <a:ext uri="{FF2B5EF4-FFF2-40B4-BE49-F238E27FC236}">
-                <a16:creationId xmlns:a16="http://schemas.microsoft.com/office/drawing/2014/main" id="{D7C3FDDA-D146-49E3-BA4B-428E6176B7E9}"/>
+                <a16:creationId xmlns:a16="http://schemas.microsoft.com/office/drawing/2014/main" id="{26D76E7F-38EB-40E3-AEF8-77A90B670709}"/>
               </a:ext>
             </a:extLst>
           </p:cNvPr>
@@ -20804,7 +21986,7 @@
           <p:cNvPr id="29" name="">
             <a:extLst xmlns:a="http://schemas.openxmlformats.org/drawingml/2006/main">
               <a:ext uri="{FF2B5EF4-FFF2-40B4-BE49-F238E27FC236}">
-                <a16:creationId xmlns:a16="http://schemas.microsoft.com/office/drawing/2014/main" id="{44D2FACD-FED8-4B7E-AF4F-F6708959677E}"/>
+                <a16:creationId xmlns:a16="http://schemas.microsoft.com/office/drawing/2014/main" id="{8C889654-D4F6-43BD-9DE4-E4ECFF1F399B}"/>
               </a:ext>
             </a:extLst>
           </p:cNvPr>
@@ -20837,7 +22019,7 @@
           <p:cNvPr id="30" name="">
             <a:extLst xmlns:a="http://schemas.openxmlformats.org/drawingml/2006/main">
               <a:ext uri="{FF2B5EF4-FFF2-40B4-BE49-F238E27FC236}">
-                <a16:creationId xmlns:a16="http://schemas.microsoft.com/office/drawing/2014/main" id="{095E9943-89D6-4EC2-8BBE-4DFA3F7DB752}"/>
+                <a16:creationId xmlns:a16="http://schemas.microsoft.com/office/drawing/2014/main" id="{CC30ED22-B16C-427A-9425-06EF5CCDB1AC}"/>
               </a:ext>
             </a:extLst>
           </p:cNvPr>
@@ -20895,7 +22077,7 @@
           <p:cNvPr id="31" name="">
             <a:extLst xmlns:a="http://schemas.openxmlformats.org/drawingml/2006/main">
               <a:ext uri="{FF2B5EF4-FFF2-40B4-BE49-F238E27FC236}">
-                <a16:creationId xmlns:a16="http://schemas.microsoft.com/office/drawing/2014/main" id="{8F095F34-9456-431E-97EF-74BE12965B72}"/>
+                <a16:creationId xmlns:a16="http://schemas.microsoft.com/office/drawing/2014/main" id="{0EA49C65-F1B2-4D93-BBA5-5ED379CE5B4C}"/>
               </a:ext>
             </a:extLst>
           </p:cNvPr>
@@ -20928,7 +22110,7 @@
           <p:cNvPr id="32" name="">
             <a:extLst xmlns:a="http://schemas.openxmlformats.org/drawingml/2006/main">
               <a:ext uri="{FF2B5EF4-FFF2-40B4-BE49-F238E27FC236}">
-                <a16:creationId xmlns:a16="http://schemas.microsoft.com/office/drawing/2014/main" id="{B9C59752-9C92-4176-87A9-585A55AD8313}"/>
+                <a16:creationId xmlns:a16="http://schemas.microsoft.com/office/drawing/2014/main" id="{96673C86-288C-4EA0-9CEB-E72EDCA80709}"/>
               </a:ext>
             </a:extLst>
           </p:cNvPr>
@@ -20986,7 +22168,7 @@
           <p:cNvPr id="33" name="">
             <a:extLst xmlns:a="http://schemas.openxmlformats.org/drawingml/2006/main">
               <a:ext uri="{FF2B5EF4-FFF2-40B4-BE49-F238E27FC236}">
-                <a16:creationId xmlns:a16="http://schemas.microsoft.com/office/drawing/2014/main" id="{D9DB47DA-7D2B-429D-87E5-F272E860C32B}"/>
+                <a16:creationId xmlns:a16="http://schemas.microsoft.com/office/drawing/2014/main" id="{EB1CCBDC-1ADB-429F-A288-9C80C1A93735}"/>
               </a:ext>
             </a:extLst>
           </p:cNvPr>
@@ -21019,7 +22201,7 @@
           <p:cNvPr id="34" name="">
             <a:extLst xmlns:a="http://schemas.openxmlformats.org/drawingml/2006/main">
               <a:ext uri="{FF2B5EF4-FFF2-40B4-BE49-F238E27FC236}">
-                <a16:creationId xmlns:a16="http://schemas.microsoft.com/office/drawing/2014/main" id="{F85E0E33-0ACF-40E1-920D-2E3C78605BF5}"/>
+                <a16:creationId xmlns:a16="http://schemas.microsoft.com/office/drawing/2014/main" id="{A6545597-F660-426A-B3EE-239659B47A64}"/>
               </a:ext>
             </a:extLst>
           </p:cNvPr>
@@ -21077,7 +22259,7 @@
           <p:cNvPr id="35" name="">
             <a:extLst xmlns:a="http://schemas.openxmlformats.org/drawingml/2006/main">
               <a:ext uri="{FF2B5EF4-FFF2-40B4-BE49-F238E27FC236}">
-                <a16:creationId xmlns:a16="http://schemas.microsoft.com/office/drawing/2014/main" id="{454D2D64-CB05-4C85-BA85-654E026F481C}"/>
+                <a16:creationId xmlns:a16="http://schemas.microsoft.com/office/drawing/2014/main" id="{DB775D3B-1C5C-4E08-BB7A-4CCAF92B0EC8}"/>
               </a:ext>
             </a:extLst>
           </p:cNvPr>
@@ -21110,7 +22292,7 @@
           <p:cNvPr id="36" name="">
             <a:extLst xmlns:a="http://schemas.openxmlformats.org/drawingml/2006/main">
               <a:ext uri="{FF2B5EF4-FFF2-40B4-BE49-F238E27FC236}">
-                <a16:creationId xmlns:a16="http://schemas.microsoft.com/office/drawing/2014/main" id="{B4EBC854-0747-4249-A58A-F1622F337BEF}"/>
+                <a16:creationId xmlns:a16="http://schemas.microsoft.com/office/drawing/2014/main" id="{F47B3B8E-1229-4201-8D56-B7F24BFBEDE9}"/>
               </a:ext>
             </a:extLst>
           </p:cNvPr>
@@ -21168,7 +22350,7 @@
           <p:cNvPr id="37" name="">
             <a:extLst xmlns:a="http://schemas.openxmlformats.org/drawingml/2006/main">
               <a:ext uri="{FF2B5EF4-FFF2-40B4-BE49-F238E27FC236}">
-                <a16:creationId xmlns:a16="http://schemas.microsoft.com/office/drawing/2014/main" id="{FC558555-F0B0-470C-9C0B-A0594C7B7C21}"/>
+                <a16:creationId xmlns:a16="http://schemas.microsoft.com/office/drawing/2014/main" id="{8543AAE9-0464-4DC2-A531-69662DC8B75A}"/>
               </a:ext>
             </a:extLst>
           </p:cNvPr>
@@ -21201,7 +22383,7 @@
           <p:cNvPr id="38" name="">
             <a:extLst xmlns:a="http://schemas.openxmlformats.org/drawingml/2006/main">
               <a:ext uri="{FF2B5EF4-FFF2-40B4-BE49-F238E27FC236}">
-                <a16:creationId xmlns:a16="http://schemas.microsoft.com/office/drawing/2014/main" id="{2740D4CE-C092-4E3A-96AC-9B611C1B1F95}"/>
+                <a16:creationId xmlns:a16="http://schemas.microsoft.com/office/drawing/2014/main" id="{16878BD4-C8A6-449E-8B04-53675C23AFDC}"/>
               </a:ext>
             </a:extLst>
           </p:cNvPr>
@@ -21259,7 +22441,7 @@
           <p:cNvPr id="39" name="">
             <a:extLst xmlns:a="http://schemas.openxmlformats.org/drawingml/2006/main">
               <a:ext uri="{FF2B5EF4-FFF2-40B4-BE49-F238E27FC236}">
-                <a16:creationId xmlns:a16="http://schemas.microsoft.com/office/drawing/2014/main" id="{3B479FA8-21EF-4B24-BECF-9391A7158F3A}"/>
+                <a16:creationId xmlns:a16="http://schemas.microsoft.com/office/drawing/2014/main" id="{941A0624-EB24-4CD0-A294-6C2BF7BF4A24}"/>
               </a:ext>
             </a:extLst>
           </p:cNvPr>
@@ -21292,7 +22474,7 @@
           <p:cNvPr id="40" name="">
             <a:extLst xmlns:a="http://schemas.openxmlformats.org/drawingml/2006/main">
               <a:ext uri="{FF2B5EF4-FFF2-40B4-BE49-F238E27FC236}">
-                <a16:creationId xmlns:a16="http://schemas.microsoft.com/office/drawing/2014/main" id="{B0E0EFA5-9160-4F3C-BF34-63D5D06144B6}"/>
+                <a16:creationId xmlns:a16="http://schemas.microsoft.com/office/drawing/2014/main" id="{B6E34B2C-2077-47F1-960F-3184EC74F3B2}"/>
               </a:ext>
             </a:extLst>
           </p:cNvPr>
@@ -21350,7 +22532,7 @@
           <p:cNvPr id="41" name="">
             <a:extLst xmlns:a="http://schemas.openxmlformats.org/drawingml/2006/main">
               <a:ext uri="{FF2B5EF4-FFF2-40B4-BE49-F238E27FC236}">
-                <a16:creationId xmlns:a16="http://schemas.microsoft.com/office/drawing/2014/main" id="{D07ACE0E-CE7A-43B7-8525-3B519A913378}"/>
+                <a16:creationId xmlns:a16="http://schemas.microsoft.com/office/drawing/2014/main" id="{D6C3056D-F328-45AD-AEF2-553456F6394A}"/>
               </a:ext>
             </a:extLst>
           </p:cNvPr>
@@ -21383,7 +22565,7 @@
           <p:cNvPr id="42" name="">
             <a:extLst xmlns:a="http://schemas.openxmlformats.org/drawingml/2006/main">
               <a:ext uri="{FF2B5EF4-FFF2-40B4-BE49-F238E27FC236}">
-                <a16:creationId xmlns:a16="http://schemas.microsoft.com/office/drawing/2014/main" id="{8E3146AB-C5C7-45BC-8421-9AA262F2827F}"/>
+                <a16:creationId xmlns:a16="http://schemas.microsoft.com/office/drawing/2014/main" id="{93EA5B88-A983-464F-9B5D-0E372C879AFE}"/>
               </a:ext>
             </a:extLst>
           </p:cNvPr>
@@ -21441,7 +22623,7 @@
           <p:cNvPr id="43" name="">
             <a:extLst xmlns:a="http://schemas.openxmlformats.org/drawingml/2006/main">
               <a:ext uri="{FF2B5EF4-FFF2-40B4-BE49-F238E27FC236}">
-                <a16:creationId xmlns:a16="http://schemas.microsoft.com/office/drawing/2014/main" id="{B57549AE-19E2-47B5-86BD-CF1E5068F1E8}"/>
+                <a16:creationId xmlns:a16="http://schemas.microsoft.com/office/drawing/2014/main" id="{42027CA1-9096-4E2F-93BF-ABBC5AD50FEF}"/>
               </a:ext>
             </a:extLst>
           </p:cNvPr>
@@ -21499,7 +22681,7 @@
           <p:cNvPr id="44" name="">
             <a:extLst xmlns:a="http://schemas.openxmlformats.org/drawingml/2006/main">
               <a:ext uri="{FF2B5EF4-FFF2-40B4-BE49-F238E27FC236}">
-                <a16:creationId xmlns:a16="http://schemas.microsoft.com/office/drawing/2014/main" id="{36970B26-7FA4-4C59-8359-34CC111B9316}"/>
+                <a16:creationId xmlns:a16="http://schemas.microsoft.com/office/drawing/2014/main" id="{1A9E7276-3C9B-4806-AB7B-5D0AF8ACF491}"/>
               </a:ext>
             </a:extLst>
           </p:cNvPr>
@@ -21557,7 +22739,7 @@
           <p:cNvPr id="45" name="">
             <a:extLst xmlns:a="http://schemas.openxmlformats.org/drawingml/2006/main">
               <a:ext uri="{FF2B5EF4-FFF2-40B4-BE49-F238E27FC236}">
-                <a16:creationId xmlns:a16="http://schemas.microsoft.com/office/drawing/2014/main" id="{125F7129-7553-4F8D-97B0-A6E45E9E789F}"/>
+                <a16:creationId xmlns:a16="http://schemas.microsoft.com/office/drawing/2014/main" id="{E8FBFEAE-83ED-447E-A4F8-ACBE416891B9}"/>
               </a:ext>
             </a:extLst>
           </p:cNvPr>
@@ -21590,7 +22772,7 @@
           <p:cNvPr id="46" name="">
             <a:extLst xmlns:a="http://schemas.openxmlformats.org/drawingml/2006/main">
               <a:ext uri="{FF2B5EF4-FFF2-40B4-BE49-F238E27FC236}">
-                <a16:creationId xmlns:a16="http://schemas.microsoft.com/office/drawing/2014/main" id="{69510CF4-C1F8-46BB-9164-64A0A56A8A4D}"/>
+                <a16:creationId xmlns:a16="http://schemas.microsoft.com/office/drawing/2014/main" id="{45BCC962-AE51-4697-9986-214A171B31D6}"/>
               </a:ext>
             </a:extLst>
           </p:cNvPr>
@@ -21648,7 +22830,7 @@
           <p:cNvPr id="47" name="">
             <a:extLst xmlns:a="http://schemas.openxmlformats.org/drawingml/2006/main">
               <a:ext uri="{FF2B5EF4-FFF2-40B4-BE49-F238E27FC236}">
-                <a16:creationId xmlns:a16="http://schemas.microsoft.com/office/drawing/2014/main" id="{6F9F1094-EE61-4A97-8175-6B9D3213E240}"/>
+                <a16:creationId xmlns:a16="http://schemas.microsoft.com/office/drawing/2014/main" id="{6A2B5F3D-0821-4E16-8A97-520522C7C057}"/>
               </a:ext>
             </a:extLst>
           </p:cNvPr>
@@ -21704,7 +22886,7 @@
     </p:spTree>
     <p:extLst>
       <p:ext uri="{BB962C8B-B14F-4D97-AF65-F5344CB8AC3E}">
-        <p14:creationId xmlns:p14="http://schemas.microsoft.com/office/powerpoint/2010/main" val="176540285"/>
+        <p14:creationId xmlns:p14="http://schemas.microsoft.com/office/powerpoint/2010/main" val="354215981"/>
       </p:ext>
     </p:extLst>
   </p:cSld>
@@ -21735,7 +22917,7 @@
           <p:cNvPr id="13" name="">
             <a:extLst xmlns:a="http://schemas.openxmlformats.org/drawingml/2006/main">
               <a:ext uri="{FF2B5EF4-FFF2-40B4-BE49-F238E27FC236}">
-                <a16:creationId xmlns:a16="http://schemas.microsoft.com/office/drawing/2014/main" id="{9E100C94-F3D9-4A01-8A41-E07FCE28FE93}"/>
+                <a16:creationId xmlns:a16="http://schemas.microsoft.com/office/drawing/2014/main" id="{59044137-2EAD-45D9-B0D1-786D59524113}"/>
               </a:ext>
             </a:extLst>
           </p:cNvPr>
@@ -21793,7 +22975,7 @@
           <p:cNvPr id="2" name="">
             <a:extLst xmlns:a="http://schemas.openxmlformats.org/drawingml/2006/main">
               <a:ext uri="{FF2B5EF4-FFF2-40B4-BE49-F238E27FC236}">
-                <a16:creationId xmlns:a16="http://schemas.microsoft.com/office/drawing/2014/main" id="{EEAB4703-D0AC-4423-898A-F8487943B5E4}"/>
+                <a16:creationId xmlns:a16="http://schemas.microsoft.com/office/drawing/2014/main" id="{786C4DCA-DCAD-4B8E-A094-4C28BA63CCC6}"/>
               </a:ext>
             </a:extLst>
           </p:cNvPr>
@@ -21851,7 +23033,7 @@
           <p:cNvPr id="3" name="">
             <a:extLst xmlns:a="http://schemas.openxmlformats.org/drawingml/2006/main">
               <a:ext uri="{FF2B5EF4-FFF2-40B4-BE49-F238E27FC236}">
-                <a16:creationId xmlns:a16="http://schemas.microsoft.com/office/drawing/2014/main" id="{30E4AF85-1780-4D7A-9F71-C6A5DC1B7197}"/>
+                <a16:creationId xmlns:a16="http://schemas.microsoft.com/office/drawing/2014/main" id="{7A3F9702-E8DF-4C9B-8F7F-E5AFB5C75A33}"/>
               </a:ext>
             </a:extLst>
           </p:cNvPr>
@@ -21884,7 +23066,7 @@
           <p:cNvPr id="4" name="">
             <a:extLst xmlns:a="http://schemas.openxmlformats.org/drawingml/2006/main">
               <a:ext uri="{FF2B5EF4-FFF2-40B4-BE49-F238E27FC236}">
-                <a16:creationId xmlns:a16="http://schemas.microsoft.com/office/drawing/2014/main" id="{6EC458CB-D25A-47FE-9E88-FA294B8B67B3}"/>
+                <a16:creationId xmlns:a16="http://schemas.microsoft.com/office/drawing/2014/main" id="{FB5A5002-7B0D-4E57-912D-EB4057287AB3}"/>
               </a:ext>
             </a:extLst>
           </p:cNvPr>
@@ -21946,7 +23128,7 @@
           <p:nvPr/>
         </p:nvPicPr>
         <p:blipFill>
-          <a:blip xmlns:r="http://schemas.openxmlformats.org/officeDocument/2006/relationships" xmlns:a="http://schemas.openxmlformats.org/drawingml/2006/main" r:embed="R6f0b961bacd94172"/>
+          <a:blip xmlns:r="http://schemas.openxmlformats.org/officeDocument/2006/relationships" xmlns:a="http://schemas.openxmlformats.org/drawingml/2006/main" r:embed="R1aeda432829148a6"/>
           <a:stretch xmlns:a="http://schemas.openxmlformats.org/drawingml/2006/main"/>
         </p:blipFill>
         <p:spPr>
@@ -21970,7 +23152,7 @@
           <p:nvPr/>
         </p:nvPicPr>
         <p:blipFill>
-          <a:blip xmlns:r="http://schemas.openxmlformats.org/officeDocument/2006/relationships" xmlns:a="http://schemas.openxmlformats.org/drawingml/2006/main" r:embed="R2c7e3262abe64519"/>
+          <a:blip xmlns:r="http://schemas.openxmlformats.org/officeDocument/2006/relationships" xmlns:a="http://schemas.openxmlformats.org/drawingml/2006/main" r:embed="R9b8d88ba6a6349ad"/>
           <a:stretch xmlns:a="http://schemas.openxmlformats.org/drawingml/2006/main"/>
         </p:blipFill>
         <p:spPr>
@@ -21990,7 +23172,7 @@
           <p:cNvPr id="7" name="">
             <a:extLst xmlns:a="http://schemas.openxmlformats.org/drawingml/2006/main">
               <a:ext uri="{FF2B5EF4-FFF2-40B4-BE49-F238E27FC236}">
-                <a16:creationId xmlns:a16="http://schemas.microsoft.com/office/drawing/2014/main" id="{DB6885B0-C573-40CB-A72B-6EF3370EBFDC}"/>
+                <a16:creationId xmlns:a16="http://schemas.microsoft.com/office/drawing/2014/main" id="{4DE8B86A-7050-431B-9EC2-5A2D0FCBDFB3}"/>
               </a:ext>
             </a:extLst>
           </p:cNvPr>
@@ -22048,7 +23230,7 @@
           <p:cNvPr id="8" name="">
             <a:extLst xmlns:a="http://schemas.openxmlformats.org/drawingml/2006/main">
               <a:ext uri="{FF2B5EF4-FFF2-40B4-BE49-F238E27FC236}">
-                <a16:creationId xmlns:a16="http://schemas.microsoft.com/office/drawing/2014/main" id="{BDE8BB9C-1F52-4241-9D3E-A7066CC6FA90}"/>
+                <a16:creationId xmlns:a16="http://schemas.microsoft.com/office/drawing/2014/main" id="{13DE094C-2BE9-4CBC-A09A-35AAE68BFA9E}"/>
               </a:ext>
             </a:extLst>
           </p:cNvPr>
@@ -22106,7 +23288,7 @@
           <p:cNvPr id="9" name="">
             <a:extLst xmlns:a="http://schemas.openxmlformats.org/drawingml/2006/main">
               <a:ext uri="{FF2B5EF4-FFF2-40B4-BE49-F238E27FC236}">
-                <a16:creationId xmlns:a16="http://schemas.microsoft.com/office/drawing/2014/main" id="{B42E1CF1-7F07-427D-951C-646FDE66DB4C}"/>
+                <a16:creationId xmlns:a16="http://schemas.microsoft.com/office/drawing/2014/main" id="{B979CBEF-8559-4149-BD89-364DA86374D6}"/>
               </a:ext>
             </a:extLst>
           </p:cNvPr>
@@ -22164,7 +23346,7 @@
           <p:cNvPr id="10" name="">
             <a:extLst xmlns:a="http://schemas.openxmlformats.org/drawingml/2006/main">
               <a:ext uri="{FF2B5EF4-FFF2-40B4-BE49-F238E27FC236}">
-                <a16:creationId xmlns:a16="http://schemas.microsoft.com/office/drawing/2014/main" id="{42B6A94C-B12B-462A-BAE1-C3B95611D628}"/>
+                <a16:creationId xmlns:a16="http://schemas.microsoft.com/office/drawing/2014/main" id="{AC21FF64-2809-4CEB-A8B9-2C1382E3DDFB}"/>
               </a:ext>
             </a:extLst>
           </p:cNvPr>
@@ -22197,7 +23379,7 @@
           <p:cNvPr id="11" name="">
             <a:extLst xmlns:a="http://schemas.openxmlformats.org/drawingml/2006/main">
               <a:ext uri="{FF2B5EF4-FFF2-40B4-BE49-F238E27FC236}">
-                <a16:creationId xmlns:a16="http://schemas.microsoft.com/office/drawing/2014/main" id="{514219E5-A7B5-44F7-9E62-0B30AC8325BB}"/>
+                <a16:creationId xmlns:a16="http://schemas.microsoft.com/office/drawing/2014/main" id="{9178D28A-010E-4448-8265-D3C8C3D35A9F}"/>
               </a:ext>
             </a:extLst>
           </p:cNvPr>
@@ -22255,7 +23437,7 @@
           <p:cNvPr id="12" name="">
             <a:extLst xmlns:a="http://schemas.openxmlformats.org/drawingml/2006/main">
               <a:ext uri="{FF2B5EF4-FFF2-40B4-BE49-F238E27FC236}">
-                <a16:creationId xmlns:a16="http://schemas.microsoft.com/office/drawing/2014/main" id="{311B1E0D-13DF-490B-A2D6-074EA02F41AA}"/>
+                <a16:creationId xmlns:a16="http://schemas.microsoft.com/office/drawing/2014/main" id="{5F551B5A-8FA7-403C-BB45-4276E3044294}"/>
               </a:ext>
             </a:extLst>
           </p:cNvPr>
@@ -22311,7 +23493,7 @@
     </p:spTree>
     <p:extLst>
       <p:ext uri="{BB962C8B-B14F-4D97-AF65-F5344CB8AC3E}">
-        <p14:creationId xmlns:p14="http://schemas.microsoft.com/office/powerpoint/2010/main" val="108536110"/>
+        <p14:creationId xmlns:p14="http://schemas.microsoft.com/office/powerpoint/2010/main" val="2112505822"/>
       </p:ext>
     </p:extLst>
   </p:cSld>
@@ -22342,7 +23524,7 @@
           <p:cNvPr id="18" name="">
             <a:extLst xmlns:a="http://schemas.openxmlformats.org/drawingml/2006/main">
               <a:ext uri="{FF2B5EF4-FFF2-40B4-BE49-F238E27FC236}">
-                <a16:creationId xmlns:a16="http://schemas.microsoft.com/office/drawing/2014/main" id="{10ADC6D8-52E4-4071-8FBB-3D9B72C101D1}"/>
+                <a16:creationId xmlns:a16="http://schemas.microsoft.com/office/drawing/2014/main" id="{57A6187E-8080-48A4-B381-740DADCCE550}"/>
               </a:ext>
             </a:extLst>
           </p:cNvPr>
@@ -22400,7 +23582,7 @@
           <p:cNvPr id="2" name="">
             <a:extLst xmlns:a="http://schemas.openxmlformats.org/drawingml/2006/main">
               <a:ext uri="{FF2B5EF4-FFF2-40B4-BE49-F238E27FC236}">
-                <a16:creationId xmlns:a16="http://schemas.microsoft.com/office/drawing/2014/main" id="{B9FD8762-B24F-4D62-9FD5-D74ABBE2DA7C}"/>
+                <a16:creationId xmlns:a16="http://schemas.microsoft.com/office/drawing/2014/main" id="{673B333A-6806-46A6-8612-776044A662E1}"/>
               </a:ext>
             </a:extLst>
           </p:cNvPr>
@@ -22458,7 +23640,7 @@
           <p:cNvPr id="3" name="">
             <a:extLst xmlns:a="http://schemas.openxmlformats.org/drawingml/2006/main">
               <a:ext uri="{FF2B5EF4-FFF2-40B4-BE49-F238E27FC236}">
-                <a16:creationId xmlns:a16="http://schemas.microsoft.com/office/drawing/2014/main" id="{C9C35174-7023-4FA8-9A51-A8D761BEC4D2}"/>
+                <a16:creationId xmlns:a16="http://schemas.microsoft.com/office/drawing/2014/main" id="{9600438D-4706-400B-B441-EED16CDA5FE2}"/>
               </a:ext>
             </a:extLst>
           </p:cNvPr>
@@ -22491,7 +23673,7 @@
           <p:cNvPr id="4" name="">
             <a:extLst xmlns:a="http://schemas.openxmlformats.org/drawingml/2006/main">
               <a:ext uri="{FF2B5EF4-FFF2-40B4-BE49-F238E27FC236}">
-                <a16:creationId xmlns:a16="http://schemas.microsoft.com/office/drawing/2014/main" id="{71BED3DA-3BA9-4BA9-B9F6-4267B09B2995}"/>
+                <a16:creationId xmlns:a16="http://schemas.microsoft.com/office/drawing/2014/main" id="{E6B20AB4-9290-4DCF-818A-FAAEDD512809}"/>
               </a:ext>
             </a:extLst>
           </p:cNvPr>
@@ -22549,7 +23731,7 @@
           <p:cNvPr id="5" name="">
             <a:extLst xmlns:a="http://schemas.openxmlformats.org/drawingml/2006/main">
               <a:ext uri="{FF2B5EF4-FFF2-40B4-BE49-F238E27FC236}">
-                <a16:creationId xmlns:a16="http://schemas.microsoft.com/office/drawing/2014/main" id="{902D4F75-3AAE-452A-A45E-D98AE68B8261}"/>
+                <a16:creationId xmlns:a16="http://schemas.microsoft.com/office/drawing/2014/main" id="{37B8F740-1091-4641-857B-6489A5816897}"/>
               </a:ext>
             </a:extLst>
           </p:cNvPr>
@@ -22582,7 +23764,7 @@
           <p:cNvPr id="6" name="">
             <a:extLst xmlns:a="http://schemas.openxmlformats.org/drawingml/2006/main">
               <a:ext uri="{FF2B5EF4-FFF2-40B4-BE49-F238E27FC236}">
-                <a16:creationId xmlns:a16="http://schemas.microsoft.com/office/drawing/2014/main" id="{FCD4587B-05E5-45AE-A258-1F49190540A6}"/>
+                <a16:creationId xmlns:a16="http://schemas.microsoft.com/office/drawing/2014/main" id="{FF92E9D3-E203-4BC2-B168-EFC2D8F9A027}"/>
               </a:ext>
             </a:extLst>
           </p:cNvPr>
@@ -22640,7 +23822,7 @@
           <p:cNvPr id="7" name="">
             <a:extLst xmlns:a="http://schemas.openxmlformats.org/drawingml/2006/main">
               <a:ext uri="{FF2B5EF4-FFF2-40B4-BE49-F238E27FC236}">
-                <a16:creationId xmlns:a16="http://schemas.microsoft.com/office/drawing/2014/main" id="{39236AAB-EFB3-4001-97E6-BAF0CA3A8DEE}"/>
+                <a16:creationId xmlns:a16="http://schemas.microsoft.com/office/drawing/2014/main" id="{A9689B6E-B290-416F-88FA-B057318E3E3C}"/>
               </a:ext>
             </a:extLst>
           </p:cNvPr>
@@ -22673,7 +23855,7 @@
           <p:cNvPr id="8" name="">
             <a:extLst xmlns:a="http://schemas.openxmlformats.org/drawingml/2006/main">
               <a:ext uri="{FF2B5EF4-FFF2-40B4-BE49-F238E27FC236}">
-                <a16:creationId xmlns:a16="http://schemas.microsoft.com/office/drawing/2014/main" id="{CF7EBDC9-42FD-44A2-9D33-8DA21FB6AFAE}"/>
+                <a16:creationId xmlns:a16="http://schemas.microsoft.com/office/drawing/2014/main" id="{83DA60F4-8DC0-4B32-83AD-DF3E9F2DD745}"/>
               </a:ext>
             </a:extLst>
           </p:cNvPr>
@@ -22731,7 +23913,7 @@
           <p:cNvPr id="9" name="">
             <a:extLst xmlns:a="http://schemas.openxmlformats.org/drawingml/2006/main">
               <a:ext uri="{FF2B5EF4-FFF2-40B4-BE49-F238E27FC236}">
-                <a16:creationId xmlns:a16="http://schemas.microsoft.com/office/drawing/2014/main" id="{746D715E-E6AD-40FF-9111-DFE9E3CC5949}"/>
+                <a16:creationId xmlns:a16="http://schemas.microsoft.com/office/drawing/2014/main" id="{226587E4-DC94-485E-8997-961E1DA867F4}"/>
               </a:ext>
             </a:extLst>
           </p:cNvPr>
@@ -22764,7 +23946,7 @@
           <p:cNvPr id="10" name="">
             <a:extLst xmlns:a="http://schemas.openxmlformats.org/drawingml/2006/main">
               <a:ext uri="{FF2B5EF4-FFF2-40B4-BE49-F238E27FC236}">
-                <a16:creationId xmlns:a16="http://schemas.microsoft.com/office/drawing/2014/main" id="{384A9E3A-F900-4770-A8E7-3E7F18E8CDCC}"/>
+                <a16:creationId xmlns:a16="http://schemas.microsoft.com/office/drawing/2014/main" id="{218A325E-A1CE-46B2-B4A5-A8F61F38A918}"/>
               </a:ext>
             </a:extLst>
           </p:cNvPr>
@@ -22822,7 +24004,7 @@
           <p:cNvPr id="11" name="">
             <a:extLst xmlns:a="http://schemas.openxmlformats.org/drawingml/2006/main">
               <a:ext uri="{FF2B5EF4-FFF2-40B4-BE49-F238E27FC236}">
-                <a16:creationId xmlns:a16="http://schemas.microsoft.com/office/drawing/2014/main" id="{42928A5A-4410-4A3E-854C-1C6F29C2EA0F}"/>
+                <a16:creationId xmlns:a16="http://schemas.microsoft.com/office/drawing/2014/main" id="{0A02D20A-A299-4075-80DC-AC68F6CE3EBB}"/>
               </a:ext>
             </a:extLst>
           </p:cNvPr>
@@ -22855,7 +24037,7 @@
           <p:cNvPr id="12" name="">
             <a:extLst xmlns:a="http://schemas.openxmlformats.org/drawingml/2006/main">
               <a:ext uri="{FF2B5EF4-FFF2-40B4-BE49-F238E27FC236}">
-                <a16:creationId xmlns:a16="http://schemas.microsoft.com/office/drawing/2014/main" id="{0AD6C862-9737-4760-8F7E-9D1CF283DE8F}"/>
+                <a16:creationId xmlns:a16="http://schemas.microsoft.com/office/drawing/2014/main" id="{750D57CC-3A99-4A17-8BA3-3CDFCAA35B4D}"/>
               </a:ext>
             </a:extLst>
           </p:cNvPr>
@@ -22917,7 +24099,7 @@
           <p:nvPr/>
         </p:nvPicPr>
         <p:blipFill>
-          <a:blip xmlns:r="http://schemas.openxmlformats.org/officeDocument/2006/relationships" xmlns:a="http://schemas.openxmlformats.org/drawingml/2006/main" r:embed="Re0b86b3954904111"/>
+          <a:blip xmlns:r="http://schemas.openxmlformats.org/officeDocument/2006/relationships" xmlns:a="http://schemas.openxmlformats.org/drawingml/2006/main" r:embed="Rd9767e9df0ca49e7"/>
           <a:stretch xmlns:a="http://schemas.openxmlformats.org/drawingml/2006/main"/>
         </p:blipFill>
         <p:spPr>
@@ -22937,7 +24119,7 @@
           <p:cNvPr id="14" name="">
             <a:extLst xmlns:a="http://schemas.openxmlformats.org/drawingml/2006/main">
               <a:ext uri="{FF2B5EF4-FFF2-40B4-BE49-F238E27FC236}">
-                <a16:creationId xmlns:a16="http://schemas.microsoft.com/office/drawing/2014/main" id="{68BD296F-F7A7-470E-A410-D53ED0CB335D}"/>
+                <a16:creationId xmlns:a16="http://schemas.microsoft.com/office/drawing/2014/main" id="{B1DFEB36-73EC-4CDC-B9B6-1443EA2D9C89}"/>
               </a:ext>
             </a:extLst>
           </p:cNvPr>
@@ -22995,7 +24177,7 @@
           <p:cNvPr id="15" name="">
             <a:extLst xmlns:a="http://schemas.openxmlformats.org/drawingml/2006/main">
               <a:ext uri="{FF2B5EF4-FFF2-40B4-BE49-F238E27FC236}">
-                <a16:creationId xmlns:a16="http://schemas.microsoft.com/office/drawing/2014/main" id="{C72B5038-4E83-4E6F-89FD-DDB359AEE944}"/>
+                <a16:creationId xmlns:a16="http://schemas.microsoft.com/office/drawing/2014/main" id="{4BB4B069-B873-498A-8EA3-2DC0F8EDDC26}"/>
               </a:ext>
             </a:extLst>
           </p:cNvPr>
@@ -23028,7 +24210,7 @@
           <p:cNvPr id="16" name="">
             <a:extLst xmlns:a="http://schemas.openxmlformats.org/drawingml/2006/main">
               <a:ext uri="{FF2B5EF4-FFF2-40B4-BE49-F238E27FC236}">
-                <a16:creationId xmlns:a16="http://schemas.microsoft.com/office/drawing/2014/main" id="{81073438-029B-4E18-89C3-8C49AD2ABDEA}"/>
+                <a16:creationId xmlns:a16="http://schemas.microsoft.com/office/drawing/2014/main" id="{0C20A1FD-6F22-47D5-88BE-1C167B98A34A}"/>
               </a:ext>
             </a:extLst>
           </p:cNvPr>
@@ -23086,7 +24268,7 @@
           <p:cNvPr id="17" name="">
             <a:extLst xmlns:a="http://schemas.openxmlformats.org/drawingml/2006/main">
               <a:ext uri="{FF2B5EF4-FFF2-40B4-BE49-F238E27FC236}">
-                <a16:creationId xmlns:a16="http://schemas.microsoft.com/office/drawing/2014/main" id="{C35EA232-D45E-48FF-96E1-0F8756898B6D}"/>
+                <a16:creationId xmlns:a16="http://schemas.microsoft.com/office/drawing/2014/main" id="{C8C11BFA-8B2D-4374-BE69-E89066D7CB5A}"/>
               </a:ext>
             </a:extLst>
           </p:cNvPr>
@@ -23142,7 +24324,7 @@
     </p:spTree>
     <p:extLst>
       <p:ext uri="{BB962C8B-B14F-4D97-AF65-F5344CB8AC3E}">
-        <p14:creationId xmlns:p14="http://schemas.microsoft.com/office/powerpoint/2010/main" val="70023953"/>
+        <p14:creationId xmlns:p14="http://schemas.microsoft.com/office/powerpoint/2010/main" val="1088769103"/>
       </p:ext>
     </p:extLst>
   </p:cSld>
@@ -23173,7 +24355,7 @@
           <p:cNvPr id="34" name="">
             <a:extLst xmlns:a="http://schemas.openxmlformats.org/drawingml/2006/main">
               <a:ext uri="{FF2B5EF4-FFF2-40B4-BE49-F238E27FC236}">
-                <a16:creationId xmlns:a16="http://schemas.microsoft.com/office/drawing/2014/main" id="{DFD636E1-3D10-4A5D-A898-FE73E48B8128}"/>
+                <a16:creationId xmlns:a16="http://schemas.microsoft.com/office/drawing/2014/main" id="{7786E5A6-B3BC-43E4-AEEE-DC7FD54EAC8B}"/>
               </a:ext>
             </a:extLst>
           </p:cNvPr>
@@ -23231,7 +24413,7 @@
           <p:cNvPr id="2" name="">
             <a:extLst xmlns:a="http://schemas.openxmlformats.org/drawingml/2006/main">
               <a:ext uri="{FF2B5EF4-FFF2-40B4-BE49-F238E27FC236}">
-                <a16:creationId xmlns:a16="http://schemas.microsoft.com/office/drawing/2014/main" id="{3CE5E572-2472-4A8D-9605-981D4CF97481}"/>
+                <a16:creationId xmlns:a16="http://schemas.microsoft.com/office/drawing/2014/main" id="{7235AB53-B815-4039-ADC3-78AE08F850F9}"/>
               </a:ext>
             </a:extLst>
           </p:cNvPr>
@@ -23289,7 +24471,7 @@
           <p:cNvPr id="3" name="">
             <a:extLst xmlns:a="http://schemas.openxmlformats.org/drawingml/2006/main">
               <a:ext uri="{FF2B5EF4-FFF2-40B4-BE49-F238E27FC236}">
-                <a16:creationId xmlns:a16="http://schemas.microsoft.com/office/drawing/2014/main" id="{98981897-9E73-422A-A21D-8BCBDE4F4A7C}"/>
+                <a16:creationId xmlns:a16="http://schemas.microsoft.com/office/drawing/2014/main" id="{CD60D4D4-3017-4F81-A804-6FA0413AD6E9}"/>
               </a:ext>
             </a:extLst>
           </p:cNvPr>
@@ -23322,7 +24504,7 @@
           <p:cNvPr id="4" name="">
             <a:extLst xmlns:a="http://schemas.openxmlformats.org/drawingml/2006/main">
               <a:ext uri="{FF2B5EF4-FFF2-40B4-BE49-F238E27FC236}">
-                <a16:creationId xmlns:a16="http://schemas.microsoft.com/office/drawing/2014/main" id="{D9F88BDD-74A4-423A-B412-BE3BBE48FE4C}"/>
+                <a16:creationId xmlns:a16="http://schemas.microsoft.com/office/drawing/2014/main" id="{0CDEC02B-FE5B-41C5-8E34-18CAC1E4E315}"/>
               </a:ext>
             </a:extLst>
           </p:cNvPr>
@@ -23380,7 +24562,7 @@
           <p:cNvPr id="5" name="">
             <a:extLst xmlns:a="http://schemas.openxmlformats.org/drawingml/2006/main">
               <a:ext uri="{FF2B5EF4-FFF2-40B4-BE49-F238E27FC236}">
-                <a16:creationId xmlns:a16="http://schemas.microsoft.com/office/drawing/2014/main" id="{6ABB7002-D056-4522-A38E-AAA67195A682}"/>
+                <a16:creationId xmlns:a16="http://schemas.microsoft.com/office/drawing/2014/main" id="{F36C75BC-23E9-419E-AF25-6C52B7AE4005}"/>
               </a:ext>
             </a:extLst>
           </p:cNvPr>
@@ -23413,7 +24595,7 @@
           <p:cNvPr id="6" name="">
             <a:extLst xmlns:a="http://schemas.openxmlformats.org/drawingml/2006/main">
               <a:ext uri="{FF2B5EF4-FFF2-40B4-BE49-F238E27FC236}">
-                <a16:creationId xmlns:a16="http://schemas.microsoft.com/office/drawing/2014/main" id="{686A07D5-0329-4AE2-B81F-5D4FC1E7674E}"/>
+                <a16:creationId xmlns:a16="http://schemas.microsoft.com/office/drawing/2014/main" id="{2A8D3FAA-B4DA-4FDE-A58A-F7789169A02F}"/>
               </a:ext>
             </a:extLst>
           </p:cNvPr>
@@ -23471,7 +24653,7 @@
           <p:cNvPr id="7" name="">
             <a:extLst xmlns:a="http://schemas.openxmlformats.org/drawingml/2006/main">
               <a:ext uri="{FF2B5EF4-FFF2-40B4-BE49-F238E27FC236}">
-                <a16:creationId xmlns:a16="http://schemas.microsoft.com/office/drawing/2014/main" id="{DA837756-56FD-49A8-A4DB-D05E88AD2838}"/>
+                <a16:creationId xmlns:a16="http://schemas.microsoft.com/office/drawing/2014/main" id="{C139695F-76D1-4491-8D30-43698CD1076B}"/>
               </a:ext>
             </a:extLst>
           </p:cNvPr>
@@ -23529,7 +24711,7 @@
           <p:cNvPr id="8" name="">
             <a:extLst xmlns:a="http://schemas.openxmlformats.org/drawingml/2006/main">
               <a:ext uri="{FF2B5EF4-FFF2-40B4-BE49-F238E27FC236}">
-                <a16:creationId xmlns:a16="http://schemas.microsoft.com/office/drawing/2014/main" id="{02D06B78-800C-4173-884C-E652EB009DB4}"/>
+                <a16:creationId xmlns:a16="http://schemas.microsoft.com/office/drawing/2014/main" id="{45F8AA77-BA04-4048-8E41-F653EEAEC6FA}"/>
               </a:ext>
             </a:extLst>
           </p:cNvPr>
@@ -23610,7 +24792,7 @@
           <p:cNvPr id="9" name="">
             <a:extLst xmlns:a="http://schemas.openxmlformats.org/drawingml/2006/main">
               <a:ext uri="{FF2B5EF4-FFF2-40B4-BE49-F238E27FC236}">
-                <a16:creationId xmlns:a16="http://schemas.microsoft.com/office/drawing/2014/main" id="{BAECF785-9B67-4006-9804-8C3559393563}"/>
+                <a16:creationId xmlns:a16="http://schemas.microsoft.com/office/drawing/2014/main" id="{D8AABC01-219E-43F3-A383-AD3165E28988}"/>
               </a:ext>
             </a:extLst>
           </p:cNvPr>
@@ -23668,7 +24850,7 @@
           <p:cNvPr id="10" name="">
             <a:extLst xmlns:a="http://schemas.openxmlformats.org/drawingml/2006/main">
               <a:ext uri="{FF2B5EF4-FFF2-40B4-BE49-F238E27FC236}">
-                <a16:creationId xmlns:a16="http://schemas.microsoft.com/office/drawing/2014/main" id="{8E1395A3-B7E8-43D0-9656-9BE5CF5E1132}"/>
+                <a16:creationId xmlns:a16="http://schemas.microsoft.com/office/drawing/2014/main" id="{F3ED13EB-0731-4349-9BE8-B4B072833D7A}"/>
               </a:ext>
             </a:extLst>
           </p:cNvPr>
@@ -23701,7 +24883,7 @@
           <p:cNvPr id="11" name="">
             <a:extLst xmlns:a="http://schemas.openxmlformats.org/drawingml/2006/main">
               <a:ext uri="{FF2B5EF4-FFF2-40B4-BE49-F238E27FC236}">
-                <a16:creationId xmlns:a16="http://schemas.microsoft.com/office/drawing/2014/main" id="{24B480A2-9AB8-4D56-B836-DCE97AD60A24}"/>
+                <a16:creationId xmlns:a16="http://schemas.microsoft.com/office/drawing/2014/main" id="{37049C50-55C1-4F30-8600-BBF9FAFA9CFE}"/>
               </a:ext>
             </a:extLst>
           </p:cNvPr>
@@ -23759,7 +24941,7 @@
           <p:cNvPr id="12" name="">
             <a:extLst xmlns:a="http://schemas.openxmlformats.org/drawingml/2006/main">
               <a:ext uri="{FF2B5EF4-FFF2-40B4-BE49-F238E27FC236}">
-                <a16:creationId xmlns:a16="http://schemas.microsoft.com/office/drawing/2014/main" id="{D1DB61DF-B90C-4818-A072-749B941B385E}"/>
+                <a16:creationId xmlns:a16="http://schemas.microsoft.com/office/drawing/2014/main" id="{501EC5C0-245A-43A4-B043-298CFF79606C}"/>
               </a:ext>
             </a:extLst>
           </p:cNvPr>
@@ -23817,7 +24999,7 @@
           <p:cNvPr id="13" name="">
             <a:extLst xmlns:a="http://schemas.openxmlformats.org/drawingml/2006/main">
               <a:ext uri="{FF2B5EF4-FFF2-40B4-BE49-F238E27FC236}">
-                <a16:creationId xmlns:a16="http://schemas.microsoft.com/office/drawing/2014/main" id="{F9609AA5-6321-43F1-954B-EB114D8407ED}"/>
+                <a16:creationId xmlns:a16="http://schemas.microsoft.com/office/drawing/2014/main" id="{9B7BD903-6CFE-4B16-B603-BE1C1C13D7B0}"/>
               </a:ext>
             </a:extLst>
           </p:cNvPr>
@@ -23898,7 +25080,7 @@
           <p:cNvPr id="14" name="">
             <a:extLst xmlns:a="http://schemas.openxmlformats.org/drawingml/2006/main">
               <a:ext uri="{FF2B5EF4-FFF2-40B4-BE49-F238E27FC236}">
-                <a16:creationId xmlns:a16="http://schemas.microsoft.com/office/drawing/2014/main" id="{BCC48909-C19B-46B8-A2D6-83D912A53AB1}"/>
+                <a16:creationId xmlns:a16="http://schemas.microsoft.com/office/drawing/2014/main" id="{13F9E10A-440F-4C62-993C-DCBD9EE57F1A}"/>
               </a:ext>
             </a:extLst>
           </p:cNvPr>
@@ -23956,7 +25138,7 @@
           <p:cNvPr id="15" name="">
             <a:extLst xmlns:a="http://schemas.openxmlformats.org/drawingml/2006/main">
               <a:ext uri="{FF2B5EF4-FFF2-40B4-BE49-F238E27FC236}">
-                <a16:creationId xmlns:a16="http://schemas.microsoft.com/office/drawing/2014/main" id="{B85BBD09-F4F1-4718-8E23-4A03774BC239}"/>
+                <a16:creationId xmlns:a16="http://schemas.microsoft.com/office/drawing/2014/main" id="{7C6E6854-5622-463E-AC68-71EDCF9A791C}"/>
               </a:ext>
             </a:extLst>
           </p:cNvPr>
@@ -23989,7 +25171,7 @@
           <p:cNvPr id="16" name="">
             <a:extLst xmlns:a="http://schemas.openxmlformats.org/drawingml/2006/main">
               <a:ext uri="{FF2B5EF4-FFF2-40B4-BE49-F238E27FC236}">
-                <a16:creationId xmlns:a16="http://schemas.microsoft.com/office/drawing/2014/main" id="{8A2BDB4E-A74A-4676-A437-ED5590BED040}"/>
+                <a16:creationId xmlns:a16="http://schemas.microsoft.com/office/drawing/2014/main" id="{6B65E081-9FA3-4F18-9D5D-F2BB66484A73}"/>
               </a:ext>
             </a:extLst>
           </p:cNvPr>
@@ -24047,7 +25229,7 @@
           <p:cNvPr id="17" name="">
             <a:extLst xmlns:a="http://schemas.openxmlformats.org/drawingml/2006/main">
               <a:ext uri="{FF2B5EF4-FFF2-40B4-BE49-F238E27FC236}">
-                <a16:creationId xmlns:a16="http://schemas.microsoft.com/office/drawing/2014/main" id="{B6840D54-61CF-4B6F-94B4-C77B9A59FCB8}"/>
+                <a16:creationId xmlns:a16="http://schemas.microsoft.com/office/drawing/2014/main" id="{1FA898C6-C885-4128-9C3C-C2C00E6BE950}"/>
               </a:ext>
             </a:extLst>
           </p:cNvPr>
@@ -24105,7 +25287,7 @@
           <p:cNvPr id="18" name="">
             <a:extLst xmlns:a="http://schemas.openxmlformats.org/drawingml/2006/main">
               <a:ext uri="{FF2B5EF4-FFF2-40B4-BE49-F238E27FC236}">
-                <a16:creationId xmlns:a16="http://schemas.microsoft.com/office/drawing/2014/main" id="{46F57567-5B60-4B03-9E2A-7673A02BC302}"/>
+                <a16:creationId xmlns:a16="http://schemas.microsoft.com/office/drawing/2014/main" id="{870E0086-3C11-4EBC-8F67-1D8E22540A38}"/>
               </a:ext>
             </a:extLst>
           </p:cNvPr>
@@ -24186,7 +25368,7 @@
           <p:cNvPr id="19" name="">
             <a:extLst xmlns:a="http://schemas.openxmlformats.org/drawingml/2006/main">
               <a:ext uri="{FF2B5EF4-FFF2-40B4-BE49-F238E27FC236}">
-                <a16:creationId xmlns:a16="http://schemas.microsoft.com/office/drawing/2014/main" id="{3B9A18DC-CEC5-4418-BD0C-C217DAB3831F}"/>
+                <a16:creationId xmlns:a16="http://schemas.microsoft.com/office/drawing/2014/main" id="{AEA09D63-D362-42ED-A4FA-69624CC8B209}"/>
               </a:ext>
             </a:extLst>
           </p:cNvPr>
@@ -24244,7 +25426,7 @@
           <p:cNvPr id="20" name="">
             <a:extLst xmlns:a="http://schemas.openxmlformats.org/drawingml/2006/main">
               <a:ext uri="{FF2B5EF4-FFF2-40B4-BE49-F238E27FC236}">
-                <a16:creationId xmlns:a16="http://schemas.microsoft.com/office/drawing/2014/main" id="{219F303F-9C01-4C8A-A136-ECF48C24C1DB}"/>
+                <a16:creationId xmlns:a16="http://schemas.microsoft.com/office/drawing/2014/main" id="{D6329B94-B4D0-47B5-BCEA-0BFC3B1DDA10}"/>
               </a:ext>
             </a:extLst>
           </p:cNvPr>
@@ -24277,7 +25459,7 @@
           <p:cNvPr id="21" name="">
             <a:extLst xmlns:a="http://schemas.openxmlformats.org/drawingml/2006/main">
               <a:ext uri="{FF2B5EF4-FFF2-40B4-BE49-F238E27FC236}">
-                <a16:creationId xmlns:a16="http://schemas.microsoft.com/office/drawing/2014/main" id="{3A200EAD-BCDE-458F-BCBC-D2859BE993BB}"/>
+                <a16:creationId xmlns:a16="http://schemas.microsoft.com/office/drawing/2014/main" id="{02EA3396-AD13-4A3C-82C8-789D84C165E9}"/>
               </a:ext>
             </a:extLst>
           </p:cNvPr>
@@ -24335,7 +25517,7 @@
           <p:cNvPr id="22" name="">
             <a:extLst xmlns:a="http://schemas.openxmlformats.org/drawingml/2006/main">
               <a:ext uri="{FF2B5EF4-FFF2-40B4-BE49-F238E27FC236}">
-                <a16:creationId xmlns:a16="http://schemas.microsoft.com/office/drawing/2014/main" id="{30B17A64-3557-454C-8B73-C95B82BAAB3D}"/>
+                <a16:creationId xmlns:a16="http://schemas.microsoft.com/office/drawing/2014/main" id="{2E531D2C-1574-4F09-B910-31F1F2A1476B}"/>
               </a:ext>
             </a:extLst>
           </p:cNvPr>
@@ -24393,7 +25575,7 @@
           <p:cNvPr id="23" name="">
             <a:extLst xmlns:a="http://schemas.openxmlformats.org/drawingml/2006/main">
               <a:ext uri="{FF2B5EF4-FFF2-40B4-BE49-F238E27FC236}">
-                <a16:creationId xmlns:a16="http://schemas.microsoft.com/office/drawing/2014/main" id="{6BE8CA76-B301-4D94-BC35-A5FF8700BCB1}"/>
+                <a16:creationId xmlns:a16="http://schemas.microsoft.com/office/drawing/2014/main" id="{367FB11C-0C9E-4810-A54F-3416E1A1E236}"/>
               </a:ext>
             </a:extLst>
           </p:cNvPr>
@@ -24474,7 +25656,7 @@
           <p:cNvPr id="24" name="">
             <a:extLst xmlns:a="http://schemas.openxmlformats.org/drawingml/2006/main">
               <a:ext uri="{FF2B5EF4-FFF2-40B4-BE49-F238E27FC236}">
-                <a16:creationId xmlns:a16="http://schemas.microsoft.com/office/drawing/2014/main" id="{F85DAAF6-04F5-4032-874C-BA64E7BC7C98}"/>
+                <a16:creationId xmlns:a16="http://schemas.microsoft.com/office/drawing/2014/main" id="{B733A9F8-50CE-4DB0-A2E6-1924A02F47A1}"/>
               </a:ext>
             </a:extLst>
           </p:cNvPr>
@@ -24532,7 +25714,7 @@
           <p:cNvPr id="25" name="">
             <a:extLst xmlns:a="http://schemas.openxmlformats.org/drawingml/2006/main">
               <a:ext uri="{FF2B5EF4-FFF2-40B4-BE49-F238E27FC236}">
-                <a16:creationId xmlns:a16="http://schemas.microsoft.com/office/drawing/2014/main" id="{62B48A54-3501-4CF6-949B-DBE8DC08DEE1}"/>
+                <a16:creationId xmlns:a16="http://schemas.microsoft.com/office/drawing/2014/main" id="{E2A0454F-51D8-4CF5-A500-E09C171B9296}"/>
               </a:ext>
             </a:extLst>
           </p:cNvPr>
@@ -24565,7 +25747,7 @@
           <p:cNvPr id="26" name="">
             <a:extLst xmlns:a="http://schemas.openxmlformats.org/drawingml/2006/main">
               <a:ext uri="{FF2B5EF4-FFF2-40B4-BE49-F238E27FC236}">
-                <a16:creationId xmlns:a16="http://schemas.microsoft.com/office/drawing/2014/main" id="{976E47C2-950D-4632-8DB2-AE83A62FEB72}"/>
+                <a16:creationId xmlns:a16="http://schemas.microsoft.com/office/drawing/2014/main" id="{9CB8FC35-9F77-4AD6-993C-38AEE3C4AE70}"/>
               </a:ext>
             </a:extLst>
           </p:cNvPr>
@@ -24623,7 +25805,7 @@
           <p:cNvPr id="27" name="">
             <a:extLst xmlns:a="http://schemas.openxmlformats.org/drawingml/2006/main">
               <a:ext uri="{FF2B5EF4-FFF2-40B4-BE49-F238E27FC236}">
-                <a16:creationId xmlns:a16="http://schemas.microsoft.com/office/drawing/2014/main" id="{D8D5EFAB-C3B2-405F-BEBE-03C5062DD26E}"/>
+                <a16:creationId xmlns:a16="http://schemas.microsoft.com/office/drawing/2014/main" id="{BBD64A9B-1189-4CE4-9B78-2B14E2959C6F}"/>
               </a:ext>
             </a:extLst>
           </p:cNvPr>
@@ -24681,7 +25863,7 @@
           <p:cNvPr id="28" name="">
             <a:extLst xmlns:a="http://schemas.openxmlformats.org/drawingml/2006/main">
               <a:ext uri="{FF2B5EF4-FFF2-40B4-BE49-F238E27FC236}">
-                <a16:creationId xmlns:a16="http://schemas.microsoft.com/office/drawing/2014/main" id="{03CD54B6-F5E9-4489-9DD3-330E76D87641}"/>
+                <a16:creationId xmlns:a16="http://schemas.microsoft.com/office/drawing/2014/main" id="{BF6B45F3-2AB2-49A0-9DF0-952FA8F0CD42}"/>
               </a:ext>
             </a:extLst>
           </p:cNvPr>
@@ -24762,7 +25944,7 @@
           <p:cNvPr id="29" name="">
             <a:extLst xmlns:a="http://schemas.openxmlformats.org/drawingml/2006/main">
               <a:ext uri="{FF2B5EF4-FFF2-40B4-BE49-F238E27FC236}">
-                <a16:creationId xmlns:a16="http://schemas.microsoft.com/office/drawing/2014/main" id="{B5D50622-E936-44A1-B11A-68C68EAE96D2}"/>
+                <a16:creationId xmlns:a16="http://schemas.microsoft.com/office/drawing/2014/main" id="{24872598-E039-47EC-ABA7-9098DA4FC142}"/>
               </a:ext>
             </a:extLst>
           </p:cNvPr>
@@ -24820,7 +26002,7 @@
           <p:cNvPr id="30" name="">
             <a:extLst xmlns:a="http://schemas.openxmlformats.org/drawingml/2006/main">
               <a:ext uri="{FF2B5EF4-FFF2-40B4-BE49-F238E27FC236}">
-                <a16:creationId xmlns:a16="http://schemas.microsoft.com/office/drawing/2014/main" id="{F31A7423-D1B7-40C2-AE4B-BF13F49AD53D}"/>
+                <a16:creationId xmlns:a16="http://schemas.microsoft.com/office/drawing/2014/main" id="{C152B0CE-46CA-4809-AA7F-33F65C6E7F38}"/>
               </a:ext>
             </a:extLst>
           </p:cNvPr>
@@ -24878,7 +26060,7 @@
           <p:cNvPr id="31" name="">
             <a:extLst xmlns:a="http://schemas.openxmlformats.org/drawingml/2006/main">
               <a:ext uri="{FF2B5EF4-FFF2-40B4-BE49-F238E27FC236}">
-                <a16:creationId xmlns:a16="http://schemas.microsoft.com/office/drawing/2014/main" id="{0A424578-B6F0-4CCC-BAB7-3A2243FD98B7}"/>
+                <a16:creationId xmlns:a16="http://schemas.microsoft.com/office/drawing/2014/main" id="{D27C78EF-8565-4D22-9178-40FE58DE01DF}"/>
               </a:ext>
             </a:extLst>
           </p:cNvPr>
@@ -24911,7 +26093,7 @@
           <p:cNvPr id="32" name="">
             <a:extLst xmlns:a="http://schemas.openxmlformats.org/drawingml/2006/main">
               <a:ext uri="{FF2B5EF4-FFF2-40B4-BE49-F238E27FC236}">
-                <a16:creationId xmlns:a16="http://schemas.microsoft.com/office/drawing/2014/main" id="{82E4A1C9-EF55-474A-97EC-986CC3BD327B}"/>
+                <a16:creationId xmlns:a16="http://schemas.microsoft.com/office/drawing/2014/main" id="{E00A07BE-22B2-49C1-B8B5-9AE01F6DA616}"/>
               </a:ext>
             </a:extLst>
           </p:cNvPr>
@@ -24969,7 +26151,7 @@
           <p:cNvPr id="33" name="">
             <a:extLst xmlns:a="http://schemas.openxmlformats.org/drawingml/2006/main">
               <a:ext uri="{FF2B5EF4-FFF2-40B4-BE49-F238E27FC236}">
-                <a16:creationId xmlns:a16="http://schemas.microsoft.com/office/drawing/2014/main" id="{C8D08216-2C73-428B-9AE2-55164D71B713}"/>
+                <a16:creationId xmlns:a16="http://schemas.microsoft.com/office/drawing/2014/main" id="{153D429D-3744-4165-B90F-4595EDD0E381}"/>
               </a:ext>
             </a:extLst>
           </p:cNvPr>
@@ -25025,7 +26207,7 @@
     </p:spTree>
     <p:extLst>
       <p:ext uri="{BB962C8B-B14F-4D97-AF65-F5344CB8AC3E}">
-        <p14:creationId xmlns:p14="http://schemas.microsoft.com/office/powerpoint/2010/main" val="939819892"/>
+        <p14:creationId xmlns:p14="http://schemas.microsoft.com/office/powerpoint/2010/main" val="112404599"/>
       </p:ext>
     </p:extLst>
   </p:cSld>
